--- a/Lightning Talk Christina.pptx
+++ b/Lightning Talk Christina.pptx
@@ -31,6 +31,13 @@
     <p:embeddedFont>
       <p:font typeface="Canva Student Font" panose="020B0604020202020204" charset="0"/>
       <p:regular r:id="rId12"/>
+    </p:embeddedFont>
+    <p:embeddedFont>
+      <p:font typeface="Segoe UI" panose="020B0502040204020203" pitchFamily="34" charset="0"/>
+      <p:regular r:id="rId13"/>
+      <p:bold r:id="rId14"/>
+      <p:italic r:id="rId15"/>
+      <p:boldItalic r:id="rId16"/>
     </p:embeddedFont>
   </p:embeddedFontLst>
   <p:defaultTextStyle>
@@ -147,6 +154,438 @@
 </p:presentation>
 </file>
 
+<file path=ppt/revisionInfo.xml><?xml version="1.0" encoding="utf-8"?>
+<p1510:revInfo xmlns:a="http://schemas.openxmlformats.org/drawingml/2006/main" xmlns:r="http://schemas.openxmlformats.org/officeDocument/2006/relationships" xmlns:p1510="http://schemas.microsoft.com/office/powerpoint/2015/10/main">
+  <p1510:revLst>
+    <p1510:client id="{758A810B-C379-4C8B-B534-293CCBD759B1}" v="39" dt="2026-06-09T08:47:20.271"/>
+  </p1510:revLst>
+</p1510:revInfo>
+</file>
+
+<file path=ppt/changesInfos/changesInfo1.xml><?xml version="1.0" encoding="utf-8"?>
+<pc:chgInfo xmlns:a="http://schemas.openxmlformats.org/drawingml/2006/main" xmlns:r="http://schemas.openxmlformats.org/officeDocument/2006/relationships" xmlns:ac="http://schemas.microsoft.com/office/drawing/2013/main/command" xmlns:pc="http://schemas.microsoft.com/office/powerpoint/2013/main/command">
+  <pc:docChgLst>
+    <pc:chgData name="Christina Knes" userId="7e9737a164333dbd" providerId="LiveId" clId="{72053980-4108-4AED-A5B7-3290F7F82C69}"/>
+    <pc:docChg chg="custSel modSld">
+      <pc:chgData name="Christina Knes" userId="7e9737a164333dbd" providerId="LiveId" clId="{72053980-4108-4AED-A5B7-3290F7F82C69}" dt="2026-06-09T08:48:05.793" v="139"/>
+      <pc:docMkLst>
+        <pc:docMk/>
+      </pc:docMkLst>
+      <pc:sldChg chg="modSp mod modAnim">
+        <pc:chgData name="Christina Knes" userId="7e9737a164333dbd" providerId="LiveId" clId="{72053980-4108-4AED-A5B7-3290F7F82C69}" dt="2026-06-09T08:43:44.663" v="120"/>
+        <pc:sldMkLst>
+          <pc:docMk/>
+          <pc:sldMk cId="0" sldId="256"/>
+        </pc:sldMkLst>
+        <pc:spChg chg="mod">
+          <ac:chgData name="Christina Knes" userId="7e9737a164333dbd" providerId="LiveId" clId="{72053980-4108-4AED-A5B7-3290F7F82C69}" dt="2026-06-09T08:30:01.882" v="2" actId="1076"/>
+          <ac:spMkLst>
+            <pc:docMk/>
+            <pc:sldMk cId="0" sldId="256"/>
+            <ac:spMk id="2" creationId="{00000000-0000-0000-0000-000000000000}"/>
+          </ac:spMkLst>
+        </pc:spChg>
+        <pc:spChg chg="mod">
+          <ac:chgData name="Christina Knes" userId="7e9737a164333dbd" providerId="LiveId" clId="{72053980-4108-4AED-A5B7-3290F7F82C69}" dt="2026-06-09T08:30:21.465" v="8" actId="1076"/>
+          <ac:spMkLst>
+            <pc:docMk/>
+            <pc:sldMk cId="0" sldId="256"/>
+            <ac:spMk id="3" creationId="{00000000-0000-0000-0000-000000000000}"/>
+          </ac:spMkLst>
+        </pc:spChg>
+        <pc:spChg chg="mod">
+          <ac:chgData name="Christina Knes" userId="7e9737a164333dbd" providerId="LiveId" clId="{72053980-4108-4AED-A5B7-3290F7F82C69}" dt="2026-06-09T08:30:07.044" v="4" actId="1076"/>
+          <ac:spMkLst>
+            <pc:docMk/>
+            <pc:sldMk cId="0" sldId="256"/>
+            <ac:spMk id="4" creationId="{00000000-0000-0000-0000-000000000000}"/>
+          </ac:spMkLst>
+        </pc:spChg>
+        <pc:spChg chg="mod">
+          <ac:chgData name="Christina Knes" userId="7e9737a164333dbd" providerId="LiveId" clId="{72053980-4108-4AED-A5B7-3290F7F82C69}" dt="2026-06-09T08:30:11.840" v="5" actId="1076"/>
+          <ac:spMkLst>
+            <pc:docMk/>
+            <pc:sldMk cId="0" sldId="256"/>
+            <ac:spMk id="5" creationId="{00000000-0000-0000-0000-000000000000}"/>
+          </ac:spMkLst>
+        </pc:spChg>
+        <pc:spChg chg="mod">
+          <ac:chgData name="Christina Knes" userId="7e9737a164333dbd" providerId="LiveId" clId="{72053980-4108-4AED-A5B7-3290F7F82C69}" dt="2026-06-09T08:29:19.573" v="0" actId="1076"/>
+          <ac:spMkLst>
+            <pc:docMk/>
+            <pc:sldMk cId="0" sldId="256"/>
+            <ac:spMk id="6" creationId="{00000000-0000-0000-0000-000000000000}"/>
+          </ac:spMkLst>
+        </pc:spChg>
+        <pc:spChg chg="mod">
+          <ac:chgData name="Christina Knes" userId="7e9737a164333dbd" providerId="LiveId" clId="{72053980-4108-4AED-A5B7-3290F7F82C69}" dt="2026-06-09T08:30:14.386" v="6" actId="1076"/>
+          <ac:spMkLst>
+            <pc:docMk/>
+            <pc:sldMk cId="0" sldId="256"/>
+            <ac:spMk id="7" creationId="{00000000-0000-0000-0000-000000000000}"/>
+          </ac:spMkLst>
+        </pc:spChg>
+        <pc:spChg chg="mod">
+          <ac:chgData name="Christina Knes" userId="7e9737a164333dbd" providerId="LiveId" clId="{72053980-4108-4AED-A5B7-3290F7F82C69}" dt="2026-06-09T08:30:17.718" v="7" actId="1076"/>
+          <ac:spMkLst>
+            <pc:docMk/>
+            <pc:sldMk cId="0" sldId="256"/>
+            <ac:spMk id="8" creationId="{00000000-0000-0000-0000-000000000000}"/>
+          </ac:spMkLst>
+        </pc:spChg>
+        <pc:spChg chg="mod">
+          <ac:chgData name="Christina Knes" userId="7e9737a164333dbd" providerId="LiveId" clId="{72053980-4108-4AED-A5B7-3290F7F82C69}" dt="2026-06-09T08:29:21.563" v="1" actId="1076"/>
+          <ac:spMkLst>
+            <pc:docMk/>
+            <pc:sldMk cId="0" sldId="256"/>
+            <ac:spMk id="9" creationId="{00000000-0000-0000-0000-000000000000}"/>
+          </ac:spMkLst>
+        </pc:spChg>
+        <pc:spChg chg="mod">
+          <ac:chgData name="Christina Knes" userId="7e9737a164333dbd" providerId="LiveId" clId="{72053980-4108-4AED-A5B7-3290F7F82C69}" dt="2026-06-09T08:30:25.382" v="10" actId="1076"/>
+          <ac:spMkLst>
+            <pc:docMk/>
+            <pc:sldMk cId="0" sldId="256"/>
+            <ac:spMk id="10" creationId="{00000000-0000-0000-0000-000000000000}"/>
+          </ac:spMkLst>
+        </pc:spChg>
+        <pc:spChg chg="mod">
+          <ac:chgData name="Christina Knes" userId="7e9737a164333dbd" providerId="LiveId" clId="{72053980-4108-4AED-A5B7-3290F7F82C69}" dt="2026-06-09T08:30:23.124" v="9" actId="1076"/>
+          <ac:spMkLst>
+            <pc:docMk/>
+            <pc:sldMk cId="0" sldId="256"/>
+            <ac:spMk id="14" creationId="{00000000-0000-0000-0000-000000000000}"/>
+          </ac:spMkLst>
+        </pc:spChg>
+        <pc:spChg chg="mod">
+          <ac:chgData name="Christina Knes" userId="7e9737a164333dbd" providerId="LiveId" clId="{72053980-4108-4AED-A5B7-3290F7F82C69}" dt="2026-06-09T08:30:04.732" v="3" actId="1076"/>
+          <ac:spMkLst>
+            <pc:docMk/>
+            <pc:sldMk cId="0" sldId="256"/>
+            <ac:spMk id="15" creationId="{00000000-0000-0000-0000-000000000000}"/>
+          </ac:spMkLst>
+        </pc:spChg>
+      </pc:sldChg>
+      <pc:sldChg chg="modSp mod addAnim delAnim modAnim">
+        <pc:chgData name="Christina Knes" userId="7e9737a164333dbd" providerId="LiveId" clId="{72053980-4108-4AED-A5B7-3290F7F82C69}" dt="2026-06-09T08:48:05.793" v="139"/>
+        <pc:sldMkLst>
+          <pc:docMk/>
+          <pc:sldMk cId="0" sldId="257"/>
+        </pc:sldMkLst>
+        <pc:spChg chg="mod">
+          <ac:chgData name="Christina Knes" userId="7e9737a164333dbd" providerId="LiveId" clId="{72053980-4108-4AED-A5B7-3290F7F82C69}" dt="2026-06-09T08:43:33.008" v="118" actId="1036"/>
+          <ac:spMkLst>
+            <pc:docMk/>
+            <pc:sldMk cId="0" sldId="257"/>
+            <ac:spMk id="2" creationId="{00000000-0000-0000-0000-000000000000}"/>
+          </ac:spMkLst>
+        </pc:spChg>
+        <pc:spChg chg="mod">
+          <ac:chgData name="Christina Knes" userId="7e9737a164333dbd" providerId="LiveId" clId="{72053980-4108-4AED-A5B7-3290F7F82C69}" dt="2026-06-09T08:31:09.424" v="15" actId="1076"/>
+          <ac:spMkLst>
+            <pc:docMk/>
+            <pc:sldMk cId="0" sldId="257"/>
+            <ac:spMk id="3" creationId="{00000000-0000-0000-0000-000000000000}"/>
+          </ac:spMkLst>
+        </pc:spChg>
+        <pc:spChg chg="mod">
+          <ac:chgData name="Christina Knes" userId="7e9737a164333dbd" providerId="LiveId" clId="{72053980-4108-4AED-A5B7-3290F7F82C69}" dt="2026-06-09T08:31:06.243" v="14" actId="1076"/>
+          <ac:spMkLst>
+            <pc:docMk/>
+            <pc:sldMk cId="0" sldId="257"/>
+            <ac:spMk id="5" creationId="{00000000-0000-0000-0000-000000000000}"/>
+          </ac:spMkLst>
+        </pc:spChg>
+        <pc:spChg chg="mod">
+          <ac:chgData name="Christina Knes" userId="7e9737a164333dbd" providerId="LiveId" clId="{72053980-4108-4AED-A5B7-3290F7F82C69}" dt="2026-06-09T08:31:19.069" v="16" actId="1076"/>
+          <ac:spMkLst>
+            <pc:docMk/>
+            <pc:sldMk cId="0" sldId="257"/>
+            <ac:spMk id="6" creationId="{00000000-0000-0000-0000-000000000000}"/>
+          </ac:spMkLst>
+        </pc:spChg>
+      </pc:sldChg>
+      <pc:sldChg chg="delSp modSp mod addAnim delAnim modAnim">
+        <pc:chgData name="Christina Knes" userId="7e9737a164333dbd" providerId="LiveId" clId="{72053980-4108-4AED-A5B7-3290F7F82C69}" dt="2026-06-09T08:44:33.548" v="126"/>
+        <pc:sldMkLst>
+          <pc:docMk/>
+          <pc:sldMk cId="0" sldId="258"/>
+        </pc:sldMkLst>
+        <pc:spChg chg="mod">
+          <ac:chgData name="Christina Knes" userId="7e9737a164333dbd" providerId="LiveId" clId="{72053980-4108-4AED-A5B7-3290F7F82C69}" dt="2026-06-09T08:43:14.642" v="113" actId="1076"/>
+          <ac:spMkLst>
+            <pc:docMk/>
+            <pc:sldMk cId="0" sldId="258"/>
+            <ac:spMk id="2" creationId="{00000000-0000-0000-0000-000000000000}"/>
+          </ac:spMkLst>
+        </pc:spChg>
+        <pc:spChg chg="mod">
+          <ac:chgData name="Christina Knes" userId="7e9737a164333dbd" providerId="LiveId" clId="{72053980-4108-4AED-A5B7-3290F7F82C69}" dt="2026-06-09T08:43:14.642" v="113" actId="1076"/>
+          <ac:spMkLst>
+            <pc:docMk/>
+            <pc:sldMk cId="0" sldId="258"/>
+            <ac:spMk id="6" creationId="{00000000-0000-0000-0000-000000000000}"/>
+          </ac:spMkLst>
+        </pc:spChg>
+        <pc:spChg chg="mod">
+          <ac:chgData name="Christina Knes" userId="7e9737a164333dbd" providerId="LiveId" clId="{72053980-4108-4AED-A5B7-3290F7F82C69}" dt="2026-06-09T08:43:14.642" v="113" actId="1076"/>
+          <ac:spMkLst>
+            <pc:docMk/>
+            <pc:sldMk cId="0" sldId="258"/>
+            <ac:spMk id="7" creationId="{00000000-0000-0000-0000-000000000000}"/>
+          </ac:spMkLst>
+        </pc:spChg>
+        <pc:spChg chg="mod">
+          <ac:chgData name="Christina Knes" userId="7e9737a164333dbd" providerId="LiveId" clId="{72053980-4108-4AED-A5B7-3290F7F82C69}" dt="2026-06-09T08:43:14.642" v="113" actId="1076"/>
+          <ac:spMkLst>
+            <pc:docMk/>
+            <pc:sldMk cId="0" sldId="258"/>
+            <ac:spMk id="8" creationId="{00000000-0000-0000-0000-000000000000}"/>
+          </ac:spMkLst>
+        </pc:spChg>
+        <pc:spChg chg="mod">
+          <ac:chgData name="Christina Knes" userId="7e9737a164333dbd" providerId="LiveId" clId="{72053980-4108-4AED-A5B7-3290F7F82C69}" dt="2026-06-09T08:43:14.642" v="113" actId="1076"/>
+          <ac:spMkLst>
+            <pc:docMk/>
+            <pc:sldMk cId="0" sldId="258"/>
+            <ac:spMk id="9" creationId="{00000000-0000-0000-0000-000000000000}"/>
+          </ac:spMkLst>
+        </pc:spChg>
+        <pc:spChg chg="mod">
+          <ac:chgData name="Christina Knes" userId="7e9737a164333dbd" providerId="LiveId" clId="{72053980-4108-4AED-A5B7-3290F7F82C69}" dt="2026-06-09T08:43:06.653" v="112" actId="1076"/>
+          <ac:spMkLst>
+            <pc:docMk/>
+            <pc:sldMk cId="0" sldId="258"/>
+            <ac:spMk id="10" creationId="{00000000-0000-0000-0000-000000000000}"/>
+          </ac:spMkLst>
+        </pc:spChg>
+        <pc:spChg chg="del mod">
+          <ac:chgData name="Christina Knes" userId="7e9737a164333dbd" providerId="LiveId" clId="{72053980-4108-4AED-A5B7-3290F7F82C69}" dt="2026-06-09T08:42:50.669" v="108" actId="478"/>
+          <ac:spMkLst>
+            <pc:docMk/>
+            <pc:sldMk cId="0" sldId="258"/>
+            <ac:spMk id="12" creationId="{00000000-0000-0000-0000-000000000000}"/>
+          </ac:spMkLst>
+        </pc:spChg>
+        <pc:spChg chg="del mod">
+          <ac:chgData name="Christina Knes" userId="7e9737a164333dbd" providerId="LiveId" clId="{72053980-4108-4AED-A5B7-3290F7F82C69}" dt="2026-06-09T08:42:53.749" v="109" actId="478"/>
+          <ac:spMkLst>
+            <pc:docMk/>
+            <pc:sldMk cId="0" sldId="258"/>
+            <ac:spMk id="13" creationId="{00000000-0000-0000-0000-000000000000}"/>
+          </ac:spMkLst>
+        </pc:spChg>
+        <pc:spChg chg="del mod">
+          <ac:chgData name="Christina Knes" userId="7e9737a164333dbd" providerId="LiveId" clId="{72053980-4108-4AED-A5B7-3290F7F82C69}" dt="2026-06-09T08:42:56.380" v="110" actId="478"/>
+          <ac:spMkLst>
+            <pc:docMk/>
+            <pc:sldMk cId="0" sldId="258"/>
+            <ac:spMk id="14" creationId="{00000000-0000-0000-0000-000000000000}"/>
+          </ac:spMkLst>
+        </pc:spChg>
+        <pc:spChg chg="del mod">
+          <ac:chgData name="Christina Knes" userId="7e9737a164333dbd" providerId="LiveId" clId="{72053980-4108-4AED-A5B7-3290F7F82C69}" dt="2026-06-09T08:42:58.516" v="111" actId="478"/>
+          <ac:spMkLst>
+            <pc:docMk/>
+            <pc:sldMk cId="0" sldId="258"/>
+            <ac:spMk id="15" creationId="{00000000-0000-0000-0000-000000000000}"/>
+          </ac:spMkLst>
+        </pc:spChg>
+        <pc:spChg chg="mod">
+          <ac:chgData name="Christina Knes" userId="7e9737a164333dbd" providerId="LiveId" clId="{72053980-4108-4AED-A5B7-3290F7F82C69}" dt="2026-06-09T08:43:06.653" v="112" actId="1076"/>
+          <ac:spMkLst>
+            <pc:docMk/>
+            <pc:sldMk cId="0" sldId="258"/>
+            <ac:spMk id="16" creationId="{00000000-0000-0000-0000-000000000000}"/>
+          </ac:spMkLst>
+        </pc:spChg>
+        <pc:spChg chg="mod">
+          <ac:chgData name="Christina Knes" userId="7e9737a164333dbd" providerId="LiveId" clId="{72053980-4108-4AED-A5B7-3290F7F82C69}" dt="2026-06-09T08:43:06.653" v="112" actId="1076"/>
+          <ac:spMkLst>
+            <pc:docMk/>
+            <pc:sldMk cId="0" sldId="258"/>
+            <ac:spMk id="17" creationId="{00000000-0000-0000-0000-000000000000}"/>
+          </ac:spMkLst>
+        </pc:spChg>
+        <pc:spChg chg="mod">
+          <ac:chgData name="Christina Knes" userId="7e9737a164333dbd" providerId="LiveId" clId="{72053980-4108-4AED-A5B7-3290F7F82C69}" dt="2026-06-09T08:43:06.653" v="112" actId="1076"/>
+          <ac:spMkLst>
+            <pc:docMk/>
+            <pc:sldMk cId="0" sldId="258"/>
+            <ac:spMk id="18" creationId="{00000000-0000-0000-0000-000000000000}"/>
+          </ac:spMkLst>
+        </pc:spChg>
+        <pc:grpChg chg="mod">
+          <ac:chgData name="Christina Knes" userId="7e9737a164333dbd" providerId="LiveId" clId="{72053980-4108-4AED-A5B7-3290F7F82C69}" dt="2026-06-09T08:43:14.642" v="113" actId="1076"/>
+          <ac:grpSpMkLst>
+            <pc:docMk/>
+            <pc:sldMk cId="0" sldId="258"/>
+            <ac:grpSpMk id="3" creationId="{00000000-0000-0000-0000-000000000000}"/>
+          </ac:grpSpMkLst>
+        </pc:grpChg>
+      </pc:sldChg>
+      <pc:sldChg chg="modSp mod modAnim">
+        <pc:chgData name="Christina Knes" userId="7e9737a164333dbd" providerId="LiveId" clId="{72053980-4108-4AED-A5B7-3290F7F82C69}" dt="2026-06-09T08:45:41.531" v="128"/>
+        <pc:sldMkLst>
+          <pc:docMk/>
+          <pc:sldMk cId="0" sldId="260"/>
+        </pc:sldMkLst>
+        <pc:spChg chg="mod">
+          <ac:chgData name="Christina Knes" userId="7e9737a164333dbd" providerId="LiveId" clId="{72053980-4108-4AED-A5B7-3290F7F82C69}" dt="2026-06-09T08:37:47.403" v="31" actId="1036"/>
+          <ac:spMkLst>
+            <pc:docMk/>
+            <pc:sldMk cId="0" sldId="260"/>
+            <ac:spMk id="26" creationId="{00000000-0000-0000-0000-000000000000}"/>
+          </ac:spMkLst>
+        </pc:spChg>
+        <pc:spChg chg="mod">
+          <ac:chgData name="Christina Knes" userId="7e9737a164333dbd" providerId="LiveId" clId="{72053980-4108-4AED-A5B7-3290F7F82C69}" dt="2026-06-09T08:37:53.649" v="39" actId="1036"/>
+          <ac:spMkLst>
+            <pc:docMk/>
+            <pc:sldMk cId="0" sldId="260"/>
+            <ac:spMk id="27" creationId="{00000000-0000-0000-0000-000000000000}"/>
+          </ac:spMkLst>
+        </pc:spChg>
+        <pc:spChg chg="mod">
+          <ac:chgData name="Christina Knes" userId="7e9737a164333dbd" providerId="LiveId" clId="{72053980-4108-4AED-A5B7-3290F7F82C69}" dt="2026-06-09T08:37:59.110" v="47" actId="1035"/>
+          <ac:spMkLst>
+            <pc:docMk/>
+            <pc:sldMk cId="0" sldId="260"/>
+            <ac:spMk id="28" creationId="{00000000-0000-0000-0000-000000000000}"/>
+          </ac:spMkLst>
+        </pc:spChg>
+        <pc:spChg chg="mod">
+          <ac:chgData name="Christina Knes" userId="7e9737a164333dbd" providerId="LiveId" clId="{72053980-4108-4AED-A5B7-3290F7F82C69}" dt="2026-06-09T08:36:27.710" v="28" actId="1076"/>
+          <ac:spMkLst>
+            <pc:docMk/>
+            <pc:sldMk cId="0" sldId="260"/>
+            <ac:spMk id="29" creationId="{00000000-0000-0000-0000-000000000000}"/>
+          </ac:spMkLst>
+        </pc:spChg>
+        <pc:spChg chg="mod">
+          <ac:chgData name="Christina Knes" userId="7e9737a164333dbd" providerId="LiveId" clId="{72053980-4108-4AED-A5B7-3290F7F82C69}" dt="2026-06-09T08:37:50.518" v="34" actId="1036"/>
+          <ac:spMkLst>
+            <pc:docMk/>
+            <pc:sldMk cId="0" sldId="260"/>
+            <ac:spMk id="30" creationId="{00000000-0000-0000-0000-000000000000}"/>
+          </ac:spMkLst>
+        </pc:spChg>
+      </pc:sldChg>
+      <pc:sldChg chg="modSp mod modAnim">
+        <pc:chgData name="Christina Knes" userId="7e9737a164333dbd" providerId="LiveId" clId="{72053980-4108-4AED-A5B7-3290F7F82C69}" dt="2026-06-09T08:45:49.745" v="129"/>
+        <pc:sldMkLst>
+          <pc:docMk/>
+          <pc:sldMk cId="0" sldId="261"/>
+        </pc:sldMkLst>
+        <pc:spChg chg="mod">
+          <ac:chgData name="Christina Knes" userId="7e9737a164333dbd" providerId="LiveId" clId="{72053980-4108-4AED-A5B7-3290F7F82C69}" dt="2026-06-09T08:41:04.858" v="95" actId="20577"/>
+          <ac:spMkLst>
+            <pc:docMk/>
+            <pc:sldMk cId="0" sldId="261"/>
+            <ac:spMk id="3" creationId="{00000000-0000-0000-0000-000000000000}"/>
+          </ac:spMkLst>
+        </pc:spChg>
+        <pc:spChg chg="mod">
+          <ac:chgData name="Christina Knes" userId="7e9737a164333dbd" providerId="LiveId" clId="{72053980-4108-4AED-A5B7-3290F7F82C69}" dt="2026-06-09T08:38:10.023" v="48" actId="1076"/>
+          <ac:spMkLst>
+            <pc:docMk/>
+            <pc:sldMk cId="0" sldId="261"/>
+            <ac:spMk id="4" creationId="{00000000-0000-0000-0000-000000000000}"/>
+          </ac:spMkLst>
+        </pc:spChg>
+      </pc:sldChg>
+      <pc:sldChg chg="addSp modSp mod">
+        <pc:chgData name="Christina Knes" userId="7e9737a164333dbd" providerId="LiveId" clId="{72053980-4108-4AED-A5B7-3290F7F82C69}" dt="2026-06-09T08:40:37.397" v="81" actId="1076"/>
+        <pc:sldMkLst>
+          <pc:docMk/>
+          <pc:sldMk cId="0" sldId="262"/>
+        </pc:sldMkLst>
+        <pc:spChg chg="mod">
+          <ac:chgData name="Christina Knes" userId="7e9737a164333dbd" providerId="LiveId" clId="{72053980-4108-4AED-A5B7-3290F7F82C69}" dt="2026-06-09T08:40:30.593" v="80" actId="1076"/>
+          <ac:spMkLst>
+            <pc:docMk/>
+            <pc:sldMk cId="0" sldId="262"/>
+            <ac:spMk id="2" creationId="{00000000-0000-0000-0000-000000000000}"/>
+          </ac:spMkLst>
+        </pc:spChg>
+        <pc:spChg chg="mod">
+          <ac:chgData name="Christina Knes" userId="7e9737a164333dbd" providerId="LiveId" clId="{72053980-4108-4AED-A5B7-3290F7F82C69}" dt="2026-06-09T08:40:19.787" v="76" actId="1076"/>
+          <ac:spMkLst>
+            <pc:docMk/>
+            <pc:sldMk cId="0" sldId="262"/>
+            <ac:spMk id="3" creationId="{00000000-0000-0000-0000-000000000000}"/>
+          </ac:spMkLst>
+        </pc:spChg>
+        <pc:spChg chg="mod">
+          <ac:chgData name="Christina Knes" userId="7e9737a164333dbd" providerId="LiveId" clId="{72053980-4108-4AED-A5B7-3290F7F82C69}" dt="2026-06-09T08:40:13.422" v="72" actId="1076"/>
+          <ac:spMkLst>
+            <pc:docMk/>
+            <pc:sldMk cId="0" sldId="262"/>
+            <ac:spMk id="4" creationId="{00000000-0000-0000-0000-000000000000}"/>
+          </ac:spMkLst>
+        </pc:spChg>
+        <pc:spChg chg="mod">
+          <ac:chgData name="Christina Knes" userId="7e9737a164333dbd" providerId="LiveId" clId="{72053980-4108-4AED-A5B7-3290F7F82C69}" dt="2026-06-09T08:40:16.851" v="74" actId="1076"/>
+          <ac:spMkLst>
+            <pc:docMk/>
+            <pc:sldMk cId="0" sldId="262"/>
+            <ac:spMk id="5" creationId="{00000000-0000-0000-0000-000000000000}"/>
+          </ac:spMkLst>
+        </pc:spChg>
+        <pc:spChg chg="mod">
+          <ac:chgData name="Christina Knes" userId="7e9737a164333dbd" providerId="LiveId" clId="{72053980-4108-4AED-A5B7-3290F7F82C69}" dt="2026-06-09T08:40:27.388" v="78" actId="1076"/>
+          <ac:spMkLst>
+            <pc:docMk/>
+            <pc:sldMk cId="0" sldId="262"/>
+            <ac:spMk id="6" creationId="{00000000-0000-0000-0000-000000000000}"/>
+          </ac:spMkLst>
+        </pc:spChg>
+        <pc:spChg chg="mod">
+          <ac:chgData name="Christina Knes" userId="7e9737a164333dbd" providerId="LiveId" clId="{72053980-4108-4AED-A5B7-3290F7F82C69}" dt="2026-06-09T08:40:18.456" v="75" actId="1076"/>
+          <ac:spMkLst>
+            <pc:docMk/>
+            <pc:sldMk cId="0" sldId="262"/>
+            <ac:spMk id="7" creationId="{00000000-0000-0000-0000-000000000000}"/>
+          </ac:spMkLst>
+        </pc:spChg>
+        <pc:spChg chg="mod">
+          <ac:chgData name="Christina Knes" userId="7e9737a164333dbd" providerId="LiveId" clId="{72053980-4108-4AED-A5B7-3290F7F82C69}" dt="2026-06-09T08:40:29.200" v="79" actId="1076"/>
+          <ac:spMkLst>
+            <pc:docMk/>
+            <pc:sldMk cId="0" sldId="262"/>
+            <ac:spMk id="9" creationId="{00000000-0000-0000-0000-000000000000}"/>
+          </ac:spMkLst>
+        </pc:spChg>
+        <pc:spChg chg="mod">
+          <ac:chgData name="Christina Knes" userId="7e9737a164333dbd" providerId="LiveId" clId="{72053980-4108-4AED-A5B7-3290F7F82C69}" dt="2026-06-09T08:40:25.875" v="77" actId="1076"/>
+          <ac:spMkLst>
+            <pc:docMk/>
+            <pc:sldMk cId="0" sldId="262"/>
+            <ac:spMk id="10" creationId="{00000000-0000-0000-0000-000000000000}"/>
+          </ac:spMkLst>
+        </pc:spChg>
+        <pc:spChg chg="mod">
+          <ac:chgData name="Christina Knes" userId="7e9737a164333dbd" providerId="LiveId" clId="{72053980-4108-4AED-A5B7-3290F7F82C69}" dt="2026-06-09T08:40:14.843" v="73" actId="1076"/>
+          <ac:spMkLst>
+            <pc:docMk/>
+            <pc:sldMk cId="0" sldId="262"/>
+            <ac:spMk id="14" creationId="{00000000-0000-0000-0000-000000000000}"/>
+          </ac:spMkLst>
+        </pc:spChg>
+        <pc:spChg chg="add mod">
+          <ac:chgData name="Christina Knes" userId="7e9737a164333dbd" providerId="LiveId" clId="{72053980-4108-4AED-A5B7-3290F7F82C69}" dt="2026-06-09T08:40:37.397" v="81" actId="1076"/>
+          <ac:spMkLst>
+            <pc:docMk/>
+            <pc:sldMk cId="0" sldId="262"/>
+            <ac:spMk id="16" creationId="{991D8DE7-5AF2-F117-76F1-3EE3ECF51802}"/>
+          </ac:spMkLst>
+        </pc:spChg>
+      </pc:sldChg>
+    </pc:docChg>
+  </pc:docChgLst>
+</pc:chgInfo>
+</file>
+
 <file path=ppt/slideLayouts/slideLayout1.xml><?xml version="1.0" encoding="utf-8"?>
 <p:sldLayout xmlns:a="http://schemas.openxmlformats.org/drawingml/2006/main" xmlns:r="http://schemas.openxmlformats.org/officeDocument/2006/relationships" xmlns:p="http://schemas.openxmlformats.org/presentationml/2006/main" type="title" preserve="1">
   <p:cSld name="Title Slide">
@@ -327,7 +766,7 @@
             <a:fld id="{1D8BD707-D9CF-40AE-B4C6-C98DA3205C09}" type="datetimeFigureOut">
               <a:rPr lang="en-US" smtClean="0"/>
               <a:pPr/>
-              <a:t>5/18/2026</a:t>
+              <a:t>6/9/2026</a:t>
             </a:fld>
             <a:endParaRPr lang="en-US"/>
           </a:p>
@@ -492,7 +931,7 @@
             <a:fld id="{1D8BD707-D9CF-40AE-B4C6-C98DA3205C09}" type="datetimeFigureOut">
               <a:rPr lang="en-US" smtClean="0"/>
               <a:pPr/>
-              <a:t>5/18/2026</a:t>
+              <a:t>6/9/2026</a:t>
             </a:fld>
             <a:endParaRPr lang="en-US"/>
           </a:p>
@@ -667,7 +1106,7 @@
             <a:fld id="{1D8BD707-D9CF-40AE-B4C6-C98DA3205C09}" type="datetimeFigureOut">
               <a:rPr lang="en-US" smtClean="0"/>
               <a:pPr/>
-              <a:t>5/18/2026</a:t>
+              <a:t>6/9/2026</a:t>
             </a:fld>
             <a:endParaRPr lang="en-US"/>
           </a:p>
@@ -832,7 +1271,7 @@
             <a:fld id="{1D8BD707-D9CF-40AE-B4C6-C98DA3205C09}" type="datetimeFigureOut">
               <a:rPr lang="en-US" smtClean="0"/>
               <a:pPr/>
-              <a:t>5/18/2026</a:t>
+              <a:t>6/9/2026</a:t>
             </a:fld>
             <a:endParaRPr lang="en-US"/>
           </a:p>
@@ -1074,7 +1513,7 @@
             <a:fld id="{1D8BD707-D9CF-40AE-B4C6-C98DA3205C09}" type="datetimeFigureOut">
               <a:rPr lang="en-US" smtClean="0"/>
               <a:pPr/>
-              <a:t>5/18/2026</a:t>
+              <a:t>6/9/2026</a:t>
             </a:fld>
             <a:endParaRPr lang="en-US"/>
           </a:p>
@@ -1356,7 +1795,7 @@
             <a:fld id="{1D8BD707-D9CF-40AE-B4C6-C98DA3205C09}" type="datetimeFigureOut">
               <a:rPr lang="en-US" smtClean="0"/>
               <a:pPr/>
-              <a:t>5/18/2026</a:t>
+              <a:t>6/9/2026</a:t>
             </a:fld>
             <a:endParaRPr lang="en-US"/>
           </a:p>
@@ -1772,7 +2211,7 @@
             <a:fld id="{1D8BD707-D9CF-40AE-B4C6-C98DA3205C09}" type="datetimeFigureOut">
               <a:rPr lang="en-US" smtClean="0"/>
               <a:pPr/>
-              <a:t>5/18/2026</a:t>
+              <a:t>6/9/2026</a:t>
             </a:fld>
             <a:endParaRPr lang="en-US"/>
           </a:p>
@@ -1886,7 +2325,7 @@
             <a:fld id="{1D8BD707-D9CF-40AE-B4C6-C98DA3205C09}" type="datetimeFigureOut">
               <a:rPr lang="en-US" smtClean="0"/>
               <a:pPr/>
-              <a:t>5/18/2026</a:t>
+              <a:t>6/9/2026</a:t>
             </a:fld>
             <a:endParaRPr lang="en-US"/>
           </a:p>
@@ -1978,7 +2417,7 @@
             <a:fld id="{1D8BD707-D9CF-40AE-B4C6-C98DA3205C09}" type="datetimeFigureOut">
               <a:rPr lang="en-US" smtClean="0"/>
               <a:pPr/>
-              <a:t>5/18/2026</a:t>
+              <a:t>6/9/2026</a:t>
             </a:fld>
             <a:endParaRPr lang="en-US"/>
           </a:p>
@@ -2250,7 +2689,7 @@
             <a:fld id="{1D8BD707-D9CF-40AE-B4C6-C98DA3205C09}" type="datetimeFigureOut">
               <a:rPr lang="en-US" smtClean="0"/>
               <a:pPr/>
-              <a:t>5/18/2026</a:t>
+              <a:t>6/9/2026</a:t>
             </a:fld>
             <a:endParaRPr lang="en-US"/>
           </a:p>
@@ -2499,7 +2938,7 @@
             <a:fld id="{1D8BD707-D9CF-40AE-B4C6-C98DA3205C09}" type="datetimeFigureOut">
               <a:rPr lang="en-US" smtClean="0"/>
               <a:pPr/>
-              <a:t>5/18/2026</a:t>
+              <a:t>6/9/2026</a:t>
             </a:fld>
             <a:endParaRPr lang="en-US"/>
           </a:p>
@@ -2707,7 +3146,7 @@
             <a:fld id="{1D8BD707-D9CF-40AE-B4C6-C98DA3205C09}" type="datetimeFigureOut">
               <a:rPr lang="en-US" smtClean="0"/>
               <a:pPr/>
-              <a:t>5/18/2026</a:t>
+              <a:t>6/9/2026</a:t>
             </a:fld>
             <a:endParaRPr lang="en-US"/>
           </a:p>
@@ -3094,7 +3533,7 @@
         </p:nvSpPr>
         <p:spPr>
           <a:xfrm rot="-691699">
-            <a:off x="15763663" y="3157614"/>
+            <a:off x="16345508" y="2893683"/>
             <a:ext cx="4154462" cy="3863649"/>
           </a:xfrm>
           <a:custGeom>
@@ -3153,7 +3592,7 @@
         </p:nvSpPr>
         <p:spPr>
           <a:xfrm rot="-284944">
-            <a:off x="-1396635" y="3102424"/>
+            <a:off x="-1837951" y="3037093"/>
             <a:ext cx="4096277" cy="3630325"/>
           </a:xfrm>
           <a:custGeom>
@@ -3212,7 +3651,7 @@
         </p:nvSpPr>
         <p:spPr>
           <a:xfrm rot="1061051">
-            <a:off x="12724036" y="7681159"/>
+            <a:off x="12885689" y="8121676"/>
             <a:ext cx="3642065" cy="3848946"/>
           </a:xfrm>
           <a:custGeom>
@@ -3271,7 +3710,7 @@
         </p:nvSpPr>
         <p:spPr>
           <a:xfrm rot="-411245">
-            <a:off x="7229722" y="8180178"/>
+            <a:off x="7640446" y="8421029"/>
             <a:ext cx="4476094" cy="3731943"/>
           </a:xfrm>
           <a:custGeom>
@@ -3330,7 +3769,7 @@
         </p:nvSpPr>
         <p:spPr>
           <a:xfrm rot="-474403">
-            <a:off x="6963632" y="-2635620"/>
+            <a:off x="6948183" y="-2882444"/>
             <a:ext cx="4368067" cy="4329846"/>
           </a:xfrm>
           <a:custGeom>
@@ -3389,7 +3828,7 @@
         </p:nvSpPr>
         <p:spPr>
           <a:xfrm>
-            <a:off x="2029993" y="7417753"/>
+            <a:off x="2095416" y="7659441"/>
             <a:ext cx="4373018" cy="4214496"/>
           </a:xfrm>
           <a:custGeom>
@@ -3448,7 +3887,7 @@
         </p:nvSpPr>
         <p:spPr>
           <a:xfrm rot="356799">
-            <a:off x="-2200203" y="7515623"/>
+            <a:off x="-2319440" y="7621568"/>
             <a:ext cx="3888820" cy="3485355"/>
           </a:xfrm>
           <a:custGeom>
@@ -3507,7 +3946,7 @@
         </p:nvSpPr>
         <p:spPr>
           <a:xfrm rot="675348">
-            <a:off x="12487865" y="-1080492"/>
+            <a:off x="12448212" y="-1678300"/>
             <a:ext cx="3789402" cy="3685194"/>
           </a:xfrm>
           <a:custGeom>
@@ -3566,7 +4005,7 @@
         </p:nvSpPr>
         <p:spPr>
           <a:xfrm rot="710027">
-            <a:off x="2074980" y="-1213346"/>
+            <a:off x="1788193" y="-1759765"/>
             <a:ext cx="4057937" cy="3692723"/>
           </a:xfrm>
           <a:custGeom>
@@ -3769,7 +4208,7 @@
         </p:nvSpPr>
         <p:spPr>
           <a:xfrm>
-            <a:off x="-2075123" y="-1202141"/>
+            <a:off x="-2482149" y="-1417257"/>
             <a:ext cx="3294905" cy="3163108"/>
           </a:xfrm>
           <a:custGeom>
@@ -3828,7 +4267,7 @@
         </p:nvSpPr>
         <p:spPr>
           <a:xfrm rot="-503037">
-            <a:off x="17148200" y="7696708"/>
+            <a:off x="17176209" y="7989173"/>
             <a:ext cx="3294905" cy="2230322"/>
           </a:xfrm>
           <a:custGeom>
@@ -3884,128 +4323,6 @@
   <p:clrMapOvr>
     <a:masterClrMapping/>
   </p:clrMapOvr>
-  <p:timing>
-    <p:tnLst>
-      <p:par>
-        <p:cTn id="1" dur="indefinite" restart="never" nodeType="tmRoot">
-          <p:childTnLst>
-            <p:seq concurrent="1" nextAc="seek">
-              <p:cTn id="2" dur="indefinite" nodeType="mainSeq">
-                <p:childTnLst>
-                  <p:par>
-                    <p:cTn id="3" fill="hold">
-                      <p:stCondLst>
-                        <p:cond delay="indefinite"/>
-                      </p:stCondLst>
-                      <p:childTnLst>
-                        <p:par>
-                          <p:cTn id="4" fill="hold">
-                            <p:stCondLst>
-                              <p:cond delay="0"/>
-                            </p:stCondLst>
-                            <p:childTnLst>
-                              <p:par>
-                                <p:cTn id="5" presetID="10" presetClass="entr" presetSubtype="0" fill="hold" grpId="0" nodeType="clickEffect">
-                                  <p:stCondLst>
-                                    <p:cond delay="0"/>
-                                  </p:stCondLst>
-                                  <p:childTnLst>
-                                    <p:set>
-                                      <p:cBhvr>
-                                        <p:cTn id="6" dur="1" fill="hold">
-                                          <p:stCondLst>
-                                            <p:cond delay="0"/>
-                                          </p:stCondLst>
-                                        </p:cTn>
-                                        <p:tgtEl>
-                                          <p:spTgt spid="12"/>
-                                        </p:tgtEl>
-                                        <p:attrNameLst>
-                                          <p:attrName>style.visibility</p:attrName>
-                                        </p:attrNameLst>
-                                      </p:cBhvr>
-                                      <p:to>
-                                        <p:strVal val="visible"/>
-                                      </p:to>
-                                    </p:set>
-                                    <p:animEffect transition="in" filter="fade">
-                                      <p:cBhvr>
-                                        <p:cTn id="7" dur="500"/>
-                                        <p:tgtEl>
-                                          <p:spTgt spid="12"/>
-                                        </p:tgtEl>
-                                      </p:cBhvr>
-                                    </p:animEffect>
-                                  </p:childTnLst>
-                                </p:cTn>
-                              </p:par>
-                              <p:par>
-                                <p:cTn id="8" presetID="10" presetClass="entr" presetSubtype="0" fill="hold" grpId="0" nodeType="withEffect">
-                                  <p:stCondLst>
-                                    <p:cond delay="0"/>
-                                  </p:stCondLst>
-                                  <p:childTnLst>
-                                    <p:set>
-                                      <p:cBhvr>
-                                        <p:cTn id="9" dur="1" fill="hold">
-                                          <p:stCondLst>
-                                            <p:cond delay="0"/>
-                                          </p:stCondLst>
-                                        </p:cTn>
-                                        <p:tgtEl>
-                                          <p:spTgt spid="13"/>
-                                        </p:tgtEl>
-                                        <p:attrNameLst>
-                                          <p:attrName>style.visibility</p:attrName>
-                                        </p:attrNameLst>
-                                      </p:cBhvr>
-                                      <p:to>
-                                        <p:strVal val="visible"/>
-                                      </p:to>
-                                    </p:set>
-                                    <p:animEffect transition="in" filter="fade">
-                                      <p:cBhvr>
-                                        <p:cTn id="10" dur="500"/>
-                                        <p:tgtEl>
-                                          <p:spTgt spid="13"/>
-                                        </p:tgtEl>
-                                      </p:cBhvr>
-                                    </p:animEffect>
-                                  </p:childTnLst>
-                                </p:cTn>
-                              </p:par>
-                            </p:childTnLst>
-                          </p:cTn>
-                        </p:par>
-                      </p:childTnLst>
-                    </p:cTn>
-                  </p:par>
-                </p:childTnLst>
-              </p:cTn>
-              <p:prevCondLst>
-                <p:cond evt="onPrev" delay="0">
-                  <p:tgtEl>
-                    <p:sldTgt/>
-                  </p:tgtEl>
-                </p:cond>
-              </p:prevCondLst>
-              <p:nextCondLst>
-                <p:cond evt="onNext" delay="0">
-                  <p:tgtEl>
-                    <p:sldTgt/>
-                  </p:tgtEl>
-                </p:cond>
-              </p:nextCondLst>
-            </p:seq>
-          </p:childTnLst>
-        </p:cTn>
-      </p:par>
-    </p:tnLst>
-    <p:bldLst>
-      <p:bldP spid="12" grpId="0"/>
-      <p:bldP spid="13" grpId="0"/>
-    </p:bldLst>
-  </p:timing>
 </p:sld>
 </file>
 
@@ -4042,8 +4359,8 @@
         </p:nvSpPr>
         <p:spPr>
           <a:xfrm>
-            <a:off x="11125200" y="374650"/>
-            <a:ext cx="5598662" cy="5206755"/>
+            <a:off x="11456165" y="755651"/>
+            <a:ext cx="5267697" cy="4768849"/>
           </a:xfrm>
           <a:custGeom>
             <a:avLst/>
@@ -4101,7 +4418,7 @@
         </p:nvSpPr>
         <p:spPr>
           <a:xfrm>
-            <a:off x="533400" y="1787525"/>
+            <a:off x="381000" y="1751883"/>
             <a:ext cx="9626922" cy="3789045"/>
           </a:xfrm>
           <a:prstGeom prst="rect">
@@ -4327,7 +4644,7 @@
         </p:nvSpPr>
         <p:spPr>
           <a:xfrm>
-            <a:off x="9846402" y="5834825"/>
+            <a:off x="9829800" y="5682697"/>
             <a:ext cx="8156257" cy="4265295"/>
           </a:xfrm>
           <a:prstGeom prst="rect">
@@ -4560,7 +4877,7 @@
         </p:nvSpPr>
         <p:spPr>
           <a:xfrm>
-            <a:off x="3733800" y="6059432"/>
+            <a:off x="3429000" y="5920823"/>
             <a:ext cx="4209050" cy="4040688"/>
           </a:xfrm>
           <a:custGeom>
@@ -4864,7 +5181,7 @@
         </p:nvSpPr>
         <p:spPr>
           <a:xfrm>
-            <a:off x="1661480" y="3268517"/>
+            <a:off x="1827536" y="3519528"/>
             <a:ext cx="2533572" cy="2511403"/>
           </a:xfrm>
           <a:custGeom>
@@ -4923,7 +5240,7 @@
         </p:nvGrpSpPr>
         <p:grpSpPr>
           <a:xfrm rot="2700000">
-            <a:off x="2316610" y="4766348"/>
+            <a:off x="2482666" y="5017359"/>
             <a:ext cx="337633" cy="337597"/>
             <a:chOff x="0" y="0"/>
             <a:chExt cx="88924" cy="88914"/>
@@ -5013,7 +5330,7 @@
         </p:nvSpPr>
         <p:spPr>
           <a:xfrm rot="868315">
-            <a:off x="2330217" y="4737616"/>
+            <a:off x="2496273" y="4988627"/>
             <a:ext cx="310421" cy="342147"/>
           </a:xfrm>
           <a:custGeom>
@@ -5072,7 +5389,7 @@
         </p:nvSpPr>
         <p:spPr>
           <a:xfrm>
-            <a:off x="5705768" y="3478158"/>
+            <a:off x="5871824" y="3729169"/>
             <a:ext cx="2728794" cy="2728794"/>
           </a:xfrm>
           <a:custGeom>
@@ -5125,7 +5442,7 @@
         </p:nvSpPr>
         <p:spPr>
           <a:xfrm>
-            <a:off x="9949036" y="3615025"/>
+            <a:off x="10115092" y="3866036"/>
             <a:ext cx="2529409" cy="2301762"/>
           </a:xfrm>
           <a:custGeom>
@@ -5184,7 +5501,7 @@
         </p:nvSpPr>
         <p:spPr>
           <a:xfrm>
-            <a:off x="14083344" y="3696903"/>
+            <a:off x="14249400" y="3947914"/>
             <a:ext cx="2564325" cy="2138006"/>
           </a:xfrm>
           <a:custGeom>
@@ -5243,7 +5560,7 @@
         </p:nvSpPr>
         <p:spPr>
           <a:xfrm>
-            <a:off x="5156087" y="5888355"/>
+            <a:off x="5293102" y="6185120"/>
             <a:ext cx="3828155" cy="1057275"/>
           </a:xfrm>
           <a:prstGeom prst="rect">
@@ -5319,177 +5636,13 @@
       </p:sp>
       <p:sp>
         <p:nvSpPr>
-          <p:cNvPr id="12" name="TextBox 12"/>
-          <p:cNvSpPr txBox="1"/>
-          <p:nvPr/>
-        </p:nvSpPr>
-        <p:spPr>
-          <a:xfrm>
-            <a:off x="1229714" y="7111970"/>
-            <a:ext cx="3456099" cy="1423210"/>
-          </a:xfrm>
-          <a:prstGeom prst="rect">
-            <a:avLst/>
-          </a:prstGeom>
-        </p:spPr>
-        <p:txBody>
-          <a:bodyPr lIns="0" tIns="0" rIns="0" bIns="0" rtlCol="0" anchor="t">
-            <a:spAutoFit/>
-          </a:bodyPr>
-          <a:lstStyle/>
-          <a:p>
-            <a:pPr algn="ctr">
-              <a:lnSpc>
-                <a:spcPts val="3780"/>
-              </a:lnSpc>
-            </a:pPr>
-            <a:r>
-              <a:rPr lang="en-US" sz="2400">
-                <a:solidFill>
-                  <a:srgbClr val="000000"/>
-                </a:solidFill>
-                <a:latin typeface="Bricolage Grotesque"/>
-                <a:ea typeface="Bricolage Grotesque"/>
-                <a:cs typeface="Bricolage Grotesque"/>
-                <a:sym typeface="Bricolage Grotesque"/>
-              </a:rPr>
-              <a:t>No significant difference in overall essay quality.</a:t>
-            </a:r>
-          </a:p>
-        </p:txBody>
-      </p:sp>
-      <p:sp>
-        <p:nvSpPr>
-          <p:cNvPr id="13" name="TextBox 13"/>
-          <p:cNvSpPr txBox="1"/>
-          <p:nvPr/>
-        </p:nvSpPr>
-        <p:spPr>
-          <a:xfrm>
-            <a:off x="5371612" y="7111970"/>
-            <a:ext cx="3456099" cy="1423210"/>
-          </a:xfrm>
-          <a:prstGeom prst="rect">
-            <a:avLst/>
-          </a:prstGeom>
-        </p:spPr>
-        <p:txBody>
-          <a:bodyPr lIns="0" tIns="0" rIns="0" bIns="0" rtlCol="0" anchor="t">
-            <a:spAutoFit/>
-          </a:bodyPr>
-          <a:lstStyle/>
-          <a:p>
-            <a:pPr algn="ctr">
-              <a:lnSpc>
-                <a:spcPts val="3780"/>
-              </a:lnSpc>
-            </a:pPr>
-            <a:r>
-              <a:rPr lang="en-US" sz="2400">
-                <a:solidFill>
-                  <a:srgbClr val="000000"/>
-                </a:solidFill>
-                <a:latin typeface="Bricolage Grotesque"/>
-                <a:ea typeface="Bricolage Grotesque"/>
-                <a:cs typeface="Bricolage Grotesque"/>
-                <a:sym typeface="Bricolage Grotesque"/>
-              </a:rPr>
-              <a:t>No improvement in essay scores compared to the control group.</a:t>
-            </a:r>
-          </a:p>
-        </p:txBody>
-      </p:sp>
-      <p:sp>
-        <p:nvSpPr>
-          <p:cNvPr id="14" name="TextBox 14"/>
-          <p:cNvSpPr txBox="1"/>
-          <p:nvPr/>
-        </p:nvSpPr>
-        <p:spPr>
-          <a:xfrm>
-            <a:off x="9523036" y="7078142"/>
-            <a:ext cx="3456099" cy="1423210"/>
-          </a:xfrm>
-          <a:prstGeom prst="rect">
-            <a:avLst/>
-          </a:prstGeom>
-        </p:spPr>
-        <p:txBody>
-          <a:bodyPr lIns="0" tIns="0" rIns="0" bIns="0" rtlCol="0" anchor="t">
-            <a:spAutoFit/>
-          </a:bodyPr>
-          <a:lstStyle/>
-          <a:p>
-            <a:pPr algn="ctr">
-              <a:lnSpc>
-                <a:spcPts val="3780"/>
-              </a:lnSpc>
-            </a:pPr>
-            <a:r>
-              <a:rPr lang="en-US" sz="2400">
-                <a:solidFill>
-                  <a:srgbClr val="000000"/>
-                </a:solidFill>
-                <a:latin typeface="Bricolage Grotesque"/>
-                <a:ea typeface="Bricolage Grotesque"/>
-                <a:cs typeface="Bricolage Grotesque"/>
-                <a:sym typeface="Bricolage Grotesque"/>
-              </a:rPr>
-              <a:t>Writing duration did not differ significantly between the groups.</a:t>
-            </a:r>
-          </a:p>
-        </p:txBody>
-      </p:sp>
-      <p:sp>
-        <p:nvSpPr>
-          <p:cNvPr id="15" name="TextBox 15"/>
-          <p:cNvSpPr txBox="1"/>
-          <p:nvPr/>
-        </p:nvSpPr>
-        <p:spPr>
-          <a:xfrm>
-            <a:off x="13480926" y="7078142"/>
-            <a:ext cx="3828155" cy="2397836"/>
-          </a:xfrm>
-          <a:prstGeom prst="rect">
-            <a:avLst/>
-          </a:prstGeom>
-        </p:spPr>
-        <p:txBody>
-          <a:bodyPr lIns="0" tIns="0" rIns="0" bIns="0" rtlCol="0" anchor="t">
-            <a:spAutoFit/>
-          </a:bodyPr>
-          <a:lstStyle/>
-          <a:p>
-            <a:pPr algn="ctr">
-              <a:lnSpc>
-                <a:spcPts val="3780"/>
-              </a:lnSpc>
-            </a:pPr>
-            <a:r>
-              <a:rPr lang="en-US" sz="2400">
-                <a:solidFill>
-                  <a:srgbClr val="000000"/>
-                </a:solidFill>
-                <a:latin typeface="Bricolage Grotesque"/>
-                <a:ea typeface="Bricolage Grotesque"/>
-                <a:cs typeface="Bricolage Grotesque"/>
-                <a:sym typeface="Bricolage Grotesque"/>
-              </a:rPr>
-              <a:t>Text authenticity was marginally lower and AI detectors flagged more potential AI-generated content.</a:t>
-            </a:r>
-          </a:p>
-        </p:txBody>
-      </p:sp>
-      <p:sp>
-        <p:nvSpPr>
           <p:cNvPr id="16" name="TextBox 16"/>
           <p:cNvSpPr txBox="1"/>
           <p:nvPr/>
         </p:nvSpPr>
         <p:spPr>
           <a:xfrm>
-            <a:off x="1200217" y="6140277"/>
+            <a:off x="1357202" y="6451819"/>
             <a:ext cx="3456099" cy="523875"/>
           </a:xfrm>
           <a:prstGeom prst="rect">
@@ -5530,7 +5683,7 @@
         </p:nvSpPr>
         <p:spPr>
           <a:xfrm>
-            <a:off x="9493539" y="6102177"/>
+            <a:off x="9738215" y="6451818"/>
             <a:ext cx="3456099" cy="523875"/>
           </a:xfrm>
           <a:prstGeom prst="rect">
@@ -5549,7 +5702,7 @@
               </a:lnSpc>
             </a:pPr>
             <a:r>
-              <a:rPr lang="en-US" sz="3000" b="1">
+              <a:rPr lang="en-US" sz="3000" b="1" dirty="0">
                 <a:solidFill>
                   <a:srgbClr val="000000"/>
                 </a:solidFill>
@@ -5571,7 +5724,7 @@
         </p:nvSpPr>
         <p:spPr>
           <a:xfrm>
-            <a:off x="13265401" y="5835477"/>
+            <a:off x="13408628" y="6185120"/>
             <a:ext cx="4200211" cy="1057275"/>
           </a:xfrm>
           <a:prstGeom prst="rect">
@@ -5590,7 +5743,7 @@
               </a:lnSpc>
             </a:pPr>
             <a:r>
-              <a:rPr lang="en-US" sz="3000" b="1">
+              <a:rPr lang="en-US" sz="3000" b="1" dirty="0">
                 <a:solidFill>
                   <a:srgbClr val="000000"/>
                 </a:solidFill>
@@ -5621,9 +5774,6 @@
                     <p:cTn id="3" fill="hold">
                       <p:stCondLst>
                         <p:cond delay="indefinite"/>
-                        <p:cond evt="onBegin" delay="0">
-                          <p:tn val="2"/>
-                        </p:cond>
                       </p:stCondLst>
                       <p:childTnLst>
                         <p:par>
@@ -5633,7 +5783,7 @@
                             </p:stCondLst>
                             <p:childTnLst>
                               <p:par>
-                                <p:cTn id="5" presetID="10" presetClass="entr" presetSubtype="0" fill="hold" grpId="0" nodeType="withEffect">
+                                <p:cTn id="5" presetID="10" presetClass="entr" presetSubtype="0" fill="hold" grpId="0" nodeType="clickEffect">
                                   <p:stCondLst>
                                     <p:cond delay="0"/>
                                   </p:stCondLst>
@@ -5681,7 +5831,7 @@
                                           </p:stCondLst>
                                         </p:cTn>
                                         <p:tgtEl>
-                                          <p:spTgt spid="12"/>
+                                          <p:spTgt spid="2"/>
                                         </p:tgtEl>
                                         <p:attrNameLst>
                                           <p:attrName>style.visibility</p:attrName>
@@ -5695,41 +5845,6 @@
                                       <p:cBhvr>
                                         <p:cTn id="10" dur="500"/>
                                         <p:tgtEl>
-                                          <p:spTgt spid="12"/>
-                                        </p:tgtEl>
-                                      </p:cBhvr>
-                                    </p:animEffect>
-                                  </p:childTnLst>
-                                </p:cTn>
-                              </p:par>
-                              <p:par>
-                                <p:cTn id="11" presetID="10" presetClass="entr" presetSubtype="0" fill="hold" grpId="0" nodeType="withEffect">
-                                  <p:stCondLst>
-                                    <p:cond delay="0"/>
-                                  </p:stCondLst>
-                                  <p:childTnLst>
-                                    <p:set>
-                                      <p:cBhvr>
-                                        <p:cTn id="12" dur="1" fill="hold">
-                                          <p:stCondLst>
-                                            <p:cond delay="0"/>
-                                          </p:stCondLst>
-                                        </p:cTn>
-                                        <p:tgtEl>
-                                          <p:spTgt spid="2"/>
-                                        </p:tgtEl>
-                                        <p:attrNameLst>
-                                          <p:attrName>style.visibility</p:attrName>
-                                        </p:attrNameLst>
-                                      </p:cBhvr>
-                                      <p:to>
-                                        <p:strVal val="visible"/>
-                                      </p:to>
-                                    </p:set>
-                                    <p:animEffect transition="in" filter="fade">
-                                      <p:cBhvr>
-                                        <p:cTn id="13" dur="500"/>
-                                        <p:tgtEl>
                                           <p:spTgt spid="2"/>
                                         </p:tgtEl>
                                       </p:cBhvr>
@@ -5738,14 +5853,14 @@
                                 </p:cTn>
                               </p:par>
                               <p:par>
-                                <p:cTn id="14" presetID="10" presetClass="entr" presetSubtype="0" fill="hold" nodeType="withEffect">
+                                <p:cTn id="11" presetID="10" presetClass="entr" presetSubtype="0" fill="hold" nodeType="withEffect">
                                   <p:stCondLst>
                                     <p:cond delay="0"/>
                                   </p:stCondLst>
                                   <p:childTnLst>
                                     <p:set>
                                       <p:cBhvr>
-                                        <p:cTn id="15" dur="1" fill="hold">
+                                        <p:cTn id="12" dur="1" fill="hold">
                                           <p:stCondLst>
                                             <p:cond delay="0"/>
                                           </p:stCondLst>
@@ -5763,9 +5878,44 @@
                                     </p:set>
                                     <p:animEffect transition="in" filter="fade">
                                       <p:cBhvr>
+                                        <p:cTn id="13" dur="500"/>
+                                        <p:tgtEl>
+                                          <p:spTgt spid="3"/>
+                                        </p:tgtEl>
+                                      </p:cBhvr>
+                                    </p:animEffect>
+                                  </p:childTnLst>
+                                </p:cTn>
+                              </p:par>
+                              <p:par>
+                                <p:cTn id="14" presetID="10" presetClass="entr" presetSubtype="0" fill="hold" grpId="0" nodeType="withEffect">
+                                  <p:stCondLst>
+                                    <p:cond delay="0"/>
+                                  </p:stCondLst>
+                                  <p:childTnLst>
+                                    <p:set>
+                                      <p:cBhvr>
+                                        <p:cTn id="15" dur="1" fill="hold">
+                                          <p:stCondLst>
+                                            <p:cond delay="0"/>
+                                          </p:stCondLst>
+                                        </p:cTn>
+                                        <p:tgtEl>
+                                          <p:spTgt spid="6"/>
+                                        </p:tgtEl>
+                                        <p:attrNameLst>
+                                          <p:attrName>style.visibility</p:attrName>
+                                        </p:attrNameLst>
+                                      </p:cBhvr>
+                                      <p:to>
+                                        <p:strVal val="visible"/>
+                                      </p:to>
+                                    </p:set>
+                                    <p:animEffect transition="in" filter="fade">
+                                      <p:cBhvr>
                                         <p:cTn id="16" dur="500"/>
                                         <p:tgtEl>
-                                          <p:spTgt spid="3"/>
+                                          <p:spTgt spid="6"/>
                                         </p:tgtEl>
                                       </p:cBhvr>
                                     </p:animEffect>
@@ -5786,7 +5936,7 @@
                                           </p:stCondLst>
                                         </p:cTn>
                                         <p:tgtEl>
-                                          <p:spTgt spid="6"/>
+                                          <p:spTgt spid="7"/>
                                         </p:tgtEl>
                                         <p:attrNameLst>
                                           <p:attrName>style.visibility</p:attrName>
@@ -5800,59 +5950,6 @@
                                       <p:cBhvr>
                                         <p:cTn id="19" dur="500"/>
                                         <p:tgtEl>
-                                          <p:spTgt spid="6"/>
-                                        </p:tgtEl>
-                                      </p:cBhvr>
-                                    </p:animEffect>
-                                  </p:childTnLst>
-                                </p:cTn>
-                              </p:par>
-                            </p:childTnLst>
-                          </p:cTn>
-                        </p:par>
-                      </p:childTnLst>
-                    </p:cTn>
-                  </p:par>
-                  <p:par>
-                    <p:cTn id="20" fill="hold">
-                      <p:stCondLst>
-                        <p:cond delay="indefinite"/>
-                      </p:stCondLst>
-                      <p:childTnLst>
-                        <p:par>
-                          <p:cTn id="21" fill="hold">
-                            <p:stCondLst>
-                              <p:cond delay="0"/>
-                            </p:stCondLst>
-                            <p:childTnLst>
-                              <p:par>
-                                <p:cTn id="22" presetID="10" presetClass="entr" presetSubtype="0" fill="hold" grpId="0" nodeType="clickEffect">
-                                  <p:stCondLst>
-                                    <p:cond delay="0"/>
-                                  </p:stCondLst>
-                                  <p:childTnLst>
-                                    <p:set>
-                                      <p:cBhvr>
-                                        <p:cTn id="23" dur="1" fill="hold">
-                                          <p:stCondLst>
-                                            <p:cond delay="0"/>
-                                          </p:stCondLst>
-                                        </p:cTn>
-                                        <p:tgtEl>
-                                          <p:spTgt spid="7"/>
-                                        </p:tgtEl>
-                                        <p:attrNameLst>
-                                          <p:attrName>style.visibility</p:attrName>
-                                        </p:attrNameLst>
-                                      </p:cBhvr>
-                                      <p:to>
-                                        <p:strVal val="visible"/>
-                                      </p:to>
-                                    </p:set>
-                                    <p:animEffect transition="in" filter="fade">
-                                      <p:cBhvr>
-                                        <p:cTn id="24" dur="500"/>
-                                        <p:tgtEl>
                                           <p:spTgt spid="7"/>
                                         </p:tgtEl>
                                       </p:cBhvr>
@@ -5861,14 +5958,14 @@
                                 </p:cTn>
                               </p:par>
                               <p:par>
-                                <p:cTn id="25" presetID="10" presetClass="entr" presetSubtype="0" fill="hold" grpId="0" nodeType="withEffect">
+                                <p:cTn id="20" presetID="10" presetClass="entr" presetSubtype="0" fill="hold" grpId="0" nodeType="withEffect">
                                   <p:stCondLst>
                                     <p:cond delay="0"/>
                                   </p:stCondLst>
                                   <p:childTnLst>
                                     <p:set>
                                       <p:cBhvr>
-                                        <p:cTn id="26" dur="1" fill="hold">
+                                        <p:cTn id="21" dur="1" fill="hold">
                                           <p:stCondLst>
                                             <p:cond delay="0"/>
                                           </p:stCondLst>
@@ -5886,7 +5983,7 @@
                                     </p:set>
                                     <p:animEffect transition="in" filter="fade">
                                       <p:cBhvr>
-                                        <p:cTn id="27" dur="500"/>
+                                        <p:cTn id="22" dur="500"/>
                                         <p:tgtEl>
                                           <p:spTgt spid="10"/>
                                         </p:tgtEl>
@@ -5896,67 +5993,14 @@
                                 </p:cTn>
                               </p:par>
                               <p:par>
-                                <p:cTn id="28" presetID="10" presetClass="entr" presetSubtype="0" fill="hold" grpId="0" nodeType="withEffect">
+                                <p:cTn id="23" presetID="10" presetClass="entr" presetSubtype="0" fill="hold" grpId="0" nodeType="withEffect">
                                   <p:stCondLst>
                                     <p:cond delay="0"/>
                                   </p:stCondLst>
                                   <p:childTnLst>
                                     <p:set>
                                       <p:cBhvr>
-                                        <p:cTn id="29" dur="1" fill="hold">
-                                          <p:stCondLst>
-                                            <p:cond delay="0"/>
-                                          </p:stCondLst>
-                                        </p:cTn>
-                                        <p:tgtEl>
-                                          <p:spTgt spid="13"/>
-                                        </p:tgtEl>
-                                        <p:attrNameLst>
-                                          <p:attrName>style.visibility</p:attrName>
-                                        </p:attrNameLst>
-                                      </p:cBhvr>
-                                      <p:to>
-                                        <p:strVal val="visible"/>
-                                      </p:to>
-                                    </p:set>
-                                    <p:animEffect transition="in" filter="fade">
-                                      <p:cBhvr>
-                                        <p:cTn id="30" dur="500"/>
-                                        <p:tgtEl>
-                                          <p:spTgt spid="13"/>
-                                        </p:tgtEl>
-                                      </p:cBhvr>
-                                    </p:animEffect>
-                                  </p:childTnLst>
-                                </p:cTn>
-                              </p:par>
-                            </p:childTnLst>
-                          </p:cTn>
-                        </p:par>
-                      </p:childTnLst>
-                    </p:cTn>
-                  </p:par>
-                  <p:par>
-                    <p:cTn id="31" fill="hold">
-                      <p:stCondLst>
-                        <p:cond delay="indefinite"/>
-                      </p:stCondLst>
-                      <p:childTnLst>
-                        <p:par>
-                          <p:cTn id="32" fill="hold">
-                            <p:stCondLst>
-                              <p:cond delay="0"/>
-                            </p:stCondLst>
-                            <p:childTnLst>
-                              <p:par>
-                                <p:cTn id="33" presetID="10" presetClass="entr" presetSubtype="0" fill="hold" grpId="0" nodeType="clickEffect">
-                                  <p:stCondLst>
-                                    <p:cond delay="0"/>
-                                  </p:stCondLst>
-                                  <p:childTnLst>
-                                    <p:set>
-                                      <p:cBhvr>
-                                        <p:cTn id="34" dur="1" fill="hold">
+                                        <p:cTn id="24" dur="1" fill="hold">
                                           <p:stCondLst>
                                             <p:cond delay="0"/>
                                           </p:stCondLst>
@@ -5974,7 +6018,7 @@
                                     </p:set>
                                     <p:animEffect transition="in" filter="fade">
                                       <p:cBhvr>
-                                        <p:cTn id="35" dur="500"/>
+                                        <p:cTn id="25" dur="500"/>
                                         <p:tgtEl>
                                           <p:spTgt spid="8"/>
                                         </p:tgtEl>
@@ -5984,14 +6028,14 @@
                                 </p:cTn>
                               </p:par>
                               <p:par>
-                                <p:cTn id="36" presetID="10" presetClass="entr" presetSubtype="0" fill="hold" grpId="0" nodeType="withEffect">
+                                <p:cTn id="26" presetID="10" presetClass="entr" presetSubtype="0" fill="hold" grpId="0" nodeType="withEffect">
                                   <p:stCondLst>
                                     <p:cond delay="0"/>
                                   </p:stCondLst>
                                   <p:childTnLst>
                                     <p:set>
                                       <p:cBhvr>
-                                        <p:cTn id="37" dur="1" fill="hold">
+                                        <p:cTn id="27" dur="1" fill="hold">
                                           <p:stCondLst>
                                             <p:cond delay="0"/>
                                           </p:stCondLst>
@@ -6009,7 +6053,7 @@
                                     </p:set>
                                     <p:animEffect transition="in" filter="fade">
                                       <p:cBhvr>
-                                        <p:cTn id="38" dur="500"/>
+                                        <p:cTn id="28" dur="500"/>
                                         <p:tgtEl>
                                           <p:spTgt spid="17"/>
                                         </p:tgtEl>
@@ -6019,67 +6063,14 @@
                                 </p:cTn>
                               </p:par>
                               <p:par>
-                                <p:cTn id="39" presetID="10" presetClass="entr" presetSubtype="0" fill="hold" grpId="0" nodeType="withEffect">
+                                <p:cTn id="29" presetID="10" presetClass="entr" presetSubtype="0" fill="hold" grpId="0" nodeType="withEffect">
                                   <p:stCondLst>
                                     <p:cond delay="0"/>
                                   </p:stCondLst>
                                   <p:childTnLst>
                                     <p:set>
                                       <p:cBhvr>
-                                        <p:cTn id="40" dur="1" fill="hold">
-                                          <p:stCondLst>
-                                            <p:cond delay="0"/>
-                                          </p:stCondLst>
-                                        </p:cTn>
-                                        <p:tgtEl>
-                                          <p:spTgt spid="14"/>
-                                        </p:tgtEl>
-                                        <p:attrNameLst>
-                                          <p:attrName>style.visibility</p:attrName>
-                                        </p:attrNameLst>
-                                      </p:cBhvr>
-                                      <p:to>
-                                        <p:strVal val="visible"/>
-                                      </p:to>
-                                    </p:set>
-                                    <p:animEffect transition="in" filter="fade">
-                                      <p:cBhvr>
-                                        <p:cTn id="41" dur="500"/>
-                                        <p:tgtEl>
-                                          <p:spTgt spid="14"/>
-                                        </p:tgtEl>
-                                      </p:cBhvr>
-                                    </p:animEffect>
-                                  </p:childTnLst>
-                                </p:cTn>
-                              </p:par>
-                            </p:childTnLst>
-                          </p:cTn>
-                        </p:par>
-                      </p:childTnLst>
-                    </p:cTn>
-                  </p:par>
-                  <p:par>
-                    <p:cTn id="42" fill="hold">
-                      <p:stCondLst>
-                        <p:cond delay="indefinite"/>
-                      </p:stCondLst>
-                      <p:childTnLst>
-                        <p:par>
-                          <p:cTn id="43" fill="hold">
-                            <p:stCondLst>
-                              <p:cond delay="0"/>
-                            </p:stCondLst>
-                            <p:childTnLst>
-                              <p:par>
-                                <p:cTn id="44" presetID="10" presetClass="entr" presetSubtype="0" fill="hold" grpId="0" nodeType="clickEffect">
-                                  <p:stCondLst>
-                                    <p:cond delay="0"/>
-                                  </p:stCondLst>
-                                  <p:childTnLst>
-                                    <p:set>
-                                      <p:cBhvr>
-                                        <p:cTn id="45" dur="1" fill="hold">
+                                        <p:cTn id="30" dur="1" fill="hold">
                                           <p:stCondLst>
                                             <p:cond delay="0"/>
                                           </p:stCondLst>
@@ -6097,7 +6088,7 @@
                                     </p:set>
                                     <p:animEffect transition="in" filter="fade">
                                       <p:cBhvr>
-                                        <p:cTn id="46" dur="500"/>
+                                        <p:cTn id="31" dur="500"/>
                                         <p:tgtEl>
                                           <p:spTgt spid="9"/>
                                         </p:tgtEl>
@@ -6107,14 +6098,14 @@
                                 </p:cTn>
                               </p:par>
                               <p:par>
-                                <p:cTn id="47" presetID="10" presetClass="entr" presetSubtype="0" fill="hold" grpId="0" nodeType="withEffect">
+                                <p:cTn id="32" presetID="10" presetClass="entr" presetSubtype="0" fill="hold" grpId="0" nodeType="withEffect">
                                   <p:stCondLst>
                                     <p:cond delay="0"/>
                                   </p:stCondLst>
                                   <p:childTnLst>
                                     <p:set>
                                       <p:cBhvr>
-                                        <p:cTn id="48" dur="1" fill="hold">
+                                        <p:cTn id="33" dur="1" fill="hold">
                                           <p:stCondLst>
                                             <p:cond delay="0"/>
                                           </p:stCondLst>
@@ -6132,44 +6123,9 @@
                                     </p:set>
                                     <p:animEffect transition="in" filter="fade">
                                       <p:cBhvr>
-                                        <p:cTn id="49" dur="500"/>
+                                        <p:cTn id="34" dur="500"/>
                                         <p:tgtEl>
                                           <p:spTgt spid="18"/>
-                                        </p:tgtEl>
-                                      </p:cBhvr>
-                                    </p:animEffect>
-                                  </p:childTnLst>
-                                </p:cTn>
-                              </p:par>
-                              <p:par>
-                                <p:cTn id="50" presetID="10" presetClass="entr" presetSubtype="0" fill="hold" grpId="0" nodeType="withEffect">
-                                  <p:stCondLst>
-                                    <p:cond delay="0"/>
-                                  </p:stCondLst>
-                                  <p:childTnLst>
-                                    <p:set>
-                                      <p:cBhvr>
-                                        <p:cTn id="51" dur="1" fill="hold">
-                                          <p:stCondLst>
-                                            <p:cond delay="0"/>
-                                          </p:stCondLst>
-                                        </p:cTn>
-                                        <p:tgtEl>
-                                          <p:spTgt spid="15"/>
-                                        </p:tgtEl>
-                                        <p:attrNameLst>
-                                          <p:attrName>style.visibility</p:attrName>
-                                        </p:attrNameLst>
-                                      </p:cBhvr>
-                                      <p:to>
-                                        <p:strVal val="visible"/>
-                                      </p:to>
-                                    </p:set>
-                                    <p:animEffect transition="in" filter="fade">
-                                      <p:cBhvr>
-                                        <p:cTn id="52" dur="500"/>
-                                        <p:tgtEl>
-                                          <p:spTgt spid="15"/>
                                         </p:tgtEl>
                                       </p:cBhvr>
                                     </p:animEffect>
@@ -6210,10 +6166,6 @@
       <p:bldP spid="8" grpId="0" animBg="1"/>
       <p:bldP spid="9" grpId="0" animBg="1"/>
       <p:bldP spid="10" grpId="0"/>
-      <p:bldP spid="12" grpId="0"/>
-      <p:bldP spid="13" grpId="0"/>
-      <p:bldP spid="14" grpId="0"/>
-      <p:bldP spid="15" grpId="0"/>
       <p:bldP spid="16" grpId="0"/>
       <p:bldP spid="17" grpId="0"/>
       <p:bldP spid="18" grpId="0"/>
@@ -8147,7 +8099,7 @@
         </p:nvSpPr>
         <p:spPr>
           <a:xfrm rot="-535869">
-            <a:off x="11226228" y="7703363"/>
+            <a:off x="11226228" y="8137921"/>
             <a:ext cx="3894554" cy="3582989"/>
           </a:xfrm>
           <a:custGeom>
@@ -8206,7 +8158,7 @@
         </p:nvSpPr>
         <p:spPr>
           <a:xfrm rot="-145680">
-            <a:off x="3401939" y="8092896"/>
+            <a:off x="3401939" y="8445960"/>
             <a:ext cx="3519250" cy="3330090"/>
           </a:xfrm>
           <a:custGeom>
@@ -8265,7 +8217,7 @@
         </p:nvSpPr>
         <p:spPr>
           <a:xfrm>
-            <a:off x="-654506" y="7600646"/>
+            <a:off x="-654506" y="7962900"/>
             <a:ext cx="3607581" cy="3476806"/>
           </a:xfrm>
           <a:custGeom>
@@ -8324,7 +8276,7 @@
         </p:nvSpPr>
         <p:spPr>
           <a:xfrm rot="359659">
-            <a:off x="15708951" y="8173505"/>
+            <a:off x="15708951" y="8406456"/>
             <a:ext cx="3100699" cy="3015430"/>
           </a:xfrm>
           <a:custGeom>
@@ -8383,7 +8335,7 @@
         </p:nvSpPr>
         <p:spPr>
           <a:xfrm rot="574447">
-            <a:off x="7322967" y="8295921"/>
+            <a:off x="7322967" y="8486079"/>
             <a:ext cx="3642065" cy="3848946"/>
           </a:xfrm>
           <a:custGeom>
@@ -8730,7 +8682,7 @@
                 <a:cs typeface="Bricolage Grotesque"/>
                 <a:sym typeface="Bricolage Grotesque"/>
               </a:rPr>
-              <a:t>My master thesis focuses on ChatGPT and essay enhancement.</a:t>
+              <a:t>My master thesis focuses on AI (ChatGPT) and essay enhancement.</a:t>
             </a:r>
           </a:p>
           <a:p>
@@ -8829,7 +8781,7 @@
         </p:nvSpPr>
         <p:spPr>
           <a:xfrm>
-            <a:off x="10820400" y="1028700"/>
+            <a:off x="11277600" y="1485900"/>
             <a:ext cx="8302245" cy="8229600"/>
           </a:xfrm>
           <a:custGeom>
@@ -8906,7 +8858,7 @@
                             </p:stCondLst>
                             <p:childTnLst>
                               <p:par>
-                                <p:cTn id="5" presetID="10" presetClass="entr" presetSubtype="0" fill="hold" nodeType="clickEffect">
+                                <p:cTn id="5" presetID="10" presetClass="entr" presetSubtype="0" fill="hold" grpId="0" nodeType="clickEffect">
                                   <p:stCondLst>
                                     <p:cond delay="0"/>
                                   </p:stCondLst>
@@ -8948,33 +8900,15 @@
                                   </p:childTnLst>
                                 </p:cTn>
                               </p:par>
-                            </p:childTnLst>
-                          </p:cTn>
-                        </p:par>
-                      </p:childTnLst>
-                    </p:cTn>
-                  </p:par>
-                  <p:par>
-                    <p:cTn id="8" fill="hold">
-                      <p:stCondLst>
-                        <p:cond delay="indefinite"/>
-                      </p:stCondLst>
-                      <p:childTnLst>
-                        <p:par>
-                          <p:cTn id="9" fill="hold">
-                            <p:stCondLst>
-                              <p:cond delay="0"/>
-                            </p:stCondLst>
-                            <p:childTnLst>
                               <p:par>
-                                <p:cTn id="10" presetID="10" presetClass="entr" presetSubtype="0" fill="hold" nodeType="clickEffect">
+                                <p:cTn id="8" presetID="10" presetClass="entr" presetSubtype="0" fill="hold" grpId="0" nodeType="withEffect">
                                   <p:stCondLst>
                                     <p:cond delay="0"/>
                                   </p:stCondLst>
                                   <p:childTnLst>
                                     <p:set>
                                       <p:cBhvr>
-                                        <p:cTn id="11" dur="1" fill="hold">
+                                        <p:cTn id="9" dur="1" fill="hold">
                                           <p:stCondLst>
                                             <p:cond delay="0"/>
                                           </p:stCondLst>
@@ -8996,7 +8930,7 @@
                                     </p:set>
                                     <p:animEffect transition="in" filter="fade">
                                       <p:cBhvr>
-                                        <p:cTn id="12" dur="500"/>
+                                        <p:cTn id="10" dur="500"/>
                                         <p:tgtEl>
                                           <p:spTgt spid="3">
                                             <p:txEl>
@@ -9009,33 +8943,15 @@
                                   </p:childTnLst>
                                 </p:cTn>
                               </p:par>
-                            </p:childTnLst>
-                          </p:cTn>
-                        </p:par>
-                      </p:childTnLst>
-                    </p:cTn>
-                  </p:par>
-                  <p:par>
-                    <p:cTn id="13" fill="hold">
-                      <p:stCondLst>
-                        <p:cond delay="indefinite"/>
-                      </p:stCondLst>
-                      <p:childTnLst>
-                        <p:par>
-                          <p:cTn id="14" fill="hold">
-                            <p:stCondLst>
-                              <p:cond delay="0"/>
-                            </p:stCondLst>
-                            <p:childTnLst>
                               <p:par>
-                                <p:cTn id="15" presetID="10" presetClass="entr" presetSubtype="0" fill="hold" nodeType="clickEffect">
+                                <p:cTn id="11" presetID="10" presetClass="entr" presetSubtype="0" fill="hold" grpId="0" nodeType="withEffect">
                                   <p:stCondLst>
                                     <p:cond delay="0"/>
                                   </p:stCondLst>
                                   <p:childTnLst>
                                     <p:set>
                                       <p:cBhvr>
-                                        <p:cTn id="16" dur="1" fill="hold">
+                                        <p:cTn id="12" dur="1" fill="hold">
                                           <p:stCondLst>
                                             <p:cond delay="0"/>
                                           </p:stCondLst>
@@ -9057,7 +8973,7 @@
                                     </p:set>
                                     <p:animEffect transition="in" filter="fade">
                                       <p:cBhvr>
-                                        <p:cTn id="17" dur="500"/>
+                                        <p:cTn id="13" dur="500"/>
                                         <p:tgtEl>
                                           <p:spTgt spid="3">
                                             <p:txEl>
@@ -9097,6 +9013,9 @@
         </p:cTn>
       </p:par>
     </p:tnLst>
+    <p:bldLst>
+      <p:bldP spid="3" grpId="0" build="allAtOnce"/>
+    </p:bldLst>
   </p:timing>
 </p:sld>
 </file>
@@ -9134,7 +9053,7 @@
         </p:nvSpPr>
         <p:spPr>
           <a:xfrm rot="-691699">
-            <a:off x="15311864" y="3220273"/>
+            <a:off x="15180553" y="2882165"/>
             <a:ext cx="4154462" cy="3863649"/>
           </a:xfrm>
           <a:custGeom>
@@ -9193,7 +9112,7 @@
         </p:nvSpPr>
         <p:spPr>
           <a:xfrm rot="-284944">
-            <a:off x="-828357" y="3007444"/>
+            <a:off x="-1640674" y="2979175"/>
             <a:ext cx="4096277" cy="3630325"/>
           </a:xfrm>
           <a:custGeom>
@@ -9252,7 +9171,7 @@
         </p:nvSpPr>
         <p:spPr>
           <a:xfrm rot="1061051">
-            <a:off x="12662573" y="7240317"/>
+            <a:off x="12862599" y="7878048"/>
             <a:ext cx="3642065" cy="3848946"/>
           </a:xfrm>
           <a:custGeom>
@@ -9311,7 +9230,7 @@
         </p:nvSpPr>
         <p:spPr>
           <a:xfrm rot="-411245">
-            <a:off x="7229722" y="8180178"/>
+            <a:off x="7681266" y="8281653"/>
             <a:ext cx="4476094" cy="3731943"/>
           </a:xfrm>
           <a:custGeom>
@@ -9370,7 +9289,7 @@
         </p:nvSpPr>
         <p:spPr>
           <a:xfrm rot="-474403">
-            <a:off x="6959966" y="-2524910"/>
+            <a:off x="6959966" y="-2119797"/>
             <a:ext cx="4368067" cy="4329846"/>
           </a:xfrm>
           <a:custGeom>
@@ -9429,7 +9348,7 @@
         </p:nvSpPr>
         <p:spPr>
           <a:xfrm>
-            <a:off x="2059461" y="7107532"/>
+            <a:off x="2470295" y="7921556"/>
             <a:ext cx="4373018" cy="4214496"/>
           </a:xfrm>
           <a:custGeom>
@@ -9547,7 +9466,7 @@
         </p:nvSpPr>
         <p:spPr>
           <a:xfrm rot="675348">
-            <a:off x="12487240" y="-563389"/>
+            <a:off x="12477356" y="-1035948"/>
             <a:ext cx="3789402" cy="3685194"/>
           </a:xfrm>
           <a:custGeom>
@@ -9606,7 +9525,7 @@
         </p:nvSpPr>
         <p:spPr>
           <a:xfrm rot="710027">
-            <a:off x="2194216" y="-882445"/>
+            <a:off x="2141444" y="-1085938"/>
             <a:ext cx="4057937" cy="3692723"/>
           </a:xfrm>
           <a:custGeom>
@@ -9824,7 +9743,7 @@
         </p:nvSpPr>
         <p:spPr>
           <a:xfrm rot="-503037">
-            <a:off x="17148200" y="7696708"/>
+            <a:off x="17176210" y="7849281"/>
             <a:ext cx="3294905" cy="2230322"/>
           </a:xfrm>
           <a:custGeom>
@@ -9872,6 +9791,252 @@
           <a:lstStyle/>
           <a:p>
             <a:endParaRPr lang="de-AT"/>
+          </a:p>
+        </p:txBody>
+      </p:sp>
+      <p:sp>
+        <p:nvSpPr>
+          <p:cNvPr id="16" name="Textfeld 15">
+            <a:extLst>
+              <a:ext uri="{FF2B5EF4-FFF2-40B4-BE49-F238E27FC236}">
+                <a16:creationId xmlns:a16="http://schemas.microsoft.com/office/drawing/2014/main" id="{991D8DE7-5AF2-F117-76F1-3EE3ECF51802}"/>
+              </a:ext>
+            </a:extLst>
+          </p:cNvPr>
+          <p:cNvSpPr txBox="1"/>
+          <p:nvPr/>
+        </p:nvSpPr>
+        <p:spPr>
+          <a:xfrm>
+            <a:off x="4291726" y="6952813"/>
+            <a:ext cx="9704545" cy="1169551"/>
+          </a:xfrm>
+          <a:prstGeom prst="rect">
+            <a:avLst/>
+          </a:prstGeom>
+          <a:noFill/>
+        </p:spPr>
+        <p:txBody>
+          <a:bodyPr wrap="square">
+            <a:spAutoFit/>
+          </a:bodyPr>
+          <a:lstStyle/>
+          <a:p>
+            <a:pPr algn="ctr"/>
+            <a:r>
+              <a:rPr lang="de-AT" sz="1600" dirty="0">
+                <a:solidFill>
+                  <a:srgbClr val="558DFD"/>
+                </a:solidFill>
+                <a:latin typeface="Bobby Jones Soft"/>
+              </a:rPr>
+              <a:t>Source: </a:t>
+            </a:r>
+          </a:p>
+          <a:p>
+            <a:pPr algn="ctr"/>
+            <a:r>
+              <a:rPr lang="de-AT" b="0" i="0" dirty="0">
+                <a:solidFill>
+                  <a:srgbClr val="475569"/>
+                </a:solidFill>
+                <a:effectLst/>
+                <a:latin typeface="Segoe UI" panose="020B0502040204020203" pitchFamily="34" charset="0"/>
+              </a:rPr>
+              <a:t>Bašić, Ž., </a:t>
+            </a:r>
+            <a:r>
+              <a:rPr lang="de-AT" b="0" i="0" dirty="0" err="1">
+                <a:solidFill>
+                  <a:srgbClr val="475569"/>
+                </a:solidFill>
+                <a:effectLst/>
+                <a:latin typeface="Segoe UI" panose="020B0502040204020203" pitchFamily="34" charset="0"/>
+              </a:rPr>
+              <a:t>Banovac</a:t>
+            </a:r>
+            <a:r>
+              <a:rPr lang="de-AT" b="0" i="0" dirty="0">
+                <a:solidFill>
+                  <a:srgbClr val="475569"/>
+                </a:solidFill>
+                <a:effectLst/>
+                <a:latin typeface="Segoe UI" panose="020B0502040204020203" pitchFamily="34" charset="0"/>
+              </a:rPr>
+              <a:t>, A., </a:t>
+            </a:r>
+            <a:r>
+              <a:rPr lang="de-AT" b="0" i="0" dirty="0" err="1">
+                <a:solidFill>
+                  <a:srgbClr val="475569"/>
+                </a:solidFill>
+                <a:effectLst/>
+                <a:latin typeface="Segoe UI" panose="020B0502040204020203" pitchFamily="34" charset="0"/>
+              </a:rPr>
+              <a:t>Kružić</a:t>
+            </a:r>
+            <a:r>
+              <a:rPr lang="de-AT" b="0" i="0" dirty="0">
+                <a:solidFill>
+                  <a:srgbClr val="475569"/>
+                </a:solidFill>
+                <a:effectLst/>
+                <a:latin typeface="Segoe UI" panose="020B0502040204020203" pitchFamily="34" charset="0"/>
+              </a:rPr>
+              <a:t>, I. et al. ChatGPT-3.5 </a:t>
+            </a:r>
+            <a:r>
+              <a:rPr lang="de-AT" b="0" i="0" dirty="0" err="1">
+                <a:solidFill>
+                  <a:srgbClr val="475569"/>
+                </a:solidFill>
+                <a:effectLst/>
+                <a:latin typeface="Segoe UI" panose="020B0502040204020203" pitchFamily="34" charset="0"/>
+              </a:rPr>
+              <a:t>as</a:t>
+            </a:r>
+            <a:r>
+              <a:rPr lang="de-AT" b="0" i="0" dirty="0">
+                <a:solidFill>
+                  <a:srgbClr val="475569"/>
+                </a:solidFill>
+                <a:effectLst/>
+                <a:latin typeface="Segoe UI" panose="020B0502040204020203" pitchFamily="34" charset="0"/>
+              </a:rPr>
+              <a:t> </a:t>
+            </a:r>
+            <a:r>
+              <a:rPr lang="de-AT" b="0" i="0" dirty="0" err="1">
+                <a:solidFill>
+                  <a:srgbClr val="475569"/>
+                </a:solidFill>
+                <a:effectLst/>
+                <a:latin typeface="Segoe UI" panose="020B0502040204020203" pitchFamily="34" charset="0"/>
+              </a:rPr>
+              <a:t>writing</a:t>
+            </a:r>
+            <a:r>
+              <a:rPr lang="de-AT" b="0" i="0" dirty="0">
+                <a:solidFill>
+                  <a:srgbClr val="475569"/>
+                </a:solidFill>
+                <a:effectLst/>
+                <a:latin typeface="Segoe UI" panose="020B0502040204020203" pitchFamily="34" charset="0"/>
+              </a:rPr>
+              <a:t> </a:t>
+            </a:r>
+            <a:r>
+              <a:rPr lang="de-AT" b="0" i="0" dirty="0" err="1">
+                <a:solidFill>
+                  <a:srgbClr val="475569"/>
+                </a:solidFill>
+                <a:effectLst/>
+                <a:latin typeface="Segoe UI" panose="020B0502040204020203" pitchFamily="34" charset="0"/>
+              </a:rPr>
+              <a:t>assistance</a:t>
+            </a:r>
+            <a:r>
+              <a:rPr lang="de-AT" b="0" i="0" dirty="0">
+                <a:solidFill>
+                  <a:srgbClr val="475569"/>
+                </a:solidFill>
+                <a:effectLst/>
+                <a:latin typeface="Segoe UI" panose="020B0502040204020203" pitchFamily="34" charset="0"/>
+              </a:rPr>
+              <a:t> in </a:t>
+            </a:r>
+            <a:r>
+              <a:rPr lang="de-AT" b="0" i="0" dirty="0" err="1">
+                <a:solidFill>
+                  <a:srgbClr val="475569"/>
+                </a:solidFill>
+                <a:effectLst/>
+                <a:latin typeface="Segoe UI" panose="020B0502040204020203" pitchFamily="34" charset="0"/>
+              </a:rPr>
+              <a:t>students</a:t>
+            </a:r>
+            <a:r>
+              <a:rPr lang="de-AT" b="0" i="0" dirty="0">
+                <a:solidFill>
+                  <a:srgbClr val="475569"/>
+                </a:solidFill>
+                <a:effectLst/>
+                <a:latin typeface="Segoe UI" panose="020B0502040204020203" pitchFamily="34" charset="0"/>
+              </a:rPr>
+              <a:t>’ </a:t>
+            </a:r>
+            <a:r>
+              <a:rPr lang="de-AT" b="0" i="0" dirty="0" err="1">
+                <a:solidFill>
+                  <a:srgbClr val="475569"/>
+                </a:solidFill>
+                <a:effectLst/>
+                <a:latin typeface="Segoe UI" panose="020B0502040204020203" pitchFamily="34" charset="0"/>
+              </a:rPr>
+              <a:t>essays</a:t>
+            </a:r>
+            <a:r>
+              <a:rPr lang="de-AT" b="0" i="0" dirty="0">
+                <a:solidFill>
+                  <a:srgbClr val="475569"/>
+                </a:solidFill>
+                <a:effectLst/>
+                <a:latin typeface="Segoe UI" panose="020B0502040204020203" pitchFamily="34" charset="0"/>
+              </a:rPr>
+              <a:t>. </a:t>
+            </a:r>
+            <a:r>
+              <a:rPr lang="de-AT" b="0" i="0" dirty="0" err="1">
+                <a:solidFill>
+                  <a:srgbClr val="475569"/>
+                </a:solidFill>
+                <a:effectLst/>
+                <a:latin typeface="Segoe UI" panose="020B0502040204020203" pitchFamily="34" charset="0"/>
+              </a:rPr>
+              <a:t>Humanit</a:t>
+            </a:r>
+            <a:r>
+              <a:rPr lang="de-AT" b="0" i="0" dirty="0">
+                <a:solidFill>
+                  <a:srgbClr val="475569"/>
+                </a:solidFill>
+                <a:effectLst/>
+                <a:latin typeface="Segoe UI" panose="020B0502040204020203" pitchFamily="34" charset="0"/>
+              </a:rPr>
+              <a:t> Soc </a:t>
+            </a:r>
+            <a:r>
+              <a:rPr lang="de-AT" b="0" i="0" dirty="0" err="1">
+                <a:solidFill>
+                  <a:srgbClr val="475569"/>
+                </a:solidFill>
+                <a:effectLst/>
+                <a:latin typeface="Segoe UI" panose="020B0502040204020203" pitchFamily="34" charset="0"/>
+              </a:rPr>
+              <a:t>Sci</a:t>
+            </a:r>
+            <a:r>
+              <a:rPr lang="de-AT" b="0" i="0" dirty="0">
+                <a:solidFill>
+                  <a:srgbClr val="475569"/>
+                </a:solidFill>
+                <a:effectLst/>
+                <a:latin typeface="Segoe UI" panose="020B0502040204020203" pitchFamily="34" charset="0"/>
+              </a:rPr>
+              <a:t> Commun 10, 750 (2023). </a:t>
+            </a:r>
+          </a:p>
+          <a:p>
+            <a:pPr algn="ctr"/>
+            <a:r>
+              <a:rPr lang="de-AT" b="0" i="0" dirty="0">
+                <a:effectLst/>
+                <a:latin typeface="Segoe UI" panose="020B0502040204020203" pitchFamily="34" charset="0"/>
+                <a:hlinkClick r:id="rId13"/>
+              </a:rPr>
+              <a:t>https://doi.org/10.1057/s41599-023-02269-7</a:t>
+            </a:r>
+            <a:endParaRPr lang="de-AT" dirty="0"/>
           </a:p>
         </p:txBody>
       </p:sp>

--- a/Lightning Talk Christina.pptx
+++ b/Lightning Talk Christina.pptx
@@ -4,6 +4,9 @@
   <p:sldMasterIdLst>
     <p:sldMasterId id="2147483648" r:id="rId1"/>
   </p:sldMasterIdLst>
+  <p:notesMasterIdLst>
+    <p:notesMasterId r:id="rId9"/>
+  </p:notesMasterIdLst>
   <p:sldIdLst>
     <p:sldId id="256" r:id="rId2"/>
     <p:sldId id="257" r:id="rId3"/>
@@ -18,26 +21,26 @@
   <p:embeddedFontLst>
     <p:embeddedFont>
       <p:font typeface="Bobby Jones Soft" panose="020B0604020202020204" charset="0"/>
-      <p:regular r:id="rId9"/>
+      <p:regular r:id="rId10"/>
     </p:embeddedFont>
     <p:embeddedFont>
       <p:font typeface="Bricolage Grotesque" panose="020B0604020202020204" charset="0"/>
-      <p:regular r:id="rId10"/>
+      <p:regular r:id="rId11"/>
     </p:embeddedFont>
     <p:embeddedFont>
       <p:font typeface="Bricolage Grotesque Bold" panose="020B0604020202020204" charset="0"/>
-      <p:regular r:id="rId11"/>
+      <p:regular r:id="rId12"/>
     </p:embeddedFont>
     <p:embeddedFont>
       <p:font typeface="Canva Student Font" panose="020B0604020202020204" charset="0"/>
-      <p:regular r:id="rId12"/>
+      <p:regular r:id="rId13"/>
     </p:embeddedFont>
     <p:embeddedFont>
       <p:font typeface="Segoe UI" panose="020B0502040204020203" pitchFamily="34" charset="0"/>
-      <p:regular r:id="rId13"/>
-      <p:bold r:id="rId14"/>
-      <p:italic r:id="rId15"/>
-      <p:boldItalic r:id="rId16"/>
+      <p:regular r:id="rId14"/>
+      <p:bold r:id="rId15"/>
+      <p:italic r:id="rId16"/>
+      <p:boldItalic r:id="rId17"/>
     </p:embeddedFont>
   </p:embeddedFontLst>
   <p:defaultTextStyle>
@@ -157,7 +160,7 @@
 <file path=ppt/revisionInfo.xml><?xml version="1.0" encoding="utf-8"?>
 <p1510:revInfo xmlns:a="http://schemas.openxmlformats.org/drawingml/2006/main" xmlns:r="http://schemas.openxmlformats.org/officeDocument/2006/relationships" xmlns:p1510="http://schemas.microsoft.com/office/powerpoint/2015/10/main">
   <p1510:revLst>
-    <p1510:client id="{758A810B-C379-4C8B-B534-293CCBD759B1}" v="39" dt="2026-06-09T08:47:20.271"/>
+    <p1510:client id="{758A810B-C379-4C8B-B534-293CCBD759B1}" v="46" dt="2026-06-15T15:39:01.142"/>
   </p1510:revLst>
 </p1510:revInfo>
 </file>
@@ -167,12 +170,12 @@
   <pc:docChgLst>
     <pc:chgData name="Christina Knes" userId="7e9737a164333dbd" providerId="LiveId" clId="{72053980-4108-4AED-A5B7-3290F7F82C69}"/>
     <pc:docChg chg="custSel modSld">
-      <pc:chgData name="Christina Knes" userId="7e9737a164333dbd" providerId="LiveId" clId="{72053980-4108-4AED-A5B7-3290F7F82C69}" dt="2026-06-09T08:48:05.793" v="139"/>
+      <pc:chgData name="Christina Knes" userId="7e9737a164333dbd" providerId="LiveId" clId="{72053980-4108-4AED-A5B7-3290F7F82C69}" dt="2026-06-15T15:55:17.928" v="272" actId="20577"/>
       <pc:docMkLst>
         <pc:docMk/>
       </pc:docMkLst>
-      <pc:sldChg chg="modSp mod modAnim">
-        <pc:chgData name="Christina Knes" userId="7e9737a164333dbd" providerId="LiveId" clId="{72053980-4108-4AED-A5B7-3290F7F82C69}" dt="2026-06-09T08:43:44.663" v="120"/>
+      <pc:sldChg chg="modSp mod modAnim modNotesTx">
+        <pc:chgData name="Christina Knes" userId="7e9737a164333dbd" providerId="LiveId" clId="{72053980-4108-4AED-A5B7-3290F7F82C69}" dt="2026-06-15T15:54:25.112" v="261" actId="20577"/>
         <pc:sldMkLst>
           <pc:docMk/>
           <pc:sldMk cId="0" sldId="256"/>
@@ -266,8 +269,8 @@
           </ac:spMkLst>
         </pc:spChg>
       </pc:sldChg>
-      <pc:sldChg chg="modSp mod addAnim delAnim modAnim">
-        <pc:chgData name="Christina Knes" userId="7e9737a164333dbd" providerId="LiveId" clId="{72053980-4108-4AED-A5B7-3290F7F82C69}" dt="2026-06-09T08:48:05.793" v="139"/>
+      <pc:sldChg chg="modSp mod addAnim delAnim modAnim modNotesTx">
+        <pc:chgData name="Christina Knes" userId="7e9737a164333dbd" providerId="LiveId" clId="{72053980-4108-4AED-A5B7-3290F7F82C69}" dt="2026-06-15T15:40:53.228" v="255" actId="20577"/>
         <pc:sldMkLst>
           <pc:docMk/>
           <pc:sldMk cId="0" sldId="257"/>
@@ -305,8 +308,8 @@
           </ac:spMkLst>
         </pc:spChg>
       </pc:sldChg>
-      <pc:sldChg chg="delSp modSp mod addAnim delAnim modAnim">
-        <pc:chgData name="Christina Knes" userId="7e9737a164333dbd" providerId="LiveId" clId="{72053980-4108-4AED-A5B7-3290F7F82C69}" dt="2026-06-09T08:44:33.548" v="126"/>
+      <pc:sldChg chg="delSp modSp mod addAnim delAnim modAnim modNotesTx">
+        <pc:chgData name="Christina Knes" userId="7e9737a164333dbd" providerId="LiveId" clId="{72053980-4108-4AED-A5B7-3290F7F82C69}" dt="2026-06-15T15:42:01.323" v="258" actId="20577"/>
         <pc:sldMkLst>
           <pc:docMk/>
           <pc:sldMk cId="0" sldId="258"/>
@@ -359,38 +362,6 @@
             <ac:spMk id="10" creationId="{00000000-0000-0000-0000-000000000000}"/>
           </ac:spMkLst>
         </pc:spChg>
-        <pc:spChg chg="del mod">
-          <ac:chgData name="Christina Knes" userId="7e9737a164333dbd" providerId="LiveId" clId="{72053980-4108-4AED-A5B7-3290F7F82C69}" dt="2026-06-09T08:42:50.669" v="108" actId="478"/>
-          <ac:spMkLst>
-            <pc:docMk/>
-            <pc:sldMk cId="0" sldId="258"/>
-            <ac:spMk id="12" creationId="{00000000-0000-0000-0000-000000000000}"/>
-          </ac:spMkLst>
-        </pc:spChg>
-        <pc:spChg chg="del mod">
-          <ac:chgData name="Christina Knes" userId="7e9737a164333dbd" providerId="LiveId" clId="{72053980-4108-4AED-A5B7-3290F7F82C69}" dt="2026-06-09T08:42:53.749" v="109" actId="478"/>
-          <ac:spMkLst>
-            <pc:docMk/>
-            <pc:sldMk cId="0" sldId="258"/>
-            <ac:spMk id="13" creationId="{00000000-0000-0000-0000-000000000000}"/>
-          </ac:spMkLst>
-        </pc:spChg>
-        <pc:spChg chg="del mod">
-          <ac:chgData name="Christina Knes" userId="7e9737a164333dbd" providerId="LiveId" clId="{72053980-4108-4AED-A5B7-3290F7F82C69}" dt="2026-06-09T08:42:56.380" v="110" actId="478"/>
-          <ac:spMkLst>
-            <pc:docMk/>
-            <pc:sldMk cId="0" sldId="258"/>
-            <ac:spMk id="14" creationId="{00000000-0000-0000-0000-000000000000}"/>
-          </ac:spMkLst>
-        </pc:spChg>
-        <pc:spChg chg="del mod">
-          <ac:chgData name="Christina Knes" userId="7e9737a164333dbd" providerId="LiveId" clId="{72053980-4108-4AED-A5B7-3290F7F82C69}" dt="2026-06-09T08:42:58.516" v="111" actId="478"/>
-          <ac:spMkLst>
-            <pc:docMk/>
-            <pc:sldMk cId="0" sldId="258"/>
-            <ac:spMk id="15" creationId="{00000000-0000-0000-0000-000000000000}"/>
-          </ac:spMkLst>
-        </pc:spChg>
         <pc:spChg chg="mod">
           <ac:chgData name="Christina Knes" userId="7e9737a164333dbd" providerId="LiveId" clId="{72053980-4108-4AED-A5B7-3290F7F82C69}" dt="2026-06-09T08:43:06.653" v="112" actId="1076"/>
           <ac:spMkLst>
@@ -424,8 +395,15 @@
           </ac:grpSpMkLst>
         </pc:grpChg>
       </pc:sldChg>
-      <pc:sldChg chg="modSp mod modAnim">
-        <pc:chgData name="Christina Knes" userId="7e9737a164333dbd" providerId="LiveId" clId="{72053980-4108-4AED-A5B7-3290F7F82C69}" dt="2026-06-09T08:45:41.531" v="128"/>
+      <pc:sldChg chg="modNotesTx">
+        <pc:chgData name="Christina Knes" userId="7e9737a164333dbd" providerId="LiveId" clId="{72053980-4108-4AED-A5B7-3290F7F82C69}" dt="2026-06-15T15:54:41.833" v="263" actId="20577"/>
+        <pc:sldMkLst>
+          <pc:docMk/>
+          <pc:sldMk cId="0" sldId="259"/>
+        </pc:sldMkLst>
+      </pc:sldChg>
+      <pc:sldChg chg="modSp mod modAnim modNotesTx">
+        <pc:chgData name="Christina Knes" userId="7e9737a164333dbd" providerId="LiveId" clId="{72053980-4108-4AED-A5B7-3290F7F82C69}" dt="2026-06-15T15:55:01.062" v="266" actId="20577"/>
         <pc:sldMkLst>
           <pc:docMk/>
           <pc:sldMk cId="0" sldId="260"/>
@@ -471,8 +449,8 @@
           </ac:spMkLst>
         </pc:spChg>
       </pc:sldChg>
-      <pc:sldChg chg="modSp mod modAnim">
-        <pc:chgData name="Christina Knes" userId="7e9737a164333dbd" providerId="LiveId" clId="{72053980-4108-4AED-A5B7-3290F7F82C69}" dt="2026-06-09T08:45:49.745" v="129"/>
+      <pc:sldChg chg="modSp mod modAnim modNotesTx">
+        <pc:chgData name="Christina Knes" userId="7e9737a164333dbd" providerId="LiveId" clId="{72053980-4108-4AED-A5B7-3290F7F82C69}" dt="2026-06-15T15:55:08.701" v="268" actId="20577"/>
         <pc:sldMkLst>
           <pc:docMk/>
           <pc:sldMk cId="0" sldId="261"/>
@@ -494,8 +472,8 @@
           </ac:spMkLst>
         </pc:spChg>
       </pc:sldChg>
-      <pc:sldChg chg="addSp modSp mod">
-        <pc:chgData name="Christina Knes" userId="7e9737a164333dbd" providerId="LiveId" clId="{72053980-4108-4AED-A5B7-3290F7F82C69}" dt="2026-06-09T08:40:37.397" v="81" actId="1076"/>
+      <pc:sldChg chg="addSp modSp mod modNotesTx">
+        <pc:chgData name="Christina Knes" userId="7e9737a164333dbd" providerId="LiveId" clId="{72053980-4108-4AED-A5B7-3290F7F82C69}" dt="2026-06-15T15:55:17.928" v="272" actId="20577"/>
         <pc:sldMkLst>
           <pc:docMk/>
           <pc:sldMk cId="0" sldId="262"/>
@@ -584,6 +562,4230 @@
     </pc:docChg>
   </pc:docChgLst>
 </pc:chgInfo>
+</file>
+
+<file path=ppt/notesMasters/notesMaster1.xml><?xml version="1.0" encoding="utf-8"?>
+<p:notesMaster xmlns:a="http://schemas.openxmlformats.org/drawingml/2006/main" xmlns:r="http://schemas.openxmlformats.org/officeDocument/2006/relationships" xmlns:p="http://schemas.openxmlformats.org/presentationml/2006/main">
+  <p:cSld>
+    <p:bg>
+      <p:bgRef idx="1001">
+        <a:schemeClr val="bg1"/>
+      </p:bgRef>
+    </p:bg>
+    <p:spTree>
+      <p:nvGrpSpPr>
+        <p:cNvPr id="1" name=""/>
+        <p:cNvGrpSpPr/>
+        <p:nvPr/>
+      </p:nvGrpSpPr>
+      <p:grpSpPr>
+        <a:xfrm>
+          <a:off x="0" y="0"/>
+          <a:ext cx="0" cy="0"/>
+          <a:chOff x="0" y="0"/>
+          <a:chExt cx="0" cy="0"/>
+        </a:xfrm>
+      </p:grpSpPr>
+      <p:sp>
+        <p:nvSpPr>
+          <p:cNvPr id="2" name="Kopfzeilenplatzhalter 1"/>
+          <p:cNvSpPr>
+            <a:spLocks noGrp="1"/>
+          </p:cNvSpPr>
+          <p:nvPr>
+            <p:ph type="hdr" sz="quarter"/>
+          </p:nvPr>
+        </p:nvSpPr>
+        <p:spPr>
+          <a:xfrm>
+            <a:off x="0" y="0"/>
+            <a:ext cx="2971800" cy="458788"/>
+          </a:xfrm>
+          <a:prstGeom prst="rect">
+            <a:avLst/>
+          </a:prstGeom>
+        </p:spPr>
+        <p:txBody>
+          <a:bodyPr vert="horz" lIns="91440" tIns="45720" rIns="91440" bIns="45720" rtlCol="0"/>
+          <a:lstStyle>
+            <a:lvl1pPr algn="l">
+              <a:defRPr sz="1200"/>
+            </a:lvl1pPr>
+          </a:lstStyle>
+          <a:p>
+            <a:endParaRPr lang="de-AT"/>
+          </a:p>
+        </p:txBody>
+      </p:sp>
+      <p:sp>
+        <p:nvSpPr>
+          <p:cNvPr id="3" name="Datumsplatzhalter 2"/>
+          <p:cNvSpPr>
+            <a:spLocks noGrp="1"/>
+          </p:cNvSpPr>
+          <p:nvPr>
+            <p:ph type="dt" idx="1"/>
+          </p:nvPr>
+        </p:nvSpPr>
+        <p:spPr>
+          <a:xfrm>
+            <a:off x="3884613" y="0"/>
+            <a:ext cx="2971800" cy="458788"/>
+          </a:xfrm>
+          <a:prstGeom prst="rect">
+            <a:avLst/>
+          </a:prstGeom>
+        </p:spPr>
+        <p:txBody>
+          <a:bodyPr vert="horz" lIns="91440" tIns="45720" rIns="91440" bIns="45720" rtlCol="0"/>
+          <a:lstStyle>
+            <a:lvl1pPr algn="r">
+              <a:defRPr sz="1200"/>
+            </a:lvl1pPr>
+          </a:lstStyle>
+          <a:p>
+            <a:fld id="{7AAA80C1-B10E-441C-98F7-90D0E5C9B104}" type="datetimeFigureOut">
+              <a:rPr lang="de-AT" smtClean="0"/>
+              <a:t>15.06.2026</a:t>
+            </a:fld>
+            <a:endParaRPr lang="de-AT"/>
+          </a:p>
+        </p:txBody>
+      </p:sp>
+      <p:sp>
+        <p:nvSpPr>
+          <p:cNvPr id="4" name="Folienbildplatzhalter 3"/>
+          <p:cNvSpPr>
+            <a:spLocks noGrp="1" noRot="1" noChangeAspect="1"/>
+          </p:cNvSpPr>
+          <p:nvPr>
+            <p:ph type="sldImg" idx="2"/>
+          </p:nvPr>
+        </p:nvSpPr>
+        <p:spPr>
+          <a:xfrm>
+            <a:off x="685800" y="1143000"/>
+            <a:ext cx="5486400" cy="3086100"/>
+          </a:xfrm>
+          <a:prstGeom prst="rect">
+            <a:avLst/>
+          </a:prstGeom>
+          <a:noFill/>
+          <a:ln w="12700">
+            <a:solidFill>
+              <a:prstClr val="black"/>
+            </a:solidFill>
+          </a:ln>
+        </p:spPr>
+        <p:txBody>
+          <a:bodyPr vert="horz" lIns="91440" tIns="45720" rIns="91440" bIns="45720" rtlCol="0" anchor="ctr"/>
+          <a:lstStyle/>
+          <a:p>
+            <a:endParaRPr lang="de-AT"/>
+          </a:p>
+        </p:txBody>
+      </p:sp>
+      <p:sp>
+        <p:nvSpPr>
+          <p:cNvPr id="5" name="Notizenplatzhalter 4"/>
+          <p:cNvSpPr>
+            <a:spLocks noGrp="1"/>
+          </p:cNvSpPr>
+          <p:nvPr>
+            <p:ph type="body" sz="quarter" idx="3"/>
+          </p:nvPr>
+        </p:nvSpPr>
+        <p:spPr>
+          <a:xfrm>
+            <a:off x="685800" y="4400550"/>
+            <a:ext cx="5486400" cy="3600450"/>
+          </a:xfrm>
+          <a:prstGeom prst="rect">
+            <a:avLst/>
+          </a:prstGeom>
+        </p:spPr>
+        <p:txBody>
+          <a:bodyPr vert="horz" lIns="91440" tIns="45720" rIns="91440" bIns="45720" rtlCol="0"/>
+          <a:lstStyle/>
+          <a:p>
+            <a:pPr lvl="0"/>
+            <a:r>
+              <a:rPr lang="de-DE"/>
+              <a:t>Mastertextformat bearbeiten</a:t>
+            </a:r>
+          </a:p>
+          <a:p>
+            <a:pPr lvl="1"/>
+            <a:r>
+              <a:rPr lang="de-DE"/>
+              <a:t>Zweite Ebene</a:t>
+            </a:r>
+          </a:p>
+          <a:p>
+            <a:pPr lvl="2"/>
+            <a:r>
+              <a:rPr lang="de-DE"/>
+              <a:t>Dritte Ebene</a:t>
+            </a:r>
+          </a:p>
+          <a:p>
+            <a:pPr lvl="3"/>
+            <a:r>
+              <a:rPr lang="de-DE"/>
+              <a:t>Vierte Ebene</a:t>
+            </a:r>
+          </a:p>
+          <a:p>
+            <a:pPr lvl="4"/>
+            <a:r>
+              <a:rPr lang="de-DE"/>
+              <a:t>Fünfte Ebene</a:t>
+            </a:r>
+            <a:endParaRPr lang="de-AT"/>
+          </a:p>
+        </p:txBody>
+      </p:sp>
+      <p:sp>
+        <p:nvSpPr>
+          <p:cNvPr id="6" name="Fußzeilenplatzhalter 5"/>
+          <p:cNvSpPr>
+            <a:spLocks noGrp="1"/>
+          </p:cNvSpPr>
+          <p:nvPr>
+            <p:ph type="ftr" sz="quarter" idx="4"/>
+          </p:nvPr>
+        </p:nvSpPr>
+        <p:spPr>
+          <a:xfrm>
+            <a:off x="0" y="8685213"/>
+            <a:ext cx="2971800" cy="458787"/>
+          </a:xfrm>
+          <a:prstGeom prst="rect">
+            <a:avLst/>
+          </a:prstGeom>
+        </p:spPr>
+        <p:txBody>
+          <a:bodyPr vert="horz" lIns="91440" tIns="45720" rIns="91440" bIns="45720" rtlCol="0" anchor="b"/>
+          <a:lstStyle>
+            <a:lvl1pPr algn="l">
+              <a:defRPr sz="1200"/>
+            </a:lvl1pPr>
+          </a:lstStyle>
+          <a:p>
+            <a:endParaRPr lang="de-AT"/>
+          </a:p>
+        </p:txBody>
+      </p:sp>
+      <p:sp>
+        <p:nvSpPr>
+          <p:cNvPr id="7" name="Foliennummernplatzhalter 6"/>
+          <p:cNvSpPr>
+            <a:spLocks noGrp="1"/>
+          </p:cNvSpPr>
+          <p:nvPr>
+            <p:ph type="sldNum" sz="quarter" idx="5"/>
+          </p:nvPr>
+        </p:nvSpPr>
+        <p:spPr>
+          <a:xfrm>
+            <a:off x="3884613" y="8685213"/>
+            <a:ext cx="2971800" cy="458787"/>
+          </a:xfrm>
+          <a:prstGeom prst="rect">
+            <a:avLst/>
+          </a:prstGeom>
+        </p:spPr>
+        <p:txBody>
+          <a:bodyPr vert="horz" lIns="91440" tIns="45720" rIns="91440" bIns="45720" rtlCol="0" anchor="b"/>
+          <a:lstStyle>
+            <a:lvl1pPr algn="r">
+              <a:defRPr sz="1200"/>
+            </a:lvl1pPr>
+          </a:lstStyle>
+          <a:p>
+            <a:fld id="{92333A25-CDC0-4883-9EA4-6C77BD01CB0D}" type="slidenum">
+              <a:rPr lang="de-AT" smtClean="0"/>
+              <a:t>‹Nr.›</a:t>
+            </a:fld>
+            <a:endParaRPr lang="de-AT"/>
+          </a:p>
+        </p:txBody>
+      </p:sp>
+    </p:spTree>
+    <p:extLst>
+      <p:ext uri="{BB962C8B-B14F-4D97-AF65-F5344CB8AC3E}">
+        <p14:creationId xmlns:p14="http://schemas.microsoft.com/office/powerpoint/2010/main" val="2603412845"/>
+      </p:ext>
+    </p:extLst>
+  </p:cSld>
+  <p:clrMap bg1="lt1" tx1="dk1" bg2="lt2" tx2="dk2" accent1="accent1" accent2="accent2" accent3="accent3" accent4="accent4" accent5="accent5" accent6="accent6" hlink="hlink" folHlink="folHlink"/>
+  <p:notesStyle>
+    <a:lvl1pPr marL="0" algn="l" defTabSz="914400" rtl="0" eaLnBrk="1" latinLnBrk="0" hangingPunct="1">
+      <a:defRPr sz="1200" kern="1200">
+        <a:solidFill>
+          <a:schemeClr val="tx1"/>
+        </a:solidFill>
+        <a:latin typeface="+mn-lt"/>
+        <a:ea typeface="+mn-ea"/>
+        <a:cs typeface="+mn-cs"/>
+      </a:defRPr>
+    </a:lvl1pPr>
+    <a:lvl2pPr marL="457200" algn="l" defTabSz="914400" rtl="0" eaLnBrk="1" latinLnBrk="0" hangingPunct="1">
+      <a:defRPr sz="1200" kern="1200">
+        <a:solidFill>
+          <a:schemeClr val="tx1"/>
+        </a:solidFill>
+        <a:latin typeface="+mn-lt"/>
+        <a:ea typeface="+mn-ea"/>
+        <a:cs typeface="+mn-cs"/>
+      </a:defRPr>
+    </a:lvl2pPr>
+    <a:lvl3pPr marL="914400" algn="l" defTabSz="914400" rtl="0" eaLnBrk="1" latinLnBrk="0" hangingPunct="1">
+      <a:defRPr sz="1200" kern="1200">
+        <a:solidFill>
+          <a:schemeClr val="tx1"/>
+        </a:solidFill>
+        <a:latin typeface="+mn-lt"/>
+        <a:ea typeface="+mn-ea"/>
+        <a:cs typeface="+mn-cs"/>
+      </a:defRPr>
+    </a:lvl3pPr>
+    <a:lvl4pPr marL="1371600" algn="l" defTabSz="914400" rtl="0" eaLnBrk="1" latinLnBrk="0" hangingPunct="1">
+      <a:defRPr sz="1200" kern="1200">
+        <a:solidFill>
+          <a:schemeClr val="tx1"/>
+        </a:solidFill>
+        <a:latin typeface="+mn-lt"/>
+        <a:ea typeface="+mn-ea"/>
+        <a:cs typeface="+mn-cs"/>
+      </a:defRPr>
+    </a:lvl4pPr>
+    <a:lvl5pPr marL="1828800" algn="l" defTabSz="914400" rtl="0" eaLnBrk="1" latinLnBrk="0" hangingPunct="1">
+      <a:defRPr sz="1200" kern="1200">
+        <a:solidFill>
+          <a:schemeClr val="tx1"/>
+        </a:solidFill>
+        <a:latin typeface="+mn-lt"/>
+        <a:ea typeface="+mn-ea"/>
+        <a:cs typeface="+mn-cs"/>
+      </a:defRPr>
+    </a:lvl5pPr>
+    <a:lvl6pPr marL="2286000" algn="l" defTabSz="914400" rtl="0" eaLnBrk="1" latinLnBrk="0" hangingPunct="1">
+      <a:defRPr sz="1200" kern="1200">
+        <a:solidFill>
+          <a:schemeClr val="tx1"/>
+        </a:solidFill>
+        <a:latin typeface="+mn-lt"/>
+        <a:ea typeface="+mn-ea"/>
+        <a:cs typeface="+mn-cs"/>
+      </a:defRPr>
+    </a:lvl6pPr>
+    <a:lvl7pPr marL="2743200" algn="l" defTabSz="914400" rtl="0" eaLnBrk="1" latinLnBrk="0" hangingPunct="1">
+      <a:defRPr sz="1200" kern="1200">
+        <a:solidFill>
+          <a:schemeClr val="tx1"/>
+        </a:solidFill>
+        <a:latin typeface="+mn-lt"/>
+        <a:ea typeface="+mn-ea"/>
+        <a:cs typeface="+mn-cs"/>
+      </a:defRPr>
+    </a:lvl7pPr>
+    <a:lvl8pPr marL="3200400" algn="l" defTabSz="914400" rtl="0" eaLnBrk="1" latinLnBrk="0" hangingPunct="1">
+      <a:defRPr sz="1200" kern="1200">
+        <a:solidFill>
+          <a:schemeClr val="tx1"/>
+        </a:solidFill>
+        <a:latin typeface="+mn-lt"/>
+        <a:ea typeface="+mn-ea"/>
+        <a:cs typeface="+mn-cs"/>
+      </a:defRPr>
+    </a:lvl8pPr>
+    <a:lvl9pPr marL="3657600" algn="l" defTabSz="914400" rtl="0" eaLnBrk="1" latinLnBrk="0" hangingPunct="1">
+      <a:defRPr sz="1200" kern="1200">
+        <a:solidFill>
+          <a:schemeClr val="tx1"/>
+        </a:solidFill>
+        <a:latin typeface="+mn-lt"/>
+        <a:ea typeface="+mn-ea"/>
+        <a:cs typeface="+mn-cs"/>
+      </a:defRPr>
+    </a:lvl9pPr>
+  </p:notesStyle>
+</p:notesMaster>
+</file>
+
+<file path=ppt/notesSlides/notesSlide1.xml><?xml version="1.0" encoding="utf-8"?>
+<p:notes xmlns:a="http://schemas.openxmlformats.org/drawingml/2006/main" xmlns:r="http://schemas.openxmlformats.org/officeDocument/2006/relationships" xmlns:p="http://schemas.openxmlformats.org/presentationml/2006/main">
+  <p:cSld>
+    <p:spTree>
+      <p:nvGrpSpPr>
+        <p:cNvPr id="1" name=""/>
+        <p:cNvGrpSpPr/>
+        <p:nvPr/>
+      </p:nvGrpSpPr>
+      <p:grpSpPr>
+        <a:xfrm>
+          <a:off x="0" y="0"/>
+          <a:ext cx="0" cy="0"/>
+          <a:chOff x="0" y="0"/>
+          <a:chExt cx="0" cy="0"/>
+        </a:xfrm>
+      </p:grpSpPr>
+      <p:sp>
+        <p:nvSpPr>
+          <p:cNvPr id="2" name="Folienbildplatzhalter 1"/>
+          <p:cNvSpPr>
+            <a:spLocks noGrp="1" noRot="1" noChangeAspect="1"/>
+          </p:cNvSpPr>
+          <p:nvPr>
+            <p:ph type="sldImg"/>
+          </p:nvPr>
+        </p:nvSpPr>
+        <p:spPr/>
+      </p:sp>
+      <p:sp>
+        <p:nvSpPr>
+          <p:cNvPr id="3" name="Notizenplatzhalter 2"/>
+          <p:cNvSpPr>
+            <a:spLocks noGrp="1"/>
+          </p:cNvSpPr>
+          <p:nvPr>
+            <p:ph type="body" idx="1"/>
+          </p:nvPr>
+        </p:nvSpPr>
+        <p:spPr/>
+        <p:txBody>
+          <a:bodyPr/>
+          <a:lstStyle/>
+          <a:p>
+            <a:r>
+              <a:rPr lang="de-AT" dirty="0"/>
+              <a:t>Hello </a:t>
+            </a:r>
+            <a:r>
+              <a:rPr lang="de-AT" dirty="0" err="1"/>
+              <a:t>everyone</a:t>
+            </a:r>
+            <a:r>
+              <a:rPr lang="de-AT" dirty="0"/>
+              <a:t>,</a:t>
+            </a:r>
+          </a:p>
+          <a:p>
+            <a:endParaRPr lang="de-AT" dirty="0"/>
+          </a:p>
+          <a:p>
+            <a:r>
+              <a:rPr lang="de-AT" dirty="0" err="1"/>
+              <a:t>today</a:t>
+            </a:r>
+            <a:r>
+              <a:rPr lang="de-AT" dirty="0"/>
+              <a:t> I will </a:t>
+            </a:r>
+            <a:r>
+              <a:rPr lang="de-AT" dirty="0" err="1"/>
+              <a:t>present</a:t>
+            </a:r>
+            <a:r>
+              <a:rPr lang="de-AT" dirty="0"/>
+              <a:t> </a:t>
+            </a:r>
+            <a:r>
+              <a:rPr lang="de-AT" dirty="0" err="1"/>
+              <a:t>the</a:t>
+            </a:r>
+            <a:r>
+              <a:rPr lang="de-AT" dirty="0"/>
+              <a:t> </a:t>
+            </a:r>
+            <a:r>
+              <a:rPr lang="de-AT" dirty="0" err="1"/>
+              <a:t>study</a:t>
+            </a:r>
+            <a:r>
+              <a:rPr lang="de-AT" dirty="0"/>
+              <a:t> </a:t>
+            </a:r>
+            <a:r>
+              <a:rPr lang="de-AT" i="1" dirty="0"/>
+              <a:t>“ChatGPT-3.5 </a:t>
+            </a:r>
+            <a:r>
+              <a:rPr lang="de-AT" i="1" dirty="0" err="1"/>
+              <a:t>as</a:t>
+            </a:r>
+            <a:r>
+              <a:rPr lang="de-AT" i="1" dirty="0"/>
+              <a:t> Writing Assistance in </a:t>
+            </a:r>
+            <a:r>
+              <a:rPr lang="de-AT" i="1" dirty="0" err="1"/>
+              <a:t>Students</a:t>
+            </a:r>
+            <a:r>
+              <a:rPr lang="de-AT" i="1" dirty="0"/>
+              <a:t>’ Essays”</a:t>
+            </a:r>
+            <a:r>
+              <a:rPr lang="de-AT" dirty="0"/>
+              <a:t> </a:t>
+            </a:r>
+            <a:r>
+              <a:rPr lang="de-AT" dirty="0" err="1"/>
+              <a:t>by</a:t>
+            </a:r>
+            <a:r>
+              <a:rPr lang="de-AT" dirty="0"/>
+              <a:t> Bašić and </a:t>
+            </a:r>
+            <a:r>
+              <a:rPr lang="de-AT" dirty="0" err="1"/>
+              <a:t>colleagues</a:t>
+            </a:r>
+            <a:r>
+              <a:rPr lang="de-AT" dirty="0"/>
+              <a:t>, </a:t>
+            </a:r>
+            <a:r>
+              <a:rPr lang="de-AT" dirty="0" err="1"/>
+              <a:t>published</a:t>
+            </a:r>
+            <a:r>
+              <a:rPr lang="de-AT" dirty="0"/>
+              <a:t> in </a:t>
+            </a:r>
+            <a:r>
+              <a:rPr lang="de-AT" dirty="0" err="1"/>
+              <a:t>the</a:t>
+            </a:r>
+            <a:r>
+              <a:rPr lang="de-AT" dirty="0"/>
+              <a:t> </a:t>
+            </a:r>
+            <a:r>
+              <a:rPr lang="de-AT" dirty="0" err="1"/>
+              <a:t>year</a:t>
+            </a:r>
+            <a:r>
+              <a:rPr lang="de-AT" dirty="0"/>
+              <a:t> 2023, so </a:t>
+            </a:r>
+            <a:r>
+              <a:rPr lang="de-AT" dirty="0" err="1"/>
+              <a:t>we</a:t>
+            </a:r>
+            <a:r>
+              <a:rPr lang="de-AT" dirty="0"/>
+              <a:t> </a:t>
+            </a:r>
+            <a:r>
+              <a:rPr lang="de-AT" dirty="0" err="1"/>
+              <a:t>can</a:t>
+            </a:r>
+            <a:r>
+              <a:rPr lang="de-AT" dirty="0"/>
+              <a:t> </a:t>
+            </a:r>
+            <a:r>
+              <a:rPr lang="de-AT" dirty="0" err="1"/>
+              <a:t>say</a:t>
+            </a:r>
+            <a:r>
+              <a:rPr lang="de-AT" dirty="0"/>
+              <a:t> </a:t>
+            </a:r>
+            <a:r>
+              <a:rPr lang="de-AT" dirty="0" err="1"/>
+              <a:t>that</a:t>
+            </a:r>
+            <a:r>
+              <a:rPr lang="de-AT" dirty="0"/>
+              <a:t> </a:t>
+            </a:r>
+            <a:r>
+              <a:rPr lang="de-AT" dirty="0" err="1"/>
+              <a:t>it</a:t>
+            </a:r>
+            <a:r>
+              <a:rPr lang="de-AT" dirty="0"/>
+              <a:t> </a:t>
+            </a:r>
+            <a:r>
+              <a:rPr lang="de-AT" dirty="0" err="1"/>
+              <a:t>is</a:t>
+            </a:r>
+            <a:r>
+              <a:rPr lang="de-AT" dirty="0"/>
+              <a:t> </a:t>
+            </a:r>
+            <a:r>
+              <a:rPr lang="de-AT" dirty="0" err="1"/>
+              <a:t>one</a:t>
+            </a:r>
+            <a:r>
+              <a:rPr lang="de-AT" dirty="0"/>
+              <a:t> </a:t>
+            </a:r>
+            <a:r>
+              <a:rPr lang="de-AT" dirty="0" err="1"/>
+              <a:t>of</a:t>
+            </a:r>
+            <a:r>
+              <a:rPr lang="de-AT" dirty="0"/>
+              <a:t> </a:t>
+            </a:r>
+            <a:r>
+              <a:rPr lang="de-AT" dirty="0" err="1"/>
+              <a:t>the</a:t>
+            </a:r>
+            <a:r>
+              <a:rPr lang="de-AT" dirty="0"/>
+              <a:t> </a:t>
+            </a:r>
+            <a:r>
+              <a:rPr lang="de-AT" dirty="0" err="1"/>
+              <a:t>earlier</a:t>
+            </a:r>
+            <a:r>
+              <a:rPr lang="de-AT" dirty="0"/>
+              <a:t> </a:t>
+            </a:r>
+            <a:r>
+              <a:rPr lang="de-AT" dirty="0" err="1"/>
+              <a:t>studies</a:t>
+            </a:r>
+            <a:r>
+              <a:rPr lang="de-AT" dirty="0"/>
+              <a:t> on ChatGPT.</a:t>
+            </a:r>
+          </a:p>
+          <a:p>
+            <a:endParaRPr lang="de-AT" dirty="0"/>
+          </a:p>
+          <a:p>
+            <a:r>
+              <a:rPr lang="de-AT" dirty="0"/>
+              <a:t>The </a:t>
+            </a:r>
+            <a:r>
+              <a:rPr lang="de-AT" dirty="0" err="1"/>
+              <a:t>study</a:t>
+            </a:r>
+            <a:r>
+              <a:rPr lang="de-AT" dirty="0"/>
+              <a:t> </a:t>
+            </a:r>
+            <a:r>
+              <a:rPr lang="de-AT" dirty="0" err="1"/>
+              <a:t>investigates</a:t>
+            </a:r>
+            <a:r>
+              <a:rPr lang="de-AT" dirty="0"/>
+              <a:t> an </a:t>
+            </a:r>
+            <a:r>
+              <a:rPr lang="de-AT" dirty="0" err="1"/>
+              <a:t>important</a:t>
+            </a:r>
+            <a:r>
+              <a:rPr lang="de-AT" dirty="0"/>
+              <a:t> </a:t>
+            </a:r>
+            <a:r>
+              <a:rPr lang="de-AT" dirty="0" err="1"/>
+              <a:t>question</a:t>
+            </a:r>
+            <a:r>
+              <a:rPr lang="de-AT" dirty="0"/>
+              <a:t>:</a:t>
+            </a:r>
+          </a:p>
+          <a:p>
+            <a:endParaRPr lang="de-AT" dirty="0"/>
+          </a:p>
+          <a:p>
+            <a:r>
+              <a:rPr lang="de-AT" b="1" dirty="0"/>
+              <a:t>Does ChatGPT </a:t>
+            </a:r>
+            <a:r>
+              <a:rPr lang="de-AT" b="1" dirty="0" err="1"/>
+              <a:t>actually</a:t>
+            </a:r>
+            <a:r>
+              <a:rPr lang="de-AT" b="1" dirty="0"/>
+              <a:t> </a:t>
+            </a:r>
+            <a:r>
+              <a:rPr lang="de-AT" b="1" dirty="0" err="1"/>
+              <a:t>improve</a:t>
+            </a:r>
+            <a:r>
+              <a:rPr lang="de-AT" b="1" dirty="0"/>
+              <a:t> </a:t>
+            </a:r>
+            <a:r>
+              <a:rPr lang="de-AT" b="1" dirty="0" err="1"/>
+              <a:t>students</a:t>
+            </a:r>
+            <a:r>
+              <a:rPr lang="de-AT" b="1" dirty="0"/>
+              <a:t>’ essay-</a:t>
+            </a:r>
+            <a:r>
+              <a:rPr lang="de-AT" b="1" dirty="0" err="1"/>
+              <a:t>writing</a:t>
+            </a:r>
+            <a:r>
+              <a:rPr lang="de-AT" b="1" dirty="0"/>
+              <a:t> </a:t>
+            </a:r>
+            <a:r>
+              <a:rPr lang="de-AT" b="1" dirty="0" err="1"/>
+              <a:t>performance</a:t>
+            </a:r>
+            <a:r>
+              <a:rPr lang="de-AT" b="1" dirty="0"/>
+              <a:t>?</a:t>
+            </a:r>
+            <a:endParaRPr lang="de-AT" dirty="0"/>
+          </a:p>
+          <a:p>
+            <a:endParaRPr lang="de-AT" dirty="0"/>
+          </a:p>
+        </p:txBody>
+      </p:sp>
+      <p:sp>
+        <p:nvSpPr>
+          <p:cNvPr id="4" name="Foliennummernplatzhalter 3"/>
+          <p:cNvSpPr>
+            <a:spLocks noGrp="1"/>
+          </p:cNvSpPr>
+          <p:nvPr>
+            <p:ph type="sldNum" sz="quarter" idx="5"/>
+          </p:nvPr>
+        </p:nvSpPr>
+        <p:spPr/>
+        <p:txBody>
+          <a:bodyPr/>
+          <a:lstStyle/>
+          <a:p>
+            <a:fld id="{92333A25-CDC0-4883-9EA4-6C77BD01CB0D}" type="slidenum">
+              <a:rPr lang="de-AT" smtClean="0"/>
+              <a:t>1</a:t>
+            </a:fld>
+            <a:endParaRPr lang="de-AT"/>
+          </a:p>
+        </p:txBody>
+      </p:sp>
+    </p:spTree>
+    <p:extLst>
+      <p:ext uri="{BB962C8B-B14F-4D97-AF65-F5344CB8AC3E}">
+        <p14:creationId xmlns:p14="http://schemas.microsoft.com/office/powerpoint/2010/main" val="3014618345"/>
+      </p:ext>
+    </p:extLst>
+  </p:cSld>
+  <p:clrMapOvr>
+    <a:masterClrMapping/>
+  </p:clrMapOvr>
+</p:notes>
+</file>
+
+<file path=ppt/notesSlides/notesSlide2.xml><?xml version="1.0" encoding="utf-8"?>
+<p:notes xmlns:a="http://schemas.openxmlformats.org/drawingml/2006/main" xmlns:r="http://schemas.openxmlformats.org/officeDocument/2006/relationships" xmlns:p="http://schemas.openxmlformats.org/presentationml/2006/main">
+  <p:cSld>
+    <p:spTree>
+      <p:nvGrpSpPr>
+        <p:cNvPr id="1" name=""/>
+        <p:cNvGrpSpPr/>
+        <p:nvPr/>
+      </p:nvGrpSpPr>
+      <p:grpSpPr>
+        <a:xfrm>
+          <a:off x="0" y="0"/>
+          <a:ext cx="0" cy="0"/>
+          <a:chOff x="0" y="0"/>
+          <a:chExt cx="0" cy="0"/>
+        </a:xfrm>
+      </p:grpSpPr>
+      <p:sp>
+        <p:nvSpPr>
+          <p:cNvPr id="2" name="Folienbildplatzhalter 1"/>
+          <p:cNvSpPr>
+            <a:spLocks noGrp="1" noRot="1" noChangeAspect="1"/>
+          </p:cNvSpPr>
+          <p:nvPr>
+            <p:ph type="sldImg"/>
+          </p:nvPr>
+        </p:nvSpPr>
+        <p:spPr/>
+      </p:sp>
+      <p:sp>
+        <p:nvSpPr>
+          <p:cNvPr id="3" name="Notizenplatzhalter 2"/>
+          <p:cNvSpPr>
+            <a:spLocks noGrp="1"/>
+          </p:cNvSpPr>
+          <p:nvPr>
+            <p:ph type="body" idx="1"/>
+          </p:nvPr>
+        </p:nvSpPr>
+        <p:spPr/>
+        <p:txBody>
+          <a:bodyPr/>
+          <a:lstStyle/>
+          <a:p>
+            <a:r>
+              <a:rPr lang="de-AT" dirty="0" err="1"/>
+              <a:t>To</a:t>
+            </a:r>
+            <a:r>
+              <a:rPr lang="de-AT" dirty="0"/>
+              <a:t> </a:t>
+            </a:r>
+            <a:r>
+              <a:rPr lang="de-AT" dirty="0" err="1"/>
+              <a:t>answer</a:t>
+            </a:r>
+            <a:r>
+              <a:rPr lang="de-AT" dirty="0"/>
+              <a:t> </a:t>
+            </a:r>
+            <a:r>
+              <a:rPr lang="de-AT" dirty="0" err="1"/>
+              <a:t>this</a:t>
+            </a:r>
+            <a:r>
+              <a:rPr lang="de-AT" dirty="0"/>
+              <a:t> </a:t>
+            </a:r>
+            <a:r>
+              <a:rPr lang="de-AT" dirty="0" err="1"/>
+              <a:t>question</a:t>
+            </a:r>
+            <a:r>
+              <a:rPr lang="de-AT" dirty="0"/>
+              <a:t>, </a:t>
+            </a:r>
+            <a:r>
+              <a:rPr lang="de-AT" dirty="0" err="1"/>
+              <a:t>the</a:t>
+            </a:r>
+            <a:r>
+              <a:rPr lang="de-AT" dirty="0"/>
+              <a:t> </a:t>
+            </a:r>
+            <a:r>
+              <a:rPr lang="de-AT" dirty="0" err="1"/>
+              <a:t>researchers</a:t>
+            </a:r>
+            <a:r>
+              <a:rPr lang="de-AT" dirty="0"/>
+              <a:t> </a:t>
+            </a:r>
+            <a:r>
+              <a:rPr lang="de-AT" dirty="0" err="1"/>
+              <a:t>conducted</a:t>
+            </a:r>
+            <a:r>
+              <a:rPr lang="de-AT" dirty="0"/>
+              <a:t> an </a:t>
+            </a:r>
+            <a:r>
+              <a:rPr lang="de-AT" dirty="0" err="1"/>
+              <a:t>experiment</a:t>
+            </a:r>
+            <a:r>
+              <a:rPr lang="de-AT" dirty="0"/>
+              <a:t> </a:t>
+            </a:r>
+            <a:r>
+              <a:rPr lang="de-AT" dirty="0" err="1"/>
+              <a:t>with</a:t>
+            </a:r>
+            <a:r>
+              <a:rPr lang="de-AT" dirty="0"/>
+              <a:t> </a:t>
+            </a:r>
+            <a:r>
+              <a:rPr lang="de-AT" b="1" dirty="0"/>
+              <a:t>18 </a:t>
+            </a:r>
+            <a:r>
+              <a:rPr lang="de-AT" b="1" dirty="0" err="1"/>
+              <a:t>master’s</a:t>
+            </a:r>
+            <a:r>
+              <a:rPr lang="de-AT" b="1" dirty="0"/>
+              <a:t> </a:t>
+            </a:r>
+            <a:r>
+              <a:rPr lang="de-AT" b="1" dirty="0" err="1"/>
+              <a:t>students</a:t>
+            </a:r>
+            <a:r>
+              <a:rPr lang="de-AT" dirty="0"/>
+              <a:t> </a:t>
+            </a:r>
+            <a:r>
+              <a:rPr lang="de-AT" dirty="0" err="1"/>
+              <a:t>from</a:t>
+            </a:r>
+            <a:r>
+              <a:rPr lang="de-AT" dirty="0"/>
+              <a:t> </a:t>
+            </a:r>
+            <a:r>
+              <a:rPr lang="de-AT" dirty="0" err="1"/>
+              <a:t>the</a:t>
+            </a:r>
+            <a:r>
+              <a:rPr lang="de-AT" dirty="0"/>
+              <a:t> University </a:t>
+            </a:r>
+            <a:r>
+              <a:rPr lang="de-AT" dirty="0" err="1"/>
+              <a:t>of</a:t>
+            </a:r>
+            <a:r>
+              <a:rPr lang="de-AT" dirty="0"/>
+              <a:t> Split.</a:t>
+            </a:r>
+          </a:p>
+          <a:p>
+            <a:endParaRPr lang="de-AT" dirty="0"/>
+          </a:p>
+          <a:p>
+            <a:r>
+              <a:rPr lang="de-AT" dirty="0"/>
+              <a:t>The </a:t>
+            </a:r>
+            <a:r>
+              <a:rPr lang="de-AT" dirty="0" err="1"/>
+              <a:t>students</a:t>
+            </a:r>
+            <a:r>
+              <a:rPr lang="de-AT" dirty="0"/>
+              <a:t> </a:t>
+            </a:r>
+            <a:r>
+              <a:rPr lang="de-AT" dirty="0" err="1"/>
+              <a:t>were</a:t>
+            </a:r>
+            <a:r>
+              <a:rPr lang="de-AT" dirty="0"/>
+              <a:t> </a:t>
+            </a:r>
+            <a:r>
+              <a:rPr lang="de-AT" dirty="0" err="1"/>
+              <a:t>divided</a:t>
+            </a:r>
+            <a:r>
+              <a:rPr lang="de-AT" dirty="0"/>
+              <a:t> </a:t>
+            </a:r>
+            <a:r>
+              <a:rPr lang="de-AT" dirty="0" err="1"/>
+              <a:t>into</a:t>
+            </a:r>
+            <a:r>
+              <a:rPr lang="de-AT" dirty="0"/>
+              <a:t> </a:t>
+            </a:r>
+            <a:r>
+              <a:rPr lang="de-AT" dirty="0" err="1"/>
+              <a:t>two</a:t>
+            </a:r>
+            <a:r>
+              <a:rPr lang="de-AT" dirty="0"/>
+              <a:t> </a:t>
+            </a:r>
+            <a:r>
+              <a:rPr lang="de-AT" dirty="0" err="1"/>
+              <a:t>groups</a:t>
+            </a:r>
+            <a:r>
+              <a:rPr lang="de-AT" dirty="0"/>
+              <a:t>:</a:t>
+            </a:r>
+          </a:p>
+          <a:p>
+            <a:endParaRPr lang="de-AT" dirty="0"/>
+          </a:p>
+          <a:p>
+            <a:r>
+              <a:rPr lang="de-AT" dirty="0"/>
+              <a:t>A </a:t>
+            </a:r>
+            <a:r>
+              <a:rPr lang="de-AT" dirty="0" err="1"/>
+              <a:t>control</a:t>
+            </a:r>
+            <a:r>
+              <a:rPr lang="de-AT" dirty="0"/>
+              <a:t> </a:t>
+            </a:r>
+            <a:r>
+              <a:rPr lang="de-AT" dirty="0" err="1"/>
+              <a:t>group</a:t>
+            </a:r>
+            <a:r>
+              <a:rPr lang="de-AT" dirty="0"/>
+              <a:t> </a:t>
+            </a:r>
+            <a:r>
+              <a:rPr lang="de-AT" dirty="0" err="1"/>
+              <a:t>that</a:t>
+            </a:r>
+            <a:r>
+              <a:rPr lang="de-AT" dirty="0"/>
+              <a:t> </a:t>
+            </a:r>
+            <a:r>
+              <a:rPr lang="de-AT" dirty="0" err="1"/>
+              <a:t>wrote</a:t>
+            </a:r>
+            <a:r>
+              <a:rPr lang="de-AT" dirty="0"/>
+              <a:t> </a:t>
+            </a:r>
+            <a:r>
+              <a:rPr lang="de-AT" dirty="0" err="1"/>
+              <a:t>essays</a:t>
+            </a:r>
+            <a:r>
+              <a:rPr lang="de-AT" dirty="0"/>
+              <a:t> in </a:t>
+            </a:r>
+            <a:r>
+              <a:rPr lang="de-AT" dirty="0" err="1"/>
+              <a:t>the</a:t>
+            </a:r>
+            <a:r>
+              <a:rPr lang="de-AT" dirty="0"/>
+              <a:t> traditional </a:t>
+            </a:r>
+            <a:r>
+              <a:rPr lang="de-AT" dirty="0" err="1"/>
+              <a:t>way</a:t>
+            </a:r>
+            <a:r>
+              <a:rPr lang="de-AT" dirty="0"/>
+              <a:t>. </a:t>
+            </a:r>
+          </a:p>
+          <a:p>
+            <a:r>
+              <a:rPr lang="de-AT" dirty="0"/>
+              <a:t>An experimental </a:t>
+            </a:r>
+            <a:r>
+              <a:rPr lang="de-AT" dirty="0" err="1"/>
+              <a:t>group</a:t>
+            </a:r>
+            <a:r>
+              <a:rPr lang="de-AT" dirty="0"/>
+              <a:t> </a:t>
+            </a:r>
+            <a:r>
+              <a:rPr lang="de-AT" dirty="0" err="1"/>
+              <a:t>that</a:t>
+            </a:r>
+            <a:r>
+              <a:rPr lang="de-AT" dirty="0"/>
+              <a:t> was </a:t>
+            </a:r>
+            <a:r>
+              <a:rPr lang="de-AT" dirty="0" err="1"/>
+              <a:t>allowed</a:t>
+            </a:r>
+            <a:r>
+              <a:rPr lang="de-AT" dirty="0"/>
+              <a:t> </a:t>
+            </a:r>
+            <a:r>
+              <a:rPr lang="de-AT" dirty="0" err="1"/>
+              <a:t>to</a:t>
+            </a:r>
+            <a:r>
+              <a:rPr lang="de-AT" dirty="0"/>
+              <a:t> </a:t>
+            </a:r>
+            <a:r>
+              <a:rPr lang="de-AT" dirty="0" err="1"/>
+              <a:t>use</a:t>
+            </a:r>
+            <a:r>
+              <a:rPr lang="de-AT" dirty="0"/>
+              <a:t> ChatGPT </a:t>
+            </a:r>
+            <a:r>
+              <a:rPr lang="de-AT" dirty="0" err="1"/>
+              <a:t>as</a:t>
+            </a:r>
+            <a:r>
+              <a:rPr lang="de-AT" dirty="0"/>
+              <a:t> a </a:t>
+            </a:r>
+            <a:r>
+              <a:rPr lang="de-AT" dirty="0" err="1"/>
+              <a:t>writing</a:t>
+            </a:r>
+            <a:r>
+              <a:rPr lang="de-AT" dirty="0"/>
+              <a:t> </a:t>
+            </a:r>
+            <a:r>
+              <a:rPr lang="de-AT" dirty="0" err="1"/>
+              <a:t>assistant</a:t>
+            </a:r>
+            <a:r>
+              <a:rPr lang="de-AT" dirty="0"/>
+              <a:t>. </a:t>
+            </a:r>
+          </a:p>
+          <a:p>
+            <a:endParaRPr lang="de-AT" dirty="0"/>
+          </a:p>
+          <a:p>
+            <a:r>
+              <a:rPr lang="de-AT" dirty="0"/>
+              <a:t>All </a:t>
+            </a:r>
+            <a:r>
+              <a:rPr lang="de-AT" dirty="0" err="1"/>
+              <a:t>students</a:t>
+            </a:r>
+            <a:r>
+              <a:rPr lang="de-AT" dirty="0"/>
+              <a:t> </a:t>
+            </a:r>
+            <a:r>
+              <a:rPr lang="de-AT" dirty="0" err="1"/>
+              <a:t>wrote</a:t>
+            </a:r>
+            <a:r>
+              <a:rPr lang="de-AT" dirty="0"/>
+              <a:t> an </a:t>
+            </a:r>
+            <a:r>
+              <a:rPr lang="de-AT" dirty="0" err="1"/>
+              <a:t>essay</a:t>
+            </a:r>
+            <a:r>
+              <a:rPr lang="de-AT" dirty="0"/>
+              <a:t> on </a:t>
+            </a:r>
+            <a:r>
+              <a:rPr lang="de-AT" dirty="0" err="1"/>
+              <a:t>the</a:t>
+            </a:r>
+            <a:r>
+              <a:rPr lang="de-AT" dirty="0"/>
+              <a:t> </a:t>
+            </a:r>
+            <a:r>
+              <a:rPr lang="de-AT" dirty="0" err="1"/>
+              <a:t>topic</a:t>
+            </a:r>
+            <a:r>
+              <a:rPr lang="de-AT" dirty="0"/>
+              <a:t>:</a:t>
+            </a:r>
+          </a:p>
+          <a:p>
+            <a:r>
+              <a:rPr lang="de-AT" b="1" dirty="0"/>
+              <a:t>“Advantages and </a:t>
+            </a:r>
+            <a:r>
+              <a:rPr lang="de-AT" b="1" dirty="0" err="1"/>
+              <a:t>disadvantages</a:t>
+            </a:r>
+            <a:r>
+              <a:rPr lang="de-AT" b="1" dirty="0"/>
+              <a:t> </a:t>
+            </a:r>
+            <a:r>
+              <a:rPr lang="de-AT" b="1" dirty="0" err="1"/>
+              <a:t>of</a:t>
+            </a:r>
+            <a:r>
+              <a:rPr lang="de-AT" b="1" dirty="0"/>
+              <a:t> </a:t>
+            </a:r>
+            <a:r>
+              <a:rPr lang="de-AT" b="1" dirty="0" err="1"/>
+              <a:t>biometric</a:t>
+            </a:r>
+            <a:r>
+              <a:rPr lang="de-AT" b="1" dirty="0"/>
+              <a:t> </a:t>
+            </a:r>
+            <a:r>
+              <a:rPr lang="de-AT" b="1" dirty="0" err="1"/>
+              <a:t>identification</a:t>
+            </a:r>
+            <a:r>
+              <a:rPr lang="de-AT" b="1" dirty="0"/>
+              <a:t> in </a:t>
+            </a:r>
+            <a:r>
+              <a:rPr lang="de-AT" b="1" dirty="0" err="1"/>
+              <a:t>forensic</a:t>
+            </a:r>
+            <a:r>
+              <a:rPr lang="de-AT" b="1" dirty="0"/>
+              <a:t> </a:t>
+            </a:r>
+            <a:r>
+              <a:rPr lang="de-AT" b="1" dirty="0" err="1"/>
+              <a:t>sciences</a:t>
+            </a:r>
+            <a:r>
+              <a:rPr lang="de-AT" b="1" dirty="0"/>
+              <a:t>.”</a:t>
+            </a:r>
+          </a:p>
+          <a:p>
+            <a:endParaRPr lang="de-AT" dirty="0"/>
+          </a:p>
+          <a:p>
+            <a:r>
+              <a:rPr lang="de-AT" dirty="0"/>
+              <a:t>The </a:t>
+            </a:r>
+            <a:r>
+              <a:rPr lang="de-AT" dirty="0" err="1"/>
+              <a:t>researchers</a:t>
+            </a:r>
+            <a:r>
+              <a:rPr lang="de-AT" dirty="0"/>
+              <a:t> </a:t>
+            </a:r>
+            <a:r>
+              <a:rPr lang="de-AT" dirty="0" err="1"/>
+              <a:t>then</a:t>
+            </a:r>
+            <a:r>
+              <a:rPr lang="de-AT" dirty="0"/>
+              <a:t> </a:t>
+            </a:r>
+            <a:r>
+              <a:rPr lang="de-AT" dirty="0" err="1"/>
+              <a:t>evaluated</a:t>
+            </a:r>
+            <a:r>
+              <a:rPr lang="de-AT" dirty="0"/>
+              <a:t>:</a:t>
+            </a:r>
+          </a:p>
+          <a:p>
+            <a:r>
+              <a:rPr lang="de-AT" dirty="0" err="1"/>
+              <a:t>essay</a:t>
+            </a:r>
+            <a:r>
+              <a:rPr lang="de-AT" dirty="0"/>
+              <a:t> </a:t>
+            </a:r>
+            <a:r>
+              <a:rPr lang="de-AT" dirty="0" err="1"/>
+              <a:t>quality</a:t>
+            </a:r>
+            <a:r>
+              <a:rPr lang="de-AT" dirty="0"/>
+              <a:t>, </a:t>
+            </a:r>
+          </a:p>
+          <a:p>
+            <a:r>
+              <a:rPr lang="de-AT" dirty="0" err="1"/>
+              <a:t>writing</a:t>
+            </a:r>
+            <a:r>
+              <a:rPr lang="de-AT" dirty="0"/>
+              <a:t> </a:t>
+            </a:r>
+            <a:r>
+              <a:rPr lang="de-AT" dirty="0" err="1"/>
+              <a:t>duration</a:t>
+            </a:r>
+            <a:r>
+              <a:rPr lang="de-AT" dirty="0"/>
+              <a:t>, </a:t>
+            </a:r>
+          </a:p>
+          <a:p>
+            <a:r>
+              <a:rPr lang="de-AT" dirty="0" err="1"/>
+              <a:t>text</a:t>
+            </a:r>
+            <a:r>
+              <a:rPr lang="de-AT" dirty="0"/>
+              <a:t> </a:t>
+            </a:r>
+            <a:r>
+              <a:rPr lang="de-AT" dirty="0" err="1"/>
+              <a:t>authenticity</a:t>
+            </a:r>
+            <a:r>
+              <a:rPr lang="de-AT" dirty="0"/>
+              <a:t>, </a:t>
+            </a:r>
+          </a:p>
+          <a:p>
+            <a:r>
+              <a:rPr lang="de-AT" dirty="0"/>
+              <a:t>and </a:t>
+            </a:r>
+            <a:r>
+              <a:rPr lang="de-AT" dirty="0" err="1"/>
+              <a:t>the</a:t>
+            </a:r>
+            <a:r>
+              <a:rPr lang="de-AT" dirty="0"/>
+              <a:t> </a:t>
+            </a:r>
+            <a:r>
+              <a:rPr lang="de-AT" dirty="0" err="1"/>
+              <a:t>likelihood</a:t>
+            </a:r>
+            <a:r>
+              <a:rPr lang="de-AT" dirty="0"/>
+              <a:t> </a:t>
+            </a:r>
+            <a:r>
+              <a:rPr lang="de-AT" dirty="0" err="1"/>
+              <a:t>that</a:t>
+            </a:r>
+            <a:r>
+              <a:rPr lang="de-AT" dirty="0"/>
+              <a:t> AI-</a:t>
+            </a:r>
+            <a:r>
+              <a:rPr lang="de-AT" dirty="0" err="1"/>
+              <a:t>generated</a:t>
+            </a:r>
+            <a:r>
+              <a:rPr lang="de-AT" dirty="0"/>
+              <a:t> </a:t>
+            </a:r>
+            <a:r>
+              <a:rPr lang="de-AT" dirty="0" err="1"/>
+              <a:t>content</a:t>
+            </a:r>
+            <a:r>
+              <a:rPr lang="de-AT" dirty="0"/>
+              <a:t> was </a:t>
+            </a:r>
+            <a:r>
+              <a:rPr lang="de-AT" dirty="0" err="1"/>
+              <a:t>present</a:t>
+            </a:r>
+            <a:r>
+              <a:rPr lang="de-AT" dirty="0"/>
+              <a:t>.</a:t>
+            </a:r>
+          </a:p>
+          <a:p>
+            <a:endParaRPr lang="de-AT" dirty="0"/>
+          </a:p>
+        </p:txBody>
+      </p:sp>
+      <p:sp>
+        <p:nvSpPr>
+          <p:cNvPr id="4" name="Foliennummernplatzhalter 3"/>
+          <p:cNvSpPr>
+            <a:spLocks noGrp="1"/>
+          </p:cNvSpPr>
+          <p:nvPr>
+            <p:ph type="sldNum" sz="quarter" idx="5"/>
+          </p:nvPr>
+        </p:nvSpPr>
+        <p:spPr/>
+        <p:txBody>
+          <a:bodyPr/>
+          <a:lstStyle/>
+          <a:p>
+            <a:fld id="{92333A25-CDC0-4883-9EA4-6C77BD01CB0D}" type="slidenum">
+              <a:rPr lang="de-AT" smtClean="0"/>
+              <a:t>2</a:t>
+            </a:fld>
+            <a:endParaRPr lang="de-AT"/>
+          </a:p>
+        </p:txBody>
+      </p:sp>
+    </p:spTree>
+    <p:extLst>
+      <p:ext uri="{BB962C8B-B14F-4D97-AF65-F5344CB8AC3E}">
+        <p14:creationId xmlns:p14="http://schemas.microsoft.com/office/powerpoint/2010/main" val="3155868558"/>
+      </p:ext>
+    </p:extLst>
+  </p:cSld>
+  <p:clrMapOvr>
+    <a:masterClrMapping/>
+  </p:clrMapOvr>
+</p:notes>
+</file>
+
+<file path=ppt/notesSlides/notesSlide3.xml><?xml version="1.0" encoding="utf-8"?>
+<p:notes xmlns:a="http://schemas.openxmlformats.org/drawingml/2006/main" xmlns:r="http://schemas.openxmlformats.org/officeDocument/2006/relationships" xmlns:p="http://schemas.openxmlformats.org/presentationml/2006/main">
+  <p:cSld>
+    <p:spTree>
+      <p:nvGrpSpPr>
+        <p:cNvPr id="1" name=""/>
+        <p:cNvGrpSpPr/>
+        <p:nvPr/>
+      </p:nvGrpSpPr>
+      <p:grpSpPr>
+        <a:xfrm>
+          <a:off x="0" y="0"/>
+          <a:ext cx="0" cy="0"/>
+          <a:chOff x="0" y="0"/>
+          <a:chExt cx="0" cy="0"/>
+        </a:xfrm>
+      </p:grpSpPr>
+      <p:sp>
+        <p:nvSpPr>
+          <p:cNvPr id="2" name="Folienbildplatzhalter 1"/>
+          <p:cNvSpPr>
+            <a:spLocks noGrp="1" noRot="1" noChangeAspect="1"/>
+          </p:cNvSpPr>
+          <p:nvPr>
+            <p:ph type="sldImg"/>
+          </p:nvPr>
+        </p:nvSpPr>
+        <p:spPr/>
+      </p:sp>
+      <p:sp>
+        <p:nvSpPr>
+          <p:cNvPr id="3" name="Notizenplatzhalter 2"/>
+          <p:cNvSpPr>
+            <a:spLocks noGrp="1"/>
+          </p:cNvSpPr>
+          <p:nvPr>
+            <p:ph type="body" idx="1"/>
+          </p:nvPr>
+        </p:nvSpPr>
+        <p:spPr/>
+        <p:txBody>
+          <a:bodyPr/>
+          <a:lstStyle/>
+          <a:p>
+            <a:r>
+              <a:rPr lang="de-AT" dirty="0"/>
+              <a:t>The </a:t>
+            </a:r>
+            <a:r>
+              <a:rPr lang="de-AT" dirty="0" err="1"/>
+              <a:t>results</a:t>
+            </a:r>
+            <a:r>
+              <a:rPr lang="de-AT" dirty="0"/>
+              <a:t> </a:t>
+            </a:r>
+            <a:r>
+              <a:rPr lang="de-AT" dirty="0" err="1"/>
+              <a:t>were</a:t>
+            </a:r>
+            <a:r>
+              <a:rPr lang="de-AT" dirty="0"/>
+              <a:t> </a:t>
+            </a:r>
+            <a:r>
+              <a:rPr lang="de-AT" dirty="0" err="1"/>
+              <a:t>quite</a:t>
+            </a:r>
+            <a:r>
+              <a:rPr lang="de-AT" dirty="0"/>
+              <a:t> </a:t>
+            </a:r>
+            <a:r>
+              <a:rPr lang="de-AT" dirty="0" err="1"/>
+              <a:t>surprising</a:t>
+            </a:r>
+            <a:r>
+              <a:rPr lang="de-AT" dirty="0"/>
+              <a:t>.</a:t>
+            </a:r>
+          </a:p>
+          <a:p>
+            <a:endParaRPr lang="de-AT" dirty="0"/>
+          </a:p>
+          <a:p>
+            <a:r>
+              <a:rPr lang="de-AT" dirty="0"/>
+              <a:t>The </a:t>
+            </a:r>
+            <a:r>
+              <a:rPr lang="de-AT" dirty="0" err="1"/>
+              <a:t>researchers</a:t>
+            </a:r>
+            <a:r>
+              <a:rPr lang="de-AT" dirty="0"/>
+              <a:t> </a:t>
+            </a:r>
+            <a:r>
+              <a:rPr lang="de-AT" dirty="0" err="1"/>
+              <a:t>found</a:t>
+            </a:r>
+            <a:r>
+              <a:rPr lang="de-AT" dirty="0"/>
+              <a:t> </a:t>
+            </a:r>
+            <a:r>
+              <a:rPr lang="de-AT" dirty="0" err="1"/>
+              <a:t>that</a:t>
+            </a:r>
+            <a:r>
+              <a:rPr lang="de-AT" dirty="0"/>
+              <a:t> </a:t>
+            </a:r>
+            <a:r>
+              <a:rPr lang="de-AT" dirty="0" err="1"/>
+              <a:t>the</a:t>
+            </a:r>
+            <a:r>
+              <a:rPr lang="de-AT" dirty="0"/>
+              <a:t> </a:t>
+            </a:r>
+            <a:r>
+              <a:rPr lang="de-AT" b="1" dirty="0"/>
+              <a:t>ChatGPT </a:t>
+            </a:r>
+            <a:r>
+              <a:rPr lang="de-AT" b="1" dirty="0" err="1"/>
+              <a:t>group</a:t>
+            </a:r>
+            <a:r>
+              <a:rPr lang="de-AT" b="1" dirty="0"/>
+              <a:t> </a:t>
+            </a:r>
+            <a:r>
+              <a:rPr lang="de-AT" b="1" dirty="0" err="1"/>
+              <a:t>did</a:t>
+            </a:r>
+            <a:r>
+              <a:rPr lang="de-AT" b="1" dirty="0"/>
+              <a:t> not perform </a:t>
+            </a:r>
+            <a:r>
+              <a:rPr lang="de-AT" b="1" dirty="0" err="1"/>
+              <a:t>better</a:t>
+            </a:r>
+            <a:r>
+              <a:rPr lang="de-AT" b="1" dirty="0"/>
+              <a:t> </a:t>
+            </a:r>
+            <a:r>
+              <a:rPr lang="de-AT" b="1" dirty="0" err="1"/>
+              <a:t>than</a:t>
+            </a:r>
+            <a:r>
+              <a:rPr lang="de-AT" b="1" dirty="0"/>
+              <a:t> </a:t>
+            </a:r>
+            <a:r>
+              <a:rPr lang="de-AT" b="1" dirty="0" err="1"/>
+              <a:t>the</a:t>
+            </a:r>
+            <a:r>
+              <a:rPr lang="de-AT" b="1" dirty="0"/>
+              <a:t> </a:t>
+            </a:r>
+            <a:r>
+              <a:rPr lang="de-AT" b="1" dirty="0" err="1"/>
+              <a:t>control</a:t>
+            </a:r>
+            <a:r>
+              <a:rPr lang="de-AT" b="1" dirty="0"/>
+              <a:t> </a:t>
+            </a:r>
+            <a:r>
+              <a:rPr lang="de-AT" b="1" dirty="0" err="1"/>
+              <a:t>group</a:t>
+            </a:r>
+            <a:r>
+              <a:rPr lang="de-AT" b="1" dirty="0"/>
+              <a:t>.</a:t>
+            </a:r>
+            <a:endParaRPr lang="de-AT" dirty="0"/>
+          </a:p>
+          <a:p>
+            <a:r>
+              <a:rPr lang="de-AT" dirty="0"/>
+              <a:t>Both </a:t>
+            </a:r>
+            <a:r>
+              <a:rPr lang="de-AT" dirty="0" err="1"/>
+              <a:t>groups</a:t>
+            </a:r>
+            <a:r>
+              <a:rPr lang="de-AT" dirty="0"/>
+              <a:t> </a:t>
+            </a:r>
+            <a:r>
+              <a:rPr lang="de-AT" dirty="0" err="1"/>
+              <a:t>achieved</a:t>
+            </a:r>
+            <a:r>
+              <a:rPr lang="de-AT" dirty="0"/>
+              <a:t> an </a:t>
+            </a:r>
+            <a:r>
+              <a:rPr lang="de-AT" dirty="0" err="1"/>
+              <a:t>average</a:t>
+            </a:r>
+            <a:r>
+              <a:rPr lang="de-AT" dirty="0"/>
+              <a:t> grade </a:t>
+            </a:r>
+            <a:r>
+              <a:rPr lang="de-AT" dirty="0" err="1"/>
+              <a:t>of</a:t>
+            </a:r>
+            <a:r>
+              <a:rPr lang="de-AT" dirty="0"/>
+              <a:t> </a:t>
+            </a:r>
+            <a:r>
+              <a:rPr lang="de-AT" b="1" dirty="0"/>
+              <a:t>C</a:t>
+            </a:r>
+            <a:r>
+              <a:rPr lang="de-AT" dirty="0"/>
+              <a:t>.</a:t>
+            </a:r>
+          </a:p>
+          <a:p>
+            <a:endParaRPr lang="de-AT" dirty="0"/>
+          </a:p>
+          <a:p>
+            <a:r>
+              <a:rPr lang="de-AT" dirty="0"/>
+              <a:t>In </a:t>
+            </a:r>
+            <a:r>
+              <a:rPr lang="de-AT" dirty="0" err="1"/>
+              <a:t>addition</a:t>
+            </a:r>
+            <a:r>
+              <a:rPr lang="de-AT" dirty="0"/>
+              <a:t>:</a:t>
+            </a:r>
+          </a:p>
+          <a:p>
+            <a:r>
+              <a:rPr lang="de-AT" dirty="0" err="1"/>
+              <a:t>students</a:t>
+            </a:r>
+            <a:r>
+              <a:rPr lang="de-AT" dirty="0"/>
+              <a:t> </a:t>
+            </a:r>
+            <a:r>
+              <a:rPr lang="de-AT" dirty="0" err="1"/>
+              <a:t>using</a:t>
+            </a:r>
+            <a:r>
+              <a:rPr lang="de-AT" dirty="0"/>
+              <a:t> ChatGPT </a:t>
+            </a:r>
+            <a:r>
+              <a:rPr lang="de-AT" dirty="0" err="1"/>
+              <a:t>did</a:t>
+            </a:r>
+            <a:r>
+              <a:rPr lang="de-AT" dirty="0"/>
+              <a:t> not finish </a:t>
+            </a:r>
+            <a:r>
+              <a:rPr lang="de-AT" dirty="0" err="1"/>
+              <a:t>their</a:t>
+            </a:r>
+            <a:r>
+              <a:rPr lang="de-AT" dirty="0"/>
+              <a:t> </a:t>
+            </a:r>
+            <a:r>
+              <a:rPr lang="de-AT" dirty="0" err="1"/>
+              <a:t>essays</a:t>
+            </a:r>
+            <a:r>
+              <a:rPr lang="de-AT" dirty="0"/>
+              <a:t> </a:t>
+            </a:r>
+            <a:r>
+              <a:rPr lang="de-AT" dirty="0" err="1"/>
+              <a:t>faster</a:t>
+            </a:r>
+            <a:r>
+              <a:rPr lang="de-AT" dirty="0"/>
+              <a:t>, </a:t>
+            </a:r>
+          </a:p>
+          <a:p>
+            <a:r>
+              <a:rPr lang="de-AT" dirty="0" err="1"/>
+              <a:t>they</a:t>
+            </a:r>
+            <a:r>
+              <a:rPr lang="de-AT" dirty="0"/>
+              <a:t> </a:t>
+            </a:r>
+            <a:r>
+              <a:rPr lang="de-AT" dirty="0" err="1"/>
+              <a:t>did</a:t>
+            </a:r>
+            <a:r>
+              <a:rPr lang="de-AT" dirty="0"/>
+              <a:t> not </a:t>
+            </a:r>
+            <a:r>
+              <a:rPr lang="de-AT" dirty="0" err="1"/>
+              <a:t>produce</a:t>
+            </a:r>
+            <a:r>
+              <a:rPr lang="de-AT" dirty="0"/>
+              <a:t> </a:t>
+            </a:r>
+            <a:r>
+              <a:rPr lang="de-AT" dirty="0" err="1"/>
+              <a:t>higher</a:t>
+            </a:r>
+            <a:r>
+              <a:rPr lang="de-AT" dirty="0"/>
+              <a:t>-quality </a:t>
+            </a:r>
+            <a:r>
+              <a:rPr lang="de-AT" dirty="0" err="1"/>
+              <a:t>essays</a:t>
+            </a:r>
+            <a:r>
+              <a:rPr lang="de-AT" dirty="0"/>
+              <a:t>, </a:t>
+            </a:r>
+          </a:p>
+          <a:p>
+            <a:r>
+              <a:rPr lang="de-AT" dirty="0"/>
+              <a:t>and </a:t>
+            </a:r>
+            <a:r>
+              <a:rPr lang="de-AT" dirty="0" err="1"/>
+              <a:t>their</a:t>
+            </a:r>
+            <a:r>
+              <a:rPr lang="de-AT" dirty="0"/>
+              <a:t> </a:t>
+            </a:r>
+            <a:r>
+              <a:rPr lang="de-AT" dirty="0" err="1"/>
+              <a:t>texts</a:t>
+            </a:r>
+            <a:r>
+              <a:rPr lang="de-AT" dirty="0"/>
+              <a:t> </a:t>
+            </a:r>
+            <a:r>
+              <a:rPr lang="de-AT" dirty="0" err="1"/>
+              <a:t>were</a:t>
+            </a:r>
+            <a:r>
+              <a:rPr lang="de-AT" dirty="0"/>
+              <a:t> </a:t>
+            </a:r>
+            <a:r>
+              <a:rPr lang="de-AT" dirty="0" err="1"/>
+              <a:t>slightly</a:t>
+            </a:r>
+            <a:r>
+              <a:rPr lang="de-AT" dirty="0"/>
+              <a:t> </a:t>
+            </a:r>
+            <a:r>
+              <a:rPr lang="de-AT" dirty="0" err="1"/>
+              <a:t>less</a:t>
+            </a:r>
+            <a:r>
+              <a:rPr lang="de-AT" dirty="0"/>
+              <a:t> </a:t>
+            </a:r>
+            <a:r>
+              <a:rPr lang="de-AT" dirty="0" err="1"/>
+              <a:t>authentic</a:t>
+            </a:r>
+            <a:r>
+              <a:rPr lang="de-AT" dirty="0"/>
+              <a:t>. </a:t>
+            </a:r>
+          </a:p>
+          <a:p>
+            <a:endParaRPr lang="de-AT" dirty="0"/>
+          </a:p>
+          <a:p>
+            <a:r>
+              <a:rPr lang="de-AT" dirty="0"/>
+              <a:t>The </a:t>
+            </a:r>
+            <a:r>
+              <a:rPr lang="de-AT" dirty="0" err="1"/>
+              <a:t>statistical</a:t>
+            </a:r>
+            <a:r>
+              <a:rPr lang="de-AT" dirty="0"/>
+              <a:t> </a:t>
+            </a:r>
+            <a:r>
+              <a:rPr lang="de-AT" dirty="0" err="1"/>
+              <a:t>analysis</a:t>
+            </a:r>
+            <a:r>
+              <a:rPr lang="de-AT" dirty="0"/>
+              <a:t> </a:t>
+            </a:r>
+            <a:r>
+              <a:rPr lang="de-AT" dirty="0" err="1"/>
+              <a:t>showed</a:t>
+            </a:r>
+            <a:r>
+              <a:rPr lang="de-AT" dirty="0"/>
+              <a:t> </a:t>
+            </a:r>
+            <a:r>
+              <a:rPr lang="de-AT" dirty="0" err="1"/>
+              <a:t>that</a:t>
+            </a:r>
+            <a:r>
+              <a:rPr lang="de-AT" dirty="0"/>
+              <a:t> </a:t>
+            </a:r>
+            <a:r>
+              <a:rPr lang="de-AT" dirty="0" err="1"/>
+              <a:t>none</a:t>
+            </a:r>
+            <a:r>
+              <a:rPr lang="de-AT" dirty="0"/>
+              <a:t> </a:t>
+            </a:r>
+            <a:r>
+              <a:rPr lang="de-AT" dirty="0" err="1"/>
+              <a:t>of</a:t>
+            </a:r>
+            <a:r>
+              <a:rPr lang="de-AT" dirty="0"/>
+              <a:t> </a:t>
+            </a:r>
+            <a:r>
+              <a:rPr lang="de-AT" dirty="0" err="1"/>
+              <a:t>the</a:t>
+            </a:r>
+            <a:r>
+              <a:rPr lang="de-AT" dirty="0"/>
+              <a:t> </a:t>
+            </a:r>
+            <a:r>
+              <a:rPr lang="de-AT" dirty="0" err="1"/>
+              <a:t>examined</a:t>
+            </a:r>
+            <a:r>
+              <a:rPr lang="de-AT" dirty="0"/>
+              <a:t> variables </a:t>
+            </a:r>
+            <a:r>
+              <a:rPr lang="de-AT" dirty="0" err="1"/>
+              <a:t>significantly</a:t>
+            </a:r>
+            <a:r>
+              <a:rPr lang="de-AT" dirty="0"/>
+              <a:t> </a:t>
+            </a:r>
+            <a:r>
+              <a:rPr lang="de-AT" dirty="0" err="1"/>
+              <a:t>improved</a:t>
+            </a:r>
+            <a:r>
+              <a:rPr lang="de-AT" dirty="0"/>
+              <a:t> </a:t>
+            </a:r>
+            <a:r>
+              <a:rPr lang="de-AT" dirty="0" err="1"/>
+              <a:t>essay</a:t>
+            </a:r>
+            <a:r>
+              <a:rPr lang="de-AT" dirty="0"/>
+              <a:t> </a:t>
+            </a:r>
+            <a:r>
+              <a:rPr lang="de-AT" dirty="0" err="1"/>
+              <a:t>performance</a:t>
+            </a:r>
+            <a:r>
+              <a:rPr lang="de-AT" dirty="0"/>
+              <a:t>. </a:t>
+            </a:r>
+          </a:p>
+        </p:txBody>
+      </p:sp>
+      <p:sp>
+        <p:nvSpPr>
+          <p:cNvPr id="4" name="Foliennummernplatzhalter 3"/>
+          <p:cNvSpPr>
+            <a:spLocks noGrp="1"/>
+          </p:cNvSpPr>
+          <p:nvPr>
+            <p:ph type="sldNum" sz="quarter" idx="5"/>
+          </p:nvPr>
+        </p:nvSpPr>
+        <p:spPr/>
+        <p:txBody>
+          <a:bodyPr/>
+          <a:lstStyle/>
+          <a:p>
+            <a:fld id="{92333A25-CDC0-4883-9EA4-6C77BD01CB0D}" type="slidenum">
+              <a:rPr lang="de-AT" smtClean="0"/>
+              <a:t>3</a:t>
+            </a:fld>
+            <a:endParaRPr lang="de-AT"/>
+          </a:p>
+        </p:txBody>
+      </p:sp>
+    </p:spTree>
+    <p:extLst>
+      <p:ext uri="{BB962C8B-B14F-4D97-AF65-F5344CB8AC3E}">
+        <p14:creationId xmlns:p14="http://schemas.microsoft.com/office/powerpoint/2010/main" val="3016747050"/>
+      </p:ext>
+    </p:extLst>
+  </p:cSld>
+  <p:clrMapOvr>
+    <a:masterClrMapping/>
+  </p:clrMapOvr>
+</p:notes>
+</file>
+
+<file path=ppt/notesSlides/notesSlide4.xml><?xml version="1.0" encoding="utf-8"?>
+<p:notes xmlns:a="http://schemas.openxmlformats.org/drawingml/2006/main" xmlns:r="http://schemas.openxmlformats.org/officeDocument/2006/relationships" xmlns:p="http://schemas.openxmlformats.org/presentationml/2006/main">
+  <p:cSld>
+    <p:spTree>
+      <p:nvGrpSpPr>
+        <p:cNvPr id="1" name=""/>
+        <p:cNvGrpSpPr/>
+        <p:nvPr/>
+      </p:nvGrpSpPr>
+      <p:grpSpPr>
+        <a:xfrm>
+          <a:off x="0" y="0"/>
+          <a:ext cx="0" cy="0"/>
+          <a:chOff x="0" y="0"/>
+          <a:chExt cx="0" cy="0"/>
+        </a:xfrm>
+      </p:grpSpPr>
+      <p:sp>
+        <p:nvSpPr>
+          <p:cNvPr id="2" name="Folienbildplatzhalter 1"/>
+          <p:cNvSpPr>
+            <a:spLocks noGrp="1" noRot="1" noChangeAspect="1"/>
+          </p:cNvSpPr>
+          <p:nvPr>
+            <p:ph type="sldImg"/>
+          </p:nvPr>
+        </p:nvSpPr>
+        <p:spPr/>
+      </p:sp>
+      <p:sp>
+        <p:nvSpPr>
+          <p:cNvPr id="3" name="Notizenplatzhalter 2"/>
+          <p:cNvSpPr>
+            <a:spLocks noGrp="1"/>
+          </p:cNvSpPr>
+          <p:nvPr>
+            <p:ph type="body" idx="1"/>
+          </p:nvPr>
+        </p:nvSpPr>
+        <p:spPr/>
+        <p:txBody>
+          <a:bodyPr/>
+          <a:lstStyle/>
+          <a:p>
+            <a:r>
+              <a:rPr lang="de-AT" dirty="0"/>
+              <a:t>The </a:t>
+            </a:r>
+            <a:r>
+              <a:rPr lang="de-AT" dirty="0" err="1"/>
+              <a:t>authors</a:t>
+            </a:r>
+            <a:r>
+              <a:rPr lang="de-AT" dirty="0"/>
+              <a:t> </a:t>
+            </a:r>
+            <a:r>
+              <a:rPr lang="de-AT" dirty="0" err="1"/>
+              <a:t>therefore</a:t>
+            </a:r>
+            <a:r>
+              <a:rPr lang="de-AT" dirty="0"/>
+              <a:t> </a:t>
+            </a:r>
+            <a:r>
+              <a:rPr lang="de-AT" dirty="0" err="1"/>
+              <a:t>concluded</a:t>
+            </a:r>
+            <a:r>
+              <a:rPr lang="de-AT" dirty="0"/>
+              <a:t> </a:t>
+            </a:r>
+            <a:r>
+              <a:rPr lang="de-AT" dirty="0" err="1"/>
+              <a:t>that</a:t>
+            </a:r>
+            <a:r>
+              <a:rPr lang="de-AT" dirty="0"/>
+              <a:t> ChatGPT </a:t>
+            </a:r>
+            <a:r>
+              <a:rPr lang="de-AT" dirty="0" err="1"/>
+              <a:t>should</a:t>
+            </a:r>
+            <a:r>
+              <a:rPr lang="de-AT" dirty="0"/>
+              <a:t> not </a:t>
+            </a:r>
+            <a:r>
+              <a:rPr lang="de-AT" dirty="0" err="1"/>
+              <a:t>automatically</a:t>
+            </a:r>
+            <a:r>
+              <a:rPr lang="de-AT" dirty="0"/>
+              <a:t> </a:t>
+            </a:r>
+            <a:r>
+              <a:rPr lang="de-AT" dirty="0" err="1"/>
+              <a:t>be</a:t>
+            </a:r>
+            <a:r>
+              <a:rPr lang="de-AT" dirty="0"/>
+              <a:t> </a:t>
+            </a:r>
+            <a:r>
+              <a:rPr lang="de-AT" dirty="0" err="1"/>
+              <a:t>viewed</a:t>
+            </a:r>
+            <a:r>
+              <a:rPr lang="de-AT" dirty="0"/>
+              <a:t> </a:t>
+            </a:r>
+            <a:r>
+              <a:rPr lang="de-AT" dirty="0" err="1"/>
+              <a:t>as</a:t>
+            </a:r>
+            <a:r>
+              <a:rPr lang="de-AT" dirty="0"/>
+              <a:t> an “</a:t>
+            </a:r>
+            <a:r>
+              <a:rPr lang="de-AT" dirty="0" err="1"/>
+              <a:t>essay</a:t>
+            </a:r>
+            <a:r>
+              <a:rPr lang="de-AT" dirty="0"/>
+              <a:t> </a:t>
+            </a:r>
+            <a:r>
+              <a:rPr lang="de-AT" dirty="0" err="1"/>
+              <a:t>enhancement</a:t>
+            </a:r>
+            <a:r>
+              <a:rPr lang="de-AT" dirty="0"/>
+              <a:t> </a:t>
+            </a:r>
+            <a:r>
+              <a:rPr lang="de-AT" dirty="0" err="1"/>
+              <a:t>tool</a:t>
+            </a:r>
+            <a:r>
+              <a:rPr lang="de-AT" dirty="0"/>
+              <a:t>.”</a:t>
+            </a:r>
+          </a:p>
+          <a:p>
+            <a:endParaRPr lang="de-AT" dirty="0"/>
+          </a:p>
+          <a:p>
+            <a:r>
+              <a:rPr lang="de-AT" dirty="0" err="1"/>
+              <a:t>Instead</a:t>
+            </a:r>
+            <a:r>
+              <a:rPr lang="de-AT" dirty="0"/>
+              <a:t>, </a:t>
+            </a:r>
+            <a:r>
+              <a:rPr lang="de-AT" dirty="0" err="1"/>
+              <a:t>its</a:t>
+            </a:r>
+            <a:r>
+              <a:rPr lang="de-AT" dirty="0"/>
+              <a:t> </a:t>
+            </a:r>
+            <a:r>
+              <a:rPr lang="de-AT" dirty="0" err="1"/>
+              <a:t>effectiveness</a:t>
+            </a:r>
+            <a:r>
+              <a:rPr lang="de-AT" dirty="0"/>
+              <a:t> </a:t>
+            </a:r>
+            <a:r>
+              <a:rPr lang="de-AT" dirty="0" err="1"/>
+              <a:t>appears</a:t>
+            </a:r>
+            <a:r>
+              <a:rPr lang="de-AT" dirty="0"/>
+              <a:t> </a:t>
+            </a:r>
+            <a:r>
+              <a:rPr lang="de-AT" dirty="0" err="1"/>
+              <a:t>to</a:t>
+            </a:r>
+            <a:r>
+              <a:rPr lang="de-AT" dirty="0"/>
+              <a:t> </a:t>
+            </a:r>
+            <a:r>
+              <a:rPr lang="de-AT" dirty="0" err="1"/>
+              <a:t>depend</a:t>
+            </a:r>
+            <a:r>
+              <a:rPr lang="de-AT" dirty="0"/>
+              <a:t> on </a:t>
+            </a:r>
+            <a:r>
+              <a:rPr lang="de-AT" dirty="0" err="1"/>
+              <a:t>several</a:t>
+            </a:r>
+            <a:r>
+              <a:rPr lang="de-AT" dirty="0"/>
+              <a:t> </a:t>
+            </a:r>
+            <a:r>
+              <a:rPr lang="de-AT" dirty="0" err="1"/>
+              <a:t>factors</a:t>
+            </a:r>
+            <a:r>
+              <a:rPr lang="de-AT" dirty="0"/>
+              <a:t>:</a:t>
+            </a:r>
+          </a:p>
+          <a:p>
+            <a:endParaRPr lang="de-AT" dirty="0"/>
+          </a:p>
+          <a:p>
+            <a:r>
+              <a:rPr lang="de-AT" dirty="0" err="1"/>
+              <a:t>prior</a:t>
+            </a:r>
+            <a:r>
+              <a:rPr lang="de-AT" dirty="0"/>
+              <a:t> </a:t>
+            </a:r>
+            <a:r>
+              <a:rPr lang="de-AT" dirty="0" err="1"/>
+              <a:t>knowledge</a:t>
+            </a:r>
+            <a:r>
+              <a:rPr lang="de-AT" dirty="0"/>
+              <a:t>, </a:t>
+            </a:r>
+          </a:p>
+          <a:p>
+            <a:r>
+              <a:rPr lang="de-AT" dirty="0" err="1"/>
+              <a:t>critical</a:t>
+            </a:r>
+            <a:r>
+              <a:rPr lang="de-AT" dirty="0"/>
+              <a:t> </a:t>
+            </a:r>
+            <a:r>
+              <a:rPr lang="de-AT" dirty="0" err="1"/>
+              <a:t>thinking</a:t>
+            </a:r>
+            <a:r>
+              <a:rPr lang="de-AT" dirty="0"/>
+              <a:t> </a:t>
+            </a:r>
+            <a:r>
+              <a:rPr lang="de-AT" dirty="0" err="1"/>
+              <a:t>skills</a:t>
+            </a:r>
+            <a:r>
+              <a:rPr lang="de-AT" dirty="0"/>
+              <a:t>, </a:t>
+            </a:r>
+          </a:p>
+          <a:p>
+            <a:r>
+              <a:rPr lang="de-AT" dirty="0" err="1"/>
+              <a:t>prompting</a:t>
+            </a:r>
+            <a:r>
+              <a:rPr lang="de-AT" dirty="0"/>
+              <a:t> </a:t>
+            </a:r>
+            <a:r>
+              <a:rPr lang="de-AT" dirty="0" err="1"/>
+              <a:t>ability</a:t>
+            </a:r>
+            <a:r>
+              <a:rPr lang="de-AT" dirty="0"/>
+              <a:t>, </a:t>
+            </a:r>
+          </a:p>
+          <a:p>
+            <a:r>
+              <a:rPr lang="de-AT" dirty="0"/>
+              <a:t>and </a:t>
+            </a:r>
+            <a:r>
+              <a:rPr lang="de-AT" dirty="0" err="1"/>
+              <a:t>overall</a:t>
+            </a:r>
+            <a:r>
+              <a:rPr lang="de-AT" dirty="0"/>
+              <a:t> </a:t>
+            </a:r>
+            <a:r>
+              <a:rPr lang="de-AT" dirty="0" err="1"/>
+              <a:t>writing</a:t>
+            </a:r>
+            <a:r>
+              <a:rPr lang="de-AT" dirty="0"/>
+              <a:t> </a:t>
+            </a:r>
+            <a:r>
+              <a:rPr lang="de-AT" dirty="0" err="1"/>
+              <a:t>competence</a:t>
+            </a:r>
+            <a:r>
+              <a:rPr lang="de-AT" dirty="0"/>
+              <a:t>. </a:t>
+            </a:r>
+          </a:p>
+          <a:p>
+            <a:endParaRPr lang="de-AT" dirty="0"/>
+          </a:p>
+        </p:txBody>
+      </p:sp>
+      <p:sp>
+        <p:nvSpPr>
+          <p:cNvPr id="4" name="Foliennummernplatzhalter 3"/>
+          <p:cNvSpPr>
+            <a:spLocks noGrp="1"/>
+          </p:cNvSpPr>
+          <p:nvPr>
+            <p:ph type="sldNum" sz="quarter" idx="5"/>
+          </p:nvPr>
+        </p:nvSpPr>
+        <p:spPr/>
+        <p:txBody>
+          <a:bodyPr/>
+          <a:lstStyle/>
+          <a:p>
+            <a:fld id="{92333A25-CDC0-4883-9EA4-6C77BD01CB0D}" type="slidenum">
+              <a:rPr lang="de-AT" smtClean="0"/>
+              <a:t>4</a:t>
+            </a:fld>
+            <a:endParaRPr lang="de-AT"/>
+          </a:p>
+        </p:txBody>
+      </p:sp>
+    </p:spTree>
+    <p:extLst>
+      <p:ext uri="{BB962C8B-B14F-4D97-AF65-F5344CB8AC3E}">
+        <p14:creationId xmlns:p14="http://schemas.microsoft.com/office/powerpoint/2010/main" val="2695388532"/>
+      </p:ext>
+    </p:extLst>
+  </p:cSld>
+  <p:clrMapOvr>
+    <a:masterClrMapping/>
+  </p:clrMapOvr>
+</p:notes>
+</file>
+
+<file path=ppt/notesSlides/notesSlide5.xml><?xml version="1.0" encoding="utf-8"?>
+<p:notes xmlns:a="http://schemas.openxmlformats.org/drawingml/2006/main" xmlns:r="http://schemas.openxmlformats.org/officeDocument/2006/relationships" xmlns:p="http://schemas.openxmlformats.org/presentationml/2006/main">
+  <p:cSld>
+    <p:spTree>
+      <p:nvGrpSpPr>
+        <p:cNvPr id="1" name=""/>
+        <p:cNvGrpSpPr/>
+        <p:nvPr/>
+      </p:nvGrpSpPr>
+      <p:grpSpPr>
+        <a:xfrm>
+          <a:off x="0" y="0"/>
+          <a:ext cx="0" cy="0"/>
+          <a:chOff x="0" y="0"/>
+          <a:chExt cx="0" cy="0"/>
+        </a:xfrm>
+      </p:grpSpPr>
+      <p:sp>
+        <p:nvSpPr>
+          <p:cNvPr id="2" name="Folienbildplatzhalter 1"/>
+          <p:cNvSpPr>
+            <a:spLocks noGrp="1" noRot="1" noChangeAspect="1"/>
+          </p:cNvSpPr>
+          <p:nvPr>
+            <p:ph type="sldImg"/>
+          </p:nvPr>
+        </p:nvSpPr>
+        <p:spPr/>
+      </p:sp>
+      <p:sp>
+        <p:nvSpPr>
+          <p:cNvPr id="3" name="Notizenplatzhalter 2"/>
+          <p:cNvSpPr>
+            <a:spLocks noGrp="1"/>
+          </p:cNvSpPr>
+          <p:nvPr>
+            <p:ph type="body" idx="1"/>
+          </p:nvPr>
+        </p:nvSpPr>
+        <p:spPr/>
+        <p:txBody>
+          <a:bodyPr/>
+          <a:lstStyle/>
+          <a:p>
+            <a:r>
+              <a:rPr lang="de-AT" dirty="0"/>
+              <a:t>Like </a:t>
+            </a:r>
+            <a:r>
+              <a:rPr lang="de-AT" dirty="0" err="1"/>
+              <a:t>every</a:t>
+            </a:r>
+            <a:r>
+              <a:rPr lang="de-AT" dirty="0"/>
+              <a:t> </a:t>
+            </a:r>
+            <a:r>
+              <a:rPr lang="de-AT" dirty="0" err="1"/>
+              <a:t>study</a:t>
+            </a:r>
+            <a:r>
+              <a:rPr lang="de-AT" dirty="0"/>
+              <a:t>, </a:t>
+            </a:r>
+            <a:r>
+              <a:rPr lang="de-AT" dirty="0" err="1"/>
+              <a:t>this</a:t>
+            </a:r>
+            <a:r>
+              <a:rPr lang="de-AT" dirty="0"/>
+              <a:t> </a:t>
+            </a:r>
+            <a:r>
+              <a:rPr lang="de-AT" dirty="0" err="1"/>
+              <a:t>one</a:t>
+            </a:r>
+            <a:r>
+              <a:rPr lang="de-AT" dirty="0"/>
+              <a:t> </a:t>
+            </a:r>
+            <a:r>
+              <a:rPr lang="de-AT" dirty="0" err="1"/>
+              <a:t>has</a:t>
+            </a:r>
+            <a:r>
+              <a:rPr lang="de-AT" dirty="0"/>
+              <a:t> </a:t>
+            </a:r>
+            <a:r>
+              <a:rPr lang="de-AT" dirty="0" err="1"/>
+              <a:t>strengths</a:t>
+            </a:r>
+            <a:r>
+              <a:rPr lang="de-AT" dirty="0"/>
+              <a:t> and </a:t>
+            </a:r>
+            <a:r>
+              <a:rPr lang="de-AT" dirty="0" err="1"/>
+              <a:t>limitations</a:t>
+            </a:r>
+            <a:r>
+              <a:rPr lang="de-AT" dirty="0"/>
+              <a:t>.</a:t>
+            </a:r>
+          </a:p>
+          <a:p>
+            <a:endParaRPr lang="de-AT" dirty="0"/>
+          </a:p>
+          <a:p>
+            <a:r>
+              <a:rPr lang="de-AT" dirty="0"/>
+              <a:t>First, </a:t>
+            </a:r>
+            <a:r>
+              <a:rPr lang="de-AT" dirty="0" err="1"/>
+              <a:t>the</a:t>
+            </a:r>
+            <a:r>
+              <a:rPr lang="de-AT" dirty="0"/>
+              <a:t> </a:t>
+            </a:r>
+            <a:r>
+              <a:rPr lang="de-AT" dirty="0" err="1"/>
+              <a:t>strengths</a:t>
+            </a:r>
+            <a:r>
+              <a:rPr lang="de-AT" dirty="0"/>
+              <a:t>:</a:t>
+            </a:r>
+          </a:p>
+          <a:p>
+            <a:r>
+              <a:rPr lang="de-AT" dirty="0"/>
+              <a:t>The </a:t>
+            </a:r>
+            <a:r>
+              <a:rPr lang="de-AT" dirty="0" err="1"/>
+              <a:t>study</a:t>
+            </a:r>
+            <a:r>
+              <a:rPr lang="de-AT" dirty="0"/>
+              <a:t> </a:t>
+            </a:r>
+            <a:r>
+              <a:rPr lang="de-AT" dirty="0" err="1"/>
+              <a:t>used</a:t>
+            </a:r>
+            <a:r>
+              <a:rPr lang="de-AT" dirty="0"/>
+              <a:t> a real experimental design and </a:t>
+            </a:r>
+            <a:r>
+              <a:rPr lang="de-AT" dirty="0" err="1"/>
+              <a:t>examined</a:t>
+            </a:r>
+            <a:r>
+              <a:rPr lang="de-AT" dirty="0"/>
+              <a:t> </a:t>
+            </a:r>
+            <a:r>
+              <a:rPr lang="de-AT" dirty="0" err="1"/>
+              <a:t>students</a:t>
+            </a:r>
+            <a:r>
+              <a:rPr lang="de-AT" dirty="0"/>
+              <a:t> in an </a:t>
+            </a:r>
+            <a:r>
+              <a:rPr lang="de-AT" dirty="0" err="1"/>
+              <a:t>authentic</a:t>
+            </a:r>
+            <a:r>
+              <a:rPr lang="de-AT" dirty="0"/>
+              <a:t> </a:t>
+            </a:r>
+            <a:r>
+              <a:rPr lang="de-AT" dirty="0" err="1"/>
+              <a:t>educational</a:t>
+            </a:r>
+            <a:r>
+              <a:rPr lang="de-AT" dirty="0"/>
+              <a:t> </a:t>
+            </a:r>
+            <a:r>
+              <a:rPr lang="de-AT" dirty="0" err="1"/>
+              <a:t>environment</a:t>
+            </a:r>
+            <a:r>
+              <a:rPr lang="de-AT" dirty="0"/>
+              <a:t>. </a:t>
+            </a:r>
+          </a:p>
+          <a:p>
+            <a:r>
+              <a:rPr lang="de-AT" dirty="0"/>
+              <a:t>This </a:t>
+            </a:r>
+            <a:r>
+              <a:rPr lang="de-AT" dirty="0" err="1"/>
+              <a:t>makes</a:t>
+            </a:r>
+            <a:r>
+              <a:rPr lang="de-AT" dirty="0"/>
+              <a:t> </a:t>
+            </a:r>
+            <a:r>
+              <a:rPr lang="de-AT" dirty="0" err="1"/>
+              <a:t>the</a:t>
+            </a:r>
+            <a:r>
+              <a:rPr lang="de-AT" dirty="0"/>
+              <a:t> </a:t>
+            </a:r>
+            <a:r>
+              <a:rPr lang="de-AT" dirty="0" err="1"/>
+              <a:t>findings</a:t>
+            </a:r>
+            <a:r>
+              <a:rPr lang="de-AT" dirty="0"/>
+              <a:t> </a:t>
+            </a:r>
+            <a:r>
+              <a:rPr lang="de-AT" dirty="0" err="1"/>
+              <a:t>highly</a:t>
+            </a:r>
+            <a:r>
+              <a:rPr lang="de-AT" dirty="0"/>
+              <a:t> relevant </a:t>
+            </a:r>
+            <a:r>
+              <a:rPr lang="de-AT" dirty="0" err="1"/>
+              <a:t>for</a:t>
+            </a:r>
+            <a:r>
+              <a:rPr lang="de-AT" dirty="0"/>
+              <a:t> </a:t>
+            </a:r>
+            <a:r>
+              <a:rPr lang="de-AT" dirty="0" err="1"/>
+              <a:t>higher</a:t>
+            </a:r>
+            <a:r>
+              <a:rPr lang="de-AT" dirty="0"/>
+              <a:t> </a:t>
+            </a:r>
+            <a:r>
+              <a:rPr lang="de-AT" dirty="0" err="1"/>
+              <a:t>education</a:t>
+            </a:r>
+            <a:r>
+              <a:rPr lang="de-AT" dirty="0"/>
+              <a:t>.</a:t>
+            </a:r>
+          </a:p>
+          <a:p>
+            <a:endParaRPr lang="de-AT" dirty="0"/>
+          </a:p>
+          <a:p>
+            <a:endParaRPr lang="de-AT" dirty="0"/>
+          </a:p>
+          <a:p>
+            <a:r>
+              <a:rPr lang="de-AT" dirty="0" err="1"/>
+              <a:t>However</a:t>
+            </a:r>
+            <a:r>
+              <a:rPr lang="de-AT" dirty="0"/>
+              <a:t>, </a:t>
+            </a:r>
+            <a:r>
+              <a:rPr lang="de-AT" dirty="0" err="1"/>
+              <a:t>there</a:t>
+            </a:r>
+            <a:r>
+              <a:rPr lang="de-AT" dirty="0"/>
+              <a:t> </a:t>
+            </a:r>
+            <a:r>
+              <a:rPr lang="de-AT" dirty="0" err="1"/>
+              <a:t>are</a:t>
+            </a:r>
+            <a:r>
+              <a:rPr lang="de-AT" dirty="0"/>
+              <a:t> also </a:t>
+            </a:r>
+            <a:r>
+              <a:rPr lang="de-AT" dirty="0" err="1"/>
+              <a:t>important</a:t>
+            </a:r>
+            <a:r>
+              <a:rPr lang="de-AT" dirty="0"/>
+              <a:t> </a:t>
+            </a:r>
+            <a:r>
+              <a:rPr lang="de-AT" dirty="0" err="1"/>
+              <a:t>limitations</a:t>
+            </a:r>
+            <a:r>
+              <a:rPr lang="de-AT" dirty="0"/>
+              <a:t>.</a:t>
+            </a:r>
+          </a:p>
+          <a:p>
+            <a:r>
+              <a:rPr lang="de-AT" dirty="0"/>
+              <a:t>The sample </a:t>
+            </a:r>
+            <a:r>
+              <a:rPr lang="de-AT" dirty="0" err="1"/>
+              <a:t>size</a:t>
+            </a:r>
+            <a:r>
+              <a:rPr lang="de-AT" dirty="0"/>
+              <a:t> was </a:t>
+            </a:r>
+            <a:r>
+              <a:rPr lang="de-AT" dirty="0" err="1"/>
+              <a:t>very</a:t>
+            </a:r>
+            <a:r>
+              <a:rPr lang="de-AT" dirty="0"/>
+              <a:t> </a:t>
+            </a:r>
+            <a:r>
+              <a:rPr lang="de-AT" dirty="0" err="1"/>
+              <a:t>small</a:t>
+            </a:r>
+            <a:r>
+              <a:rPr lang="de-AT" dirty="0"/>
+              <a:t>, </a:t>
+            </a:r>
+            <a:r>
+              <a:rPr lang="de-AT" dirty="0" err="1"/>
+              <a:t>with</a:t>
+            </a:r>
+            <a:r>
+              <a:rPr lang="de-AT" dirty="0"/>
+              <a:t> </a:t>
+            </a:r>
+            <a:r>
+              <a:rPr lang="de-AT" dirty="0" err="1"/>
+              <a:t>only</a:t>
+            </a:r>
+            <a:r>
+              <a:rPr lang="de-AT" dirty="0"/>
+              <a:t> </a:t>
+            </a:r>
+            <a:r>
+              <a:rPr lang="de-AT" dirty="0" err="1"/>
+              <a:t>nine</a:t>
+            </a:r>
+            <a:r>
+              <a:rPr lang="de-AT" dirty="0"/>
+              <a:t> </a:t>
+            </a:r>
+            <a:r>
+              <a:rPr lang="de-AT" dirty="0" err="1"/>
+              <a:t>students</a:t>
+            </a:r>
+            <a:r>
+              <a:rPr lang="de-AT" dirty="0"/>
+              <a:t> per </a:t>
+            </a:r>
+            <a:r>
+              <a:rPr lang="de-AT" dirty="0" err="1"/>
+              <a:t>group</a:t>
+            </a:r>
+            <a:r>
+              <a:rPr lang="de-AT" dirty="0"/>
+              <a:t>.</a:t>
+            </a:r>
+          </a:p>
+          <a:p>
+            <a:r>
+              <a:rPr lang="de-AT" dirty="0" err="1"/>
+              <a:t>Furthermore</a:t>
+            </a:r>
+            <a:r>
+              <a:rPr lang="de-AT" dirty="0"/>
+              <a:t>, </a:t>
+            </a:r>
+            <a:r>
+              <a:rPr lang="de-AT" dirty="0" err="1"/>
+              <a:t>most</a:t>
+            </a:r>
+            <a:r>
+              <a:rPr lang="de-AT" dirty="0"/>
+              <a:t> </a:t>
+            </a:r>
+            <a:r>
+              <a:rPr lang="de-AT" dirty="0" err="1"/>
+              <a:t>participants</a:t>
+            </a:r>
+            <a:r>
+              <a:rPr lang="de-AT" dirty="0"/>
+              <a:t> </a:t>
+            </a:r>
+            <a:r>
+              <a:rPr lang="de-AT" dirty="0" err="1"/>
+              <a:t>had</a:t>
+            </a:r>
+            <a:r>
+              <a:rPr lang="de-AT" dirty="0"/>
+              <a:t> </a:t>
+            </a:r>
+            <a:r>
+              <a:rPr lang="de-AT" dirty="0" err="1"/>
+              <a:t>little</a:t>
+            </a:r>
+            <a:r>
+              <a:rPr lang="de-AT" dirty="0"/>
+              <a:t> </a:t>
+            </a:r>
+            <a:r>
+              <a:rPr lang="de-AT" dirty="0" err="1"/>
+              <a:t>or</a:t>
+            </a:r>
+            <a:r>
+              <a:rPr lang="de-AT" dirty="0"/>
+              <a:t> </a:t>
+            </a:r>
+            <a:r>
+              <a:rPr lang="de-AT" dirty="0" err="1"/>
+              <a:t>no</a:t>
+            </a:r>
+            <a:r>
+              <a:rPr lang="de-AT" dirty="0"/>
+              <a:t> </a:t>
+            </a:r>
+            <a:r>
+              <a:rPr lang="de-AT" dirty="0" err="1"/>
+              <a:t>experience</a:t>
+            </a:r>
+            <a:r>
+              <a:rPr lang="de-AT" dirty="0"/>
+              <a:t> </a:t>
+            </a:r>
+            <a:r>
+              <a:rPr lang="de-AT" dirty="0" err="1"/>
+              <a:t>using</a:t>
+            </a:r>
+            <a:r>
+              <a:rPr lang="de-AT" dirty="0"/>
+              <a:t> ChatGPT </a:t>
+            </a:r>
+            <a:r>
+              <a:rPr lang="de-AT" dirty="0" err="1"/>
+              <a:t>before</a:t>
+            </a:r>
+            <a:r>
+              <a:rPr lang="de-AT" dirty="0"/>
+              <a:t> </a:t>
+            </a:r>
+            <a:r>
+              <a:rPr lang="de-AT" dirty="0" err="1"/>
+              <a:t>the</a:t>
+            </a:r>
+            <a:r>
+              <a:rPr lang="de-AT" dirty="0"/>
+              <a:t> </a:t>
+            </a:r>
+            <a:r>
+              <a:rPr lang="de-AT" dirty="0" err="1"/>
+              <a:t>experiment</a:t>
+            </a:r>
+            <a:r>
+              <a:rPr lang="de-AT" dirty="0"/>
+              <a:t>.</a:t>
+            </a:r>
+          </a:p>
+          <a:p>
+            <a:r>
+              <a:rPr lang="de-AT" dirty="0"/>
+              <a:t>The </a:t>
+            </a:r>
+            <a:r>
+              <a:rPr lang="de-AT" dirty="0" err="1"/>
+              <a:t>essays</a:t>
+            </a:r>
+            <a:r>
+              <a:rPr lang="de-AT" dirty="0"/>
+              <a:t> </a:t>
+            </a:r>
+            <a:r>
+              <a:rPr lang="de-AT" dirty="0" err="1"/>
+              <a:t>were</a:t>
+            </a:r>
+            <a:r>
+              <a:rPr lang="de-AT" dirty="0"/>
+              <a:t> </a:t>
+            </a:r>
+            <a:r>
+              <a:rPr lang="de-AT" dirty="0" err="1"/>
+              <a:t>written</a:t>
+            </a:r>
+            <a:r>
+              <a:rPr lang="de-AT" dirty="0"/>
+              <a:t> in Croatian, </a:t>
+            </a:r>
+            <a:r>
+              <a:rPr lang="de-AT" dirty="0" err="1"/>
+              <a:t>which</a:t>
+            </a:r>
+            <a:r>
+              <a:rPr lang="de-AT" dirty="0"/>
+              <a:t> </a:t>
+            </a:r>
+            <a:r>
+              <a:rPr lang="de-AT" dirty="0" err="1"/>
+              <a:t>may</a:t>
+            </a:r>
+            <a:r>
+              <a:rPr lang="de-AT" dirty="0"/>
+              <a:t> </a:t>
+            </a:r>
+            <a:r>
+              <a:rPr lang="de-AT" dirty="0" err="1"/>
+              <a:t>have</a:t>
+            </a:r>
+            <a:r>
+              <a:rPr lang="de-AT" dirty="0"/>
+              <a:t> </a:t>
+            </a:r>
+            <a:r>
+              <a:rPr lang="de-AT" dirty="0" err="1"/>
+              <a:t>influenced</a:t>
+            </a:r>
+            <a:r>
+              <a:rPr lang="de-AT" dirty="0"/>
+              <a:t> </a:t>
+            </a:r>
+            <a:r>
+              <a:rPr lang="de-AT" dirty="0" err="1"/>
+              <a:t>ChatGPT’s</a:t>
+            </a:r>
+            <a:r>
+              <a:rPr lang="de-AT" dirty="0"/>
+              <a:t> </a:t>
+            </a:r>
+            <a:r>
+              <a:rPr lang="de-AT" dirty="0" err="1"/>
+              <a:t>performance</a:t>
+            </a:r>
+            <a:r>
+              <a:rPr lang="de-AT" dirty="0"/>
+              <a:t>.</a:t>
+            </a:r>
+          </a:p>
+          <a:p>
+            <a:r>
+              <a:rPr lang="de-AT" dirty="0" err="1"/>
+              <a:t>Finally</a:t>
+            </a:r>
+            <a:r>
+              <a:rPr lang="de-AT" dirty="0"/>
+              <a:t>, </a:t>
+            </a:r>
+            <a:r>
+              <a:rPr lang="de-AT" dirty="0" err="1"/>
+              <a:t>the</a:t>
+            </a:r>
+            <a:r>
+              <a:rPr lang="de-AT" dirty="0"/>
+              <a:t> </a:t>
+            </a:r>
+            <a:r>
+              <a:rPr lang="de-AT" dirty="0" err="1"/>
+              <a:t>study</a:t>
+            </a:r>
+            <a:r>
+              <a:rPr lang="de-AT" dirty="0"/>
+              <a:t> </a:t>
+            </a:r>
+            <a:r>
+              <a:rPr lang="de-AT" dirty="0" err="1"/>
+              <a:t>only</a:t>
+            </a:r>
+            <a:r>
+              <a:rPr lang="de-AT" dirty="0"/>
+              <a:t> </a:t>
+            </a:r>
+            <a:r>
+              <a:rPr lang="de-AT" dirty="0" err="1"/>
+              <a:t>examined</a:t>
+            </a:r>
+            <a:r>
+              <a:rPr lang="de-AT" dirty="0"/>
+              <a:t> a </a:t>
+            </a:r>
+            <a:r>
+              <a:rPr lang="de-AT" dirty="0" err="1"/>
+              <a:t>short</a:t>
+            </a:r>
+            <a:r>
+              <a:rPr lang="de-AT" dirty="0"/>
+              <a:t>-term </a:t>
+            </a:r>
+            <a:r>
+              <a:rPr lang="de-AT" dirty="0" err="1"/>
+              <a:t>intervention</a:t>
+            </a:r>
+            <a:r>
+              <a:rPr lang="de-AT" dirty="0"/>
+              <a:t> and </a:t>
+            </a:r>
+            <a:r>
+              <a:rPr lang="de-AT" dirty="0" err="1"/>
+              <a:t>therefore</a:t>
+            </a:r>
+            <a:r>
+              <a:rPr lang="de-AT" dirty="0"/>
+              <a:t> </a:t>
+            </a:r>
+            <a:r>
+              <a:rPr lang="de-AT" dirty="0" err="1"/>
+              <a:t>cannot</a:t>
+            </a:r>
+            <a:r>
+              <a:rPr lang="de-AT" dirty="0"/>
+              <a:t> </a:t>
+            </a:r>
+            <a:r>
+              <a:rPr lang="de-AT" dirty="0" err="1"/>
+              <a:t>tell</a:t>
+            </a:r>
+            <a:r>
+              <a:rPr lang="de-AT" dirty="0"/>
+              <a:t> </a:t>
+            </a:r>
+            <a:r>
+              <a:rPr lang="de-AT" dirty="0" err="1"/>
+              <a:t>us</a:t>
+            </a:r>
+            <a:r>
+              <a:rPr lang="de-AT" dirty="0"/>
+              <a:t> </a:t>
+            </a:r>
+            <a:r>
+              <a:rPr lang="de-AT" dirty="0" err="1"/>
+              <a:t>much</a:t>
+            </a:r>
+            <a:r>
+              <a:rPr lang="de-AT" dirty="0"/>
+              <a:t> </a:t>
+            </a:r>
+            <a:r>
+              <a:rPr lang="de-AT" dirty="0" err="1"/>
+              <a:t>about</a:t>
+            </a:r>
+            <a:r>
+              <a:rPr lang="de-AT" dirty="0"/>
+              <a:t> </a:t>
+            </a:r>
+            <a:r>
+              <a:rPr lang="de-AT" dirty="0" err="1"/>
+              <a:t>long</a:t>
+            </a:r>
+            <a:r>
+              <a:rPr lang="de-AT" dirty="0"/>
+              <a:t>-term </a:t>
+            </a:r>
+            <a:r>
+              <a:rPr lang="de-AT" dirty="0" err="1"/>
+              <a:t>learning</a:t>
+            </a:r>
+            <a:r>
+              <a:rPr lang="de-AT" dirty="0"/>
+              <a:t> </a:t>
+            </a:r>
+            <a:r>
+              <a:rPr lang="de-AT" dirty="0" err="1"/>
+              <a:t>effects</a:t>
+            </a:r>
+            <a:r>
+              <a:rPr lang="de-AT" dirty="0"/>
+              <a:t>.</a:t>
+            </a:r>
+          </a:p>
+          <a:p>
+            <a:endParaRPr lang="de-AT" dirty="0"/>
+          </a:p>
+          <a:p>
+            <a:r>
+              <a:rPr lang="de-AT" dirty="0" err="1"/>
+              <a:t>Because</a:t>
+            </a:r>
+            <a:r>
+              <a:rPr lang="de-AT" dirty="0"/>
+              <a:t> </a:t>
+            </a:r>
+            <a:r>
+              <a:rPr lang="de-AT" dirty="0" err="1"/>
+              <a:t>of</a:t>
+            </a:r>
+            <a:r>
+              <a:rPr lang="de-AT" dirty="0"/>
+              <a:t> </a:t>
+            </a:r>
+            <a:r>
+              <a:rPr lang="de-AT" dirty="0" err="1"/>
+              <a:t>these</a:t>
+            </a:r>
+            <a:r>
+              <a:rPr lang="de-AT" dirty="0"/>
+              <a:t> </a:t>
+            </a:r>
+            <a:r>
+              <a:rPr lang="de-AT" dirty="0" err="1"/>
+              <a:t>limitations</a:t>
+            </a:r>
+            <a:r>
+              <a:rPr lang="de-AT" dirty="0"/>
+              <a:t>, </a:t>
+            </a:r>
+            <a:r>
+              <a:rPr lang="de-AT" dirty="0" err="1"/>
+              <a:t>the</a:t>
+            </a:r>
+            <a:r>
+              <a:rPr lang="de-AT" dirty="0"/>
+              <a:t> </a:t>
+            </a:r>
+            <a:r>
+              <a:rPr lang="de-AT" dirty="0" err="1"/>
+              <a:t>results</a:t>
+            </a:r>
+            <a:r>
+              <a:rPr lang="de-AT" dirty="0"/>
+              <a:t> </a:t>
+            </a:r>
+            <a:r>
+              <a:rPr lang="de-AT" dirty="0" err="1"/>
+              <a:t>should</a:t>
+            </a:r>
+            <a:r>
+              <a:rPr lang="de-AT" dirty="0"/>
+              <a:t> </a:t>
+            </a:r>
+            <a:r>
+              <a:rPr lang="de-AT" dirty="0" err="1"/>
+              <a:t>be</a:t>
+            </a:r>
+            <a:r>
+              <a:rPr lang="de-AT" dirty="0"/>
+              <a:t> </a:t>
+            </a:r>
+            <a:r>
+              <a:rPr lang="de-AT" dirty="0" err="1"/>
+              <a:t>interpreted</a:t>
+            </a:r>
+            <a:r>
+              <a:rPr lang="de-AT" dirty="0"/>
+              <a:t> </a:t>
+            </a:r>
+            <a:r>
+              <a:rPr lang="de-AT" dirty="0" err="1"/>
+              <a:t>cautiously</a:t>
+            </a:r>
+            <a:r>
+              <a:rPr lang="de-AT" dirty="0"/>
+              <a:t>.</a:t>
+            </a:r>
+          </a:p>
+          <a:p>
+            <a:endParaRPr lang="de-AT" dirty="0"/>
+          </a:p>
+        </p:txBody>
+      </p:sp>
+      <p:sp>
+        <p:nvSpPr>
+          <p:cNvPr id="4" name="Foliennummernplatzhalter 3"/>
+          <p:cNvSpPr>
+            <a:spLocks noGrp="1"/>
+          </p:cNvSpPr>
+          <p:nvPr>
+            <p:ph type="sldNum" sz="quarter" idx="5"/>
+          </p:nvPr>
+        </p:nvSpPr>
+        <p:spPr/>
+        <p:txBody>
+          <a:bodyPr/>
+          <a:lstStyle/>
+          <a:p>
+            <a:fld id="{92333A25-CDC0-4883-9EA4-6C77BD01CB0D}" type="slidenum">
+              <a:rPr lang="de-AT" smtClean="0"/>
+              <a:t>5</a:t>
+            </a:fld>
+            <a:endParaRPr lang="de-AT"/>
+          </a:p>
+        </p:txBody>
+      </p:sp>
+    </p:spTree>
+    <p:extLst>
+      <p:ext uri="{BB962C8B-B14F-4D97-AF65-F5344CB8AC3E}">
+        <p14:creationId xmlns:p14="http://schemas.microsoft.com/office/powerpoint/2010/main" val="1402844492"/>
+      </p:ext>
+    </p:extLst>
+  </p:cSld>
+  <p:clrMapOvr>
+    <a:masterClrMapping/>
+  </p:clrMapOvr>
+</p:notes>
+</file>
+
+<file path=ppt/notesSlides/notesSlide6.xml><?xml version="1.0" encoding="utf-8"?>
+<p:notes xmlns:a="http://schemas.openxmlformats.org/drawingml/2006/main" xmlns:r="http://schemas.openxmlformats.org/officeDocument/2006/relationships" xmlns:p="http://schemas.openxmlformats.org/presentationml/2006/main">
+  <p:cSld>
+    <p:spTree>
+      <p:nvGrpSpPr>
+        <p:cNvPr id="1" name=""/>
+        <p:cNvGrpSpPr/>
+        <p:nvPr/>
+      </p:nvGrpSpPr>
+      <p:grpSpPr>
+        <a:xfrm>
+          <a:off x="0" y="0"/>
+          <a:ext cx="0" cy="0"/>
+          <a:chOff x="0" y="0"/>
+          <a:chExt cx="0" cy="0"/>
+        </a:xfrm>
+      </p:grpSpPr>
+      <p:sp>
+        <p:nvSpPr>
+          <p:cNvPr id="2" name="Folienbildplatzhalter 1"/>
+          <p:cNvSpPr>
+            <a:spLocks noGrp="1" noRot="1" noChangeAspect="1"/>
+          </p:cNvSpPr>
+          <p:nvPr>
+            <p:ph type="sldImg"/>
+          </p:nvPr>
+        </p:nvSpPr>
+        <p:spPr/>
+      </p:sp>
+      <p:sp>
+        <p:nvSpPr>
+          <p:cNvPr id="3" name="Notizenplatzhalter 2"/>
+          <p:cNvSpPr>
+            <a:spLocks noGrp="1"/>
+          </p:cNvSpPr>
+          <p:nvPr>
+            <p:ph type="body" idx="1"/>
+          </p:nvPr>
+        </p:nvSpPr>
+        <p:spPr/>
+        <p:txBody>
+          <a:bodyPr/>
+          <a:lstStyle/>
+          <a:p>
+            <a:r>
+              <a:rPr lang="de-AT" dirty="0"/>
+              <a:t>I </a:t>
+            </a:r>
+            <a:r>
+              <a:rPr lang="de-AT" dirty="0" err="1"/>
+              <a:t>selected</a:t>
+            </a:r>
+            <a:r>
+              <a:rPr lang="de-AT" dirty="0"/>
+              <a:t> </a:t>
+            </a:r>
+            <a:r>
+              <a:rPr lang="de-AT" dirty="0" err="1"/>
+              <a:t>this</a:t>
+            </a:r>
+            <a:r>
+              <a:rPr lang="de-AT" dirty="0"/>
+              <a:t> </a:t>
+            </a:r>
+            <a:r>
+              <a:rPr lang="de-AT" dirty="0" err="1"/>
+              <a:t>study</a:t>
+            </a:r>
+            <a:r>
+              <a:rPr lang="de-AT" dirty="0"/>
+              <a:t> </a:t>
+            </a:r>
+            <a:r>
+              <a:rPr lang="de-AT" dirty="0" err="1"/>
+              <a:t>because</a:t>
+            </a:r>
+            <a:r>
+              <a:rPr lang="de-AT" dirty="0"/>
+              <a:t> </a:t>
+            </a:r>
+            <a:r>
+              <a:rPr lang="de-AT" dirty="0" err="1"/>
+              <a:t>it</a:t>
+            </a:r>
+            <a:r>
+              <a:rPr lang="de-AT" dirty="0"/>
+              <a:t> </a:t>
+            </a:r>
+            <a:r>
+              <a:rPr lang="de-AT" dirty="0" err="1"/>
+              <a:t>connects</a:t>
+            </a:r>
+            <a:r>
+              <a:rPr lang="de-AT" dirty="0"/>
+              <a:t> </a:t>
+            </a:r>
+            <a:r>
+              <a:rPr lang="de-AT" dirty="0" err="1"/>
+              <a:t>directly</a:t>
+            </a:r>
+            <a:r>
+              <a:rPr lang="de-AT" dirty="0"/>
+              <a:t> </a:t>
+            </a:r>
+            <a:r>
+              <a:rPr lang="de-AT" dirty="0" err="1"/>
+              <a:t>to</a:t>
+            </a:r>
+            <a:r>
+              <a:rPr lang="de-AT" dirty="0"/>
+              <a:t> </a:t>
+            </a:r>
+            <a:r>
+              <a:rPr lang="de-AT" dirty="0" err="1"/>
+              <a:t>my</a:t>
+            </a:r>
+            <a:r>
+              <a:rPr lang="de-AT" dirty="0"/>
+              <a:t> </a:t>
+            </a:r>
+            <a:r>
+              <a:rPr lang="de-AT" dirty="0" err="1"/>
+              <a:t>master’s</a:t>
+            </a:r>
+            <a:r>
+              <a:rPr lang="de-AT" dirty="0"/>
+              <a:t> </a:t>
+            </a:r>
+            <a:r>
+              <a:rPr lang="de-AT" dirty="0" err="1"/>
+              <a:t>thesis</a:t>
+            </a:r>
+            <a:r>
+              <a:rPr lang="de-AT" dirty="0"/>
+              <a:t>.</a:t>
+            </a:r>
+          </a:p>
+          <a:p>
+            <a:endParaRPr lang="de-AT" dirty="0"/>
+          </a:p>
+          <a:p>
+            <a:r>
+              <a:rPr lang="de-AT" dirty="0"/>
+              <a:t>Many </a:t>
+            </a:r>
+            <a:r>
+              <a:rPr lang="de-AT" dirty="0" err="1"/>
+              <a:t>discussions</a:t>
+            </a:r>
+            <a:r>
+              <a:rPr lang="de-AT" dirty="0"/>
+              <a:t> </a:t>
+            </a:r>
+            <a:r>
+              <a:rPr lang="de-AT" dirty="0" err="1"/>
+              <a:t>about</a:t>
+            </a:r>
+            <a:r>
+              <a:rPr lang="de-AT" dirty="0"/>
+              <a:t> ChatGPT </a:t>
+            </a:r>
+            <a:r>
+              <a:rPr lang="de-AT" dirty="0" err="1"/>
+              <a:t>focus</a:t>
+            </a:r>
+            <a:r>
+              <a:rPr lang="de-AT" dirty="0"/>
+              <a:t> </a:t>
+            </a:r>
+            <a:r>
+              <a:rPr lang="de-AT" dirty="0" err="1"/>
+              <a:t>mainly</a:t>
+            </a:r>
+            <a:r>
+              <a:rPr lang="de-AT" dirty="0"/>
+              <a:t> on </a:t>
+            </a:r>
+            <a:r>
+              <a:rPr lang="de-AT" dirty="0" err="1"/>
+              <a:t>its</a:t>
+            </a:r>
+            <a:r>
+              <a:rPr lang="de-AT" dirty="0"/>
+              <a:t> potential </a:t>
+            </a:r>
+            <a:r>
+              <a:rPr lang="de-AT" dirty="0" err="1"/>
+              <a:t>benefits</a:t>
+            </a:r>
+            <a:r>
+              <a:rPr lang="de-AT" dirty="0"/>
+              <a:t>.</a:t>
+            </a:r>
+          </a:p>
+          <a:p>
+            <a:r>
+              <a:rPr lang="de-AT" dirty="0" err="1"/>
+              <a:t>What</a:t>
+            </a:r>
+            <a:r>
+              <a:rPr lang="de-AT" dirty="0"/>
+              <a:t> I find </a:t>
+            </a:r>
+            <a:r>
+              <a:rPr lang="de-AT" dirty="0" err="1"/>
+              <a:t>particularly</a:t>
+            </a:r>
+            <a:r>
+              <a:rPr lang="de-AT" dirty="0"/>
+              <a:t> </a:t>
+            </a:r>
+            <a:r>
+              <a:rPr lang="de-AT" dirty="0" err="1"/>
+              <a:t>interesting</a:t>
+            </a:r>
+            <a:r>
+              <a:rPr lang="de-AT" dirty="0"/>
+              <a:t> </a:t>
+            </a:r>
+            <a:r>
+              <a:rPr lang="de-AT" dirty="0" err="1"/>
+              <a:t>is</a:t>
+            </a:r>
+            <a:r>
+              <a:rPr lang="de-AT" dirty="0"/>
+              <a:t> </a:t>
+            </a:r>
+            <a:r>
+              <a:rPr lang="de-AT" dirty="0" err="1"/>
+              <a:t>that</a:t>
+            </a:r>
+            <a:r>
+              <a:rPr lang="de-AT" dirty="0"/>
+              <a:t> </a:t>
+            </a:r>
+            <a:r>
+              <a:rPr lang="de-AT" dirty="0" err="1"/>
+              <a:t>this</a:t>
+            </a:r>
+            <a:r>
+              <a:rPr lang="de-AT" dirty="0"/>
+              <a:t> </a:t>
+            </a:r>
+            <a:r>
+              <a:rPr lang="de-AT" dirty="0" err="1"/>
+              <a:t>study</a:t>
+            </a:r>
+            <a:r>
+              <a:rPr lang="de-AT" dirty="0"/>
+              <a:t> also </a:t>
+            </a:r>
+            <a:r>
+              <a:rPr lang="de-AT" dirty="0" err="1"/>
+              <a:t>highlights</a:t>
+            </a:r>
+            <a:r>
+              <a:rPr lang="de-AT" dirty="0"/>
+              <a:t> </a:t>
+            </a:r>
+            <a:r>
+              <a:rPr lang="de-AT" dirty="0" err="1"/>
+              <a:t>its</a:t>
+            </a:r>
+            <a:r>
+              <a:rPr lang="de-AT" dirty="0"/>
+              <a:t> </a:t>
+            </a:r>
+            <a:r>
+              <a:rPr lang="de-AT" dirty="0" err="1"/>
+              <a:t>limitations</a:t>
+            </a:r>
+            <a:r>
+              <a:rPr lang="de-AT" dirty="0"/>
+              <a:t>.</a:t>
+            </a:r>
+          </a:p>
+          <a:p>
+            <a:r>
+              <a:rPr lang="de-AT" dirty="0"/>
+              <a:t>The </a:t>
+            </a:r>
+            <a:r>
+              <a:rPr lang="de-AT" dirty="0" err="1"/>
+              <a:t>findings</a:t>
+            </a:r>
+            <a:r>
+              <a:rPr lang="de-AT" dirty="0"/>
+              <a:t> </a:t>
+            </a:r>
+            <a:r>
+              <a:rPr lang="de-AT" dirty="0" err="1"/>
+              <a:t>suggest</a:t>
+            </a:r>
+            <a:r>
+              <a:rPr lang="de-AT" dirty="0"/>
+              <a:t> </a:t>
+            </a:r>
+            <a:r>
+              <a:rPr lang="de-AT" dirty="0" err="1"/>
+              <a:t>that</a:t>
+            </a:r>
+            <a:r>
+              <a:rPr lang="de-AT" dirty="0"/>
+              <a:t> </a:t>
+            </a:r>
+            <a:r>
+              <a:rPr lang="de-AT" dirty="0" err="1"/>
+              <a:t>simply</a:t>
+            </a:r>
+            <a:r>
+              <a:rPr lang="de-AT" dirty="0"/>
+              <a:t> </a:t>
+            </a:r>
+            <a:r>
+              <a:rPr lang="de-AT" dirty="0" err="1"/>
+              <a:t>having</a:t>
+            </a:r>
+            <a:r>
+              <a:rPr lang="de-AT" dirty="0"/>
+              <a:t> </a:t>
+            </a:r>
+            <a:r>
+              <a:rPr lang="de-AT" dirty="0" err="1"/>
+              <a:t>access</a:t>
+            </a:r>
+            <a:r>
+              <a:rPr lang="de-AT" dirty="0"/>
+              <a:t> </a:t>
+            </a:r>
+            <a:r>
+              <a:rPr lang="de-AT" dirty="0" err="1"/>
+              <a:t>to</a:t>
+            </a:r>
+            <a:r>
+              <a:rPr lang="de-AT" dirty="0"/>
+              <a:t> AI </a:t>
+            </a:r>
+            <a:r>
+              <a:rPr lang="de-AT" dirty="0" err="1"/>
+              <a:t>does</a:t>
+            </a:r>
+            <a:r>
+              <a:rPr lang="de-AT" dirty="0"/>
+              <a:t> not </a:t>
+            </a:r>
+            <a:r>
+              <a:rPr lang="de-AT" dirty="0" err="1"/>
+              <a:t>automatically</a:t>
+            </a:r>
+            <a:r>
+              <a:rPr lang="de-AT" dirty="0"/>
+              <a:t> </a:t>
+            </a:r>
+            <a:r>
+              <a:rPr lang="de-AT" dirty="0" err="1"/>
+              <a:t>improve</a:t>
+            </a:r>
+            <a:r>
+              <a:rPr lang="de-AT" dirty="0"/>
+              <a:t> </a:t>
+            </a:r>
+            <a:r>
+              <a:rPr lang="de-AT" dirty="0" err="1"/>
+              <a:t>performance</a:t>
+            </a:r>
+            <a:r>
+              <a:rPr lang="de-AT" dirty="0"/>
+              <a:t>.</a:t>
+            </a:r>
+          </a:p>
+          <a:p>
+            <a:endParaRPr lang="de-AT" dirty="0"/>
+          </a:p>
+          <a:p>
+            <a:r>
+              <a:rPr lang="de-AT" dirty="0" err="1"/>
+              <a:t>Instead</a:t>
+            </a:r>
+            <a:r>
+              <a:rPr lang="de-AT" dirty="0"/>
+              <a:t>, </a:t>
+            </a:r>
+            <a:r>
+              <a:rPr lang="de-AT" dirty="0" err="1"/>
+              <a:t>successful</a:t>
+            </a:r>
+            <a:r>
+              <a:rPr lang="de-AT" dirty="0"/>
+              <a:t> </a:t>
+            </a:r>
+            <a:r>
+              <a:rPr lang="de-AT" dirty="0" err="1"/>
+              <a:t>use</a:t>
+            </a:r>
+            <a:r>
+              <a:rPr lang="de-AT" dirty="0"/>
+              <a:t> </a:t>
+            </a:r>
+            <a:r>
+              <a:rPr lang="de-AT" dirty="0" err="1"/>
+              <a:t>depends</a:t>
+            </a:r>
+            <a:r>
+              <a:rPr lang="de-AT" dirty="0"/>
+              <a:t> on </a:t>
+            </a:r>
+            <a:r>
+              <a:rPr lang="de-AT" dirty="0" err="1"/>
+              <a:t>how</a:t>
+            </a:r>
+            <a:r>
+              <a:rPr lang="de-AT" dirty="0"/>
+              <a:t> </a:t>
+            </a:r>
+            <a:r>
+              <a:rPr lang="de-AT" dirty="0" err="1"/>
+              <a:t>well</a:t>
+            </a:r>
+            <a:r>
+              <a:rPr lang="de-AT" dirty="0"/>
+              <a:t> </a:t>
+            </a:r>
+            <a:r>
+              <a:rPr lang="de-AT" dirty="0" err="1"/>
+              <a:t>students</a:t>
+            </a:r>
+            <a:r>
+              <a:rPr lang="de-AT" dirty="0"/>
+              <a:t> </a:t>
+            </a:r>
+            <a:r>
+              <a:rPr lang="de-AT" dirty="0" err="1"/>
+              <a:t>understand</a:t>
+            </a:r>
+            <a:r>
+              <a:rPr lang="de-AT" dirty="0"/>
+              <a:t> </a:t>
+            </a:r>
+            <a:r>
+              <a:rPr lang="de-AT" dirty="0" err="1"/>
+              <a:t>the</a:t>
+            </a:r>
+            <a:r>
+              <a:rPr lang="de-AT" dirty="0"/>
+              <a:t> </a:t>
+            </a:r>
+            <a:r>
+              <a:rPr lang="de-AT" dirty="0" err="1"/>
+              <a:t>topic</a:t>
+            </a:r>
+            <a:r>
+              <a:rPr lang="de-AT" dirty="0"/>
+              <a:t>, </a:t>
+            </a:r>
+            <a:r>
+              <a:rPr lang="de-AT" dirty="0" err="1"/>
+              <a:t>formulate</a:t>
+            </a:r>
+            <a:r>
+              <a:rPr lang="de-AT" dirty="0"/>
+              <a:t> </a:t>
+            </a:r>
+            <a:r>
+              <a:rPr lang="de-AT" dirty="0" err="1"/>
+              <a:t>prompts</a:t>
+            </a:r>
+            <a:r>
+              <a:rPr lang="de-AT" dirty="0"/>
+              <a:t>, </a:t>
+            </a:r>
+            <a:r>
+              <a:rPr lang="de-AT" dirty="0" err="1"/>
+              <a:t>evaluate</a:t>
+            </a:r>
+            <a:r>
+              <a:rPr lang="de-AT" dirty="0"/>
+              <a:t> </a:t>
+            </a:r>
+            <a:r>
+              <a:rPr lang="de-AT" dirty="0" err="1"/>
+              <a:t>information</a:t>
+            </a:r>
+            <a:r>
+              <a:rPr lang="de-AT" dirty="0"/>
+              <a:t>, and </a:t>
+            </a:r>
+            <a:r>
+              <a:rPr lang="de-AT" dirty="0" err="1"/>
+              <a:t>integrate</a:t>
+            </a:r>
+            <a:r>
+              <a:rPr lang="de-AT" dirty="0"/>
+              <a:t> AI-</a:t>
+            </a:r>
+            <a:r>
+              <a:rPr lang="de-AT" dirty="0" err="1"/>
+              <a:t>generated</a:t>
+            </a:r>
+            <a:r>
+              <a:rPr lang="de-AT" dirty="0"/>
+              <a:t> </a:t>
+            </a:r>
+            <a:r>
+              <a:rPr lang="de-AT" dirty="0" err="1"/>
+              <a:t>content</a:t>
+            </a:r>
+            <a:r>
+              <a:rPr lang="de-AT" dirty="0"/>
+              <a:t> </a:t>
+            </a:r>
+            <a:r>
+              <a:rPr lang="de-AT" dirty="0" err="1"/>
+              <a:t>into</a:t>
+            </a:r>
+            <a:r>
+              <a:rPr lang="de-AT" dirty="0"/>
+              <a:t> </a:t>
+            </a:r>
+            <a:r>
+              <a:rPr lang="de-AT" dirty="0" err="1"/>
+              <a:t>their</a:t>
+            </a:r>
+            <a:r>
+              <a:rPr lang="de-AT" dirty="0"/>
+              <a:t> own </a:t>
+            </a:r>
+            <a:r>
+              <a:rPr lang="de-AT" dirty="0" err="1"/>
+              <a:t>work</a:t>
+            </a:r>
+            <a:r>
+              <a:rPr lang="de-AT" dirty="0"/>
+              <a:t>. </a:t>
+            </a:r>
+          </a:p>
+          <a:p>
+            <a:r>
+              <a:rPr lang="de-AT" dirty="0" err="1"/>
+              <a:t>For</a:t>
+            </a:r>
+            <a:r>
+              <a:rPr lang="de-AT" dirty="0"/>
+              <a:t> </a:t>
+            </a:r>
+            <a:r>
+              <a:rPr lang="de-AT" dirty="0" err="1"/>
+              <a:t>my</a:t>
+            </a:r>
+            <a:r>
+              <a:rPr lang="de-AT" dirty="0"/>
+              <a:t> </a:t>
+            </a:r>
+            <a:r>
+              <a:rPr lang="de-AT" dirty="0" err="1"/>
+              <a:t>research</a:t>
+            </a:r>
+            <a:r>
+              <a:rPr lang="de-AT" dirty="0"/>
+              <a:t>, </a:t>
+            </a:r>
+            <a:r>
+              <a:rPr lang="de-AT" dirty="0" err="1"/>
+              <a:t>this</a:t>
+            </a:r>
+            <a:r>
+              <a:rPr lang="de-AT" dirty="0"/>
+              <a:t> </a:t>
+            </a:r>
+            <a:r>
+              <a:rPr lang="de-AT" dirty="0" err="1"/>
+              <a:t>is</a:t>
+            </a:r>
+            <a:r>
+              <a:rPr lang="de-AT" dirty="0"/>
+              <a:t> </a:t>
+            </a:r>
+            <a:r>
+              <a:rPr lang="de-AT" dirty="0" err="1"/>
+              <a:t>highly</a:t>
+            </a:r>
+            <a:r>
+              <a:rPr lang="de-AT" dirty="0"/>
+              <a:t> relevant </a:t>
+            </a:r>
+            <a:r>
+              <a:rPr lang="de-AT" dirty="0" err="1"/>
+              <a:t>because</a:t>
+            </a:r>
+            <a:r>
+              <a:rPr lang="de-AT" dirty="0"/>
+              <a:t> </a:t>
+            </a:r>
+            <a:r>
+              <a:rPr lang="de-AT" dirty="0" err="1"/>
+              <a:t>it</a:t>
+            </a:r>
+            <a:r>
+              <a:rPr lang="de-AT" dirty="0"/>
+              <a:t> </a:t>
+            </a:r>
+            <a:r>
+              <a:rPr lang="de-AT" dirty="0" err="1"/>
+              <a:t>shows</a:t>
+            </a:r>
+            <a:r>
+              <a:rPr lang="de-AT" dirty="0"/>
+              <a:t> </a:t>
+            </a:r>
+            <a:r>
+              <a:rPr lang="de-AT" dirty="0" err="1"/>
+              <a:t>that</a:t>
+            </a:r>
+            <a:r>
+              <a:rPr lang="de-AT" dirty="0"/>
+              <a:t> AI </a:t>
+            </a:r>
+            <a:r>
+              <a:rPr lang="de-AT" dirty="0" err="1"/>
+              <a:t>should</a:t>
+            </a:r>
+            <a:r>
+              <a:rPr lang="de-AT" dirty="0"/>
+              <a:t> not </a:t>
+            </a:r>
+            <a:r>
+              <a:rPr lang="de-AT" dirty="0" err="1"/>
+              <a:t>be</a:t>
+            </a:r>
+            <a:r>
+              <a:rPr lang="de-AT" dirty="0"/>
+              <a:t> </a:t>
+            </a:r>
+            <a:r>
+              <a:rPr lang="de-AT" dirty="0" err="1"/>
+              <a:t>seen</a:t>
+            </a:r>
+            <a:r>
+              <a:rPr lang="de-AT" dirty="0"/>
+              <a:t> </a:t>
+            </a:r>
+            <a:r>
+              <a:rPr lang="de-AT" dirty="0" err="1"/>
+              <a:t>as</a:t>
+            </a:r>
+            <a:r>
+              <a:rPr lang="de-AT" dirty="0"/>
+              <a:t> a </a:t>
+            </a:r>
+            <a:r>
+              <a:rPr lang="de-AT" dirty="0" err="1"/>
+              <a:t>replacement</a:t>
+            </a:r>
+            <a:r>
+              <a:rPr lang="de-AT" dirty="0"/>
+              <a:t> </a:t>
+            </a:r>
+            <a:r>
+              <a:rPr lang="de-AT" dirty="0" err="1"/>
+              <a:t>for</a:t>
+            </a:r>
+            <a:r>
+              <a:rPr lang="de-AT" dirty="0"/>
+              <a:t> </a:t>
+            </a:r>
+            <a:r>
+              <a:rPr lang="de-AT" dirty="0" err="1"/>
+              <a:t>writing</a:t>
+            </a:r>
+            <a:r>
+              <a:rPr lang="de-AT" dirty="0"/>
+              <a:t> </a:t>
+            </a:r>
+            <a:r>
+              <a:rPr lang="de-AT" dirty="0" err="1"/>
+              <a:t>skills</a:t>
+            </a:r>
+            <a:r>
+              <a:rPr lang="de-AT" dirty="0"/>
+              <a:t>, but </a:t>
+            </a:r>
+            <a:r>
+              <a:rPr lang="de-AT" dirty="0" err="1"/>
+              <a:t>rather</a:t>
+            </a:r>
+            <a:r>
+              <a:rPr lang="de-AT" dirty="0"/>
+              <a:t> </a:t>
+            </a:r>
+            <a:r>
+              <a:rPr lang="de-AT" dirty="0" err="1"/>
+              <a:t>as</a:t>
+            </a:r>
+            <a:r>
+              <a:rPr lang="de-AT" dirty="0"/>
+              <a:t> a </a:t>
+            </a:r>
+            <a:r>
+              <a:rPr lang="de-AT" dirty="0" err="1"/>
+              <a:t>tool</a:t>
+            </a:r>
+            <a:r>
+              <a:rPr lang="de-AT" dirty="0"/>
+              <a:t> </a:t>
+            </a:r>
+            <a:r>
+              <a:rPr lang="de-AT" dirty="0" err="1"/>
+              <a:t>whose</a:t>
+            </a:r>
+            <a:r>
+              <a:rPr lang="de-AT" dirty="0"/>
+              <a:t> </a:t>
+            </a:r>
+            <a:r>
+              <a:rPr lang="de-AT" dirty="0" err="1"/>
+              <a:t>effectiveness</a:t>
+            </a:r>
+            <a:r>
+              <a:rPr lang="de-AT" dirty="0"/>
+              <a:t> </a:t>
+            </a:r>
+            <a:r>
+              <a:rPr lang="de-AT" dirty="0" err="1"/>
+              <a:t>depends</a:t>
+            </a:r>
+            <a:r>
+              <a:rPr lang="de-AT" dirty="0"/>
+              <a:t> on </a:t>
+            </a:r>
+            <a:r>
+              <a:rPr lang="de-AT" dirty="0" err="1"/>
+              <a:t>the</a:t>
+            </a:r>
+            <a:r>
+              <a:rPr lang="de-AT" dirty="0"/>
+              <a:t> </a:t>
+            </a:r>
+            <a:r>
+              <a:rPr lang="de-AT" dirty="0" err="1"/>
+              <a:t>user</a:t>
+            </a:r>
+            <a:r>
+              <a:rPr lang="de-AT" dirty="0"/>
+              <a:t>.</a:t>
+            </a:r>
+          </a:p>
+          <a:p>
+            <a:endParaRPr lang="de-AT" dirty="0"/>
+          </a:p>
+        </p:txBody>
+      </p:sp>
+      <p:sp>
+        <p:nvSpPr>
+          <p:cNvPr id="4" name="Foliennummernplatzhalter 3"/>
+          <p:cNvSpPr>
+            <a:spLocks noGrp="1"/>
+          </p:cNvSpPr>
+          <p:nvPr>
+            <p:ph type="sldNum" sz="quarter" idx="5"/>
+          </p:nvPr>
+        </p:nvSpPr>
+        <p:spPr/>
+        <p:txBody>
+          <a:bodyPr/>
+          <a:lstStyle/>
+          <a:p>
+            <a:fld id="{92333A25-CDC0-4883-9EA4-6C77BD01CB0D}" type="slidenum">
+              <a:rPr lang="de-AT" smtClean="0"/>
+              <a:t>6</a:t>
+            </a:fld>
+            <a:endParaRPr lang="de-AT"/>
+          </a:p>
+        </p:txBody>
+      </p:sp>
+    </p:spTree>
+    <p:extLst>
+      <p:ext uri="{BB962C8B-B14F-4D97-AF65-F5344CB8AC3E}">
+        <p14:creationId xmlns:p14="http://schemas.microsoft.com/office/powerpoint/2010/main" val="2093646729"/>
+      </p:ext>
+    </p:extLst>
+  </p:cSld>
+  <p:clrMapOvr>
+    <a:masterClrMapping/>
+  </p:clrMapOvr>
+</p:notes>
+</file>
+
+<file path=ppt/notesSlides/notesSlide7.xml><?xml version="1.0" encoding="utf-8"?>
+<p:notes xmlns:a="http://schemas.openxmlformats.org/drawingml/2006/main" xmlns:r="http://schemas.openxmlformats.org/officeDocument/2006/relationships" xmlns:p="http://schemas.openxmlformats.org/presentationml/2006/main">
+  <p:cSld>
+    <p:spTree>
+      <p:nvGrpSpPr>
+        <p:cNvPr id="1" name=""/>
+        <p:cNvGrpSpPr/>
+        <p:nvPr/>
+      </p:nvGrpSpPr>
+      <p:grpSpPr>
+        <a:xfrm>
+          <a:off x="0" y="0"/>
+          <a:ext cx="0" cy="0"/>
+          <a:chOff x="0" y="0"/>
+          <a:chExt cx="0" cy="0"/>
+        </a:xfrm>
+      </p:grpSpPr>
+      <p:sp>
+        <p:nvSpPr>
+          <p:cNvPr id="2" name="Folienbildplatzhalter 1"/>
+          <p:cNvSpPr>
+            <a:spLocks noGrp="1" noRot="1" noChangeAspect="1"/>
+          </p:cNvSpPr>
+          <p:nvPr>
+            <p:ph type="sldImg"/>
+          </p:nvPr>
+        </p:nvSpPr>
+        <p:spPr/>
+      </p:sp>
+      <p:sp>
+        <p:nvSpPr>
+          <p:cNvPr id="3" name="Notizenplatzhalter 2"/>
+          <p:cNvSpPr>
+            <a:spLocks noGrp="1"/>
+          </p:cNvSpPr>
+          <p:nvPr>
+            <p:ph type="body" idx="1"/>
+          </p:nvPr>
+        </p:nvSpPr>
+        <p:spPr/>
+        <p:txBody>
+          <a:bodyPr/>
+          <a:lstStyle/>
+          <a:p>
+            <a:r>
+              <a:rPr lang="de-AT" dirty="0" err="1"/>
+              <a:t>To</a:t>
+            </a:r>
+            <a:r>
+              <a:rPr lang="de-AT" dirty="0"/>
+              <a:t> </a:t>
+            </a:r>
+            <a:r>
+              <a:rPr lang="de-AT" dirty="0" err="1"/>
+              <a:t>conclude</a:t>
+            </a:r>
+            <a:r>
+              <a:rPr lang="de-AT" dirty="0"/>
+              <a:t>:</a:t>
+            </a:r>
+          </a:p>
+          <a:p>
+            <a:endParaRPr lang="de-AT" dirty="0"/>
+          </a:p>
+          <a:p>
+            <a:r>
+              <a:rPr lang="de-AT" dirty="0"/>
+              <a:t>This </a:t>
+            </a:r>
+            <a:r>
+              <a:rPr lang="de-AT" dirty="0" err="1"/>
+              <a:t>study</a:t>
+            </a:r>
+            <a:r>
+              <a:rPr lang="de-AT" dirty="0"/>
+              <a:t> </a:t>
+            </a:r>
+            <a:r>
+              <a:rPr lang="de-AT" dirty="0" err="1"/>
+              <a:t>found</a:t>
+            </a:r>
+            <a:r>
+              <a:rPr lang="de-AT" dirty="0"/>
+              <a:t> </a:t>
+            </a:r>
+            <a:r>
+              <a:rPr lang="de-AT" dirty="0" err="1"/>
+              <a:t>that</a:t>
+            </a:r>
+            <a:r>
+              <a:rPr lang="de-AT" dirty="0"/>
+              <a:t> ChatGPT </a:t>
+            </a:r>
+            <a:r>
+              <a:rPr lang="de-AT" dirty="0" err="1"/>
+              <a:t>did</a:t>
+            </a:r>
+            <a:r>
+              <a:rPr lang="de-AT" dirty="0"/>
+              <a:t> not </a:t>
+            </a:r>
+            <a:r>
+              <a:rPr lang="de-AT" dirty="0" err="1"/>
+              <a:t>significantly</a:t>
+            </a:r>
+            <a:r>
+              <a:rPr lang="de-AT" dirty="0"/>
+              <a:t> </a:t>
+            </a:r>
+            <a:r>
+              <a:rPr lang="de-AT" dirty="0" err="1"/>
+              <a:t>improve</a:t>
+            </a:r>
+            <a:r>
+              <a:rPr lang="de-AT" dirty="0"/>
+              <a:t> </a:t>
+            </a:r>
+            <a:r>
+              <a:rPr lang="de-AT" dirty="0" err="1"/>
+              <a:t>essay</a:t>
+            </a:r>
+            <a:r>
+              <a:rPr lang="de-AT" dirty="0"/>
+              <a:t> </a:t>
+            </a:r>
+            <a:r>
+              <a:rPr lang="de-AT" dirty="0" err="1"/>
+              <a:t>quality</a:t>
+            </a:r>
+            <a:r>
+              <a:rPr lang="de-AT" dirty="0"/>
+              <a:t>, </a:t>
+            </a:r>
+            <a:r>
+              <a:rPr lang="de-AT" dirty="0" err="1"/>
+              <a:t>speed</a:t>
+            </a:r>
+            <a:r>
+              <a:rPr lang="de-AT" dirty="0"/>
+              <a:t>, </a:t>
+            </a:r>
+            <a:r>
+              <a:rPr lang="de-AT" dirty="0" err="1"/>
+              <a:t>or</a:t>
+            </a:r>
+            <a:r>
+              <a:rPr lang="de-AT" dirty="0"/>
+              <a:t> </a:t>
+            </a:r>
+            <a:r>
+              <a:rPr lang="de-AT" dirty="0" err="1"/>
+              <a:t>authenticity</a:t>
+            </a:r>
+            <a:r>
+              <a:rPr lang="de-AT" dirty="0"/>
+              <a:t> in </a:t>
+            </a:r>
+            <a:r>
+              <a:rPr lang="de-AT" dirty="0" err="1"/>
+              <a:t>this</a:t>
+            </a:r>
+            <a:r>
+              <a:rPr lang="de-AT" dirty="0"/>
+              <a:t> </a:t>
+            </a:r>
+            <a:r>
+              <a:rPr lang="de-AT" dirty="0" err="1"/>
+              <a:t>student</a:t>
+            </a:r>
+            <a:r>
+              <a:rPr lang="de-AT" dirty="0"/>
+              <a:t> sample.</a:t>
+            </a:r>
+          </a:p>
+          <a:p>
+            <a:r>
+              <a:rPr lang="de-AT" dirty="0"/>
+              <a:t>The </a:t>
+            </a:r>
+            <a:r>
+              <a:rPr lang="de-AT" dirty="0" err="1"/>
+              <a:t>results</a:t>
+            </a:r>
+            <a:r>
+              <a:rPr lang="de-AT" dirty="0"/>
+              <a:t> </a:t>
+            </a:r>
+            <a:r>
+              <a:rPr lang="de-AT" dirty="0" err="1"/>
+              <a:t>suggest</a:t>
+            </a:r>
+            <a:r>
+              <a:rPr lang="de-AT" dirty="0"/>
+              <a:t> </a:t>
+            </a:r>
+            <a:r>
+              <a:rPr lang="de-AT" dirty="0" err="1"/>
+              <a:t>that</a:t>
+            </a:r>
+            <a:r>
+              <a:rPr lang="de-AT" dirty="0"/>
+              <a:t> AI </a:t>
+            </a:r>
+            <a:r>
+              <a:rPr lang="de-AT" dirty="0" err="1"/>
+              <a:t>can</a:t>
+            </a:r>
+            <a:r>
+              <a:rPr lang="de-AT" dirty="0"/>
+              <a:t> support </a:t>
+            </a:r>
+            <a:r>
+              <a:rPr lang="de-AT" dirty="0" err="1"/>
+              <a:t>writing</a:t>
+            </a:r>
+            <a:r>
+              <a:rPr lang="de-AT" dirty="0"/>
+              <a:t>, but </a:t>
+            </a:r>
+            <a:r>
+              <a:rPr lang="de-AT" dirty="0" err="1"/>
+              <a:t>only</a:t>
+            </a:r>
+            <a:r>
+              <a:rPr lang="de-AT" dirty="0"/>
+              <a:t> </a:t>
+            </a:r>
+            <a:r>
+              <a:rPr lang="de-AT" dirty="0" err="1"/>
+              <a:t>when</a:t>
+            </a:r>
+            <a:r>
+              <a:rPr lang="de-AT" dirty="0"/>
+              <a:t> </a:t>
+            </a:r>
+            <a:r>
+              <a:rPr lang="de-AT" dirty="0" err="1"/>
+              <a:t>users</a:t>
+            </a:r>
+            <a:r>
+              <a:rPr lang="de-AT" dirty="0"/>
+              <a:t> </a:t>
+            </a:r>
+            <a:r>
+              <a:rPr lang="de-AT" dirty="0" err="1"/>
+              <a:t>have</a:t>
+            </a:r>
+            <a:r>
+              <a:rPr lang="de-AT" dirty="0"/>
+              <a:t> </a:t>
+            </a:r>
+            <a:r>
+              <a:rPr lang="de-AT" dirty="0" err="1"/>
+              <a:t>the</a:t>
+            </a:r>
+            <a:r>
+              <a:rPr lang="de-AT" dirty="0"/>
+              <a:t> </a:t>
+            </a:r>
+            <a:r>
+              <a:rPr lang="de-AT" dirty="0" err="1"/>
+              <a:t>necessary</a:t>
+            </a:r>
+            <a:r>
+              <a:rPr lang="de-AT" dirty="0"/>
+              <a:t> </a:t>
+            </a:r>
+            <a:r>
+              <a:rPr lang="de-AT" dirty="0" err="1"/>
+              <a:t>skills</a:t>
+            </a:r>
+            <a:r>
+              <a:rPr lang="de-AT" dirty="0"/>
+              <a:t> </a:t>
+            </a:r>
+            <a:r>
+              <a:rPr lang="de-AT" dirty="0" err="1"/>
+              <a:t>to</a:t>
+            </a:r>
+            <a:r>
+              <a:rPr lang="de-AT" dirty="0"/>
+              <a:t> </a:t>
+            </a:r>
+            <a:r>
+              <a:rPr lang="de-AT" dirty="0" err="1"/>
+              <a:t>use</a:t>
+            </a:r>
+            <a:r>
+              <a:rPr lang="de-AT" dirty="0"/>
+              <a:t> </a:t>
+            </a:r>
+            <a:r>
+              <a:rPr lang="de-AT" dirty="0" err="1"/>
+              <a:t>it</a:t>
+            </a:r>
+            <a:r>
+              <a:rPr lang="de-AT" dirty="0"/>
+              <a:t> </a:t>
+            </a:r>
+            <a:r>
+              <a:rPr lang="de-AT" dirty="0" err="1"/>
+              <a:t>effectively</a:t>
+            </a:r>
+            <a:r>
+              <a:rPr lang="de-AT"/>
+              <a:t>.</a:t>
+            </a:r>
+          </a:p>
+          <a:p>
+            <a:endParaRPr lang="de-AT" dirty="0"/>
+          </a:p>
+          <a:p>
+            <a:r>
+              <a:rPr lang="de-AT" dirty="0" err="1"/>
+              <a:t>Thank</a:t>
+            </a:r>
+            <a:r>
+              <a:rPr lang="de-AT" dirty="0"/>
+              <a:t> </a:t>
+            </a:r>
+            <a:r>
+              <a:rPr lang="de-AT" dirty="0" err="1"/>
+              <a:t>you</a:t>
+            </a:r>
+            <a:r>
+              <a:rPr lang="de-AT" dirty="0"/>
+              <a:t> </a:t>
+            </a:r>
+            <a:r>
+              <a:rPr lang="de-AT" dirty="0" err="1"/>
+              <a:t>for</a:t>
+            </a:r>
+            <a:r>
+              <a:rPr lang="de-AT" dirty="0"/>
+              <a:t> </a:t>
+            </a:r>
+            <a:r>
+              <a:rPr lang="de-AT" dirty="0" err="1"/>
+              <a:t>listening</a:t>
+            </a:r>
+            <a:r>
+              <a:rPr lang="de-AT" dirty="0"/>
+              <a:t>.</a:t>
+            </a:r>
+          </a:p>
+        </p:txBody>
+      </p:sp>
+      <p:sp>
+        <p:nvSpPr>
+          <p:cNvPr id="4" name="Foliennummernplatzhalter 3"/>
+          <p:cNvSpPr>
+            <a:spLocks noGrp="1"/>
+          </p:cNvSpPr>
+          <p:nvPr>
+            <p:ph type="sldNum" sz="quarter" idx="5"/>
+          </p:nvPr>
+        </p:nvSpPr>
+        <p:spPr/>
+        <p:txBody>
+          <a:bodyPr/>
+          <a:lstStyle/>
+          <a:p>
+            <a:fld id="{92333A25-CDC0-4883-9EA4-6C77BD01CB0D}" type="slidenum">
+              <a:rPr lang="de-AT" smtClean="0"/>
+              <a:t>7</a:t>
+            </a:fld>
+            <a:endParaRPr lang="de-AT"/>
+          </a:p>
+        </p:txBody>
+      </p:sp>
+    </p:spTree>
+    <p:extLst>
+      <p:ext uri="{BB962C8B-B14F-4D97-AF65-F5344CB8AC3E}">
+        <p14:creationId xmlns:p14="http://schemas.microsoft.com/office/powerpoint/2010/main" val="2635707834"/>
+      </p:ext>
+    </p:extLst>
+  </p:cSld>
+  <p:clrMapOvr>
+    <a:masterClrMapping/>
+  </p:clrMapOvr>
+</p:notes>
 </file>
 
 <file path=ppt/slideLayouts/slideLayout1.xml><?xml version="1.0" encoding="utf-8"?>
@@ -766,7 +4968,7 @@
             <a:fld id="{1D8BD707-D9CF-40AE-B4C6-C98DA3205C09}" type="datetimeFigureOut">
               <a:rPr lang="en-US" smtClean="0"/>
               <a:pPr/>
-              <a:t>6/9/2026</a:t>
+              <a:t>6/15/2026</a:t>
             </a:fld>
             <a:endParaRPr lang="en-US"/>
           </a:p>
@@ -931,7 +5133,7 @@
             <a:fld id="{1D8BD707-D9CF-40AE-B4C6-C98DA3205C09}" type="datetimeFigureOut">
               <a:rPr lang="en-US" smtClean="0"/>
               <a:pPr/>
-              <a:t>6/9/2026</a:t>
+              <a:t>6/15/2026</a:t>
             </a:fld>
             <a:endParaRPr lang="en-US"/>
           </a:p>
@@ -1106,7 +5308,7 @@
             <a:fld id="{1D8BD707-D9CF-40AE-B4C6-C98DA3205C09}" type="datetimeFigureOut">
               <a:rPr lang="en-US" smtClean="0"/>
               <a:pPr/>
-              <a:t>6/9/2026</a:t>
+              <a:t>6/15/2026</a:t>
             </a:fld>
             <a:endParaRPr lang="en-US"/>
           </a:p>
@@ -1271,7 +5473,7 @@
             <a:fld id="{1D8BD707-D9CF-40AE-B4C6-C98DA3205C09}" type="datetimeFigureOut">
               <a:rPr lang="en-US" smtClean="0"/>
               <a:pPr/>
-              <a:t>6/9/2026</a:t>
+              <a:t>6/15/2026</a:t>
             </a:fld>
             <a:endParaRPr lang="en-US"/>
           </a:p>
@@ -1513,7 +5715,7 @@
             <a:fld id="{1D8BD707-D9CF-40AE-B4C6-C98DA3205C09}" type="datetimeFigureOut">
               <a:rPr lang="en-US" smtClean="0"/>
               <a:pPr/>
-              <a:t>6/9/2026</a:t>
+              <a:t>6/15/2026</a:t>
             </a:fld>
             <a:endParaRPr lang="en-US"/>
           </a:p>
@@ -1795,7 +5997,7 @@
             <a:fld id="{1D8BD707-D9CF-40AE-B4C6-C98DA3205C09}" type="datetimeFigureOut">
               <a:rPr lang="en-US" smtClean="0"/>
               <a:pPr/>
-              <a:t>6/9/2026</a:t>
+              <a:t>6/15/2026</a:t>
             </a:fld>
             <a:endParaRPr lang="en-US"/>
           </a:p>
@@ -2211,7 +6413,7 @@
             <a:fld id="{1D8BD707-D9CF-40AE-B4C6-C98DA3205C09}" type="datetimeFigureOut">
               <a:rPr lang="en-US" smtClean="0"/>
               <a:pPr/>
-              <a:t>6/9/2026</a:t>
+              <a:t>6/15/2026</a:t>
             </a:fld>
             <a:endParaRPr lang="en-US"/>
           </a:p>
@@ -2325,7 +6527,7 @@
             <a:fld id="{1D8BD707-D9CF-40AE-B4C6-C98DA3205C09}" type="datetimeFigureOut">
               <a:rPr lang="en-US" smtClean="0"/>
               <a:pPr/>
-              <a:t>6/9/2026</a:t>
+              <a:t>6/15/2026</a:t>
             </a:fld>
             <a:endParaRPr lang="en-US"/>
           </a:p>
@@ -2417,7 +6619,7 @@
             <a:fld id="{1D8BD707-D9CF-40AE-B4C6-C98DA3205C09}" type="datetimeFigureOut">
               <a:rPr lang="en-US" smtClean="0"/>
               <a:pPr/>
-              <a:t>6/9/2026</a:t>
+              <a:t>6/15/2026</a:t>
             </a:fld>
             <a:endParaRPr lang="en-US"/>
           </a:p>
@@ -2689,7 +6891,7 @@
             <a:fld id="{1D8BD707-D9CF-40AE-B4C6-C98DA3205C09}" type="datetimeFigureOut">
               <a:rPr lang="en-US" smtClean="0"/>
               <a:pPr/>
-              <a:t>6/9/2026</a:t>
+              <a:t>6/15/2026</a:t>
             </a:fld>
             <a:endParaRPr lang="en-US"/>
           </a:p>
@@ -2938,7 +7140,7 @@
             <a:fld id="{1D8BD707-D9CF-40AE-B4C6-C98DA3205C09}" type="datetimeFigureOut">
               <a:rPr lang="en-US" smtClean="0"/>
               <a:pPr/>
-              <a:t>6/9/2026</a:t>
+              <a:t>6/15/2026</a:t>
             </a:fld>
             <a:endParaRPr lang="en-US"/>
           </a:p>
@@ -3146,7 +7348,7 @@
             <a:fld id="{1D8BD707-D9CF-40AE-B4C6-C98DA3205C09}" type="datetimeFigureOut">
               <a:rPr lang="en-US" smtClean="0"/>
               <a:pPr/>
-              <a:t>6/9/2026</a:t>
+              <a:t>6/15/2026</a:t>
             </a:fld>
             <a:endParaRPr lang="en-US"/>
           </a:p>
@@ -3567,7 +7769,7 @@
             <a:blip>
               <a:extLst>
                 <a:ext uri="{96DAC541-7B7A-43D3-8B79-37D633B846F1}">
-                  <asvg:svgBlip xmlns:asvg="http://schemas.microsoft.com/office/drawing/2016/SVG/main" r:embed="rId2"/>
+                  <asvg:svgBlip xmlns:asvg="http://schemas.microsoft.com/office/drawing/2016/SVG/main" r:embed="rId3"/>
                 </a:ext>
               </a:extLst>
             </a:blip>
@@ -3614,65 +7816,6 @@
                 </a:lnTo>
                 <a:lnTo>
                   <a:pt x="0" y="3630325"/>
-                </a:lnTo>
-                <a:lnTo>
-                  <a:pt x="0" y="0"/>
-                </a:lnTo>
-                <a:close/>
-              </a:path>
-            </a:pathLst>
-          </a:custGeom>
-          <a:blipFill>
-            <a:blip>
-              <a:extLst>
-                <a:ext uri="{96DAC541-7B7A-43D3-8B79-37D633B846F1}">
-                  <asvg:svgBlip xmlns:asvg="http://schemas.microsoft.com/office/drawing/2016/SVG/main" r:embed="rId3"/>
-                </a:ext>
-              </a:extLst>
-            </a:blip>
-            <a:stretch>
-              <a:fillRect/>
-            </a:stretch>
-          </a:blipFill>
-        </p:spPr>
-        <p:txBody>
-          <a:bodyPr/>
-          <a:lstStyle/>
-          <a:p>
-            <a:endParaRPr lang="de-AT"/>
-          </a:p>
-        </p:txBody>
-      </p:sp>
-      <p:sp>
-        <p:nvSpPr>
-          <p:cNvPr id="4" name="Freeform 4"/>
-          <p:cNvSpPr/>
-          <p:nvPr/>
-        </p:nvSpPr>
-        <p:spPr>
-          <a:xfrm rot="1061051">
-            <a:off x="12885689" y="8121676"/>
-            <a:ext cx="3642065" cy="3848946"/>
-          </a:xfrm>
-          <a:custGeom>
-            <a:avLst/>
-            <a:gdLst/>
-            <a:ahLst/>
-            <a:cxnLst/>
-            <a:rect l="l" t="t" r="r" b="b"/>
-            <a:pathLst>
-              <a:path w="3642065" h="3848946">
-                <a:moveTo>
-                  <a:pt x="0" y="0"/>
-                </a:moveTo>
-                <a:lnTo>
-                  <a:pt x="3642065" y="0"/>
-                </a:lnTo>
-                <a:lnTo>
-                  <a:pt x="3642065" y="3848946"/>
-                </a:lnTo>
-                <a:lnTo>
-                  <a:pt x="0" y="3848946"/>
                 </a:lnTo>
                 <a:lnTo>
                   <a:pt x="0" y="0"/>
@@ -3704,14 +7847,14 @@
       </p:sp>
       <p:sp>
         <p:nvSpPr>
-          <p:cNvPr id="5" name="Freeform 5"/>
+          <p:cNvPr id="4" name="Freeform 4"/>
           <p:cNvSpPr/>
           <p:nvPr/>
         </p:nvSpPr>
         <p:spPr>
-          <a:xfrm rot="-411245">
-            <a:off x="7640446" y="8421029"/>
-            <a:ext cx="4476094" cy="3731943"/>
+          <a:xfrm rot="1061051">
+            <a:off x="12885689" y="8121676"/>
+            <a:ext cx="3642065" cy="3848946"/>
           </a:xfrm>
           <a:custGeom>
             <a:avLst/>
@@ -3720,18 +7863,18 @@
             <a:cxnLst/>
             <a:rect l="l" t="t" r="r" b="b"/>
             <a:pathLst>
-              <a:path w="4476094" h="3731943">
+              <a:path w="3642065" h="3848946">
                 <a:moveTo>
                   <a:pt x="0" y="0"/>
                 </a:moveTo>
                 <a:lnTo>
-                  <a:pt x="4476094" y="0"/>
-                </a:lnTo>
-                <a:lnTo>
-                  <a:pt x="4476094" y="3731943"/>
-                </a:lnTo>
-                <a:lnTo>
-                  <a:pt x="0" y="3731943"/>
+                  <a:pt x="3642065" y="0"/>
+                </a:lnTo>
+                <a:lnTo>
+                  <a:pt x="3642065" y="3848946"/>
+                </a:lnTo>
+                <a:lnTo>
+                  <a:pt x="0" y="3848946"/>
                 </a:lnTo>
                 <a:lnTo>
                   <a:pt x="0" y="0"/>
@@ -3763,14 +7906,14 @@
       </p:sp>
       <p:sp>
         <p:nvSpPr>
-          <p:cNvPr id="6" name="Freeform 6"/>
+          <p:cNvPr id="5" name="Freeform 5"/>
           <p:cNvSpPr/>
           <p:nvPr/>
         </p:nvSpPr>
         <p:spPr>
-          <a:xfrm rot="-474403">
-            <a:off x="6948183" y="-2882444"/>
-            <a:ext cx="4368067" cy="4329846"/>
+          <a:xfrm rot="-411245">
+            <a:off x="7640446" y="8421029"/>
+            <a:ext cx="4476094" cy="3731943"/>
           </a:xfrm>
           <a:custGeom>
             <a:avLst/>
@@ -3779,18 +7922,18 @@
             <a:cxnLst/>
             <a:rect l="l" t="t" r="r" b="b"/>
             <a:pathLst>
-              <a:path w="4368067" h="4329846">
+              <a:path w="4476094" h="3731943">
                 <a:moveTo>
                   <a:pt x="0" y="0"/>
                 </a:moveTo>
                 <a:lnTo>
-                  <a:pt x="4368068" y="0"/>
-                </a:lnTo>
-                <a:lnTo>
-                  <a:pt x="4368068" y="4329846"/>
-                </a:lnTo>
-                <a:lnTo>
-                  <a:pt x="0" y="4329846"/>
+                  <a:pt x="4476094" y="0"/>
+                </a:lnTo>
+                <a:lnTo>
+                  <a:pt x="4476094" y="3731943"/>
+                </a:lnTo>
+                <a:lnTo>
+                  <a:pt x="0" y="3731943"/>
                 </a:lnTo>
                 <a:lnTo>
                   <a:pt x="0" y="0"/>
@@ -3822,14 +7965,14 @@
       </p:sp>
       <p:sp>
         <p:nvSpPr>
-          <p:cNvPr id="7" name="Freeform 7"/>
+          <p:cNvPr id="6" name="Freeform 6"/>
           <p:cNvSpPr/>
           <p:nvPr/>
         </p:nvSpPr>
         <p:spPr>
-          <a:xfrm>
-            <a:off x="2095416" y="7659441"/>
-            <a:ext cx="4373018" cy="4214496"/>
+          <a:xfrm rot="-474403">
+            <a:off x="6948183" y="-2882444"/>
+            <a:ext cx="4368067" cy="4329846"/>
           </a:xfrm>
           <a:custGeom>
             <a:avLst/>
@@ -3838,18 +7981,18 @@
             <a:cxnLst/>
             <a:rect l="l" t="t" r="r" b="b"/>
             <a:pathLst>
-              <a:path w="4373018" h="4214496">
+              <a:path w="4368067" h="4329846">
                 <a:moveTo>
                   <a:pt x="0" y="0"/>
                 </a:moveTo>
                 <a:lnTo>
-                  <a:pt x="4373018" y="0"/>
-                </a:lnTo>
-                <a:lnTo>
-                  <a:pt x="4373018" y="4214496"/>
-                </a:lnTo>
-                <a:lnTo>
-                  <a:pt x="0" y="4214496"/>
+                  <a:pt x="4368068" y="0"/>
+                </a:lnTo>
+                <a:lnTo>
+                  <a:pt x="4368068" y="4329846"/>
+                </a:lnTo>
+                <a:lnTo>
+                  <a:pt x="0" y="4329846"/>
                 </a:lnTo>
                 <a:lnTo>
                   <a:pt x="0" y="0"/>
@@ -3881,14 +8024,14 @@
       </p:sp>
       <p:sp>
         <p:nvSpPr>
-          <p:cNvPr id="8" name="Freeform 8"/>
+          <p:cNvPr id="7" name="Freeform 7"/>
           <p:cNvSpPr/>
           <p:nvPr/>
         </p:nvSpPr>
         <p:spPr>
-          <a:xfrm rot="356799">
-            <a:off x="-2319440" y="7621568"/>
-            <a:ext cx="3888820" cy="3485355"/>
+          <a:xfrm>
+            <a:off x="2095416" y="7659441"/>
+            <a:ext cx="4373018" cy="4214496"/>
           </a:xfrm>
           <a:custGeom>
             <a:avLst/>
@@ -3897,18 +8040,18 @@
             <a:cxnLst/>
             <a:rect l="l" t="t" r="r" b="b"/>
             <a:pathLst>
-              <a:path w="3888820" h="3485355">
+              <a:path w="4373018" h="4214496">
                 <a:moveTo>
                   <a:pt x="0" y="0"/>
                 </a:moveTo>
                 <a:lnTo>
-                  <a:pt x="3888820" y="0"/>
-                </a:lnTo>
-                <a:lnTo>
-                  <a:pt x="3888820" y="3485354"/>
-                </a:lnTo>
-                <a:lnTo>
-                  <a:pt x="0" y="3485354"/>
+                  <a:pt x="4373018" y="0"/>
+                </a:lnTo>
+                <a:lnTo>
+                  <a:pt x="4373018" y="4214496"/>
+                </a:lnTo>
+                <a:lnTo>
+                  <a:pt x="0" y="4214496"/>
                 </a:lnTo>
                 <a:lnTo>
                   <a:pt x="0" y="0"/>
@@ -3940,14 +8083,14 @@
       </p:sp>
       <p:sp>
         <p:nvSpPr>
-          <p:cNvPr id="9" name="Freeform 9"/>
+          <p:cNvPr id="8" name="Freeform 8"/>
           <p:cNvSpPr/>
           <p:nvPr/>
         </p:nvSpPr>
         <p:spPr>
-          <a:xfrm rot="675348">
-            <a:off x="12448212" y="-1678300"/>
-            <a:ext cx="3789402" cy="3685194"/>
+          <a:xfrm rot="356799">
+            <a:off x="-2319440" y="7621568"/>
+            <a:ext cx="3888820" cy="3485355"/>
           </a:xfrm>
           <a:custGeom>
             <a:avLst/>
@@ -3956,18 +8099,18 @@
             <a:cxnLst/>
             <a:rect l="l" t="t" r="r" b="b"/>
             <a:pathLst>
-              <a:path w="3789402" h="3685194">
+              <a:path w="3888820" h="3485355">
                 <a:moveTo>
                   <a:pt x="0" y="0"/>
                 </a:moveTo>
                 <a:lnTo>
-                  <a:pt x="3789402" y="0"/>
-                </a:lnTo>
-                <a:lnTo>
-                  <a:pt x="3789402" y="3685193"/>
-                </a:lnTo>
-                <a:lnTo>
-                  <a:pt x="0" y="3685193"/>
+                  <a:pt x="3888820" y="0"/>
+                </a:lnTo>
+                <a:lnTo>
+                  <a:pt x="3888820" y="3485354"/>
+                </a:lnTo>
+                <a:lnTo>
+                  <a:pt x="0" y="3485354"/>
                 </a:lnTo>
                 <a:lnTo>
                   <a:pt x="0" y="0"/>
@@ -3999,14 +8142,14 @@
       </p:sp>
       <p:sp>
         <p:nvSpPr>
-          <p:cNvPr id="10" name="Freeform 10"/>
+          <p:cNvPr id="9" name="Freeform 9"/>
           <p:cNvSpPr/>
           <p:nvPr/>
         </p:nvSpPr>
         <p:spPr>
-          <a:xfrm rot="710027">
-            <a:off x="1788193" y="-1759765"/>
-            <a:ext cx="4057937" cy="3692723"/>
+          <a:xfrm rot="675348">
+            <a:off x="12448212" y="-1678300"/>
+            <a:ext cx="3789402" cy="3685194"/>
           </a:xfrm>
           <a:custGeom>
             <a:avLst/>
@@ -4015,18 +8158,18 @@
             <a:cxnLst/>
             <a:rect l="l" t="t" r="r" b="b"/>
             <a:pathLst>
-              <a:path w="4057937" h="3692723">
+              <a:path w="3789402" h="3685194">
                 <a:moveTo>
                   <a:pt x="0" y="0"/>
                 </a:moveTo>
                 <a:lnTo>
-                  <a:pt x="4057938" y="0"/>
-                </a:lnTo>
-                <a:lnTo>
-                  <a:pt x="4057938" y="3692723"/>
-                </a:lnTo>
-                <a:lnTo>
-                  <a:pt x="0" y="3692723"/>
+                  <a:pt x="3789402" y="0"/>
+                </a:lnTo>
+                <a:lnTo>
+                  <a:pt x="3789402" y="3685193"/>
+                </a:lnTo>
+                <a:lnTo>
+                  <a:pt x="0" y="3685193"/>
                 </a:lnTo>
                 <a:lnTo>
                   <a:pt x="0" y="0"/>
@@ -4058,14 +8201,14 @@
       </p:sp>
       <p:sp>
         <p:nvSpPr>
-          <p:cNvPr id="11" name="Freeform 11"/>
+          <p:cNvPr id="10" name="Freeform 10"/>
           <p:cNvSpPr/>
           <p:nvPr/>
         </p:nvSpPr>
         <p:spPr>
-          <a:xfrm rot="261574">
-            <a:off x="16941865" y="-1490132"/>
-            <a:ext cx="3763596" cy="3792036"/>
+          <a:xfrm rot="710027">
+            <a:off x="1788193" y="-1759765"/>
+            <a:ext cx="4057937" cy="3692723"/>
           </a:xfrm>
           <a:custGeom>
             <a:avLst/>
@@ -4074,18 +8217,18 @@
             <a:cxnLst/>
             <a:rect l="l" t="t" r="r" b="b"/>
             <a:pathLst>
-              <a:path w="3763596" h="3792036">
+              <a:path w="4057937" h="3692723">
                 <a:moveTo>
                   <a:pt x="0" y="0"/>
                 </a:moveTo>
                 <a:lnTo>
-                  <a:pt x="3763596" y="0"/>
-                </a:lnTo>
-                <a:lnTo>
-                  <a:pt x="3763596" y="3792036"/>
-                </a:lnTo>
-                <a:lnTo>
-                  <a:pt x="0" y="3792036"/>
+                  <a:pt x="4057938" y="0"/>
+                </a:lnTo>
+                <a:lnTo>
+                  <a:pt x="4057938" y="3692723"/>
+                </a:lnTo>
+                <a:lnTo>
+                  <a:pt x="0" y="3692723"/>
                 </a:lnTo>
                 <a:lnTo>
                   <a:pt x="0" y="0"/>
@@ -4117,99 +8260,14 @@
       </p:sp>
       <p:sp>
         <p:nvSpPr>
-          <p:cNvPr id="12" name="TextBox 12"/>
-          <p:cNvSpPr txBox="1"/>
-          <p:nvPr/>
-        </p:nvSpPr>
-        <p:spPr>
-          <a:xfrm>
-            <a:off x="4000684" y="3937719"/>
-            <a:ext cx="10286632" cy="3314307"/>
-          </a:xfrm>
-          <a:prstGeom prst="rect">
-            <a:avLst/>
-          </a:prstGeom>
-        </p:spPr>
-        <p:txBody>
-          <a:bodyPr lIns="0" tIns="0" rIns="0" bIns="0" rtlCol="0" anchor="t">
-            <a:spAutoFit/>
-          </a:bodyPr>
-          <a:lstStyle/>
-          <a:p>
-            <a:pPr algn="ctr">
-              <a:lnSpc>
-                <a:spcPts val="8616"/>
-              </a:lnSpc>
-            </a:pPr>
-            <a:r>
-              <a:rPr lang="en-US" sz="8053" dirty="0">
-                <a:solidFill>
-                  <a:srgbClr val="558DFD"/>
-                </a:solidFill>
-                <a:latin typeface="Bobby Jones Soft"/>
-                <a:ea typeface="Bobby Jones Soft"/>
-                <a:cs typeface="Bobby Jones Soft"/>
-                <a:sym typeface="Bobby Jones Soft"/>
-              </a:rPr>
-              <a:t>ChatGPT-3.5 as writing assistance in students’ essays</a:t>
-            </a:r>
-          </a:p>
-        </p:txBody>
-      </p:sp>
-      <p:sp>
-        <p:nvSpPr>
-          <p:cNvPr id="13" name="TextBox 13"/>
-          <p:cNvSpPr txBox="1"/>
-          <p:nvPr/>
-        </p:nvSpPr>
-        <p:spPr>
-          <a:xfrm>
-            <a:off x="4000684" y="2781448"/>
-            <a:ext cx="10286632" cy="716102"/>
-          </a:xfrm>
-          <a:prstGeom prst="rect">
-            <a:avLst/>
-          </a:prstGeom>
-        </p:spPr>
-        <p:txBody>
-          <a:bodyPr lIns="0" tIns="0" rIns="0" bIns="0" rtlCol="0" anchor="t">
-            <a:spAutoFit/>
-          </a:bodyPr>
-          <a:lstStyle/>
-          <a:p>
-            <a:pPr algn="ctr">
-              <a:lnSpc>
-                <a:spcPts val="5703"/>
-              </a:lnSpc>
-              <a:spcBef>
-                <a:spcPct val="0"/>
-              </a:spcBef>
-            </a:pPr>
-            <a:r>
-              <a:rPr lang="en-US" sz="4073" dirty="0">
-                <a:solidFill>
-                  <a:srgbClr val="000000"/>
-                </a:solidFill>
-                <a:latin typeface="Bricolage Grotesque"/>
-                <a:ea typeface="Bricolage Grotesque"/>
-                <a:cs typeface="Bricolage Grotesque"/>
-                <a:sym typeface="Bricolage Grotesque"/>
-              </a:rPr>
-              <a:t>Bašić et al. (2023)</a:t>
-            </a:r>
-          </a:p>
-        </p:txBody>
-      </p:sp>
-      <p:sp>
-        <p:nvSpPr>
-          <p:cNvPr id="14" name="Freeform 14"/>
+          <p:cNvPr id="11" name="Freeform 11"/>
           <p:cNvSpPr/>
           <p:nvPr/>
         </p:nvSpPr>
         <p:spPr>
-          <a:xfrm>
-            <a:off x="-2482149" y="-1417257"/>
-            <a:ext cx="3294905" cy="3163108"/>
+          <a:xfrm rot="261574">
+            <a:off x="16941865" y="-1490132"/>
+            <a:ext cx="3763596" cy="3792036"/>
           </a:xfrm>
           <a:custGeom>
             <a:avLst/>
@@ -4218,18 +8276,18 @@
             <a:cxnLst/>
             <a:rect l="l" t="t" r="r" b="b"/>
             <a:pathLst>
-              <a:path w="3294905" h="3163108">
+              <a:path w="3763596" h="3792036">
                 <a:moveTo>
                   <a:pt x="0" y="0"/>
                 </a:moveTo>
                 <a:lnTo>
-                  <a:pt x="3294904" y="0"/>
-                </a:lnTo>
-                <a:lnTo>
-                  <a:pt x="3294904" y="3163108"/>
-                </a:lnTo>
-                <a:lnTo>
-                  <a:pt x="0" y="3163108"/>
+                  <a:pt x="3763596" y="0"/>
+                </a:lnTo>
+                <a:lnTo>
+                  <a:pt x="3763596" y="3792036"/>
+                </a:lnTo>
+                <a:lnTo>
+                  <a:pt x="0" y="3792036"/>
                 </a:lnTo>
                 <a:lnTo>
                   <a:pt x="0" y="0"/>
@@ -4261,6 +8319,150 @@
       </p:sp>
       <p:sp>
         <p:nvSpPr>
+          <p:cNvPr id="12" name="TextBox 12"/>
+          <p:cNvSpPr txBox="1"/>
+          <p:nvPr/>
+        </p:nvSpPr>
+        <p:spPr>
+          <a:xfrm>
+            <a:off x="4000684" y="3937719"/>
+            <a:ext cx="10286632" cy="3314307"/>
+          </a:xfrm>
+          <a:prstGeom prst="rect">
+            <a:avLst/>
+          </a:prstGeom>
+        </p:spPr>
+        <p:txBody>
+          <a:bodyPr lIns="0" tIns="0" rIns="0" bIns="0" rtlCol="0" anchor="t">
+            <a:spAutoFit/>
+          </a:bodyPr>
+          <a:lstStyle/>
+          <a:p>
+            <a:pPr algn="ctr">
+              <a:lnSpc>
+                <a:spcPts val="8616"/>
+              </a:lnSpc>
+            </a:pPr>
+            <a:r>
+              <a:rPr lang="en-US" sz="8053" dirty="0">
+                <a:solidFill>
+                  <a:srgbClr val="558DFD"/>
+                </a:solidFill>
+                <a:latin typeface="Bobby Jones Soft"/>
+                <a:ea typeface="Bobby Jones Soft"/>
+                <a:cs typeface="Bobby Jones Soft"/>
+                <a:sym typeface="Bobby Jones Soft"/>
+              </a:rPr>
+              <a:t>ChatGPT-3.5 as writing assistance in students’ essays</a:t>
+            </a:r>
+          </a:p>
+        </p:txBody>
+      </p:sp>
+      <p:sp>
+        <p:nvSpPr>
+          <p:cNvPr id="13" name="TextBox 13"/>
+          <p:cNvSpPr txBox="1"/>
+          <p:nvPr/>
+        </p:nvSpPr>
+        <p:spPr>
+          <a:xfrm>
+            <a:off x="4000684" y="2781448"/>
+            <a:ext cx="10286632" cy="716102"/>
+          </a:xfrm>
+          <a:prstGeom prst="rect">
+            <a:avLst/>
+          </a:prstGeom>
+        </p:spPr>
+        <p:txBody>
+          <a:bodyPr lIns="0" tIns="0" rIns="0" bIns="0" rtlCol="0" anchor="t">
+            <a:spAutoFit/>
+          </a:bodyPr>
+          <a:lstStyle/>
+          <a:p>
+            <a:pPr algn="ctr">
+              <a:lnSpc>
+                <a:spcPts val="5703"/>
+              </a:lnSpc>
+              <a:spcBef>
+                <a:spcPct val="0"/>
+              </a:spcBef>
+            </a:pPr>
+            <a:r>
+              <a:rPr lang="en-US" sz="4073" dirty="0">
+                <a:solidFill>
+                  <a:srgbClr val="000000"/>
+                </a:solidFill>
+                <a:latin typeface="Bricolage Grotesque"/>
+                <a:ea typeface="Bricolage Grotesque"/>
+                <a:cs typeface="Bricolage Grotesque"/>
+                <a:sym typeface="Bricolage Grotesque"/>
+              </a:rPr>
+              <a:t>Bašić et al. (2023)</a:t>
+            </a:r>
+          </a:p>
+        </p:txBody>
+      </p:sp>
+      <p:sp>
+        <p:nvSpPr>
+          <p:cNvPr id="14" name="Freeform 14"/>
+          <p:cNvSpPr/>
+          <p:nvPr/>
+        </p:nvSpPr>
+        <p:spPr>
+          <a:xfrm>
+            <a:off x="-2482149" y="-1417257"/>
+            <a:ext cx="3294905" cy="3163108"/>
+          </a:xfrm>
+          <a:custGeom>
+            <a:avLst/>
+            <a:gdLst/>
+            <a:ahLst/>
+            <a:cxnLst/>
+            <a:rect l="l" t="t" r="r" b="b"/>
+            <a:pathLst>
+              <a:path w="3294905" h="3163108">
+                <a:moveTo>
+                  <a:pt x="0" y="0"/>
+                </a:moveTo>
+                <a:lnTo>
+                  <a:pt x="3294904" y="0"/>
+                </a:lnTo>
+                <a:lnTo>
+                  <a:pt x="3294904" y="3163108"/>
+                </a:lnTo>
+                <a:lnTo>
+                  <a:pt x="0" y="3163108"/>
+                </a:lnTo>
+                <a:lnTo>
+                  <a:pt x="0" y="0"/>
+                </a:lnTo>
+                <a:close/>
+              </a:path>
+            </a:pathLst>
+          </a:custGeom>
+          <a:blipFill>
+            <a:blip>
+              <a:extLst>
+                <a:ext uri="{96DAC541-7B7A-43D3-8B79-37D633B846F1}">
+                  <asvg:svgBlip xmlns:asvg="http://schemas.microsoft.com/office/drawing/2016/SVG/main" r:embed="rId13"/>
+                </a:ext>
+              </a:extLst>
+            </a:blip>
+            <a:stretch>
+              <a:fillRect/>
+            </a:stretch>
+          </a:blipFill>
+        </p:spPr>
+        <p:txBody>
+          <a:bodyPr/>
+          <a:lstStyle/>
+          <a:p>
+            <a:endParaRPr lang="de-AT"/>
+          </a:p>
+        </p:txBody>
+      </p:sp>
+      <p:sp>
+        <p:nvSpPr>
           <p:cNvPr id="15" name="Freeform 15"/>
           <p:cNvSpPr/>
           <p:nvPr/>
@@ -4301,7 +8503,7 @@
             <a:blip>
               <a:extLst>
                 <a:ext uri="{96DAC541-7B7A-43D3-8B79-37D633B846F1}">
-                  <asvg:svgBlip xmlns:asvg="http://schemas.microsoft.com/office/drawing/2016/SVG/main" r:embed="rId12"/>
+                  <asvg:svgBlip xmlns:asvg="http://schemas.microsoft.com/office/drawing/2016/SVG/main" r:embed="rId13"/>
                 </a:ext>
               </a:extLst>
             </a:blip>
@@ -4393,7 +8595,7 @@
             <a:blip>
               <a:extLst>
                 <a:ext uri="{96DAC541-7B7A-43D3-8B79-37D633B846F1}">
-                  <asvg:svgBlip xmlns:asvg="http://schemas.microsoft.com/office/drawing/2016/SVG/main" r:embed="rId2"/>
+                  <asvg:svgBlip xmlns:asvg="http://schemas.microsoft.com/office/drawing/2016/SVG/main" r:embed="rId3"/>
                 </a:ext>
               </a:extLst>
             </a:blip>
@@ -4911,7 +9113,7 @@
             <a:blip>
               <a:extLst>
                 <a:ext uri="{96DAC541-7B7A-43D3-8B79-37D633B846F1}">
-                  <asvg:svgBlip xmlns:asvg="http://schemas.microsoft.com/office/drawing/2016/SVG/main" r:embed="rId3"/>
+                  <asvg:svgBlip xmlns:asvg="http://schemas.microsoft.com/office/drawing/2016/SVG/main" r:embed="rId4"/>
                 </a:ext>
               </a:extLst>
             </a:blip>
@@ -5215,7 +9417,7 @@
             <a:blip>
               <a:extLst>
                 <a:ext uri="{96DAC541-7B7A-43D3-8B79-37D633B846F1}">
-                  <asvg:svgBlip xmlns:asvg="http://schemas.microsoft.com/office/drawing/2016/SVG/main" r:embed="rId2"/>
+                  <asvg:svgBlip xmlns:asvg="http://schemas.microsoft.com/office/drawing/2016/SVG/main" r:embed="rId3"/>
                 </a:ext>
               </a:extLst>
             </a:blip>
@@ -5364,7 +9566,7 @@
             <a:blip>
               <a:extLst>
                 <a:ext uri="{96DAC541-7B7A-43D3-8B79-37D633B846F1}">
-                  <asvg:svgBlip xmlns:asvg="http://schemas.microsoft.com/office/drawing/2016/SVG/main" r:embed="rId3"/>
+                  <asvg:svgBlip xmlns:asvg="http://schemas.microsoft.com/office/drawing/2016/SVG/main" r:embed="rId4"/>
                 </a:ext>
               </a:extLst>
             </a:blip>
@@ -5420,7 +9622,7 @@
             </a:pathLst>
           </a:custGeom>
           <a:blipFill>
-            <a:blip r:embed="rId4"/>
+            <a:blip r:embed="rId5"/>
             <a:stretch>
               <a:fillRect/>
             </a:stretch>
@@ -5476,7 +9678,7 @@
             <a:blip>
               <a:extLst>
                 <a:ext uri="{96DAC541-7B7A-43D3-8B79-37D633B846F1}">
-                  <asvg:svgBlip xmlns:asvg="http://schemas.microsoft.com/office/drawing/2016/SVG/main" r:embed="rId5"/>
+                  <asvg:svgBlip xmlns:asvg="http://schemas.microsoft.com/office/drawing/2016/SVG/main" r:embed="rId6"/>
                 </a:ext>
               </a:extLst>
             </a:blip>
@@ -5535,7 +9737,7 @@
             <a:blip>
               <a:extLst>
                 <a:ext uri="{96DAC541-7B7A-43D3-8B79-37D633B846F1}">
-                  <asvg:svgBlip xmlns:asvg="http://schemas.microsoft.com/office/drawing/2016/SVG/main" r:embed="rId6"/>
+                  <asvg:svgBlip xmlns:asvg="http://schemas.microsoft.com/office/drawing/2016/SVG/main" r:embed="rId7"/>
                 </a:ext>
               </a:extLst>
             </a:blip>
@@ -6282,7 +10484,7 @@
             <a:blip>
               <a:extLst>
                 <a:ext uri="{96DAC541-7B7A-43D3-8B79-37D633B846F1}">
-                  <asvg:svgBlip xmlns:asvg="http://schemas.microsoft.com/office/drawing/2016/SVG/main" r:embed="rId2"/>
+                  <asvg:svgBlip xmlns:asvg="http://schemas.microsoft.com/office/drawing/2016/SVG/main" r:embed="rId3"/>
                 </a:ext>
               </a:extLst>
             </a:blip>
@@ -6464,7 +10666,7 @@
             <a:blip>
               <a:extLst>
                 <a:ext uri="{96DAC541-7B7A-43D3-8B79-37D633B846F1}">
-                  <asvg:svgBlip xmlns:asvg="http://schemas.microsoft.com/office/drawing/2016/SVG/main" r:embed="rId3"/>
+                  <asvg:svgBlip xmlns:asvg="http://schemas.microsoft.com/office/drawing/2016/SVG/main" r:embed="rId4"/>
                 </a:ext>
               </a:extLst>
             </a:blip>
@@ -6523,7 +10725,7 @@
             <a:blip>
               <a:extLst>
                 <a:ext uri="{96DAC541-7B7A-43D3-8B79-37D633B846F1}">
-                  <asvg:svgBlip xmlns:asvg="http://schemas.microsoft.com/office/drawing/2016/SVG/main" r:embed="rId4"/>
+                  <asvg:svgBlip xmlns:asvg="http://schemas.microsoft.com/office/drawing/2016/SVG/main" r:embed="rId5"/>
                 </a:ext>
               </a:extLst>
             </a:blip>
@@ -6664,7 +10866,7 @@
             <a:blip>
               <a:extLst>
                 <a:ext uri="{96DAC541-7B7A-43D3-8B79-37D633B846F1}">
-                  <asvg:svgBlip xmlns:asvg="http://schemas.microsoft.com/office/drawing/2016/SVG/main" r:embed="rId5"/>
+                  <asvg:svgBlip xmlns:asvg="http://schemas.microsoft.com/office/drawing/2016/SVG/main" r:embed="rId6"/>
                 </a:ext>
               </a:extLst>
             </a:blip>
@@ -7525,7 +11727,7 @@
               <a:blip>
                 <a:extLst>
                   <a:ext uri="{96DAC541-7B7A-43D3-8B79-37D633B846F1}">
-                    <asvg:svgBlip xmlns:asvg="http://schemas.microsoft.com/office/drawing/2016/SVG/main" r:embed="rId2"/>
+                    <asvg:svgBlip xmlns:asvg="http://schemas.microsoft.com/office/drawing/2016/SVG/main" r:embed="rId3"/>
                   </a:ext>
                 </a:extLst>
               </a:blip>
@@ -7928,7 +12130,7 @@
               <a:blip>
                 <a:extLst>
                   <a:ext uri="{96DAC541-7B7A-43D3-8B79-37D633B846F1}">
-                    <asvg:svgBlip xmlns:asvg="http://schemas.microsoft.com/office/drawing/2016/SVG/main" r:embed="rId3"/>
+                    <asvg:svgBlip xmlns:asvg="http://schemas.microsoft.com/office/drawing/2016/SVG/main" r:embed="rId4"/>
                   </a:ext>
                 </a:extLst>
               </a:blip>
@@ -8133,7 +12335,7 @@
             <a:blip>
               <a:extLst>
                 <a:ext uri="{96DAC541-7B7A-43D3-8B79-37D633B846F1}">
-                  <asvg:svgBlip xmlns:asvg="http://schemas.microsoft.com/office/drawing/2016/SVG/main" r:embed="rId4"/>
+                  <asvg:svgBlip xmlns:asvg="http://schemas.microsoft.com/office/drawing/2016/SVG/main" r:embed="rId5"/>
                 </a:ext>
               </a:extLst>
             </a:blip>
@@ -8180,65 +12382,6 @@
                 </a:lnTo>
                 <a:lnTo>
                   <a:pt x="0" y="3330091"/>
-                </a:lnTo>
-                <a:lnTo>
-                  <a:pt x="0" y="0"/>
-                </a:lnTo>
-                <a:close/>
-              </a:path>
-            </a:pathLst>
-          </a:custGeom>
-          <a:blipFill>
-            <a:blip>
-              <a:extLst>
-                <a:ext uri="{96DAC541-7B7A-43D3-8B79-37D633B846F1}">
-                  <asvg:svgBlip xmlns:asvg="http://schemas.microsoft.com/office/drawing/2016/SVG/main" r:embed="rId5"/>
-                </a:ext>
-              </a:extLst>
-            </a:blip>
-            <a:stretch>
-              <a:fillRect/>
-            </a:stretch>
-          </a:blipFill>
-        </p:spPr>
-        <p:txBody>
-          <a:bodyPr/>
-          <a:lstStyle/>
-          <a:p>
-            <a:endParaRPr lang="de-AT"/>
-          </a:p>
-        </p:txBody>
-      </p:sp>
-      <p:sp>
-        <p:nvSpPr>
-          <p:cNvPr id="28" name="Freeform 28"/>
-          <p:cNvSpPr/>
-          <p:nvPr/>
-        </p:nvSpPr>
-        <p:spPr>
-          <a:xfrm>
-            <a:off x="-654506" y="7962900"/>
-            <a:ext cx="3607581" cy="3476806"/>
-          </a:xfrm>
-          <a:custGeom>
-            <a:avLst/>
-            <a:gdLst/>
-            <a:ahLst/>
-            <a:cxnLst/>
-            <a:rect l="l" t="t" r="r" b="b"/>
-            <a:pathLst>
-              <a:path w="3607581" h="3476806">
-                <a:moveTo>
-                  <a:pt x="0" y="0"/>
-                </a:moveTo>
-                <a:lnTo>
-                  <a:pt x="3607581" y="0"/>
-                </a:lnTo>
-                <a:lnTo>
-                  <a:pt x="3607581" y="3476806"/>
-                </a:lnTo>
-                <a:lnTo>
-                  <a:pt x="0" y="3476806"/>
                 </a:lnTo>
                 <a:lnTo>
                   <a:pt x="0" y="0"/>
@@ -8270,14 +12413,14 @@
       </p:sp>
       <p:sp>
         <p:nvSpPr>
-          <p:cNvPr id="29" name="Freeform 29"/>
+          <p:cNvPr id="28" name="Freeform 28"/>
           <p:cNvSpPr/>
           <p:nvPr/>
         </p:nvSpPr>
         <p:spPr>
-          <a:xfrm rot="359659">
-            <a:off x="15708951" y="8406456"/>
-            <a:ext cx="3100699" cy="3015430"/>
+          <a:xfrm>
+            <a:off x="-654506" y="7962900"/>
+            <a:ext cx="3607581" cy="3476806"/>
           </a:xfrm>
           <a:custGeom>
             <a:avLst/>
@@ -8286,18 +12429,18 @@
             <a:cxnLst/>
             <a:rect l="l" t="t" r="r" b="b"/>
             <a:pathLst>
-              <a:path w="3100699" h="3015430">
+              <a:path w="3607581" h="3476806">
                 <a:moveTo>
                   <a:pt x="0" y="0"/>
                 </a:moveTo>
                 <a:lnTo>
-                  <a:pt x="3100698" y="0"/>
-                </a:lnTo>
-                <a:lnTo>
-                  <a:pt x="3100698" y="3015430"/>
-                </a:lnTo>
-                <a:lnTo>
-                  <a:pt x="0" y="3015430"/>
+                  <a:pt x="3607581" y="0"/>
+                </a:lnTo>
+                <a:lnTo>
+                  <a:pt x="3607581" y="3476806"/>
+                </a:lnTo>
+                <a:lnTo>
+                  <a:pt x="0" y="3476806"/>
                 </a:lnTo>
                 <a:lnTo>
                   <a:pt x="0" y="0"/>
@@ -8329,6 +12472,65 @@
       </p:sp>
       <p:sp>
         <p:nvSpPr>
+          <p:cNvPr id="29" name="Freeform 29"/>
+          <p:cNvSpPr/>
+          <p:nvPr/>
+        </p:nvSpPr>
+        <p:spPr>
+          <a:xfrm rot="359659">
+            <a:off x="15708951" y="8406456"/>
+            <a:ext cx="3100699" cy="3015430"/>
+          </a:xfrm>
+          <a:custGeom>
+            <a:avLst/>
+            <a:gdLst/>
+            <a:ahLst/>
+            <a:cxnLst/>
+            <a:rect l="l" t="t" r="r" b="b"/>
+            <a:pathLst>
+              <a:path w="3100699" h="3015430">
+                <a:moveTo>
+                  <a:pt x="0" y="0"/>
+                </a:moveTo>
+                <a:lnTo>
+                  <a:pt x="3100698" y="0"/>
+                </a:lnTo>
+                <a:lnTo>
+                  <a:pt x="3100698" y="3015430"/>
+                </a:lnTo>
+                <a:lnTo>
+                  <a:pt x="0" y="3015430"/>
+                </a:lnTo>
+                <a:lnTo>
+                  <a:pt x="0" y="0"/>
+                </a:lnTo>
+                <a:close/>
+              </a:path>
+            </a:pathLst>
+          </a:custGeom>
+          <a:blipFill>
+            <a:blip>
+              <a:extLst>
+                <a:ext uri="{96DAC541-7B7A-43D3-8B79-37D633B846F1}">
+                  <asvg:svgBlip xmlns:asvg="http://schemas.microsoft.com/office/drawing/2016/SVG/main" r:embed="rId8"/>
+                </a:ext>
+              </a:extLst>
+            </a:blip>
+            <a:stretch>
+              <a:fillRect/>
+            </a:stretch>
+          </a:blipFill>
+        </p:spPr>
+        <p:txBody>
+          <a:bodyPr/>
+          <a:lstStyle/>
+          <a:p>
+            <a:endParaRPr lang="de-AT"/>
+          </a:p>
+        </p:txBody>
+      </p:sp>
+      <p:sp>
+        <p:nvSpPr>
           <p:cNvPr id="30" name="Freeform 30"/>
           <p:cNvSpPr/>
           <p:nvPr/>
@@ -8369,7 +12571,7 @@
             <a:blip>
               <a:extLst>
                 <a:ext uri="{96DAC541-7B7A-43D3-8B79-37D633B846F1}">
-                  <asvg:svgBlip xmlns:asvg="http://schemas.microsoft.com/office/drawing/2016/SVG/main" r:embed="rId8"/>
+                  <asvg:svgBlip xmlns:asvg="http://schemas.microsoft.com/office/drawing/2016/SVG/main" r:embed="rId9"/>
                 </a:ext>
               </a:extLst>
             </a:blip>
@@ -8815,7 +13017,7 @@
             <a:blip>
               <a:extLst>
                 <a:ext uri="{96DAC541-7B7A-43D3-8B79-37D633B846F1}">
-                  <asvg:svgBlip xmlns:asvg="http://schemas.microsoft.com/office/drawing/2016/SVG/main" r:embed="rId2"/>
+                  <asvg:svgBlip xmlns:asvg="http://schemas.microsoft.com/office/drawing/2016/SVG/main" r:embed="rId3"/>
                 </a:ext>
               </a:extLst>
             </a:blip>
@@ -9087,7 +13289,7 @@
             <a:blip>
               <a:extLst>
                 <a:ext uri="{96DAC541-7B7A-43D3-8B79-37D633B846F1}">
-                  <asvg:svgBlip xmlns:asvg="http://schemas.microsoft.com/office/drawing/2016/SVG/main" r:embed="rId2"/>
+                  <asvg:svgBlip xmlns:asvg="http://schemas.microsoft.com/office/drawing/2016/SVG/main" r:embed="rId3"/>
                 </a:ext>
               </a:extLst>
             </a:blip>
@@ -9134,65 +13336,6 @@
                 </a:lnTo>
                 <a:lnTo>
                   <a:pt x="0" y="3630325"/>
-                </a:lnTo>
-                <a:lnTo>
-                  <a:pt x="0" y="0"/>
-                </a:lnTo>
-                <a:close/>
-              </a:path>
-            </a:pathLst>
-          </a:custGeom>
-          <a:blipFill>
-            <a:blip>
-              <a:extLst>
-                <a:ext uri="{96DAC541-7B7A-43D3-8B79-37D633B846F1}">
-                  <asvg:svgBlip xmlns:asvg="http://schemas.microsoft.com/office/drawing/2016/SVG/main" r:embed="rId3"/>
-                </a:ext>
-              </a:extLst>
-            </a:blip>
-            <a:stretch>
-              <a:fillRect/>
-            </a:stretch>
-          </a:blipFill>
-        </p:spPr>
-        <p:txBody>
-          <a:bodyPr/>
-          <a:lstStyle/>
-          <a:p>
-            <a:endParaRPr lang="de-AT"/>
-          </a:p>
-        </p:txBody>
-      </p:sp>
-      <p:sp>
-        <p:nvSpPr>
-          <p:cNvPr id="4" name="Freeform 4"/>
-          <p:cNvSpPr/>
-          <p:nvPr/>
-        </p:nvSpPr>
-        <p:spPr>
-          <a:xfrm rot="1061051">
-            <a:off x="12862599" y="7878048"/>
-            <a:ext cx="3642065" cy="3848946"/>
-          </a:xfrm>
-          <a:custGeom>
-            <a:avLst/>
-            <a:gdLst/>
-            <a:ahLst/>
-            <a:cxnLst/>
-            <a:rect l="l" t="t" r="r" b="b"/>
-            <a:pathLst>
-              <a:path w="3642065" h="3848946">
-                <a:moveTo>
-                  <a:pt x="0" y="0"/>
-                </a:moveTo>
-                <a:lnTo>
-                  <a:pt x="3642065" y="0"/>
-                </a:lnTo>
-                <a:lnTo>
-                  <a:pt x="3642065" y="3848946"/>
-                </a:lnTo>
-                <a:lnTo>
-                  <a:pt x="0" y="3848946"/>
                 </a:lnTo>
                 <a:lnTo>
                   <a:pt x="0" y="0"/>
@@ -9224,14 +13367,14 @@
       </p:sp>
       <p:sp>
         <p:nvSpPr>
-          <p:cNvPr id="5" name="Freeform 5"/>
+          <p:cNvPr id="4" name="Freeform 4"/>
           <p:cNvSpPr/>
           <p:nvPr/>
         </p:nvSpPr>
         <p:spPr>
-          <a:xfrm rot="-411245">
-            <a:off x="7681266" y="8281653"/>
-            <a:ext cx="4476094" cy="3731943"/>
+          <a:xfrm rot="1061051">
+            <a:off x="12862599" y="7878048"/>
+            <a:ext cx="3642065" cy="3848946"/>
           </a:xfrm>
           <a:custGeom>
             <a:avLst/>
@@ -9240,18 +13383,18 @@
             <a:cxnLst/>
             <a:rect l="l" t="t" r="r" b="b"/>
             <a:pathLst>
-              <a:path w="4476094" h="3731943">
+              <a:path w="3642065" h="3848946">
                 <a:moveTo>
                   <a:pt x="0" y="0"/>
                 </a:moveTo>
                 <a:lnTo>
-                  <a:pt x="4476094" y="0"/>
-                </a:lnTo>
-                <a:lnTo>
-                  <a:pt x="4476094" y="3731943"/>
-                </a:lnTo>
-                <a:lnTo>
-                  <a:pt x="0" y="3731943"/>
+                  <a:pt x="3642065" y="0"/>
+                </a:lnTo>
+                <a:lnTo>
+                  <a:pt x="3642065" y="3848946"/>
+                </a:lnTo>
+                <a:lnTo>
+                  <a:pt x="0" y="3848946"/>
                 </a:lnTo>
                 <a:lnTo>
                   <a:pt x="0" y="0"/>
@@ -9283,14 +13426,14 @@
       </p:sp>
       <p:sp>
         <p:nvSpPr>
-          <p:cNvPr id="6" name="Freeform 6"/>
+          <p:cNvPr id="5" name="Freeform 5"/>
           <p:cNvSpPr/>
           <p:nvPr/>
         </p:nvSpPr>
         <p:spPr>
-          <a:xfrm rot="-474403">
-            <a:off x="6959966" y="-2119797"/>
-            <a:ext cx="4368067" cy="4329846"/>
+          <a:xfrm rot="-411245">
+            <a:off x="7681266" y="8281653"/>
+            <a:ext cx="4476094" cy="3731943"/>
           </a:xfrm>
           <a:custGeom>
             <a:avLst/>
@@ -9299,18 +13442,18 @@
             <a:cxnLst/>
             <a:rect l="l" t="t" r="r" b="b"/>
             <a:pathLst>
-              <a:path w="4368067" h="4329846">
+              <a:path w="4476094" h="3731943">
                 <a:moveTo>
                   <a:pt x="0" y="0"/>
                 </a:moveTo>
                 <a:lnTo>
-                  <a:pt x="4368068" y="0"/>
-                </a:lnTo>
-                <a:lnTo>
-                  <a:pt x="4368068" y="4329846"/>
-                </a:lnTo>
-                <a:lnTo>
-                  <a:pt x="0" y="4329846"/>
+                  <a:pt x="4476094" y="0"/>
+                </a:lnTo>
+                <a:lnTo>
+                  <a:pt x="4476094" y="3731943"/>
+                </a:lnTo>
+                <a:lnTo>
+                  <a:pt x="0" y="3731943"/>
                 </a:lnTo>
                 <a:lnTo>
                   <a:pt x="0" y="0"/>
@@ -9342,14 +13485,14 @@
       </p:sp>
       <p:sp>
         <p:nvSpPr>
-          <p:cNvPr id="7" name="Freeform 7"/>
+          <p:cNvPr id="6" name="Freeform 6"/>
           <p:cNvSpPr/>
           <p:nvPr/>
         </p:nvSpPr>
         <p:spPr>
-          <a:xfrm>
-            <a:off x="2470295" y="7921556"/>
-            <a:ext cx="4373018" cy="4214496"/>
+          <a:xfrm rot="-474403">
+            <a:off x="6959966" y="-2119797"/>
+            <a:ext cx="4368067" cy="4329846"/>
           </a:xfrm>
           <a:custGeom>
             <a:avLst/>
@@ -9358,18 +13501,18 @@
             <a:cxnLst/>
             <a:rect l="l" t="t" r="r" b="b"/>
             <a:pathLst>
-              <a:path w="4373018" h="4214496">
+              <a:path w="4368067" h="4329846">
                 <a:moveTo>
                   <a:pt x="0" y="0"/>
                 </a:moveTo>
                 <a:lnTo>
-                  <a:pt x="4373018" y="0"/>
-                </a:lnTo>
-                <a:lnTo>
-                  <a:pt x="4373018" y="4214496"/>
-                </a:lnTo>
-                <a:lnTo>
-                  <a:pt x="0" y="4214496"/>
+                  <a:pt x="4368068" y="0"/>
+                </a:lnTo>
+                <a:lnTo>
+                  <a:pt x="4368068" y="4329846"/>
+                </a:lnTo>
+                <a:lnTo>
+                  <a:pt x="0" y="4329846"/>
                 </a:lnTo>
                 <a:lnTo>
                   <a:pt x="0" y="0"/>
@@ -9401,14 +13544,14 @@
       </p:sp>
       <p:sp>
         <p:nvSpPr>
-          <p:cNvPr id="8" name="Freeform 8"/>
+          <p:cNvPr id="7" name="Freeform 7"/>
           <p:cNvSpPr/>
           <p:nvPr/>
         </p:nvSpPr>
         <p:spPr>
-          <a:xfrm rot="356799">
-            <a:off x="-2200203" y="7515623"/>
-            <a:ext cx="3888820" cy="3485355"/>
+          <a:xfrm>
+            <a:off x="2470295" y="7921556"/>
+            <a:ext cx="4373018" cy="4214496"/>
           </a:xfrm>
           <a:custGeom>
             <a:avLst/>
@@ -9417,18 +13560,18 @@
             <a:cxnLst/>
             <a:rect l="l" t="t" r="r" b="b"/>
             <a:pathLst>
-              <a:path w="3888820" h="3485355">
+              <a:path w="4373018" h="4214496">
                 <a:moveTo>
                   <a:pt x="0" y="0"/>
                 </a:moveTo>
                 <a:lnTo>
-                  <a:pt x="3888820" y="0"/>
-                </a:lnTo>
-                <a:lnTo>
-                  <a:pt x="3888820" y="3485354"/>
-                </a:lnTo>
-                <a:lnTo>
-                  <a:pt x="0" y="3485354"/>
+                  <a:pt x="4373018" y="0"/>
+                </a:lnTo>
+                <a:lnTo>
+                  <a:pt x="4373018" y="4214496"/>
+                </a:lnTo>
+                <a:lnTo>
+                  <a:pt x="0" y="4214496"/>
                 </a:lnTo>
                 <a:lnTo>
                   <a:pt x="0" y="0"/>
@@ -9460,14 +13603,14 @@
       </p:sp>
       <p:sp>
         <p:nvSpPr>
-          <p:cNvPr id="9" name="Freeform 9"/>
+          <p:cNvPr id="8" name="Freeform 8"/>
           <p:cNvSpPr/>
           <p:nvPr/>
         </p:nvSpPr>
         <p:spPr>
-          <a:xfrm rot="675348">
-            <a:off x="12477356" y="-1035948"/>
-            <a:ext cx="3789402" cy="3685194"/>
+          <a:xfrm rot="356799">
+            <a:off x="-2200203" y="7515623"/>
+            <a:ext cx="3888820" cy="3485355"/>
           </a:xfrm>
           <a:custGeom>
             <a:avLst/>
@@ -9476,18 +13619,18 @@
             <a:cxnLst/>
             <a:rect l="l" t="t" r="r" b="b"/>
             <a:pathLst>
-              <a:path w="3789402" h="3685194">
+              <a:path w="3888820" h="3485355">
                 <a:moveTo>
                   <a:pt x="0" y="0"/>
                 </a:moveTo>
                 <a:lnTo>
-                  <a:pt x="3789402" y="0"/>
-                </a:lnTo>
-                <a:lnTo>
-                  <a:pt x="3789402" y="3685193"/>
-                </a:lnTo>
-                <a:lnTo>
-                  <a:pt x="0" y="3685193"/>
+                  <a:pt x="3888820" y="0"/>
+                </a:lnTo>
+                <a:lnTo>
+                  <a:pt x="3888820" y="3485354"/>
+                </a:lnTo>
+                <a:lnTo>
+                  <a:pt x="0" y="3485354"/>
                 </a:lnTo>
                 <a:lnTo>
                   <a:pt x="0" y="0"/>
@@ -9519,14 +13662,14 @@
       </p:sp>
       <p:sp>
         <p:nvSpPr>
-          <p:cNvPr id="10" name="Freeform 10"/>
+          <p:cNvPr id="9" name="Freeform 9"/>
           <p:cNvSpPr/>
           <p:nvPr/>
         </p:nvSpPr>
         <p:spPr>
-          <a:xfrm rot="710027">
-            <a:off x="2141444" y="-1085938"/>
-            <a:ext cx="4057937" cy="3692723"/>
+          <a:xfrm rot="675348">
+            <a:off x="12477356" y="-1035948"/>
+            <a:ext cx="3789402" cy="3685194"/>
           </a:xfrm>
           <a:custGeom>
             <a:avLst/>
@@ -9535,18 +13678,18 @@
             <a:cxnLst/>
             <a:rect l="l" t="t" r="r" b="b"/>
             <a:pathLst>
-              <a:path w="4057937" h="3692723">
+              <a:path w="3789402" h="3685194">
                 <a:moveTo>
                   <a:pt x="0" y="0"/>
                 </a:moveTo>
                 <a:lnTo>
-                  <a:pt x="4057938" y="0"/>
-                </a:lnTo>
-                <a:lnTo>
-                  <a:pt x="4057938" y="3692723"/>
-                </a:lnTo>
-                <a:lnTo>
-                  <a:pt x="0" y="3692723"/>
+                  <a:pt x="3789402" y="0"/>
+                </a:lnTo>
+                <a:lnTo>
+                  <a:pt x="3789402" y="3685193"/>
+                </a:lnTo>
+                <a:lnTo>
+                  <a:pt x="0" y="3685193"/>
                 </a:lnTo>
                 <a:lnTo>
                   <a:pt x="0" y="0"/>
@@ -9578,14 +13721,14 @@
       </p:sp>
       <p:sp>
         <p:nvSpPr>
-          <p:cNvPr id="11" name="Freeform 11"/>
+          <p:cNvPr id="10" name="Freeform 10"/>
           <p:cNvSpPr/>
           <p:nvPr/>
         </p:nvSpPr>
         <p:spPr>
-          <a:xfrm rot="261574">
-            <a:off x="16941865" y="-1490132"/>
-            <a:ext cx="3763596" cy="3792036"/>
+          <a:xfrm rot="710027">
+            <a:off x="2141444" y="-1085938"/>
+            <a:ext cx="4057937" cy="3692723"/>
           </a:xfrm>
           <a:custGeom>
             <a:avLst/>
@@ -9594,18 +13737,18 @@
             <a:cxnLst/>
             <a:rect l="l" t="t" r="r" b="b"/>
             <a:pathLst>
-              <a:path w="3763596" h="3792036">
+              <a:path w="4057937" h="3692723">
                 <a:moveTo>
                   <a:pt x="0" y="0"/>
                 </a:moveTo>
                 <a:lnTo>
-                  <a:pt x="3763596" y="0"/>
-                </a:lnTo>
-                <a:lnTo>
-                  <a:pt x="3763596" y="3792036"/>
-                </a:lnTo>
-                <a:lnTo>
-                  <a:pt x="0" y="3792036"/>
+                  <a:pt x="4057938" y="0"/>
+                </a:lnTo>
+                <a:lnTo>
+                  <a:pt x="4057938" y="3692723"/>
+                </a:lnTo>
+                <a:lnTo>
+                  <a:pt x="0" y="3692723"/>
                 </a:lnTo>
                 <a:lnTo>
                   <a:pt x="0" y="0"/>
@@ -9637,55 +13780,14 @@
       </p:sp>
       <p:sp>
         <p:nvSpPr>
-          <p:cNvPr id="12" name="TextBox 12"/>
-          <p:cNvSpPr txBox="1"/>
-          <p:nvPr/>
-        </p:nvSpPr>
-        <p:spPr>
-          <a:xfrm>
-            <a:off x="4000684" y="3948157"/>
-            <a:ext cx="10286632" cy="2503130"/>
-          </a:xfrm>
-          <a:prstGeom prst="rect">
-            <a:avLst/>
-          </a:prstGeom>
-        </p:spPr>
-        <p:txBody>
-          <a:bodyPr lIns="0" tIns="0" rIns="0" bIns="0" rtlCol="0" anchor="t">
-            <a:spAutoFit/>
-          </a:bodyPr>
-          <a:lstStyle/>
-          <a:p>
-            <a:pPr algn="ctr">
-              <a:lnSpc>
-                <a:spcPts val="9686"/>
-              </a:lnSpc>
-            </a:pPr>
-            <a:r>
-              <a:rPr lang="en-US" sz="9052" dirty="0">
-                <a:solidFill>
-                  <a:srgbClr val="558DFD"/>
-                </a:solidFill>
-                <a:latin typeface="Bobby Jones Soft"/>
-                <a:ea typeface="Bobby Jones Soft"/>
-                <a:cs typeface="Bobby Jones Soft"/>
-                <a:sym typeface="Bobby Jones Soft"/>
-              </a:rPr>
-              <a:t>Thanks for listening!</a:t>
-            </a:r>
-          </a:p>
-        </p:txBody>
-      </p:sp>
-      <p:sp>
-        <p:nvSpPr>
-          <p:cNvPr id="13" name="Freeform 13"/>
+          <p:cNvPr id="11" name="Freeform 11"/>
           <p:cNvSpPr/>
           <p:nvPr/>
         </p:nvSpPr>
         <p:spPr>
-          <a:xfrm>
-            <a:off x="-2075123" y="-1202141"/>
-            <a:ext cx="3294905" cy="3163108"/>
+          <a:xfrm rot="261574">
+            <a:off x="16941865" y="-1490132"/>
+            <a:ext cx="3763596" cy="3792036"/>
           </a:xfrm>
           <a:custGeom>
             <a:avLst/>
@@ -9694,18 +13796,18 @@
             <a:cxnLst/>
             <a:rect l="l" t="t" r="r" b="b"/>
             <a:pathLst>
-              <a:path w="3294905" h="3163108">
+              <a:path w="3763596" h="3792036">
                 <a:moveTo>
                   <a:pt x="0" y="0"/>
                 </a:moveTo>
                 <a:lnTo>
-                  <a:pt x="3294904" y="0"/>
-                </a:lnTo>
-                <a:lnTo>
-                  <a:pt x="3294904" y="3163108"/>
-                </a:lnTo>
-                <a:lnTo>
-                  <a:pt x="0" y="3163108"/>
+                  <a:pt x="3763596" y="0"/>
+                </a:lnTo>
+                <a:lnTo>
+                  <a:pt x="3763596" y="3792036"/>
+                </a:lnTo>
+                <a:lnTo>
+                  <a:pt x="0" y="3792036"/>
                 </a:lnTo>
                 <a:lnTo>
                   <a:pt x="0" y="0"/>
@@ -9737,6 +13839,106 @@
       </p:sp>
       <p:sp>
         <p:nvSpPr>
+          <p:cNvPr id="12" name="TextBox 12"/>
+          <p:cNvSpPr txBox="1"/>
+          <p:nvPr/>
+        </p:nvSpPr>
+        <p:spPr>
+          <a:xfrm>
+            <a:off x="4000684" y="3948157"/>
+            <a:ext cx="10286632" cy="2503130"/>
+          </a:xfrm>
+          <a:prstGeom prst="rect">
+            <a:avLst/>
+          </a:prstGeom>
+        </p:spPr>
+        <p:txBody>
+          <a:bodyPr lIns="0" tIns="0" rIns="0" bIns="0" rtlCol="0" anchor="t">
+            <a:spAutoFit/>
+          </a:bodyPr>
+          <a:lstStyle/>
+          <a:p>
+            <a:pPr algn="ctr">
+              <a:lnSpc>
+                <a:spcPts val="9686"/>
+              </a:lnSpc>
+            </a:pPr>
+            <a:r>
+              <a:rPr lang="en-US" sz="9052" dirty="0">
+                <a:solidFill>
+                  <a:srgbClr val="558DFD"/>
+                </a:solidFill>
+                <a:latin typeface="Bobby Jones Soft"/>
+                <a:ea typeface="Bobby Jones Soft"/>
+                <a:cs typeface="Bobby Jones Soft"/>
+                <a:sym typeface="Bobby Jones Soft"/>
+              </a:rPr>
+              <a:t>Thanks for listening!</a:t>
+            </a:r>
+          </a:p>
+        </p:txBody>
+      </p:sp>
+      <p:sp>
+        <p:nvSpPr>
+          <p:cNvPr id="13" name="Freeform 13"/>
+          <p:cNvSpPr/>
+          <p:nvPr/>
+        </p:nvSpPr>
+        <p:spPr>
+          <a:xfrm>
+            <a:off x="-2075123" y="-1202141"/>
+            <a:ext cx="3294905" cy="3163108"/>
+          </a:xfrm>
+          <a:custGeom>
+            <a:avLst/>
+            <a:gdLst/>
+            <a:ahLst/>
+            <a:cxnLst/>
+            <a:rect l="l" t="t" r="r" b="b"/>
+            <a:pathLst>
+              <a:path w="3294905" h="3163108">
+                <a:moveTo>
+                  <a:pt x="0" y="0"/>
+                </a:moveTo>
+                <a:lnTo>
+                  <a:pt x="3294904" y="0"/>
+                </a:lnTo>
+                <a:lnTo>
+                  <a:pt x="3294904" y="3163108"/>
+                </a:lnTo>
+                <a:lnTo>
+                  <a:pt x="0" y="3163108"/>
+                </a:lnTo>
+                <a:lnTo>
+                  <a:pt x="0" y="0"/>
+                </a:lnTo>
+                <a:close/>
+              </a:path>
+            </a:pathLst>
+          </a:custGeom>
+          <a:blipFill>
+            <a:blip>
+              <a:extLst>
+                <a:ext uri="{96DAC541-7B7A-43D3-8B79-37D633B846F1}">
+                  <asvg:svgBlip xmlns:asvg="http://schemas.microsoft.com/office/drawing/2016/SVG/main" r:embed="rId13"/>
+                </a:ext>
+              </a:extLst>
+            </a:blip>
+            <a:stretch>
+              <a:fillRect/>
+            </a:stretch>
+          </a:blipFill>
+        </p:spPr>
+        <p:txBody>
+          <a:bodyPr/>
+          <a:lstStyle/>
+          <a:p>
+            <a:endParaRPr lang="de-AT"/>
+          </a:p>
+        </p:txBody>
+      </p:sp>
+      <p:sp>
+        <p:nvSpPr>
           <p:cNvPr id="14" name="Freeform 14"/>
           <p:cNvSpPr/>
           <p:nvPr/>
@@ -9777,7 +13979,7 @@
             <a:blip>
               <a:extLst>
                 <a:ext uri="{96DAC541-7B7A-43D3-8B79-37D633B846F1}">
-                  <asvg:svgBlip xmlns:asvg="http://schemas.microsoft.com/office/drawing/2016/SVG/main" r:embed="rId12"/>
+                  <asvg:svgBlip xmlns:asvg="http://schemas.microsoft.com/office/drawing/2016/SVG/main" r:embed="rId13"/>
                 </a:ext>
               </a:extLst>
             </a:blip>
@@ -10032,7 +14234,7 @@
               <a:rPr lang="de-AT" b="0" i="0" dirty="0">
                 <a:effectLst/>
                 <a:latin typeface="Segoe UI" panose="020B0502040204020203" pitchFamily="34" charset="0"/>
-                <a:hlinkClick r:id="rId13"/>
+                <a:hlinkClick r:id="rId14"/>
               </a:rPr>
               <a:t>https://doi.org/10.1057/s41599-023-02269-7</a:t>
             </a:r>
@@ -10329,4 +14531,319 @@
   <a:objectDefaults/>
   <a:extraClrSchemeLst/>
 </a:theme>
+</file>
+
+<file path=ppt/theme/theme2.xml><?xml version="1.0" encoding="utf-8"?>
+<a:theme xmlns:a="http://schemas.openxmlformats.org/drawingml/2006/main" name="Office">
+  <a:themeElements>
+    <a:clrScheme name="Office">
+      <a:dk1>
+        <a:sysClr val="windowText" lastClr="000000"/>
+      </a:dk1>
+      <a:lt1>
+        <a:sysClr val="window" lastClr="FFFFFF"/>
+      </a:lt1>
+      <a:dk2>
+        <a:srgbClr val="0E2841"/>
+      </a:dk2>
+      <a:lt2>
+        <a:srgbClr val="E8E8E8"/>
+      </a:lt2>
+      <a:accent1>
+        <a:srgbClr val="156082"/>
+      </a:accent1>
+      <a:accent2>
+        <a:srgbClr val="E97132"/>
+      </a:accent2>
+      <a:accent3>
+        <a:srgbClr val="196B24"/>
+      </a:accent3>
+      <a:accent4>
+        <a:srgbClr val="0F9ED5"/>
+      </a:accent4>
+      <a:accent5>
+        <a:srgbClr val="A02B93"/>
+      </a:accent5>
+      <a:accent6>
+        <a:srgbClr val="4EA72E"/>
+      </a:accent6>
+      <a:hlink>
+        <a:srgbClr val="467886"/>
+      </a:hlink>
+      <a:folHlink>
+        <a:srgbClr val="96607D"/>
+      </a:folHlink>
+    </a:clrScheme>
+    <a:fontScheme name="Office">
+      <a:majorFont>
+        <a:latin typeface="Aptos Display" panose="02110004020202020204"/>
+        <a:ea typeface=""/>
+        <a:cs typeface=""/>
+        <a:font script="Jpan" typeface="游ゴシック Light"/>
+        <a:font script="Hang" typeface="맑은 고딕"/>
+        <a:font script="Hans" typeface="等线 Light"/>
+        <a:font script="Hant" typeface="新細明體"/>
+        <a:font script="Arab" typeface="Times New Roman"/>
+        <a:font script="Hebr" typeface="Times New Roman"/>
+        <a:font script="Thai" typeface="Angsana New"/>
+        <a:font script="Ethi" typeface="Nyala"/>
+        <a:font script="Beng" typeface="Vrinda"/>
+        <a:font script="Gujr" typeface="Shruti"/>
+        <a:font script="Khmr" typeface="MoolBoran"/>
+        <a:font script="Knda" typeface="Tunga"/>
+        <a:font script="Guru" typeface="Raavi"/>
+        <a:font script="Cans" typeface="Euphemia"/>
+        <a:font script="Cher" typeface="Plantagenet Cherokee"/>
+        <a:font script="Yiii" typeface="Microsoft Yi Baiti"/>
+        <a:font script="Tibt" typeface="Microsoft Himalaya"/>
+        <a:font script="Thaa" typeface="MV Boli"/>
+        <a:font script="Deva" typeface="Mangal"/>
+        <a:font script="Telu" typeface="Gautami"/>
+        <a:font script="Taml" typeface="Latha"/>
+        <a:font script="Syrc" typeface="Estrangelo Edessa"/>
+        <a:font script="Orya" typeface="Kalinga"/>
+        <a:font script="Mlym" typeface="Kartika"/>
+        <a:font script="Laoo" typeface="DokChampa"/>
+        <a:font script="Sinh" typeface="Iskoola Pota"/>
+        <a:font script="Mong" typeface="Mongolian Baiti"/>
+        <a:font script="Viet" typeface="Times New Roman"/>
+        <a:font script="Uigh" typeface="Microsoft Uighur"/>
+        <a:font script="Geor" typeface="Sylfaen"/>
+        <a:font script="Armn" typeface="Arial"/>
+        <a:font script="Bugi" typeface="Leelawadee UI"/>
+        <a:font script="Bopo" typeface="Microsoft JhengHei"/>
+        <a:font script="Java" typeface="Javanese Text"/>
+        <a:font script="Lisu" typeface="Segoe UI"/>
+        <a:font script="Mymr" typeface="Myanmar Text"/>
+        <a:font script="Nkoo" typeface="Ebrima"/>
+        <a:font script="Olck" typeface="Nirmala UI"/>
+        <a:font script="Osma" typeface="Ebrima"/>
+        <a:font script="Phag" typeface="Phagspa"/>
+        <a:font script="Syrn" typeface="Estrangelo Edessa"/>
+        <a:font script="Syrj" typeface="Estrangelo Edessa"/>
+        <a:font script="Syre" typeface="Estrangelo Edessa"/>
+        <a:font script="Sora" typeface="Nirmala UI"/>
+        <a:font script="Tale" typeface="Microsoft Tai Le"/>
+        <a:font script="Talu" typeface="Microsoft New Tai Lue"/>
+        <a:font script="Tfng" typeface="Ebrima"/>
+      </a:majorFont>
+      <a:minorFont>
+        <a:latin typeface="Aptos" panose="02110004020202020204"/>
+        <a:ea typeface=""/>
+        <a:cs typeface=""/>
+        <a:font script="Jpan" typeface="游ゴシック"/>
+        <a:font script="Hang" typeface="맑은 고딕"/>
+        <a:font script="Hans" typeface="等线"/>
+        <a:font script="Hant" typeface="新細明體"/>
+        <a:font script="Arab" typeface="Arial"/>
+        <a:font script="Hebr" typeface="Arial"/>
+        <a:font script="Thai" typeface="Cordia New"/>
+        <a:font script="Ethi" typeface="Nyala"/>
+        <a:font script="Beng" typeface="Vrinda"/>
+        <a:font script="Gujr" typeface="Shruti"/>
+        <a:font script="Khmr" typeface="DaunPenh"/>
+        <a:font script="Knda" typeface="Tunga"/>
+        <a:font script="Guru" typeface="Raavi"/>
+        <a:font script="Cans" typeface="Euphemia"/>
+        <a:font script="Cher" typeface="Plantagenet Cherokee"/>
+        <a:font script="Yiii" typeface="Microsoft Yi Baiti"/>
+        <a:font script="Tibt" typeface="Microsoft Himalaya"/>
+        <a:font script="Thaa" typeface="MV Boli"/>
+        <a:font script="Deva" typeface="Mangal"/>
+        <a:font script="Telu" typeface="Gautami"/>
+        <a:font script="Taml" typeface="Latha"/>
+        <a:font script="Syrc" typeface="Estrangelo Edessa"/>
+        <a:font script="Orya" typeface="Kalinga"/>
+        <a:font script="Mlym" typeface="Kartika"/>
+        <a:font script="Laoo" typeface="DokChampa"/>
+        <a:font script="Sinh" typeface="Iskoola Pota"/>
+        <a:font script="Mong" typeface="Mongolian Baiti"/>
+        <a:font script="Viet" typeface="Arial"/>
+        <a:font script="Uigh" typeface="Microsoft Uighur"/>
+        <a:font script="Geor" typeface="Sylfaen"/>
+        <a:font script="Armn" typeface="Arial"/>
+        <a:font script="Bugi" typeface="Leelawadee UI"/>
+        <a:font script="Bopo" typeface="Microsoft JhengHei"/>
+        <a:font script="Java" typeface="Javanese Text"/>
+        <a:font script="Lisu" typeface="Segoe UI"/>
+        <a:font script="Mymr" typeface="Myanmar Text"/>
+        <a:font script="Nkoo" typeface="Ebrima"/>
+        <a:font script="Olck" typeface="Nirmala UI"/>
+        <a:font script="Osma" typeface="Ebrima"/>
+        <a:font script="Phag" typeface="Phagspa"/>
+        <a:font script="Syrn" typeface="Estrangelo Edessa"/>
+        <a:font script="Syrj" typeface="Estrangelo Edessa"/>
+        <a:font script="Syre" typeface="Estrangelo Edessa"/>
+        <a:font script="Sora" typeface="Nirmala UI"/>
+        <a:font script="Tale" typeface="Microsoft Tai Le"/>
+        <a:font script="Talu" typeface="Microsoft New Tai Lue"/>
+        <a:font script="Tfng" typeface="Ebrima"/>
+      </a:minorFont>
+    </a:fontScheme>
+    <a:fmtScheme name="Office">
+      <a:fillStyleLst>
+        <a:solidFill>
+          <a:schemeClr val="phClr"/>
+        </a:solidFill>
+        <a:gradFill rotWithShape="1">
+          <a:gsLst>
+            <a:gs pos="0">
+              <a:schemeClr val="phClr">
+                <a:lumMod val="110000"/>
+                <a:satMod val="105000"/>
+                <a:tint val="67000"/>
+              </a:schemeClr>
+            </a:gs>
+            <a:gs pos="50000">
+              <a:schemeClr val="phClr">
+                <a:lumMod val="105000"/>
+                <a:satMod val="103000"/>
+                <a:tint val="73000"/>
+              </a:schemeClr>
+            </a:gs>
+            <a:gs pos="100000">
+              <a:schemeClr val="phClr">
+                <a:lumMod val="105000"/>
+                <a:satMod val="109000"/>
+                <a:tint val="81000"/>
+              </a:schemeClr>
+            </a:gs>
+          </a:gsLst>
+          <a:lin ang="5400000" scaled="0"/>
+        </a:gradFill>
+        <a:gradFill rotWithShape="1">
+          <a:gsLst>
+            <a:gs pos="0">
+              <a:schemeClr val="phClr">
+                <a:satMod val="103000"/>
+                <a:lumMod val="102000"/>
+                <a:tint val="94000"/>
+              </a:schemeClr>
+            </a:gs>
+            <a:gs pos="50000">
+              <a:schemeClr val="phClr">
+                <a:satMod val="110000"/>
+                <a:lumMod val="100000"/>
+                <a:shade val="100000"/>
+              </a:schemeClr>
+            </a:gs>
+            <a:gs pos="100000">
+              <a:schemeClr val="phClr">
+                <a:lumMod val="99000"/>
+                <a:satMod val="120000"/>
+                <a:shade val="78000"/>
+              </a:schemeClr>
+            </a:gs>
+          </a:gsLst>
+          <a:lin ang="5400000" scaled="0"/>
+        </a:gradFill>
+      </a:fillStyleLst>
+      <a:lnStyleLst>
+        <a:ln w="12700" cap="flat" cmpd="sng" algn="ctr">
+          <a:solidFill>
+            <a:schemeClr val="phClr"/>
+          </a:solidFill>
+          <a:prstDash val="solid"/>
+          <a:miter lim="800000"/>
+        </a:ln>
+        <a:ln w="19050" cap="flat" cmpd="sng" algn="ctr">
+          <a:solidFill>
+            <a:schemeClr val="phClr"/>
+          </a:solidFill>
+          <a:prstDash val="solid"/>
+          <a:miter lim="800000"/>
+        </a:ln>
+        <a:ln w="25400" cap="flat" cmpd="sng" algn="ctr">
+          <a:solidFill>
+            <a:schemeClr val="phClr"/>
+          </a:solidFill>
+          <a:prstDash val="solid"/>
+          <a:miter lim="800000"/>
+        </a:ln>
+      </a:lnStyleLst>
+      <a:effectStyleLst>
+        <a:effectStyle>
+          <a:effectLst/>
+        </a:effectStyle>
+        <a:effectStyle>
+          <a:effectLst/>
+        </a:effectStyle>
+        <a:effectStyle>
+          <a:effectLst>
+            <a:outerShdw blurRad="57150" dist="19050" dir="5400000" algn="ctr" rotWithShape="0">
+              <a:srgbClr val="000000">
+                <a:alpha val="63000"/>
+              </a:srgbClr>
+            </a:outerShdw>
+          </a:effectLst>
+        </a:effectStyle>
+      </a:effectStyleLst>
+      <a:bgFillStyleLst>
+        <a:solidFill>
+          <a:schemeClr val="phClr"/>
+        </a:solidFill>
+        <a:solidFill>
+          <a:schemeClr val="phClr">
+            <a:tint val="95000"/>
+            <a:satMod val="170000"/>
+          </a:schemeClr>
+        </a:solidFill>
+        <a:gradFill rotWithShape="1">
+          <a:gsLst>
+            <a:gs pos="0">
+              <a:schemeClr val="phClr">
+                <a:tint val="93000"/>
+                <a:satMod val="150000"/>
+                <a:shade val="98000"/>
+                <a:lumMod val="102000"/>
+              </a:schemeClr>
+            </a:gs>
+            <a:gs pos="50000">
+              <a:schemeClr val="phClr">
+                <a:tint val="98000"/>
+                <a:satMod val="130000"/>
+                <a:shade val="90000"/>
+                <a:lumMod val="103000"/>
+              </a:schemeClr>
+            </a:gs>
+            <a:gs pos="100000">
+              <a:schemeClr val="phClr">
+                <a:shade val="63000"/>
+                <a:satMod val="120000"/>
+              </a:schemeClr>
+            </a:gs>
+          </a:gsLst>
+          <a:lin ang="5400000" scaled="0"/>
+        </a:gradFill>
+      </a:bgFillStyleLst>
+    </a:fmtScheme>
+  </a:themeElements>
+  <a:objectDefaults>
+    <a:lnDef>
+      <a:spPr/>
+      <a:bodyPr/>
+      <a:lstStyle/>
+      <a:style>
+        <a:lnRef idx="2">
+          <a:schemeClr val="accent1"/>
+        </a:lnRef>
+        <a:fillRef idx="0">
+          <a:schemeClr val="accent1"/>
+        </a:fillRef>
+        <a:effectRef idx="1">
+          <a:schemeClr val="accent1"/>
+        </a:effectRef>
+        <a:fontRef idx="minor">
+          <a:schemeClr val="tx1"/>
+        </a:fontRef>
+      </a:style>
+    </a:lnDef>
+  </a:objectDefaults>
+  <a:extraClrSchemeLst/>
+  <a:extLst>
+    <a:ext uri="{05A4C25C-085E-4340-85A3-A5531E510DB2}">
+      <thm15:themeFamily xmlns:thm15="http://schemas.microsoft.com/office/thememl/2012/main" name="Office Theme" id="{2E142A2C-CD16-42D6-873A-C26D2A0506FA}" vid="{1BDDFF52-6CD6-40A5-AB3C-68EB2F1E4D0A}"/>
+    </a:ext>
+  </a:extLst>
+</a:theme>
 </file>
--- a/Lightning Talk Christina.pptx
+++ b/Lightning Talk Christina.pptx
@@ -160,7 +160,7 @@
 <file path=ppt/revisionInfo.xml><?xml version="1.0" encoding="utf-8"?>
 <p1510:revInfo xmlns:a="http://schemas.openxmlformats.org/drawingml/2006/main" xmlns:r="http://schemas.openxmlformats.org/officeDocument/2006/relationships" xmlns:p1510="http://schemas.microsoft.com/office/powerpoint/2015/10/main">
   <p1510:revLst>
-    <p1510:client id="{758A810B-C379-4C8B-B534-293CCBD759B1}" v="46" dt="2026-06-15T15:39:01.142"/>
+    <p1510:client id="{758A810B-C379-4C8B-B534-293CCBD759B1}" v="65" dt="2026-06-16T14:34:57.367"/>
   </p1510:revLst>
 </p1510:revInfo>
 </file>
@@ -169,8 +169,8 @@
 <pc:chgInfo xmlns:a="http://schemas.openxmlformats.org/drawingml/2006/main" xmlns:r="http://schemas.openxmlformats.org/officeDocument/2006/relationships" xmlns:ac="http://schemas.microsoft.com/office/drawing/2013/main/command" xmlns:pc="http://schemas.microsoft.com/office/powerpoint/2013/main/command">
   <pc:docChgLst>
     <pc:chgData name="Christina Knes" userId="7e9737a164333dbd" providerId="LiveId" clId="{72053980-4108-4AED-A5B7-3290F7F82C69}"/>
-    <pc:docChg chg="custSel modSld">
-      <pc:chgData name="Christina Knes" userId="7e9737a164333dbd" providerId="LiveId" clId="{72053980-4108-4AED-A5B7-3290F7F82C69}" dt="2026-06-15T15:55:17.928" v="272" actId="20577"/>
+    <pc:docChg chg="undo custSel modSld">
+      <pc:chgData name="Christina Knes" userId="7e9737a164333dbd" providerId="LiveId" clId="{72053980-4108-4AED-A5B7-3290F7F82C69}" dt="2026-06-16T14:34:57.367" v="313" actId="113"/>
       <pc:docMkLst>
         <pc:docMk/>
       </pc:docMkLst>
@@ -309,13 +309,13 @@
         </pc:spChg>
       </pc:sldChg>
       <pc:sldChg chg="delSp modSp mod addAnim delAnim modAnim modNotesTx">
-        <pc:chgData name="Christina Knes" userId="7e9737a164333dbd" providerId="LiveId" clId="{72053980-4108-4AED-A5B7-3290F7F82C69}" dt="2026-06-15T15:42:01.323" v="258" actId="20577"/>
+        <pc:chgData name="Christina Knes" userId="7e9737a164333dbd" providerId="LiveId" clId="{72053980-4108-4AED-A5B7-3290F7F82C69}" dt="2026-06-16T14:34:57.367" v="313" actId="113"/>
         <pc:sldMkLst>
           <pc:docMk/>
           <pc:sldMk cId="0" sldId="258"/>
         </pc:sldMkLst>
         <pc:spChg chg="mod">
-          <ac:chgData name="Christina Knes" userId="7e9737a164333dbd" providerId="LiveId" clId="{72053980-4108-4AED-A5B7-3290F7F82C69}" dt="2026-06-09T08:43:14.642" v="113" actId="1076"/>
+          <ac:chgData name="Christina Knes" userId="7e9737a164333dbd" providerId="LiveId" clId="{72053980-4108-4AED-A5B7-3290F7F82C69}" dt="2026-06-16T14:31:47.459" v="284" actId="1076"/>
           <ac:spMkLst>
             <pc:docMk/>
             <pc:sldMk cId="0" sldId="258"/>
@@ -323,7 +323,7 @@
           </ac:spMkLst>
         </pc:spChg>
         <pc:spChg chg="mod">
-          <ac:chgData name="Christina Knes" userId="7e9737a164333dbd" providerId="LiveId" clId="{72053980-4108-4AED-A5B7-3290F7F82C69}" dt="2026-06-09T08:43:14.642" v="113" actId="1076"/>
+          <ac:chgData name="Christina Knes" userId="7e9737a164333dbd" providerId="LiveId" clId="{72053980-4108-4AED-A5B7-3290F7F82C69}" dt="2026-06-16T14:31:47.459" v="284" actId="1076"/>
           <ac:spMkLst>
             <pc:docMk/>
             <pc:sldMk cId="0" sldId="258"/>
@@ -331,7 +331,7 @@
           </ac:spMkLst>
         </pc:spChg>
         <pc:spChg chg="mod">
-          <ac:chgData name="Christina Knes" userId="7e9737a164333dbd" providerId="LiveId" clId="{72053980-4108-4AED-A5B7-3290F7F82C69}" dt="2026-06-09T08:43:14.642" v="113" actId="1076"/>
+          <ac:chgData name="Christina Knes" userId="7e9737a164333dbd" providerId="LiveId" clId="{72053980-4108-4AED-A5B7-3290F7F82C69}" dt="2026-06-16T14:32:02.273" v="285" actId="1076"/>
           <ac:spMkLst>
             <pc:docMk/>
             <pc:sldMk cId="0" sldId="258"/>
@@ -355,7 +355,7 @@
           </ac:spMkLst>
         </pc:spChg>
         <pc:spChg chg="mod">
-          <ac:chgData name="Christina Knes" userId="7e9737a164333dbd" providerId="LiveId" clId="{72053980-4108-4AED-A5B7-3290F7F82C69}" dt="2026-06-09T08:43:06.653" v="112" actId="1076"/>
+          <ac:chgData name="Christina Knes" userId="7e9737a164333dbd" providerId="LiveId" clId="{72053980-4108-4AED-A5B7-3290F7F82C69}" dt="2026-06-16T14:34:38.044" v="309" actId="113"/>
           <ac:spMkLst>
             <pc:docMk/>
             <pc:sldMk cId="0" sldId="258"/>
@@ -363,7 +363,15 @@
           </ac:spMkLst>
         </pc:spChg>
         <pc:spChg chg="mod">
-          <ac:chgData name="Christina Knes" userId="7e9737a164333dbd" providerId="LiveId" clId="{72053980-4108-4AED-A5B7-3290F7F82C69}" dt="2026-06-09T08:43:06.653" v="112" actId="1076"/>
+          <ac:chgData name="Christina Knes" userId="7e9737a164333dbd" providerId="LiveId" clId="{72053980-4108-4AED-A5B7-3290F7F82C69}" dt="2026-06-16T14:31:23.632" v="281" actId="1076"/>
+          <ac:spMkLst>
+            <pc:docMk/>
+            <pc:sldMk cId="0" sldId="258"/>
+            <ac:spMk id="11" creationId="{00000000-0000-0000-0000-000000000000}"/>
+          </ac:spMkLst>
+        </pc:spChg>
+        <pc:spChg chg="mod">
+          <ac:chgData name="Christina Knes" userId="7e9737a164333dbd" providerId="LiveId" clId="{72053980-4108-4AED-A5B7-3290F7F82C69}" dt="2026-06-16T14:34:34.801" v="308" actId="113"/>
           <ac:spMkLst>
             <pc:docMk/>
             <pc:sldMk cId="0" sldId="258"/>
@@ -371,7 +379,7 @@
           </ac:spMkLst>
         </pc:spChg>
         <pc:spChg chg="mod">
-          <ac:chgData name="Christina Knes" userId="7e9737a164333dbd" providerId="LiveId" clId="{72053980-4108-4AED-A5B7-3290F7F82C69}" dt="2026-06-09T08:43:06.653" v="112" actId="1076"/>
+          <ac:chgData name="Christina Knes" userId="7e9737a164333dbd" providerId="LiveId" clId="{72053980-4108-4AED-A5B7-3290F7F82C69}" dt="2026-06-16T14:34:47.222" v="311" actId="113"/>
           <ac:spMkLst>
             <pc:docMk/>
             <pc:sldMk cId="0" sldId="258"/>
@@ -379,7 +387,7 @@
           </ac:spMkLst>
         </pc:spChg>
         <pc:spChg chg="mod">
-          <ac:chgData name="Christina Knes" userId="7e9737a164333dbd" providerId="LiveId" clId="{72053980-4108-4AED-A5B7-3290F7F82C69}" dt="2026-06-09T08:43:06.653" v="112" actId="1076"/>
+          <ac:chgData name="Christina Knes" userId="7e9737a164333dbd" providerId="LiveId" clId="{72053980-4108-4AED-A5B7-3290F7F82C69}" dt="2026-06-16T14:34:57.367" v="313" actId="113"/>
           <ac:spMkLst>
             <pc:docMk/>
             <pc:sldMk cId="0" sldId="258"/>
@@ -387,7 +395,7 @@
           </ac:spMkLst>
         </pc:spChg>
         <pc:grpChg chg="mod">
-          <ac:chgData name="Christina Knes" userId="7e9737a164333dbd" providerId="LiveId" clId="{72053980-4108-4AED-A5B7-3290F7F82C69}" dt="2026-06-09T08:43:14.642" v="113" actId="1076"/>
+          <ac:chgData name="Christina Knes" userId="7e9737a164333dbd" providerId="LiveId" clId="{72053980-4108-4AED-A5B7-3290F7F82C69}" dt="2026-06-16T14:31:47.459" v="284" actId="1076"/>
           <ac:grpSpMkLst>
             <pc:docMk/>
             <pc:sldMk cId="0" sldId="258"/>
@@ -646,7 +654,7 @@
           <a:p>
             <a:fld id="{7AAA80C1-B10E-441C-98F7-90D0E5C9B104}" type="datetimeFigureOut">
               <a:rPr lang="de-AT" smtClean="0"/>
-              <a:t>15.06.2026</a:t>
+              <a:t>16.06.2026</a:t>
             </a:fld>
             <a:endParaRPr lang="de-AT"/>
           </a:p>
@@ -4968,7 +4976,7 @@
             <a:fld id="{1D8BD707-D9CF-40AE-B4C6-C98DA3205C09}" type="datetimeFigureOut">
               <a:rPr lang="en-US" smtClean="0"/>
               <a:pPr/>
-              <a:t>6/15/2026</a:t>
+              <a:t>6/16/2026</a:t>
             </a:fld>
             <a:endParaRPr lang="en-US"/>
           </a:p>
@@ -5133,7 +5141,7 @@
             <a:fld id="{1D8BD707-D9CF-40AE-B4C6-C98DA3205C09}" type="datetimeFigureOut">
               <a:rPr lang="en-US" smtClean="0"/>
               <a:pPr/>
-              <a:t>6/15/2026</a:t>
+              <a:t>6/16/2026</a:t>
             </a:fld>
             <a:endParaRPr lang="en-US"/>
           </a:p>
@@ -5308,7 +5316,7 @@
             <a:fld id="{1D8BD707-D9CF-40AE-B4C6-C98DA3205C09}" type="datetimeFigureOut">
               <a:rPr lang="en-US" smtClean="0"/>
               <a:pPr/>
-              <a:t>6/15/2026</a:t>
+              <a:t>6/16/2026</a:t>
             </a:fld>
             <a:endParaRPr lang="en-US"/>
           </a:p>
@@ -5473,7 +5481,7 @@
             <a:fld id="{1D8BD707-D9CF-40AE-B4C6-C98DA3205C09}" type="datetimeFigureOut">
               <a:rPr lang="en-US" smtClean="0"/>
               <a:pPr/>
-              <a:t>6/15/2026</a:t>
+              <a:t>6/16/2026</a:t>
             </a:fld>
             <a:endParaRPr lang="en-US"/>
           </a:p>
@@ -5715,7 +5723,7 @@
             <a:fld id="{1D8BD707-D9CF-40AE-B4C6-C98DA3205C09}" type="datetimeFigureOut">
               <a:rPr lang="en-US" smtClean="0"/>
               <a:pPr/>
-              <a:t>6/15/2026</a:t>
+              <a:t>6/16/2026</a:t>
             </a:fld>
             <a:endParaRPr lang="en-US"/>
           </a:p>
@@ -5997,7 +6005,7 @@
             <a:fld id="{1D8BD707-D9CF-40AE-B4C6-C98DA3205C09}" type="datetimeFigureOut">
               <a:rPr lang="en-US" smtClean="0"/>
               <a:pPr/>
-              <a:t>6/15/2026</a:t>
+              <a:t>6/16/2026</a:t>
             </a:fld>
             <a:endParaRPr lang="en-US"/>
           </a:p>
@@ -6413,7 +6421,7 @@
             <a:fld id="{1D8BD707-D9CF-40AE-B4C6-C98DA3205C09}" type="datetimeFigureOut">
               <a:rPr lang="en-US" smtClean="0"/>
               <a:pPr/>
-              <a:t>6/15/2026</a:t>
+              <a:t>6/16/2026</a:t>
             </a:fld>
             <a:endParaRPr lang="en-US"/>
           </a:p>
@@ -6527,7 +6535,7 @@
             <a:fld id="{1D8BD707-D9CF-40AE-B4C6-C98DA3205C09}" type="datetimeFigureOut">
               <a:rPr lang="en-US" smtClean="0"/>
               <a:pPr/>
-              <a:t>6/15/2026</a:t>
+              <a:t>6/16/2026</a:t>
             </a:fld>
             <a:endParaRPr lang="en-US"/>
           </a:p>
@@ -6619,7 +6627,7 @@
             <a:fld id="{1D8BD707-D9CF-40AE-B4C6-C98DA3205C09}" type="datetimeFigureOut">
               <a:rPr lang="en-US" smtClean="0"/>
               <a:pPr/>
-              <a:t>6/15/2026</a:t>
+              <a:t>6/16/2026</a:t>
             </a:fld>
             <a:endParaRPr lang="en-US"/>
           </a:p>
@@ -6891,7 +6899,7 @@
             <a:fld id="{1D8BD707-D9CF-40AE-B4C6-C98DA3205C09}" type="datetimeFigureOut">
               <a:rPr lang="en-US" smtClean="0"/>
               <a:pPr/>
-              <a:t>6/15/2026</a:t>
+              <a:t>6/16/2026</a:t>
             </a:fld>
             <a:endParaRPr lang="en-US"/>
           </a:p>
@@ -7140,7 +7148,7 @@
             <a:fld id="{1D8BD707-D9CF-40AE-B4C6-C98DA3205C09}" type="datetimeFigureOut">
               <a:rPr lang="en-US" smtClean="0"/>
               <a:pPr/>
-              <a:t>6/15/2026</a:t>
+              <a:t>6/16/2026</a:t>
             </a:fld>
             <a:endParaRPr lang="en-US"/>
           </a:p>
@@ -7348,7 +7356,7 @@
             <a:fld id="{1D8BD707-D9CF-40AE-B4C6-C98DA3205C09}" type="datetimeFigureOut">
               <a:rPr lang="en-US" smtClean="0"/>
               <a:pPr/>
-              <a:t>6/15/2026</a:t>
+              <a:t>6/16/2026</a:t>
             </a:fld>
             <a:endParaRPr lang="en-US"/>
           </a:p>
@@ -9383,7 +9391,7 @@
         </p:nvSpPr>
         <p:spPr>
           <a:xfrm>
-            <a:off x="1827536" y="3519528"/>
+            <a:off x="5871824" y="3574517"/>
             <a:ext cx="2533572" cy="2511403"/>
           </a:xfrm>
           <a:custGeom>
@@ -9442,7 +9450,7 @@
         </p:nvGrpSpPr>
         <p:grpSpPr>
           <a:xfrm rot="2700000">
-            <a:off x="2482666" y="5017359"/>
+            <a:off x="6526954" y="5072348"/>
             <a:ext cx="337633" cy="337597"/>
             <a:chOff x="0" y="0"/>
             <a:chExt cx="88924" cy="88914"/>
@@ -9532,7 +9540,7 @@
         </p:nvSpPr>
         <p:spPr>
           <a:xfrm rot="868315">
-            <a:off x="2496273" y="4988627"/>
+            <a:off x="6540561" y="5043616"/>
             <a:ext cx="310421" cy="342147"/>
           </a:xfrm>
           <a:custGeom>
@@ -9591,7 +9599,7 @@
         </p:nvSpPr>
         <p:spPr>
           <a:xfrm>
-            <a:off x="5871824" y="3729169"/>
+            <a:off x="1778038" y="3876749"/>
             <a:ext cx="2728794" cy="2728794"/>
           </a:xfrm>
           <a:custGeom>
@@ -9762,8 +9770,8 @@
         </p:nvSpPr>
         <p:spPr>
           <a:xfrm>
-            <a:off x="5293102" y="6185120"/>
-            <a:ext cx="3828155" cy="1057275"/>
+            <a:off x="5450037" y="6584849"/>
+            <a:ext cx="3828155" cy="507831"/>
           </a:xfrm>
           <a:prstGeom prst="rect">
             <a:avLst/>
@@ -9781,16 +9789,16 @@
               </a:lnSpc>
             </a:pPr>
             <a:r>
-              <a:rPr lang="en-US" sz="3000" b="1">
+              <a:rPr lang="en-US" sz="3000" dirty="0">
                 <a:solidFill>
                   <a:srgbClr val="000000"/>
                 </a:solidFill>
-                <a:latin typeface="Bricolage Grotesque Bold"/>
+                <a:latin typeface="Bricolage Grotesque" panose="020B0604020202020204" charset="0"/>
                 <a:ea typeface="Bricolage Grotesque Bold"/>
                 <a:cs typeface="Bricolage Grotesque Bold"/>
                 <a:sym typeface="Bricolage Grotesque Bold"/>
               </a:rPr>
-              <a:t>ChatGPT group did NOT perform better</a:t>
+              <a:t>Average grade “C”</a:t>
             </a:r>
           </a:p>
         </p:txBody>
@@ -9844,7 +9852,72 @@
         </p:nvSpPr>
         <p:spPr>
           <a:xfrm>
-            <a:off x="1357202" y="6451819"/>
+            <a:off x="1262257" y="6301531"/>
+            <a:ext cx="3671999" cy="1046440"/>
+          </a:xfrm>
+          <a:prstGeom prst="rect">
+            <a:avLst/>
+          </a:prstGeom>
+        </p:spPr>
+        <p:txBody>
+          <a:bodyPr wrap="square" lIns="0" tIns="0" rIns="0" bIns="0" rtlCol="0" anchor="t">
+            <a:spAutoFit/>
+          </a:bodyPr>
+          <a:lstStyle/>
+          <a:p>
+            <a:pPr algn="ctr">
+              <a:lnSpc>
+                <a:spcPts val="4200"/>
+              </a:lnSpc>
+            </a:pPr>
+            <a:r>
+              <a:rPr lang="en-US" sz="3000" dirty="0">
+                <a:solidFill>
+                  <a:srgbClr val="000000"/>
+                </a:solidFill>
+                <a:latin typeface="Bricolage Grotesque" panose="020B0604020202020204" charset="0"/>
+                <a:ea typeface="Bricolage Grotesque Bold"/>
+                <a:cs typeface="Bricolage Grotesque Bold"/>
+                <a:sym typeface="Bricolage Grotesque Bold"/>
+              </a:rPr>
+              <a:t>ChatGPT group did </a:t>
+            </a:r>
+            <a:r>
+              <a:rPr lang="en-US" sz="3000" dirty="0">
+                <a:solidFill>
+                  <a:srgbClr val="000000"/>
+                </a:solidFill>
+                <a:latin typeface="Bricolage Grotesque Bold" panose="020B0604020202020204" charset="0"/>
+                <a:ea typeface="Bricolage Grotesque Bold"/>
+                <a:cs typeface="Bricolage Grotesque Bold"/>
+                <a:sym typeface="Bricolage Grotesque Bold"/>
+              </a:rPr>
+              <a:t>NOT</a:t>
+            </a:r>
+            <a:r>
+              <a:rPr lang="en-US" sz="3000" dirty="0">
+                <a:solidFill>
+                  <a:srgbClr val="000000"/>
+                </a:solidFill>
+                <a:latin typeface="Bricolage Grotesque" panose="020B0604020202020204" charset="0"/>
+                <a:ea typeface="Bricolage Grotesque Bold"/>
+                <a:cs typeface="Bricolage Grotesque Bold"/>
+                <a:sym typeface="Bricolage Grotesque Bold"/>
+              </a:rPr>
+              <a:t> perform better</a:t>
+            </a:r>
+          </a:p>
+        </p:txBody>
+      </p:sp>
+      <p:sp>
+        <p:nvSpPr>
+          <p:cNvPr id="17" name="TextBox 17"/>
+          <p:cNvSpPr txBox="1"/>
+          <p:nvPr/>
+        </p:nvSpPr>
+        <p:spPr>
+          <a:xfrm>
+            <a:off x="9651746" y="6562813"/>
             <a:ext cx="3456099" cy="523875"/>
           </a:xfrm>
           <a:prstGeom prst="rect">
@@ -9863,52 +9936,11 @@
               </a:lnSpc>
             </a:pPr>
             <a:r>
-              <a:rPr lang="en-US" sz="3000" b="1" dirty="0">
+              <a:rPr lang="en-US" sz="3000" dirty="0">
                 <a:solidFill>
                   <a:srgbClr val="000000"/>
                 </a:solidFill>
-                <a:latin typeface="Bricolage Grotesque Bold"/>
-                <a:ea typeface="Bricolage Grotesque Bold"/>
-                <a:cs typeface="Bricolage Grotesque Bold"/>
-                <a:sym typeface="Bricolage Grotesque Bold"/>
-              </a:rPr>
-              <a:t>Average grade “C”</a:t>
-            </a:r>
-          </a:p>
-        </p:txBody>
-      </p:sp>
-      <p:sp>
-        <p:nvSpPr>
-          <p:cNvPr id="17" name="TextBox 17"/>
-          <p:cNvSpPr txBox="1"/>
-          <p:nvPr/>
-        </p:nvSpPr>
-        <p:spPr>
-          <a:xfrm>
-            <a:off x="9738215" y="6451818"/>
-            <a:ext cx="3456099" cy="523875"/>
-          </a:xfrm>
-          <a:prstGeom prst="rect">
-            <a:avLst/>
-          </a:prstGeom>
-        </p:spPr>
-        <p:txBody>
-          <a:bodyPr lIns="0" tIns="0" rIns="0" bIns="0" rtlCol="0" anchor="t">
-            <a:spAutoFit/>
-          </a:bodyPr>
-          <a:lstStyle/>
-          <a:p>
-            <a:pPr algn="ctr">
-              <a:lnSpc>
-                <a:spcPts val="4200"/>
-              </a:lnSpc>
-            </a:pPr>
-            <a:r>
-              <a:rPr lang="en-US" sz="3000" b="1" dirty="0">
-                <a:solidFill>
-                  <a:srgbClr val="000000"/>
-                </a:solidFill>
-                <a:latin typeface="Bricolage Grotesque Bold"/>
+                <a:latin typeface="Bricolage Grotesque" panose="020B0604020202020204" charset="0"/>
                 <a:ea typeface="Bricolage Grotesque Bold"/>
                 <a:cs typeface="Bricolage Grotesque Bold"/>
                 <a:sym typeface="Bricolage Grotesque Bold"/>
@@ -9926,7 +9958,7 @@
         </p:nvSpPr>
         <p:spPr>
           <a:xfrm>
-            <a:off x="13408628" y="6185120"/>
+            <a:off x="13387846" y="6310126"/>
             <a:ext cx="4200211" cy="1057275"/>
           </a:xfrm>
           <a:prstGeom prst="rect">
@@ -9945,11 +9977,11 @@
               </a:lnSpc>
             </a:pPr>
             <a:r>
-              <a:rPr lang="en-US" sz="3000" b="1" dirty="0">
+              <a:rPr lang="en-US" sz="3000" dirty="0">
                 <a:solidFill>
                   <a:srgbClr val="000000"/>
                 </a:solidFill>
-                <a:latin typeface="Bricolage Grotesque Bold"/>
+                <a:latin typeface="Bricolage Grotesque" panose="020B0604020202020204" charset="0"/>
                 <a:ea typeface="Bricolage Grotesque Bold"/>
                 <a:cs typeface="Bricolage Grotesque Bold"/>
                 <a:sym typeface="Bricolage Grotesque Bold"/>
@@ -10528,7 +10560,7 @@
               </a:lnSpc>
             </a:pPr>
             <a:r>
-              <a:rPr lang="en-US" sz="2800">
+              <a:rPr lang="en-US" sz="2800" dirty="0">
                 <a:solidFill>
                   <a:srgbClr val="000000"/>
                 </a:solidFill>

--- a/Lightning Talk Christina.pptx
+++ b/Lightning Talk Christina.pptx
@@ -170,12 +170,12 @@
   <pc:docChgLst>
     <pc:chgData name="Christina Knes" userId="7e9737a164333dbd" providerId="LiveId" clId="{72053980-4108-4AED-A5B7-3290F7F82C69}"/>
     <pc:docChg chg="undo custSel modSld">
-      <pc:chgData name="Christina Knes" userId="7e9737a164333dbd" providerId="LiveId" clId="{72053980-4108-4AED-A5B7-3290F7F82C69}" dt="2026-06-16T14:34:57.367" v="313" actId="113"/>
+      <pc:chgData name="Christina Knes" userId="7e9737a164333dbd" providerId="LiveId" clId="{72053980-4108-4AED-A5B7-3290F7F82C69}" dt="2026-06-23T13:02:07.431" v="322" actId="20577"/>
       <pc:docMkLst>
         <pc:docMk/>
       </pc:docMkLst>
       <pc:sldChg chg="modSp mod modAnim modNotesTx">
-        <pc:chgData name="Christina Knes" userId="7e9737a164333dbd" providerId="LiveId" clId="{72053980-4108-4AED-A5B7-3290F7F82C69}" dt="2026-06-15T15:54:25.112" v="261" actId="20577"/>
+        <pc:chgData name="Christina Knes" userId="7e9737a164333dbd" providerId="LiveId" clId="{72053980-4108-4AED-A5B7-3290F7F82C69}" dt="2026-06-23T13:01:38.267" v="314" actId="20577"/>
         <pc:sldMkLst>
           <pc:docMk/>
           <pc:sldMk cId="0" sldId="256"/>
@@ -270,7 +270,7 @@
         </pc:spChg>
       </pc:sldChg>
       <pc:sldChg chg="modSp mod addAnim delAnim modAnim modNotesTx">
-        <pc:chgData name="Christina Knes" userId="7e9737a164333dbd" providerId="LiveId" clId="{72053980-4108-4AED-A5B7-3290F7F82C69}" dt="2026-06-15T15:40:53.228" v="255" actId="20577"/>
+        <pc:chgData name="Christina Knes" userId="7e9737a164333dbd" providerId="LiveId" clId="{72053980-4108-4AED-A5B7-3290F7F82C69}" dt="2026-06-23T13:01:42.612" v="317" actId="20577"/>
         <pc:sldMkLst>
           <pc:docMk/>
           <pc:sldMk cId="0" sldId="257"/>
@@ -309,7 +309,7 @@
         </pc:spChg>
       </pc:sldChg>
       <pc:sldChg chg="delSp modSp mod addAnim delAnim modAnim modNotesTx">
-        <pc:chgData name="Christina Knes" userId="7e9737a164333dbd" providerId="LiveId" clId="{72053980-4108-4AED-A5B7-3290F7F82C69}" dt="2026-06-16T14:34:57.367" v="313" actId="113"/>
+        <pc:chgData name="Christina Knes" userId="7e9737a164333dbd" providerId="LiveId" clId="{72053980-4108-4AED-A5B7-3290F7F82C69}" dt="2026-06-23T13:01:50.215" v="318" actId="20577"/>
         <pc:sldMkLst>
           <pc:docMk/>
           <pc:sldMk cId="0" sldId="258"/>
@@ -404,14 +404,14 @@
         </pc:grpChg>
       </pc:sldChg>
       <pc:sldChg chg="modNotesTx">
-        <pc:chgData name="Christina Knes" userId="7e9737a164333dbd" providerId="LiveId" clId="{72053980-4108-4AED-A5B7-3290F7F82C69}" dt="2026-06-15T15:54:41.833" v="263" actId="20577"/>
+        <pc:chgData name="Christina Knes" userId="7e9737a164333dbd" providerId="LiveId" clId="{72053980-4108-4AED-A5B7-3290F7F82C69}" dt="2026-06-23T13:01:53.179" v="319" actId="20577"/>
         <pc:sldMkLst>
           <pc:docMk/>
           <pc:sldMk cId="0" sldId="259"/>
         </pc:sldMkLst>
       </pc:sldChg>
       <pc:sldChg chg="modSp mod modAnim modNotesTx">
-        <pc:chgData name="Christina Knes" userId="7e9737a164333dbd" providerId="LiveId" clId="{72053980-4108-4AED-A5B7-3290F7F82C69}" dt="2026-06-15T15:55:01.062" v="266" actId="20577"/>
+        <pc:chgData name="Christina Knes" userId="7e9737a164333dbd" providerId="LiveId" clId="{72053980-4108-4AED-A5B7-3290F7F82C69}" dt="2026-06-23T13:01:57.362" v="320" actId="20577"/>
         <pc:sldMkLst>
           <pc:docMk/>
           <pc:sldMk cId="0" sldId="260"/>
@@ -458,7 +458,7 @@
         </pc:spChg>
       </pc:sldChg>
       <pc:sldChg chg="modSp mod modAnim modNotesTx">
-        <pc:chgData name="Christina Knes" userId="7e9737a164333dbd" providerId="LiveId" clId="{72053980-4108-4AED-A5B7-3290F7F82C69}" dt="2026-06-15T15:55:08.701" v="268" actId="20577"/>
+        <pc:chgData name="Christina Knes" userId="7e9737a164333dbd" providerId="LiveId" clId="{72053980-4108-4AED-A5B7-3290F7F82C69}" dt="2026-06-23T13:02:03.430" v="321" actId="20577"/>
         <pc:sldMkLst>
           <pc:docMk/>
           <pc:sldMk cId="0" sldId="261"/>
@@ -481,7 +481,7 @@
         </pc:spChg>
       </pc:sldChg>
       <pc:sldChg chg="addSp modSp mod modNotesTx">
-        <pc:chgData name="Christina Knes" userId="7e9737a164333dbd" providerId="LiveId" clId="{72053980-4108-4AED-A5B7-3290F7F82C69}" dt="2026-06-15T15:55:17.928" v="272" actId="20577"/>
+        <pc:chgData name="Christina Knes" userId="7e9737a164333dbd" providerId="LiveId" clId="{72053980-4108-4AED-A5B7-3290F7F82C69}" dt="2026-06-23T13:02:07.431" v="322" actId="20577"/>
         <pc:sldMkLst>
           <pc:docMk/>
           <pc:sldMk cId="0" sldId="262"/>
@@ -654,7 +654,7 @@
           <a:p>
             <a:fld id="{7AAA80C1-B10E-441C-98F7-90D0E5C9B104}" type="datetimeFigureOut">
               <a:rPr lang="de-AT" smtClean="0"/>
-              <a:t>16.06.2026</a:t>
+              <a:t>23.06.2026</a:t>
             </a:fld>
             <a:endParaRPr lang="de-AT"/>
           </a:p>
@@ -966,300 +966,6 @@
           <a:bodyPr/>
           <a:lstStyle/>
           <a:p>
-            <a:r>
-              <a:rPr lang="de-AT" dirty="0"/>
-              <a:t>Hello </a:t>
-            </a:r>
-            <a:r>
-              <a:rPr lang="de-AT" dirty="0" err="1"/>
-              <a:t>everyone</a:t>
-            </a:r>
-            <a:r>
-              <a:rPr lang="de-AT" dirty="0"/>
-              <a:t>,</a:t>
-            </a:r>
-          </a:p>
-          <a:p>
-            <a:endParaRPr lang="de-AT" dirty="0"/>
-          </a:p>
-          <a:p>
-            <a:r>
-              <a:rPr lang="de-AT" dirty="0" err="1"/>
-              <a:t>today</a:t>
-            </a:r>
-            <a:r>
-              <a:rPr lang="de-AT" dirty="0"/>
-              <a:t> I will </a:t>
-            </a:r>
-            <a:r>
-              <a:rPr lang="de-AT" dirty="0" err="1"/>
-              <a:t>present</a:t>
-            </a:r>
-            <a:r>
-              <a:rPr lang="de-AT" dirty="0"/>
-              <a:t> </a:t>
-            </a:r>
-            <a:r>
-              <a:rPr lang="de-AT" dirty="0" err="1"/>
-              <a:t>the</a:t>
-            </a:r>
-            <a:r>
-              <a:rPr lang="de-AT" dirty="0"/>
-              <a:t> </a:t>
-            </a:r>
-            <a:r>
-              <a:rPr lang="de-AT" dirty="0" err="1"/>
-              <a:t>study</a:t>
-            </a:r>
-            <a:r>
-              <a:rPr lang="de-AT" dirty="0"/>
-              <a:t> </a:t>
-            </a:r>
-            <a:r>
-              <a:rPr lang="de-AT" i="1" dirty="0"/>
-              <a:t>“ChatGPT-3.5 </a:t>
-            </a:r>
-            <a:r>
-              <a:rPr lang="de-AT" i="1" dirty="0" err="1"/>
-              <a:t>as</a:t>
-            </a:r>
-            <a:r>
-              <a:rPr lang="de-AT" i="1" dirty="0"/>
-              <a:t> Writing Assistance in </a:t>
-            </a:r>
-            <a:r>
-              <a:rPr lang="de-AT" i="1" dirty="0" err="1"/>
-              <a:t>Students</a:t>
-            </a:r>
-            <a:r>
-              <a:rPr lang="de-AT" i="1" dirty="0"/>
-              <a:t>’ Essays”</a:t>
-            </a:r>
-            <a:r>
-              <a:rPr lang="de-AT" dirty="0"/>
-              <a:t> </a:t>
-            </a:r>
-            <a:r>
-              <a:rPr lang="de-AT" dirty="0" err="1"/>
-              <a:t>by</a:t>
-            </a:r>
-            <a:r>
-              <a:rPr lang="de-AT" dirty="0"/>
-              <a:t> Bašić and </a:t>
-            </a:r>
-            <a:r>
-              <a:rPr lang="de-AT" dirty="0" err="1"/>
-              <a:t>colleagues</a:t>
-            </a:r>
-            <a:r>
-              <a:rPr lang="de-AT" dirty="0"/>
-              <a:t>, </a:t>
-            </a:r>
-            <a:r>
-              <a:rPr lang="de-AT" dirty="0" err="1"/>
-              <a:t>published</a:t>
-            </a:r>
-            <a:r>
-              <a:rPr lang="de-AT" dirty="0"/>
-              <a:t> in </a:t>
-            </a:r>
-            <a:r>
-              <a:rPr lang="de-AT" dirty="0" err="1"/>
-              <a:t>the</a:t>
-            </a:r>
-            <a:r>
-              <a:rPr lang="de-AT" dirty="0"/>
-              <a:t> </a:t>
-            </a:r>
-            <a:r>
-              <a:rPr lang="de-AT" dirty="0" err="1"/>
-              <a:t>year</a:t>
-            </a:r>
-            <a:r>
-              <a:rPr lang="de-AT" dirty="0"/>
-              <a:t> 2023, so </a:t>
-            </a:r>
-            <a:r>
-              <a:rPr lang="de-AT" dirty="0" err="1"/>
-              <a:t>we</a:t>
-            </a:r>
-            <a:r>
-              <a:rPr lang="de-AT" dirty="0"/>
-              <a:t> </a:t>
-            </a:r>
-            <a:r>
-              <a:rPr lang="de-AT" dirty="0" err="1"/>
-              <a:t>can</a:t>
-            </a:r>
-            <a:r>
-              <a:rPr lang="de-AT" dirty="0"/>
-              <a:t> </a:t>
-            </a:r>
-            <a:r>
-              <a:rPr lang="de-AT" dirty="0" err="1"/>
-              <a:t>say</a:t>
-            </a:r>
-            <a:r>
-              <a:rPr lang="de-AT" dirty="0"/>
-              <a:t> </a:t>
-            </a:r>
-            <a:r>
-              <a:rPr lang="de-AT" dirty="0" err="1"/>
-              <a:t>that</a:t>
-            </a:r>
-            <a:r>
-              <a:rPr lang="de-AT" dirty="0"/>
-              <a:t> </a:t>
-            </a:r>
-            <a:r>
-              <a:rPr lang="de-AT" dirty="0" err="1"/>
-              <a:t>it</a:t>
-            </a:r>
-            <a:r>
-              <a:rPr lang="de-AT" dirty="0"/>
-              <a:t> </a:t>
-            </a:r>
-            <a:r>
-              <a:rPr lang="de-AT" dirty="0" err="1"/>
-              <a:t>is</a:t>
-            </a:r>
-            <a:r>
-              <a:rPr lang="de-AT" dirty="0"/>
-              <a:t> </a:t>
-            </a:r>
-            <a:r>
-              <a:rPr lang="de-AT" dirty="0" err="1"/>
-              <a:t>one</a:t>
-            </a:r>
-            <a:r>
-              <a:rPr lang="de-AT" dirty="0"/>
-              <a:t> </a:t>
-            </a:r>
-            <a:r>
-              <a:rPr lang="de-AT" dirty="0" err="1"/>
-              <a:t>of</a:t>
-            </a:r>
-            <a:r>
-              <a:rPr lang="de-AT" dirty="0"/>
-              <a:t> </a:t>
-            </a:r>
-            <a:r>
-              <a:rPr lang="de-AT" dirty="0" err="1"/>
-              <a:t>the</a:t>
-            </a:r>
-            <a:r>
-              <a:rPr lang="de-AT" dirty="0"/>
-              <a:t> </a:t>
-            </a:r>
-            <a:r>
-              <a:rPr lang="de-AT" dirty="0" err="1"/>
-              <a:t>earlier</a:t>
-            </a:r>
-            <a:r>
-              <a:rPr lang="de-AT" dirty="0"/>
-              <a:t> </a:t>
-            </a:r>
-            <a:r>
-              <a:rPr lang="de-AT" dirty="0" err="1"/>
-              <a:t>studies</a:t>
-            </a:r>
-            <a:r>
-              <a:rPr lang="de-AT" dirty="0"/>
-              <a:t> on ChatGPT.</a:t>
-            </a:r>
-          </a:p>
-          <a:p>
-            <a:endParaRPr lang="de-AT" dirty="0"/>
-          </a:p>
-          <a:p>
-            <a:r>
-              <a:rPr lang="de-AT" dirty="0"/>
-              <a:t>The </a:t>
-            </a:r>
-            <a:r>
-              <a:rPr lang="de-AT" dirty="0" err="1"/>
-              <a:t>study</a:t>
-            </a:r>
-            <a:r>
-              <a:rPr lang="de-AT" dirty="0"/>
-              <a:t> </a:t>
-            </a:r>
-            <a:r>
-              <a:rPr lang="de-AT" dirty="0" err="1"/>
-              <a:t>investigates</a:t>
-            </a:r>
-            <a:r>
-              <a:rPr lang="de-AT" dirty="0"/>
-              <a:t> an </a:t>
-            </a:r>
-            <a:r>
-              <a:rPr lang="de-AT" dirty="0" err="1"/>
-              <a:t>important</a:t>
-            </a:r>
-            <a:r>
-              <a:rPr lang="de-AT" dirty="0"/>
-              <a:t> </a:t>
-            </a:r>
-            <a:r>
-              <a:rPr lang="de-AT" dirty="0" err="1"/>
-              <a:t>question</a:t>
-            </a:r>
-            <a:r>
-              <a:rPr lang="de-AT" dirty="0"/>
-              <a:t>:</a:t>
-            </a:r>
-          </a:p>
-          <a:p>
-            <a:endParaRPr lang="de-AT" dirty="0"/>
-          </a:p>
-          <a:p>
-            <a:r>
-              <a:rPr lang="de-AT" b="1" dirty="0"/>
-              <a:t>Does ChatGPT </a:t>
-            </a:r>
-            <a:r>
-              <a:rPr lang="de-AT" b="1" dirty="0" err="1"/>
-              <a:t>actually</a:t>
-            </a:r>
-            <a:r>
-              <a:rPr lang="de-AT" b="1" dirty="0"/>
-              <a:t> </a:t>
-            </a:r>
-            <a:r>
-              <a:rPr lang="de-AT" b="1" dirty="0" err="1"/>
-              <a:t>improve</a:t>
-            </a:r>
-            <a:r>
-              <a:rPr lang="de-AT" b="1" dirty="0"/>
-              <a:t> </a:t>
-            </a:r>
-            <a:r>
-              <a:rPr lang="de-AT" b="1" dirty="0" err="1"/>
-              <a:t>students</a:t>
-            </a:r>
-            <a:r>
-              <a:rPr lang="de-AT" b="1" dirty="0"/>
-              <a:t>’ essay-</a:t>
-            </a:r>
-            <a:r>
-              <a:rPr lang="de-AT" b="1" dirty="0" err="1"/>
-              <a:t>writing</a:t>
-            </a:r>
-            <a:r>
-              <a:rPr lang="de-AT" b="1" dirty="0"/>
-              <a:t> </a:t>
-            </a:r>
-            <a:r>
-              <a:rPr lang="de-AT" b="1" dirty="0" err="1"/>
-              <a:t>performance</a:t>
-            </a:r>
-            <a:r>
-              <a:rPr lang="de-AT" b="1" dirty="0"/>
-              <a:t>?</a:t>
-            </a:r>
-            <a:endParaRPr lang="de-AT" dirty="0"/>
-          </a:p>
-          <a:p>
             <a:endParaRPr lang="de-AT" dirty="0"/>
           </a:p>
         </p:txBody>
@@ -1344,560 +1050,6 @@
           <a:bodyPr/>
           <a:lstStyle/>
           <a:p>
-            <a:r>
-              <a:rPr lang="de-AT" dirty="0" err="1"/>
-              <a:t>To</a:t>
-            </a:r>
-            <a:r>
-              <a:rPr lang="de-AT" dirty="0"/>
-              <a:t> </a:t>
-            </a:r>
-            <a:r>
-              <a:rPr lang="de-AT" dirty="0" err="1"/>
-              <a:t>answer</a:t>
-            </a:r>
-            <a:r>
-              <a:rPr lang="de-AT" dirty="0"/>
-              <a:t> </a:t>
-            </a:r>
-            <a:r>
-              <a:rPr lang="de-AT" dirty="0" err="1"/>
-              <a:t>this</a:t>
-            </a:r>
-            <a:r>
-              <a:rPr lang="de-AT" dirty="0"/>
-              <a:t> </a:t>
-            </a:r>
-            <a:r>
-              <a:rPr lang="de-AT" dirty="0" err="1"/>
-              <a:t>question</a:t>
-            </a:r>
-            <a:r>
-              <a:rPr lang="de-AT" dirty="0"/>
-              <a:t>, </a:t>
-            </a:r>
-            <a:r>
-              <a:rPr lang="de-AT" dirty="0" err="1"/>
-              <a:t>the</a:t>
-            </a:r>
-            <a:r>
-              <a:rPr lang="de-AT" dirty="0"/>
-              <a:t> </a:t>
-            </a:r>
-            <a:r>
-              <a:rPr lang="de-AT" dirty="0" err="1"/>
-              <a:t>researchers</a:t>
-            </a:r>
-            <a:r>
-              <a:rPr lang="de-AT" dirty="0"/>
-              <a:t> </a:t>
-            </a:r>
-            <a:r>
-              <a:rPr lang="de-AT" dirty="0" err="1"/>
-              <a:t>conducted</a:t>
-            </a:r>
-            <a:r>
-              <a:rPr lang="de-AT" dirty="0"/>
-              <a:t> an </a:t>
-            </a:r>
-            <a:r>
-              <a:rPr lang="de-AT" dirty="0" err="1"/>
-              <a:t>experiment</a:t>
-            </a:r>
-            <a:r>
-              <a:rPr lang="de-AT" dirty="0"/>
-              <a:t> </a:t>
-            </a:r>
-            <a:r>
-              <a:rPr lang="de-AT" dirty="0" err="1"/>
-              <a:t>with</a:t>
-            </a:r>
-            <a:r>
-              <a:rPr lang="de-AT" dirty="0"/>
-              <a:t> </a:t>
-            </a:r>
-            <a:r>
-              <a:rPr lang="de-AT" b="1" dirty="0"/>
-              <a:t>18 </a:t>
-            </a:r>
-            <a:r>
-              <a:rPr lang="de-AT" b="1" dirty="0" err="1"/>
-              <a:t>master’s</a:t>
-            </a:r>
-            <a:r>
-              <a:rPr lang="de-AT" b="1" dirty="0"/>
-              <a:t> </a:t>
-            </a:r>
-            <a:r>
-              <a:rPr lang="de-AT" b="1" dirty="0" err="1"/>
-              <a:t>students</a:t>
-            </a:r>
-            <a:r>
-              <a:rPr lang="de-AT" dirty="0"/>
-              <a:t> </a:t>
-            </a:r>
-            <a:r>
-              <a:rPr lang="de-AT" dirty="0" err="1"/>
-              <a:t>from</a:t>
-            </a:r>
-            <a:r>
-              <a:rPr lang="de-AT" dirty="0"/>
-              <a:t> </a:t>
-            </a:r>
-            <a:r>
-              <a:rPr lang="de-AT" dirty="0" err="1"/>
-              <a:t>the</a:t>
-            </a:r>
-            <a:r>
-              <a:rPr lang="de-AT" dirty="0"/>
-              <a:t> University </a:t>
-            </a:r>
-            <a:r>
-              <a:rPr lang="de-AT" dirty="0" err="1"/>
-              <a:t>of</a:t>
-            </a:r>
-            <a:r>
-              <a:rPr lang="de-AT" dirty="0"/>
-              <a:t> Split.</a:t>
-            </a:r>
-          </a:p>
-          <a:p>
-            <a:endParaRPr lang="de-AT" dirty="0"/>
-          </a:p>
-          <a:p>
-            <a:r>
-              <a:rPr lang="de-AT" dirty="0"/>
-              <a:t>The </a:t>
-            </a:r>
-            <a:r>
-              <a:rPr lang="de-AT" dirty="0" err="1"/>
-              <a:t>students</a:t>
-            </a:r>
-            <a:r>
-              <a:rPr lang="de-AT" dirty="0"/>
-              <a:t> </a:t>
-            </a:r>
-            <a:r>
-              <a:rPr lang="de-AT" dirty="0" err="1"/>
-              <a:t>were</a:t>
-            </a:r>
-            <a:r>
-              <a:rPr lang="de-AT" dirty="0"/>
-              <a:t> </a:t>
-            </a:r>
-            <a:r>
-              <a:rPr lang="de-AT" dirty="0" err="1"/>
-              <a:t>divided</a:t>
-            </a:r>
-            <a:r>
-              <a:rPr lang="de-AT" dirty="0"/>
-              <a:t> </a:t>
-            </a:r>
-            <a:r>
-              <a:rPr lang="de-AT" dirty="0" err="1"/>
-              <a:t>into</a:t>
-            </a:r>
-            <a:r>
-              <a:rPr lang="de-AT" dirty="0"/>
-              <a:t> </a:t>
-            </a:r>
-            <a:r>
-              <a:rPr lang="de-AT" dirty="0" err="1"/>
-              <a:t>two</a:t>
-            </a:r>
-            <a:r>
-              <a:rPr lang="de-AT" dirty="0"/>
-              <a:t> </a:t>
-            </a:r>
-            <a:r>
-              <a:rPr lang="de-AT" dirty="0" err="1"/>
-              <a:t>groups</a:t>
-            </a:r>
-            <a:r>
-              <a:rPr lang="de-AT" dirty="0"/>
-              <a:t>:</a:t>
-            </a:r>
-          </a:p>
-          <a:p>
-            <a:endParaRPr lang="de-AT" dirty="0"/>
-          </a:p>
-          <a:p>
-            <a:r>
-              <a:rPr lang="de-AT" dirty="0"/>
-              <a:t>A </a:t>
-            </a:r>
-            <a:r>
-              <a:rPr lang="de-AT" dirty="0" err="1"/>
-              <a:t>control</a:t>
-            </a:r>
-            <a:r>
-              <a:rPr lang="de-AT" dirty="0"/>
-              <a:t> </a:t>
-            </a:r>
-            <a:r>
-              <a:rPr lang="de-AT" dirty="0" err="1"/>
-              <a:t>group</a:t>
-            </a:r>
-            <a:r>
-              <a:rPr lang="de-AT" dirty="0"/>
-              <a:t> </a:t>
-            </a:r>
-            <a:r>
-              <a:rPr lang="de-AT" dirty="0" err="1"/>
-              <a:t>that</a:t>
-            </a:r>
-            <a:r>
-              <a:rPr lang="de-AT" dirty="0"/>
-              <a:t> </a:t>
-            </a:r>
-            <a:r>
-              <a:rPr lang="de-AT" dirty="0" err="1"/>
-              <a:t>wrote</a:t>
-            </a:r>
-            <a:r>
-              <a:rPr lang="de-AT" dirty="0"/>
-              <a:t> </a:t>
-            </a:r>
-            <a:r>
-              <a:rPr lang="de-AT" dirty="0" err="1"/>
-              <a:t>essays</a:t>
-            </a:r>
-            <a:r>
-              <a:rPr lang="de-AT" dirty="0"/>
-              <a:t> in </a:t>
-            </a:r>
-            <a:r>
-              <a:rPr lang="de-AT" dirty="0" err="1"/>
-              <a:t>the</a:t>
-            </a:r>
-            <a:r>
-              <a:rPr lang="de-AT" dirty="0"/>
-              <a:t> traditional </a:t>
-            </a:r>
-            <a:r>
-              <a:rPr lang="de-AT" dirty="0" err="1"/>
-              <a:t>way</a:t>
-            </a:r>
-            <a:r>
-              <a:rPr lang="de-AT" dirty="0"/>
-              <a:t>. </a:t>
-            </a:r>
-          </a:p>
-          <a:p>
-            <a:r>
-              <a:rPr lang="de-AT" dirty="0"/>
-              <a:t>An experimental </a:t>
-            </a:r>
-            <a:r>
-              <a:rPr lang="de-AT" dirty="0" err="1"/>
-              <a:t>group</a:t>
-            </a:r>
-            <a:r>
-              <a:rPr lang="de-AT" dirty="0"/>
-              <a:t> </a:t>
-            </a:r>
-            <a:r>
-              <a:rPr lang="de-AT" dirty="0" err="1"/>
-              <a:t>that</a:t>
-            </a:r>
-            <a:r>
-              <a:rPr lang="de-AT" dirty="0"/>
-              <a:t> was </a:t>
-            </a:r>
-            <a:r>
-              <a:rPr lang="de-AT" dirty="0" err="1"/>
-              <a:t>allowed</a:t>
-            </a:r>
-            <a:r>
-              <a:rPr lang="de-AT" dirty="0"/>
-              <a:t> </a:t>
-            </a:r>
-            <a:r>
-              <a:rPr lang="de-AT" dirty="0" err="1"/>
-              <a:t>to</a:t>
-            </a:r>
-            <a:r>
-              <a:rPr lang="de-AT" dirty="0"/>
-              <a:t> </a:t>
-            </a:r>
-            <a:r>
-              <a:rPr lang="de-AT" dirty="0" err="1"/>
-              <a:t>use</a:t>
-            </a:r>
-            <a:r>
-              <a:rPr lang="de-AT" dirty="0"/>
-              <a:t> ChatGPT </a:t>
-            </a:r>
-            <a:r>
-              <a:rPr lang="de-AT" dirty="0" err="1"/>
-              <a:t>as</a:t>
-            </a:r>
-            <a:r>
-              <a:rPr lang="de-AT" dirty="0"/>
-              <a:t> a </a:t>
-            </a:r>
-            <a:r>
-              <a:rPr lang="de-AT" dirty="0" err="1"/>
-              <a:t>writing</a:t>
-            </a:r>
-            <a:r>
-              <a:rPr lang="de-AT" dirty="0"/>
-              <a:t> </a:t>
-            </a:r>
-            <a:r>
-              <a:rPr lang="de-AT" dirty="0" err="1"/>
-              <a:t>assistant</a:t>
-            </a:r>
-            <a:r>
-              <a:rPr lang="de-AT" dirty="0"/>
-              <a:t>. </a:t>
-            </a:r>
-          </a:p>
-          <a:p>
-            <a:endParaRPr lang="de-AT" dirty="0"/>
-          </a:p>
-          <a:p>
-            <a:r>
-              <a:rPr lang="de-AT" dirty="0"/>
-              <a:t>All </a:t>
-            </a:r>
-            <a:r>
-              <a:rPr lang="de-AT" dirty="0" err="1"/>
-              <a:t>students</a:t>
-            </a:r>
-            <a:r>
-              <a:rPr lang="de-AT" dirty="0"/>
-              <a:t> </a:t>
-            </a:r>
-            <a:r>
-              <a:rPr lang="de-AT" dirty="0" err="1"/>
-              <a:t>wrote</a:t>
-            </a:r>
-            <a:r>
-              <a:rPr lang="de-AT" dirty="0"/>
-              <a:t> an </a:t>
-            </a:r>
-            <a:r>
-              <a:rPr lang="de-AT" dirty="0" err="1"/>
-              <a:t>essay</a:t>
-            </a:r>
-            <a:r>
-              <a:rPr lang="de-AT" dirty="0"/>
-              <a:t> on </a:t>
-            </a:r>
-            <a:r>
-              <a:rPr lang="de-AT" dirty="0" err="1"/>
-              <a:t>the</a:t>
-            </a:r>
-            <a:r>
-              <a:rPr lang="de-AT" dirty="0"/>
-              <a:t> </a:t>
-            </a:r>
-            <a:r>
-              <a:rPr lang="de-AT" dirty="0" err="1"/>
-              <a:t>topic</a:t>
-            </a:r>
-            <a:r>
-              <a:rPr lang="de-AT" dirty="0"/>
-              <a:t>:</a:t>
-            </a:r>
-          </a:p>
-          <a:p>
-            <a:r>
-              <a:rPr lang="de-AT" b="1" dirty="0"/>
-              <a:t>“Advantages and </a:t>
-            </a:r>
-            <a:r>
-              <a:rPr lang="de-AT" b="1" dirty="0" err="1"/>
-              <a:t>disadvantages</a:t>
-            </a:r>
-            <a:r>
-              <a:rPr lang="de-AT" b="1" dirty="0"/>
-              <a:t> </a:t>
-            </a:r>
-            <a:r>
-              <a:rPr lang="de-AT" b="1" dirty="0" err="1"/>
-              <a:t>of</a:t>
-            </a:r>
-            <a:r>
-              <a:rPr lang="de-AT" b="1" dirty="0"/>
-              <a:t> </a:t>
-            </a:r>
-            <a:r>
-              <a:rPr lang="de-AT" b="1" dirty="0" err="1"/>
-              <a:t>biometric</a:t>
-            </a:r>
-            <a:r>
-              <a:rPr lang="de-AT" b="1" dirty="0"/>
-              <a:t> </a:t>
-            </a:r>
-            <a:r>
-              <a:rPr lang="de-AT" b="1" dirty="0" err="1"/>
-              <a:t>identification</a:t>
-            </a:r>
-            <a:r>
-              <a:rPr lang="de-AT" b="1" dirty="0"/>
-              <a:t> in </a:t>
-            </a:r>
-            <a:r>
-              <a:rPr lang="de-AT" b="1" dirty="0" err="1"/>
-              <a:t>forensic</a:t>
-            </a:r>
-            <a:r>
-              <a:rPr lang="de-AT" b="1" dirty="0"/>
-              <a:t> </a:t>
-            </a:r>
-            <a:r>
-              <a:rPr lang="de-AT" b="1" dirty="0" err="1"/>
-              <a:t>sciences</a:t>
-            </a:r>
-            <a:r>
-              <a:rPr lang="de-AT" b="1" dirty="0"/>
-              <a:t>.”</a:t>
-            </a:r>
-          </a:p>
-          <a:p>
-            <a:endParaRPr lang="de-AT" dirty="0"/>
-          </a:p>
-          <a:p>
-            <a:r>
-              <a:rPr lang="de-AT" dirty="0"/>
-              <a:t>The </a:t>
-            </a:r>
-            <a:r>
-              <a:rPr lang="de-AT" dirty="0" err="1"/>
-              <a:t>researchers</a:t>
-            </a:r>
-            <a:r>
-              <a:rPr lang="de-AT" dirty="0"/>
-              <a:t> </a:t>
-            </a:r>
-            <a:r>
-              <a:rPr lang="de-AT" dirty="0" err="1"/>
-              <a:t>then</a:t>
-            </a:r>
-            <a:r>
-              <a:rPr lang="de-AT" dirty="0"/>
-              <a:t> </a:t>
-            </a:r>
-            <a:r>
-              <a:rPr lang="de-AT" dirty="0" err="1"/>
-              <a:t>evaluated</a:t>
-            </a:r>
-            <a:r>
-              <a:rPr lang="de-AT" dirty="0"/>
-              <a:t>:</a:t>
-            </a:r>
-          </a:p>
-          <a:p>
-            <a:r>
-              <a:rPr lang="de-AT" dirty="0" err="1"/>
-              <a:t>essay</a:t>
-            </a:r>
-            <a:r>
-              <a:rPr lang="de-AT" dirty="0"/>
-              <a:t> </a:t>
-            </a:r>
-            <a:r>
-              <a:rPr lang="de-AT" dirty="0" err="1"/>
-              <a:t>quality</a:t>
-            </a:r>
-            <a:r>
-              <a:rPr lang="de-AT" dirty="0"/>
-              <a:t>, </a:t>
-            </a:r>
-          </a:p>
-          <a:p>
-            <a:r>
-              <a:rPr lang="de-AT" dirty="0" err="1"/>
-              <a:t>writing</a:t>
-            </a:r>
-            <a:r>
-              <a:rPr lang="de-AT" dirty="0"/>
-              <a:t> </a:t>
-            </a:r>
-            <a:r>
-              <a:rPr lang="de-AT" dirty="0" err="1"/>
-              <a:t>duration</a:t>
-            </a:r>
-            <a:r>
-              <a:rPr lang="de-AT" dirty="0"/>
-              <a:t>, </a:t>
-            </a:r>
-          </a:p>
-          <a:p>
-            <a:r>
-              <a:rPr lang="de-AT" dirty="0" err="1"/>
-              <a:t>text</a:t>
-            </a:r>
-            <a:r>
-              <a:rPr lang="de-AT" dirty="0"/>
-              <a:t> </a:t>
-            </a:r>
-            <a:r>
-              <a:rPr lang="de-AT" dirty="0" err="1"/>
-              <a:t>authenticity</a:t>
-            </a:r>
-            <a:r>
-              <a:rPr lang="de-AT" dirty="0"/>
-              <a:t>, </a:t>
-            </a:r>
-          </a:p>
-          <a:p>
-            <a:r>
-              <a:rPr lang="de-AT" dirty="0"/>
-              <a:t>and </a:t>
-            </a:r>
-            <a:r>
-              <a:rPr lang="de-AT" dirty="0" err="1"/>
-              <a:t>the</a:t>
-            </a:r>
-            <a:r>
-              <a:rPr lang="de-AT" dirty="0"/>
-              <a:t> </a:t>
-            </a:r>
-            <a:r>
-              <a:rPr lang="de-AT" dirty="0" err="1"/>
-              <a:t>likelihood</a:t>
-            </a:r>
-            <a:r>
-              <a:rPr lang="de-AT" dirty="0"/>
-              <a:t> </a:t>
-            </a:r>
-            <a:r>
-              <a:rPr lang="de-AT" dirty="0" err="1"/>
-              <a:t>that</a:t>
-            </a:r>
-            <a:r>
-              <a:rPr lang="de-AT" dirty="0"/>
-              <a:t> AI-</a:t>
-            </a:r>
-            <a:r>
-              <a:rPr lang="de-AT" dirty="0" err="1"/>
-              <a:t>generated</a:t>
-            </a:r>
-            <a:r>
-              <a:rPr lang="de-AT" dirty="0"/>
-              <a:t> </a:t>
-            </a:r>
-            <a:r>
-              <a:rPr lang="de-AT" dirty="0" err="1"/>
-              <a:t>content</a:t>
-            </a:r>
-            <a:r>
-              <a:rPr lang="de-AT" dirty="0"/>
-              <a:t> was </a:t>
-            </a:r>
-            <a:r>
-              <a:rPr lang="de-AT" dirty="0" err="1"/>
-              <a:t>present</a:t>
-            </a:r>
-            <a:r>
-              <a:rPr lang="de-AT" dirty="0"/>
-              <a:t>.</a:t>
-            </a:r>
-          </a:p>
-          <a:p>
             <a:endParaRPr lang="de-AT" dirty="0"/>
           </a:p>
         </p:txBody>
@@ -1982,458 +1134,7 @@
           <a:bodyPr/>
           <a:lstStyle/>
           <a:p>
-            <a:r>
-              <a:rPr lang="de-AT" dirty="0"/>
-              <a:t>The </a:t>
-            </a:r>
-            <a:r>
-              <a:rPr lang="de-AT" dirty="0" err="1"/>
-              <a:t>results</a:t>
-            </a:r>
-            <a:r>
-              <a:rPr lang="de-AT" dirty="0"/>
-              <a:t> </a:t>
-            </a:r>
-            <a:r>
-              <a:rPr lang="de-AT" dirty="0" err="1"/>
-              <a:t>were</a:t>
-            </a:r>
-            <a:r>
-              <a:rPr lang="de-AT" dirty="0"/>
-              <a:t> </a:t>
-            </a:r>
-            <a:r>
-              <a:rPr lang="de-AT" dirty="0" err="1"/>
-              <a:t>quite</a:t>
-            </a:r>
-            <a:r>
-              <a:rPr lang="de-AT" dirty="0"/>
-              <a:t> </a:t>
-            </a:r>
-            <a:r>
-              <a:rPr lang="de-AT" dirty="0" err="1"/>
-              <a:t>surprising</a:t>
-            </a:r>
-            <a:r>
-              <a:rPr lang="de-AT" dirty="0"/>
-              <a:t>.</a:t>
-            </a:r>
-          </a:p>
-          <a:p>
             <a:endParaRPr lang="de-AT" dirty="0"/>
-          </a:p>
-          <a:p>
-            <a:r>
-              <a:rPr lang="de-AT" dirty="0"/>
-              <a:t>The </a:t>
-            </a:r>
-            <a:r>
-              <a:rPr lang="de-AT" dirty="0" err="1"/>
-              <a:t>researchers</a:t>
-            </a:r>
-            <a:r>
-              <a:rPr lang="de-AT" dirty="0"/>
-              <a:t> </a:t>
-            </a:r>
-            <a:r>
-              <a:rPr lang="de-AT" dirty="0" err="1"/>
-              <a:t>found</a:t>
-            </a:r>
-            <a:r>
-              <a:rPr lang="de-AT" dirty="0"/>
-              <a:t> </a:t>
-            </a:r>
-            <a:r>
-              <a:rPr lang="de-AT" dirty="0" err="1"/>
-              <a:t>that</a:t>
-            </a:r>
-            <a:r>
-              <a:rPr lang="de-AT" dirty="0"/>
-              <a:t> </a:t>
-            </a:r>
-            <a:r>
-              <a:rPr lang="de-AT" dirty="0" err="1"/>
-              <a:t>the</a:t>
-            </a:r>
-            <a:r>
-              <a:rPr lang="de-AT" dirty="0"/>
-              <a:t> </a:t>
-            </a:r>
-            <a:r>
-              <a:rPr lang="de-AT" b="1" dirty="0"/>
-              <a:t>ChatGPT </a:t>
-            </a:r>
-            <a:r>
-              <a:rPr lang="de-AT" b="1" dirty="0" err="1"/>
-              <a:t>group</a:t>
-            </a:r>
-            <a:r>
-              <a:rPr lang="de-AT" b="1" dirty="0"/>
-              <a:t> </a:t>
-            </a:r>
-            <a:r>
-              <a:rPr lang="de-AT" b="1" dirty="0" err="1"/>
-              <a:t>did</a:t>
-            </a:r>
-            <a:r>
-              <a:rPr lang="de-AT" b="1" dirty="0"/>
-              <a:t> not perform </a:t>
-            </a:r>
-            <a:r>
-              <a:rPr lang="de-AT" b="1" dirty="0" err="1"/>
-              <a:t>better</a:t>
-            </a:r>
-            <a:r>
-              <a:rPr lang="de-AT" b="1" dirty="0"/>
-              <a:t> </a:t>
-            </a:r>
-            <a:r>
-              <a:rPr lang="de-AT" b="1" dirty="0" err="1"/>
-              <a:t>than</a:t>
-            </a:r>
-            <a:r>
-              <a:rPr lang="de-AT" b="1" dirty="0"/>
-              <a:t> </a:t>
-            </a:r>
-            <a:r>
-              <a:rPr lang="de-AT" b="1" dirty="0" err="1"/>
-              <a:t>the</a:t>
-            </a:r>
-            <a:r>
-              <a:rPr lang="de-AT" b="1" dirty="0"/>
-              <a:t> </a:t>
-            </a:r>
-            <a:r>
-              <a:rPr lang="de-AT" b="1" dirty="0" err="1"/>
-              <a:t>control</a:t>
-            </a:r>
-            <a:r>
-              <a:rPr lang="de-AT" b="1" dirty="0"/>
-              <a:t> </a:t>
-            </a:r>
-            <a:r>
-              <a:rPr lang="de-AT" b="1" dirty="0" err="1"/>
-              <a:t>group</a:t>
-            </a:r>
-            <a:r>
-              <a:rPr lang="de-AT" b="1" dirty="0"/>
-              <a:t>.</a:t>
-            </a:r>
-            <a:endParaRPr lang="de-AT" dirty="0"/>
-          </a:p>
-          <a:p>
-            <a:r>
-              <a:rPr lang="de-AT" dirty="0"/>
-              <a:t>Both </a:t>
-            </a:r>
-            <a:r>
-              <a:rPr lang="de-AT" dirty="0" err="1"/>
-              <a:t>groups</a:t>
-            </a:r>
-            <a:r>
-              <a:rPr lang="de-AT" dirty="0"/>
-              <a:t> </a:t>
-            </a:r>
-            <a:r>
-              <a:rPr lang="de-AT" dirty="0" err="1"/>
-              <a:t>achieved</a:t>
-            </a:r>
-            <a:r>
-              <a:rPr lang="de-AT" dirty="0"/>
-              <a:t> an </a:t>
-            </a:r>
-            <a:r>
-              <a:rPr lang="de-AT" dirty="0" err="1"/>
-              <a:t>average</a:t>
-            </a:r>
-            <a:r>
-              <a:rPr lang="de-AT" dirty="0"/>
-              <a:t> grade </a:t>
-            </a:r>
-            <a:r>
-              <a:rPr lang="de-AT" dirty="0" err="1"/>
-              <a:t>of</a:t>
-            </a:r>
-            <a:r>
-              <a:rPr lang="de-AT" dirty="0"/>
-              <a:t> </a:t>
-            </a:r>
-            <a:r>
-              <a:rPr lang="de-AT" b="1" dirty="0"/>
-              <a:t>C</a:t>
-            </a:r>
-            <a:r>
-              <a:rPr lang="de-AT" dirty="0"/>
-              <a:t>.</a:t>
-            </a:r>
-          </a:p>
-          <a:p>
-            <a:endParaRPr lang="de-AT" dirty="0"/>
-          </a:p>
-          <a:p>
-            <a:r>
-              <a:rPr lang="de-AT" dirty="0"/>
-              <a:t>In </a:t>
-            </a:r>
-            <a:r>
-              <a:rPr lang="de-AT" dirty="0" err="1"/>
-              <a:t>addition</a:t>
-            </a:r>
-            <a:r>
-              <a:rPr lang="de-AT" dirty="0"/>
-              <a:t>:</a:t>
-            </a:r>
-          </a:p>
-          <a:p>
-            <a:r>
-              <a:rPr lang="de-AT" dirty="0" err="1"/>
-              <a:t>students</a:t>
-            </a:r>
-            <a:r>
-              <a:rPr lang="de-AT" dirty="0"/>
-              <a:t> </a:t>
-            </a:r>
-            <a:r>
-              <a:rPr lang="de-AT" dirty="0" err="1"/>
-              <a:t>using</a:t>
-            </a:r>
-            <a:r>
-              <a:rPr lang="de-AT" dirty="0"/>
-              <a:t> ChatGPT </a:t>
-            </a:r>
-            <a:r>
-              <a:rPr lang="de-AT" dirty="0" err="1"/>
-              <a:t>did</a:t>
-            </a:r>
-            <a:r>
-              <a:rPr lang="de-AT" dirty="0"/>
-              <a:t> not finish </a:t>
-            </a:r>
-            <a:r>
-              <a:rPr lang="de-AT" dirty="0" err="1"/>
-              <a:t>their</a:t>
-            </a:r>
-            <a:r>
-              <a:rPr lang="de-AT" dirty="0"/>
-              <a:t> </a:t>
-            </a:r>
-            <a:r>
-              <a:rPr lang="de-AT" dirty="0" err="1"/>
-              <a:t>essays</a:t>
-            </a:r>
-            <a:r>
-              <a:rPr lang="de-AT" dirty="0"/>
-              <a:t> </a:t>
-            </a:r>
-            <a:r>
-              <a:rPr lang="de-AT" dirty="0" err="1"/>
-              <a:t>faster</a:t>
-            </a:r>
-            <a:r>
-              <a:rPr lang="de-AT" dirty="0"/>
-              <a:t>, </a:t>
-            </a:r>
-          </a:p>
-          <a:p>
-            <a:r>
-              <a:rPr lang="de-AT" dirty="0" err="1"/>
-              <a:t>they</a:t>
-            </a:r>
-            <a:r>
-              <a:rPr lang="de-AT" dirty="0"/>
-              <a:t> </a:t>
-            </a:r>
-            <a:r>
-              <a:rPr lang="de-AT" dirty="0" err="1"/>
-              <a:t>did</a:t>
-            </a:r>
-            <a:r>
-              <a:rPr lang="de-AT" dirty="0"/>
-              <a:t> not </a:t>
-            </a:r>
-            <a:r>
-              <a:rPr lang="de-AT" dirty="0" err="1"/>
-              <a:t>produce</a:t>
-            </a:r>
-            <a:r>
-              <a:rPr lang="de-AT" dirty="0"/>
-              <a:t> </a:t>
-            </a:r>
-            <a:r>
-              <a:rPr lang="de-AT" dirty="0" err="1"/>
-              <a:t>higher</a:t>
-            </a:r>
-            <a:r>
-              <a:rPr lang="de-AT" dirty="0"/>
-              <a:t>-quality </a:t>
-            </a:r>
-            <a:r>
-              <a:rPr lang="de-AT" dirty="0" err="1"/>
-              <a:t>essays</a:t>
-            </a:r>
-            <a:r>
-              <a:rPr lang="de-AT" dirty="0"/>
-              <a:t>, </a:t>
-            </a:r>
-          </a:p>
-          <a:p>
-            <a:r>
-              <a:rPr lang="de-AT" dirty="0"/>
-              <a:t>and </a:t>
-            </a:r>
-            <a:r>
-              <a:rPr lang="de-AT" dirty="0" err="1"/>
-              <a:t>their</a:t>
-            </a:r>
-            <a:r>
-              <a:rPr lang="de-AT" dirty="0"/>
-              <a:t> </a:t>
-            </a:r>
-            <a:r>
-              <a:rPr lang="de-AT" dirty="0" err="1"/>
-              <a:t>texts</a:t>
-            </a:r>
-            <a:r>
-              <a:rPr lang="de-AT" dirty="0"/>
-              <a:t> </a:t>
-            </a:r>
-            <a:r>
-              <a:rPr lang="de-AT" dirty="0" err="1"/>
-              <a:t>were</a:t>
-            </a:r>
-            <a:r>
-              <a:rPr lang="de-AT" dirty="0"/>
-              <a:t> </a:t>
-            </a:r>
-            <a:r>
-              <a:rPr lang="de-AT" dirty="0" err="1"/>
-              <a:t>slightly</a:t>
-            </a:r>
-            <a:r>
-              <a:rPr lang="de-AT" dirty="0"/>
-              <a:t> </a:t>
-            </a:r>
-            <a:r>
-              <a:rPr lang="de-AT" dirty="0" err="1"/>
-              <a:t>less</a:t>
-            </a:r>
-            <a:r>
-              <a:rPr lang="de-AT" dirty="0"/>
-              <a:t> </a:t>
-            </a:r>
-            <a:r>
-              <a:rPr lang="de-AT" dirty="0" err="1"/>
-              <a:t>authentic</a:t>
-            </a:r>
-            <a:r>
-              <a:rPr lang="de-AT" dirty="0"/>
-              <a:t>. </a:t>
-            </a:r>
-          </a:p>
-          <a:p>
-            <a:endParaRPr lang="de-AT" dirty="0"/>
-          </a:p>
-          <a:p>
-            <a:r>
-              <a:rPr lang="de-AT" dirty="0"/>
-              <a:t>The </a:t>
-            </a:r>
-            <a:r>
-              <a:rPr lang="de-AT" dirty="0" err="1"/>
-              <a:t>statistical</a:t>
-            </a:r>
-            <a:r>
-              <a:rPr lang="de-AT" dirty="0"/>
-              <a:t> </a:t>
-            </a:r>
-            <a:r>
-              <a:rPr lang="de-AT" dirty="0" err="1"/>
-              <a:t>analysis</a:t>
-            </a:r>
-            <a:r>
-              <a:rPr lang="de-AT" dirty="0"/>
-              <a:t> </a:t>
-            </a:r>
-            <a:r>
-              <a:rPr lang="de-AT" dirty="0" err="1"/>
-              <a:t>showed</a:t>
-            </a:r>
-            <a:r>
-              <a:rPr lang="de-AT" dirty="0"/>
-              <a:t> </a:t>
-            </a:r>
-            <a:r>
-              <a:rPr lang="de-AT" dirty="0" err="1"/>
-              <a:t>that</a:t>
-            </a:r>
-            <a:r>
-              <a:rPr lang="de-AT" dirty="0"/>
-              <a:t> </a:t>
-            </a:r>
-            <a:r>
-              <a:rPr lang="de-AT" dirty="0" err="1"/>
-              <a:t>none</a:t>
-            </a:r>
-            <a:r>
-              <a:rPr lang="de-AT" dirty="0"/>
-              <a:t> </a:t>
-            </a:r>
-            <a:r>
-              <a:rPr lang="de-AT" dirty="0" err="1"/>
-              <a:t>of</a:t>
-            </a:r>
-            <a:r>
-              <a:rPr lang="de-AT" dirty="0"/>
-              <a:t> </a:t>
-            </a:r>
-            <a:r>
-              <a:rPr lang="de-AT" dirty="0" err="1"/>
-              <a:t>the</a:t>
-            </a:r>
-            <a:r>
-              <a:rPr lang="de-AT" dirty="0"/>
-              <a:t> </a:t>
-            </a:r>
-            <a:r>
-              <a:rPr lang="de-AT" dirty="0" err="1"/>
-              <a:t>examined</a:t>
-            </a:r>
-            <a:r>
-              <a:rPr lang="de-AT" dirty="0"/>
-              <a:t> variables </a:t>
-            </a:r>
-            <a:r>
-              <a:rPr lang="de-AT" dirty="0" err="1"/>
-              <a:t>significantly</a:t>
-            </a:r>
-            <a:r>
-              <a:rPr lang="de-AT" dirty="0"/>
-              <a:t> </a:t>
-            </a:r>
-            <a:r>
-              <a:rPr lang="de-AT" dirty="0" err="1"/>
-              <a:t>improved</a:t>
-            </a:r>
-            <a:r>
-              <a:rPr lang="de-AT" dirty="0"/>
-              <a:t> </a:t>
-            </a:r>
-            <a:r>
-              <a:rPr lang="de-AT" dirty="0" err="1"/>
-              <a:t>essay</a:t>
-            </a:r>
-            <a:r>
-              <a:rPr lang="de-AT" dirty="0"/>
-              <a:t> </a:t>
-            </a:r>
-            <a:r>
-              <a:rPr lang="de-AT" dirty="0" err="1"/>
-              <a:t>performance</a:t>
-            </a:r>
-            <a:r>
-              <a:rPr lang="de-AT" dirty="0"/>
-              <a:t>. </a:t>
-            </a:r>
           </a:p>
         </p:txBody>
       </p:sp>
@@ -2517,272 +1218,6 @@
           <a:bodyPr/>
           <a:lstStyle/>
           <a:p>
-            <a:r>
-              <a:rPr lang="de-AT" dirty="0"/>
-              <a:t>The </a:t>
-            </a:r>
-            <a:r>
-              <a:rPr lang="de-AT" dirty="0" err="1"/>
-              <a:t>authors</a:t>
-            </a:r>
-            <a:r>
-              <a:rPr lang="de-AT" dirty="0"/>
-              <a:t> </a:t>
-            </a:r>
-            <a:r>
-              <a:rPr lang="de-AT" dirty="0" err="1"/>
-              <a:t>therefore</a:t>
-            </a:r>
-            <a:r>
-              <a:rPr lang="de-AT" dirty="0"/>
-              <a:t> </a:t>
-            </a:r>
-            <a:r>
-              <a:rPr lang="de-AT" dirty="0" err="1"/>
-              <a:t>concluded</a:t>
-            </a:r>
-            <a:r>
-              <a:rPr lang="de-AT" dirty="0"/>
-              <a:t> </a:t>
-            </a:r>
-            <a:r>
-              <a:rPr lang="de-AT" dirty="0" err="1"/>
-              <a:t>that</a:t>
-            </a:r>
-            <a:r>
-              <a:rPr lang="de-AT" dirty="0"/>
-              <a:t> ChatGPT </a:t>
-            </a:r>
-            <a:r>
-              <a:rPr lang="de-AT" dirty="0" err="1"/>
-              <a:t>should</a:t>
-            </a:r>
-            <a:r>
-              <a:rPr lang="de-AT" dirty="0"/>
-              <a:t> not </a:t>
-            </a:r>
-            <a:r>
-              <a:rPr lang="de-AT" dirty="0" err="1"/>
-              <a:t>automatically</a:t>
-            </a:r>
-            <a:r>
-              <a:rPr lang="de-AT" dirty="0"/>
-              <a:t> </a:t>
-            </a:r>
-            <a:r>
-              <a:rPr lang="de-AT" dirty="0" err="1"/>
-              <a:t>be</a:t>
-            </a:r>
-            <a:r>
-              <a:rPr lang="de-AT" dirty="0"/>
-              <a:t> </a:t>
-            </a:r>
-            <a:r>
-              <a:rPr lang="de-AT" dirty="0" err="1"/>
-              <a:t>viewed</a:t>
-            </a:r>
-            <a:r>
-              <a:rPr lang="de-AT" dirty="0"/>
-              <a:t> </a:t>
-            </a:r>
-            <a:r>
-              <a:rPr lang="de-AT" dirty="0" err="1"/>
-              <a:t>as</a:t>
-            </a:r>
-            <a:r>
-              <a:rPr lang="de-AT" dirty="0"/>
-              <a:t> an “</a:t>
-            </a:r>
-            <a:r>
-              <a:rPr lang="de-AT" dirty="0" err="1"/>
-              <a:t>essay</a:t>
-            </a:r>
-            <a:r>
-              <a:rPr lang="de-AT" dirty="0"/>
-              <a:t> </a:t>
-            </a:r>
-            <a:r>
-              <a:rPr lang="de-AT" dirty="0" err="1"/>
-              <a:t>enhancement</a:t>
-            </a:r>
-            <a:r>
-              <a:rPr lang="de-AT" dirty="0"/>
-              <a:t> </a:t>
-            </a:r>
-            <a:r>
-              <a:rPr lang="de-AT" dirty="0" err="1"/>
-              <a:t>tool</a:t>
-            </a:r>
-            <a:r>
-              <a:rPr lang="de-AT" dirty="0"/>
-              <a:t>.”</a:t>
-            </a:r>
-          </a:p>
-          <a:p>
-            <a:endParaRPr lang="de-AT" dirty="0"/>
-          </a:p>
-          <a:p>
-            <a:r>
-              <a:rPr lang="de-AT" dirty="0" err="1"/>
-              <a:t>Instead</a:t>
-            </a:r>
-            <a:r>
-              <a:rPr lang="de-AT" dirty="0"/>
-              <a:t>, </a:t>
-            </a:r>
-            <a:r>
-              <a:rPr lang="de-AT" dirty="0" err="1"/>
-              <a:t>its</a:t>
-            </a:r>
-            <a:r>
-              <a:rPr lang="de-AT" dirty="0"/>
-              <a:t> </a:t>
-            </a:r>
-            <a:r>
-              <a:rPr lang="de-AT" dirty="0" err="1"/>
-              <a:t>effectiveness</a:t>
-            </a:r>
-            <a:r>
-              <a:rPr lang="de-AT" dirty="0"/>
-              <a:t> </a:t>
-            </a:r>
-            <a:r>
-              <a:rPr lang="de-AT" dirty="0" err="1"/>
-              <a:t>appears</a:t>
-            </a:r>
-            <a:r>
-              <a:rPr lang="de-AT" dirty="0"/>
-              <a:t> </a:t>
-            </a:r>
-            <a:r>
-              <a:rPr lang="de-AT" dirty="0" err="1"/>
-              <a:t>to</a:t>
-            </a:r>
-            <a:r>
-              <a:rPr lang="de-AT" dirty="0"/>
-              <a:t> </a:t>
-            </a:r>
-            <a:r>
-              <a:rPr lang="de-AT" dirty="0" err="1"/>
-              <a:t>depend</a:t>
-            </a:r>
-            <a:r>
-              <a:rPr lang="de-AT" dirty="0"/>
-              <a:t> on </a:t>
-            </a:r>
-            <a:r>
-              <a:rPr lang="de-AT" dirty="0" err="1"/>
-              <a:t>several</a:t>
-            </a:r>
-            <a:r>
-              <a:rPr lang="de-AT" dirty="0"/>
-              <a:t> </a:t>
-            </a:r>
-            <a:r>
-              <a:rPr lang="de-AT" dirty="0" err="1"/>
-              <a:t>factors</a:t>
-            </a:r>
-            <a:r>
-              <a:rPr lang="de-AT" dirty="0"/>
-              <a:t>:</a:t>
-            </a:r>
-          </a:p>
-          <a:p>
-            <a:endParaRPr lang="de-AT" dirty="0"/>
-          </a:p>
-          <a:p>
-            <a:r>
-              <a:rPr lang="de-AT" dirty="0" err="1"/>
-              <a:t>prior</a:t>
-            </a:r>
-            <a:r>
-              <a:rPr lang="de-AT" dirty="0"/>
-              <a:t> </a:t>
-            </a:r>
-            <a:r>
-              <a:rPr lang="de-AT" dirty="0" err="1"/>
-              <a:t>knowledge</a:t>
-            </a:r>
-            <a:r>
-              <a:rPr lang="de-AT" dirty="0"/>
-              <a:t>, </a:t>
-            </a:r>
-          </a:p>
-          <a:p>
-            <a:r>
-              <a:rPr lang="de-AT" dirty="0" err="1"/>
-              <a:t>critical</a:t>
-            </a:r>
-            <a:r>
-              <a:rPr lang="de-AT" dirty="0"/>
-              <a:t> </a:t>
-            </a:r>
-            <a:r>
-              <a:rPr lang="de-AT" dirty="0" err="1"/>
-              <a:t>thinking</a:t>
-            </a:r>
-            <a:r>
-              <a:rPr lang="de-AT" dirty="0"/>
-              <a:t> </a:t>
-            </a:r>
-            <a:r>
-              <a:rPr lang="de-AT" dirty="0" err="1"/>
-              <a:t>skills</a:t>
-            </a:r>
-            <a:r>
-              <a:rPr lang="de-AT" dirty="0"/>
-              <a:t>, </a:t>
-            </a:r>
-          </a:p>
-          <a:p>
-            <a:r>
-              <a:rPr lang="de-AT" dirty="0" err="1"/>
-              <a:t>prompting</a:t>
-            </a:r>
-            <a:r>
-              <a:rPr lang="de-AT" dirty="0"/>
-              <a:t> </a:t>
-            </a:r>
-            <a:r>
-              <a:rPr lang="de-AT" dirty="0" err="1"/>
-              <a:t>ability</a:t>
-            </a:r>
-            <a:r>
-              <a:rPr lang="de-AT" dirty="0"/>
-              <a:t>, </a:t>
-            </a:r>
-          </a:p>
-          <a:p>
-            <a:r>
-              <a:rPr lang="de-AT" dirty="0"/>
-              <a:t>and </a:t>
-            </a:r>
-            <a:r>
-              <a:rPr lang="de-AT" dirty="0" err="1"/>
-              <a:t>overall</a:t>
-            </a:r>
-            <a:r>
-              <a:rPr lang="de-AT" dirty="0"/>
-              <a:t> </a:t>
-            </a:r>
-            <a:r>
-              <a:rPr lang="de-AT" dirty="0" err="1"/>
-              <a:t>writing</a:t>
-            </a:r>
-            <a:r>
-              <a:rPr lang="de-AT" dirty="0"/>
-              <a:t> </a:t>
-            </a:r>
-            <a:r>
-              <a:rPr lang="de-AT" dirty="0" err="1"/>
-              <a:t>competence</a:t>
-            </a:r>
-            <a:r>
-              <a:rPr lang="de-AT" dirty="0"/>
-              <a:t>. </a:t>
-            </a:r>
-          </a:p>
-          <a:p>
             <a:endParaRPr lang="de-AT" dirty="0"/>
           </a:p>
         </p:txBody>
@@ -2867,726 +1302,6 @@
           <a:bodyPr/>
           <a:lstStyle/>
           <a:p>
-            <a:r>
-              <a:rPr lang="de-AT" dirty="0"/>
-              <a:t>Like </a:t>
-            </a:r>
-            <a:r>
-              <a:rPr lang="de-AT" dirty="0" err="1"/>
-              <a:t>every</a:t>
-            </a:r>
-            <a:r>
-              <a:rPr lang="de-AT" dirty="0"/>
-              <a:t> </a:t>
-            </a:r>
-            <a:r>
-              <a:rPr lang="de-AT" dirty="0" err="1"/>
-              <a:t>study</a:t>
-            </a:r>
-            <a:r>
-              <a:rPr lang="de-AT" dirty="0"/>
-              <a:t>, </a:t>
-            </a:r>
-            <a:r>
-              <a:rPr lang="de-AT" dirty="0" err="1"/>
-              <a:t>this</a:t>
-            </a:r>
-            <a:r>
-              <a:rPr lang="de-AT" dirty="0"/>
-              <a:t> </a:t>
-            </a:r>
-            <a:r>
-              <a:rPr lang="de-AT" dirty="0" err="1"/>
-              <a:t>one</a:t>
-            </a:r>
-            <a:r>
-              <a:rPr lang="de-AT" dirty="0"/>
-              <a:t> </a:t>
-            </a:r>
-            <a:r>
-              <a:rPr lang="de-AT" dirty="0" err="1"/>
-              <a:t>has</a:t>
-            </a:r>
-            <a:r>
-              <a:rPr lang="de-AT" dirty="0"/>
-              <a:t> </a:t>
-            </a:r>
-            <a:r>
-              <a:rPr lang="de-AT" dirty="0" err="1"/>
-              <a:t>strengths</a:t>
-            </a:r>
-            <a:r>
-              <a:rPr lang="de-AT" dirty="0"/>
-              <a:t> and </a:t>
-            </a:r>
-            <a:r>
-              <a:rPr lang="de-AT" dirty="0" err="1"/>
-              <a:t>limitations</a:t>
-            </a:r>
-            <a:r>
-              <a:rPr lang="de-AT" dirty="0"/>
-              <a:t>.</a:t>
-            </a:r>
-          </a:p>
-          <a:p>
-            <a:endParaRPr lang="de-AT" dirty="0"/>
-          </a:p>
-          <a:p>
-            <a:r>
-              <a:rPr lang="de-AT" dirty="0"/>
-              <a:t>First, </a:t>
-            </a:r>
-            <a:r>
-              <a:rPr lang="de-AT" dirty="0" err="1"/>
-              <a:t>the</a:t>
-            </a:r>
-            <a:r>
-              <a:rPr lang="de-AT" dirty="0"/>
-              <a:t> </a:t>
-            </a:r>
-            <a:r>
-              <a:rPr lang="de-AT" dirty="0" err="1"/>
-              <a:t>strengths</a:t>
-            </a:r>
-            <a:r>
-              <a:rPr lang="de-AT" dirty="0"/>
-              <a:t>:</a:t>
-            </a:r>
-          </a:p>
-          <a:p>
-            <a:r>
-              <a:rPr lang="de-AT" dirty="0"/>
-              <a:t>The </a:t>
-            </a:r>
-            <a:r>
-              <a:rPr lang="de-AT" dirty="0" err="1"/>
-              <a:t>study</a:t>
-            </a:r>
-            <a:r>
-              <a:rPr lang="de-AT" dirty="0"/>
-              <a:t> </a:t>
-            </a:r>
-            <a:r>
-              <a:rPr lang="de-AT" dirty="0" err="1"/>
-              <a:t>used</a:t>
-            </a:r>
-            <a:r>
-              <a:rPr lang="de-AT" dirty="0"/>
-              <a:t> a real experimental design and </a:t>
-            </a:r>
-            <a:r>
-              <a:rPr lang="de-AT" dirty="0" err="1"/>
-              <a:t>examined</a:t>
-            </a:r>
-            <a:r>
-              <a:rPr lang="de-AT" dirty="0"/>
-              <a:t> </a:t>
-            </a:r>
-            <a:r>
-              <a:rPr lang="de-AT" dirty="0" err="1"/>
-              <a:t>students</a:t>
-            </a:r>
-            <a:r>
-              <a:rPr lang="de-AT" dirty="0"/>
-              <a:t> in an </a:t>
-            </a:r>
-            <a:r>
-              <a:rPr lang="de-AT" dirty="0" err="1"/>
-              <a:t>authentic</a:t>
-            </a:r>
-            <a:r>
-              <a:rPr lang="de-AT" dirty="0"/>
-              <a:t> </a:t>
-            </a:r>
-            <a:r>
-              <a:rPr lang="de-AT" dirty="0" err="1"/>
-              <a:t>educational</a:t>
-            </a:r>
-            <a:r>
-              <a:rPr lang="de-AT" dirty="0"/>
-              <a:t> </a:t>
-            </a:r>
-            <a:r>
-              <a:rPr lang="de-AT" dirty="0" err="1"/>
-              <a:t>environment</a:t>
-            </a:r>
-            <a:r>
-              <a:rPr lang="de-AT" dirty="0"/>
-              <a:t>. </a:t>
-            </a:r>
-          </a:p>
-          <a:p>
-            <a:r>
-              <a:rPr lang="de-AT" dirty="0"/>
-              <a:t>This </a:t>
-            </a:r>
-            <a:r>
-              <a:rPr lang="de-AT" dirty="0" err="1"/>
-              <a:t>makes</a:t>
-            </a:r>
-            <a:r>
-              <a:rPr lang="de-AT" dirty="0"/>
-              <a:t> </a:t>
-            </a:r>
-            <a:r>
-              <a:rPr lang="de-AT" dirty="0" err="1"/>
-              <a:t>the</a:t>
-            </a:r>
-            <a:r>
-              <a:rPr lang="de-AT" dirty="0"/>
-              <a:t> </a:t>
-            </a:r>
-            <a:r>
-              <a:rPr lang="de-AT" dirty="0" err="1"/>
-              <a:t>findings</a:t>
-            </a:r>
-            <a:r>
-              <a:rPr lang="de-AT" dirty="0"/>
-              <a:t> </a:t>
-            </a:r>
-            <a:r>
-              <a:rPr lang="de-AT" dirty="0" err="1"/>
-              <a:t>highly</a:t>
-            </a:r>
-            <a:r>
-              <a:rPr lang="de-AT" dirty="0"/>
-              <a:t> relevant </a:t>
-            </a:r>
-            <a:r>
-              <a:rPr lang="de-AT" dirty="0" err="1"/>
-              <a:t>for</a:t>
-            </a:r>
-            <a:r>
-              <a:rPr lang="de-AT" dirty="0"/>
-              <a:t> </a:t>
-            </a:r>
-            <a:r>
-              <a:rPr lang="de-AT" dirty="0" err="1"/>
-              <a:t>higher</a:t>
-            </a:r>
-            <a:r>
-              <a:rPr lang="de-AT" dirty="0"/>
-              <a:t> </a:t>
-            </a:r>
-            <a:r>
-              <a:rPr lang="de-AT" dirty="0" err="1"/>
-              <a:t>education</a:t>
-            </a:r>
-            <a:r>
-              <a:rPr lang="de-AT" dirty="0"/>
-              <a:t>.</a:t>
-            </a:r>
-          </a:p>
-          <a:p>
-            <a:endParaRPr lang="de-AT" dirty="0"/>
-          </a:p>
-          <a:p>
-            <a:endParaRPr lang="de-AT" dirty="0"/>
-          </a:p>
-          <a:p>
-            <a:r>
-              <a:rPr lang="de-AT" dirty="0" err="1"/>
-              <a:t>However</a:t>
-            </a:r>
-            <a:r>
-              <a:rPr lang="de-AT" dirty="0"/>
-              <a:t>, </a:t>
-            </a:r>
-            <a:r>
-              <a:rPr lang="de-AT" dirty="0" err="1"/>
-              <a:t>there</a:t>
-            </a:r>
-            <a:r>
-              <a:rPr lang="de-AT" dirty="0"/>
-              <a:t> </a:t>
-            </a:r>
-            <a:r>
-              <a:rPr lang="de-AT" dirty="0" err="1"/>
-              <a:t>are</a:t>
-            </a:r>
-            <a:r>
-              <a:rPr lang="de-AT" dirty="0"/>
-              <a:t> also </a:t>
-            </a:r>
-            <a:r>
-              <a:rPr lang="de-AT" dirty="0" err="1"/>
-              <a:t>important</a:t>
-            </a:r>
-            <a:r>
-              <a:rPr lang="de-AT" dirty="0"/>
-              <a:t> </a:t>
-            </a:r>
-            <a:r>
-              <a:rPr lang="de-AT" dirty="0" err="1"/>
-              <a:t>limitations</a:t>
-            </a:r>
-            <a:r>
-              <a:rPr lang="de-AT" dirty="0"/>
-              <a:t>.</a:t>
-            </a:r>
-          </a:p>
-          <a:p>
-            <a:r>
-              <a:rPr lang="de-AT" dirty="0"/>
-              <a:t>The sample </a:t>
-            </a:r>
-            <a:r>
-              <a:rPr lang="de-AT" dirty="0" err="1"/>
-              <a:t>size</a:t>
-            </a:r>
-            <a:r>
-              <a:rPr lang="de-AT" dirty="0"/>
-              <a:t> was </a:t>
-            </a:r>
-            <a:r>
-              <a:rPr lang="de-AT" dirty="0" err="1"/>
-              <a:t>very</a:t>
-            </a:r>
-            <a:r>
-              <a:rPr lang="de-AT" dirty="0"/>
-              <a:t> </a:t>
-            </a:r>
-            <a:r>
-              <a:rPr lang="de-AT" dirty="0" err="1"/>
-              <a:t>small</a:t>
-            </a:r>
-            <a:r>
-              <a:rPr lang="de-AT" dirty="0"/>
-              <a:t>, </a:t>
-            </a:r>
-            <a:r>
-              <a:rPr lang="de-AT" dirty="0" err="1"/>
-              <a:t>with</a:t>
-            </a:r>
-            <a:r>
-              <a:rPr lang="de-AT" dirty="0"/>
-              <a:t> </a:t>
-            </a:r>
-            <a:r>
-              <a:rPr lang="de-AT" dirty="0" err="1"/>
-              <a:t>only</a:t>
-            </a:r>
-            <a:r>
-              <a:rPr lang="de-AT" dirty="0"/>
-              <a:t> </a:t>
-            </a:r>
-            <a:r>
-              <a:rPr lang="de-AT" dirty="0" err="1"/>
-              <a:t>nine</a:t>
-            </a:r>
-            <a:r>
-              <a:rPr lang="de-AT" dirty="0"/>
-              <a:t> </a:t>
-            </a:r>
-            <a:r>
-              <a:rPr lang="de-AT" dirty="0" err="1"/>
-              <a:t>students</a:t>
-            </a:r>
-            <a:r>
-              <a:rPr lang="de-AT" dirty="0"/>
-              <a:t> per </a:t>
-            </a:r>
-            <a:r>
-              <a:rPr lang="de-AT" dirty="0" err="1"/>
-              <a:t>group</a:t>
-            </a:r>
-            <a:r>
-              <a:rPr lang="de-AT" dirty="0"/>
-              <a:t>.</a:t>
-            </a:r>
-          </a:p>
-          <a:p>
-            <a:r>
-              <a:rPr lang="de-AT" dirty="0" err="1"/>
-              <a:t>Furthermore</a:t>
-            </a:r>
-            <a:r>
-              <a:rPr lang="de-AT" dirty="0"/>
-              <a:t>, </a:t>
-            </a:r>
-            <a:r>
-              <a:rPr lang="de-AT" dirty="0" err="1"/>
-              <a:t>most</a:t>
-            </a:r>
-            <a:r>
-              <a:rPr lang="de-AT" dirty="0"/>
-              <a:t> </a:t>
-            </a:r>
-            <a:r>
-              <a:rPr lang="de-AT" dirty="0" err="1"/>
-              <a:t>participants</a:t>
-            </a:r>
-            <a:r>
-              <a:rPr lang="de-AT" dirty="0"/>
-              <a:t> </a:t>
-            </a:r>
-            <a:r>
-              <a:rPr lang="de-AT" dirty="0" err="1"/>
-              <a:t>had</a:t>
-            </a:r>
-            <a:r>
-              <a:rPr lang="de-AT" dirty="0"/>
-              <a:t> </a:t>
-            </a:r>
-            <a:r>
-              <a:rPr lang="de-AT" dirty="0" err="1"/>
-              <a:t>little</a:t>
-            </a:r>
-            <a:r>
-              <a:rPr lang="de-AT" dirty="0"/>
-              <a:t> </a:t>
-            </a:r>
-            <a:r>
-              <a:rPr lang="de-AT" dirty="0" err="1"/>
-              <a:t>or</a:t>
-            </a:r>
-            <a:r>
-              <a:rPr lang="de-AT" dirty="0"/>
-              <a:t> </a:t>
-            </a:r>
-            <a:r>
-              <a:rPr lang="de-AT" dirty="0" err="1"/>
-              <a:t>no</a:t>
-            </a:r>
-            <a:r>
-              <a:rPr lang="de-AT" dirty="0"/>
-              <a:t> </a:t>
-            </a:r>
-            <a:r>
-              <a:rPr lang="de-AT" dirty="0" err="1"/>
-              <a:t>experience</a:t>
-            </a:r>
-            <a:r>
-              <a:rPr lang="de-AT" dirty="0"/>
-              <a:t> </a:t>
-            </a:r>
-            <a:r>
-              <a:rPr lang="de-AT" dirty="0" err="1"/>
-              <a:t>using</a:t>
-            </a:r>
-            <a:r>
-              <a:rPr lang="de-AT" dirty="0"/>
-              <a:t> ChatGPT </a:t>
-            </a:r>
-            <a:r>
-              <a:rPr lang="de-AT" dirty="0" err="1"/>
-              <a:t>before</a:t>
-            </a:r>
-            <a:r>
-              <a:rPr lang="de-AT" dirty="0"/>
-              <a:t> </a:t>
-            </a:r>
-            <a:r>
-              <a:rPr lang="de-AT" dirty="0" err="1"/>
-              <a:t>the</a:t>
-            </a:r>
-            <a:r>
-              <a:rPr lang="de-AT" dirty="0"/>
-              <a:t> </a:t>
-            </a:r>
-            <a:r>
-              <a:rPr lang="de-AT" dirty="0" err="1"/>
-              <a:t>experiment</a:t>
-            </a:r>
-            <a:r>
-              <a:rPr lang="de-AT" dirty="0"/>
-              <a:t>.</a:t>
-            </a:r>
-          </a:p>
-          <a:p>
-            <a:r>
-              <a:rPr lang="de-AT" dirty="0"/>
-              <a:t>The </a:t>
-            </a:r>
-            <a:r>
-              <a:rPr lang="de-AT" dirty="0" err="1"/>
-              <a:t>essays</a:t>
-            </a:r>
-            <a:r>
-              <a:rPr lang="de-AT" dirty="0"/>
-              <a:t> </a:t>
-            </a:r>
-            <a:r>
-              <a:rPr lang="de-AT" dirty="0" err="1"/>
-              <a:t>were</a:t>
-            </a:r>
-            <a:r>
-              <a:rPr lang="de-AT" dirty="0"/>
-              <a:t> </a:t>
-            </a:r>
-            <a:r>
-              <a:rPr lang="de-AT" dirty="0" err="1"/>
-              <a:t>written</a:t>
-            </a:r>
-            <a:r>
-              <a:rPr lang="de-AT" dirty="0"/>
-              <a:t> in Croatian, </a:t>
-            </a:r>
-            <a:r>
-              <a:rPr lang="de-AT" dirty="0" err="1"/>
-              <a:t>which</a:t>
-            </a:r>
-            <a:r>
-              <a:rPr lang="de-AT" dirty="0"/>
-              <a:t> </a:t>
-            </a:r>
-            <a:r>
-              <a:rPr lang="de-AT" dirty="0" err="1"/>
-              <a:t>may</a:t>
-            </a:r>
-            <a:r>
-              <a:rPr lang="de-AT" dirty="0"/>
-              <a:t> </a:t>
-            </a:r>
-            <a:r>
-              <a:rPr lang="de-AT" dirty="0" err="1"/>
-              <a:t>have</a:t>
-            </a:r>
-            <a:r>
-              <a:rPr lang="de-AT" dirty="0"/>
-              <a:t> </a:t>
-            </a:r>
-            <a:r>
-              <a:rPr lang="de-AT" dirty="0" err="1"/>
-              <a:t>influenced</a:t>
-            </a:r>
-            <a:r>
-              <a:rPr lang="de-AT" dirty="0"/>
-              <a:t> </a:t>
-            </a:r>
-            <a:r>
-              <a:rPr lang="de-AT" dirty="0" err="1"/>
-              <a:t>ChatGPT’s</a:t>
-            </a:r>
-            <a:r>
-              <a:rPr lang="de-AT" dirty="0"/>
-              <a:t> </a:t>
-            </a:r>
-            <a:r>
-              <a:rPr lang="de-AT" dirty="0" err="1"/>
-              <a:t>performance</a:t>
-            </a:r>
-            <a:r>
-              <a:rPr lang="de-AT" dirty="0"/>
-              <a:t>.</a:t>
-            </a:r>
-          </a:p>
-          <a:p>
-            <a:r>
-              <a:rPr lang="de-AT" dirty="0" err="1"/>
-              <a:t>Finally</a:t>
-            </a:r>
-            <a:r>
-              <a:rPr lang="de-AT" dirty="0"/>
-              <a:t>, </a:t>
-            </a:r>
-            <a:r>
-              <a:rPr lang="de-AT" dirty="0" err="1"/>
-              <a:t>the</a:t>
-            </a:r>
-            <a:r>
-              <a:rPr lang="de-AT" dirty="0"/>
-              <a:t> </a:t>
-            </a:r>
-            <a:r>
-              <a:rPr lang="de-AT" dirty="0" err="1"/>
-              <a:t>study</a:t>
-            </a:r>
-            <a:r>
-              <a:rPr lang="de-AT" dirty="0"/>
-              <a:t> </a:t>
-            </a:r>
-            <a:r>
-              <a:rPr lang="de-AT" dirty="0" err="1"/>
-              <a:t>only</a:t>
-            </a:r>
-            <a:r>
-              <a:rPr lang="de-AT" dirty="0"/>
-              <a:t> </a:t>
-            </a:r>
-            <a:r>
-              <a:rPr lang="de-AT" dirty="0" err="1"/>
-              <a:t>examined</a:t>
-            </a:r>
-            <a:r>
-              <a:rPr lang="de-AT" dirty="0"/>
-              <a:t> a </a:t>
-            </a:r>
-            <a:r>
-              <a:rPr lang="de-AT" dirty="0" err="1"/>
-              <a:t>short</a:t>
-            </a:r>
-            <a:r>
-              <a:rPr lang="de-AT" dirty="0"/>
-              <a:t>-term </a:t>
-            </a:r>
-            <a:r>
-              <a:rPr lang="de-AT" dirty="0" err="1"/>
-              <a:t>intervention</a:t>
-            </a:r>
-            <a:r>
-              <a:rPr lang="de-AT" dirty="0"/>
-              <a:t> and </a:t>
-            </a:r>
-            <a:r>
-              <a:rPr lang="de-AT" dirty="0" err="1"/>
-              <a:t>therefore</a:t>
-            </a:r>
-            <a:r>
-              <a:rPr lang="de-AT" dirty="0"/>
-              <a:t> </a:t>
-            </a:r>
-            <a:r>
-              <a:rPr lang="de-AT" dirty="0" err="1"/>
-              <a:t>cannot</a:t>
-            </a:r>
-            <a:r>
-              <a:rPr lang="de-AT" dirty="0"/>
-              <a:t> </a:t>
-            </a:r>
-            <a:r>
-              <a:rPr lang="de-AT" dirty="0" err="1"/>
-              <a:t>tell</a:t>
-            </a:r>
-            <a:r>
-              <a:rPr lang="de-AT" dirty="0"/>
-              <a:t> </a:t>
-            </a:r>
-            <a:r>
-              <a:rPr lang="de-AT" dirty="0" err="1"/>
-              <a:t>us</a:t>
-            </a:r>
-            <a:r>
-              <a:rPr lang="de-AT" dirty="0"/>
-              <a:t> </a:t>
-            </a:r>
-            <a:r>
-              <a:rPr lang="de-AT" dirty="0" err="1"/>
-              <a:t>much</a:t>
-            </a:r>
-            <a:r>
-              <a:rPr lang="de-AT" dirty="0"/>
-              <a:t> </a:t>
-            </a:r>
-            <a:r>
-              <a:rPr lang="de-AT" dirty="0" err="1"/>
-              <a:t>about</a:t>
-            </a:r>
-            <a:r>
-              <a:rPr lang="de-AT" dirty="0"/>
-              <a:t> </a:t>
-            </a:r>
-            <a:r>
-              <a:rPr lang="de-AT" dirty="0" err="1"/>
-              <a:t>long</a:t>
-            </a:r>
-            <a:r>
-              <a:rPr lang="de-AT" dirty="0"/>
-              <a:t>-term </a:t>
-            </a:r>
-            <a:r>
-              <a:rPr lang="de-AT" dirty="0" err="1"/>
-              <a:t>learning</a:t>
-            </a:r>
-            <a:r>
-              <a:rPr lang="de-AT" dirty="0"/>
-              <a:t> </a:t>
-            </a:r>
-            <a:r>
-              <a:rPr lang="de-AT" dirty="0" err="1"/>
-              <a:t>effects</a:t>
-            </a:r>
-            <a:r>
-              <a:rPr lang="de-AT" dirty="0"/>
-              <a:t>.</a:t>
-            </a:r>
-          </a:p>
-          <a:p>
-            <a:endParaRPr lang="de-AT" dirty="0"/>
-          </a:p>
-          <a:p>
-            <a:r>
-              <a:rPr lang="de-AT" dirty="0" err="1"/>
-              <a:t>Because</a:t>
-            </a:r>
-            <a:r>
-              <a:rPr lang="de-AT" dirty="0"/>
-              <a:t> </a:t>
-            </a:r>
-            <a:r>
-              <a:rPr lang="de-AT" dirty="0" err="1"/>
-              <a:t>of</a:t>
-            </a:r>
-            <a:r>
-              <a:rPr lang="de-AT" dirty="0"/>
-              <a:t> </a:t>
-            </a:r>
-            <a:r>
-              <a:rPr lang="de-AT" dirty="0" err="1"/>
-              <a:t>these</a:t>
-            </a:r>
-            <a:r>
-              <a:rPr lang="de-AT" dirty="0"/>
-              <a:t> </a:t>
-            </a:r>
-            <a:r>
-              <a:rPr lang="de-AT" dirty="0" err="1"/>
-              <a:t>limitations</a:t>
-            </a:r>
-            <a:r>
-              <a:rPr lang="de-AT" dirty="0"/>
-              <a:t>, </a:t>
-            </a:r>
-            <a:r>
-              <a:rPr lang="de-AT" dirty="0" err="1"/>
-              <a:t>the</a:t>
-            </a:r>
-            <a:r>
-              <a:rPr lang="de-AT" dirty="0"/>
-              <a:t> </a:t>
-            </a:r>
-            <a:r>
-              <a:rPr lang="de-AT" dirty="0" err="1"/>
-              <a:t>results</a:t>
-            </a:r>
-            <a:r>
-              <a:rPr lang="de-AT" dirty="0"/>
-              <a:t> </a:t>
-            </a:r>
-            <a:r>
-              <a:rPr lang="de-AT" dirty="0" err="1"/>
-              <a:t>should</a:t>
-            </a:r>
-            <a:r>
-              <a:rPr lang="de-AT" dirty="0"/>
-              <a:t> </a:t>
-            </a:r>
-            <a:r>
-              <a:rPr lang="de-AT" dirty="0" err="1"/>
-              <a:t>be</a:t>
-            </a:r>
-            <a:r>
-              <a:rPr lang="de-AT" dirty="0"/>
-              <a:t> </a:t>
-            </a:r>
-            <a:r>
-              <a:rPr lang="de-AT" dirty="0" err="1"/>
-              <a:t>interpreted</a:t>
-            </a:r>
-            <a:r>
-              <a:rPr lang="de-AT" dirty="0"/>
-              <a:t> </a:t>
-            </a:r>
-            <a:r>
-              <a:rPr lang="de-AT" dirty="0" err="1"/>
-              <a:t>cautiously</a:t>
-            </a:r>
-            <a:r>
-              <a:rPr lang="de-AT" dirty="0"/>
-              <a:t>.</a:t>
-            </a:r>
-          </a:p>
-          <a:p>
             <a:endParaRPr lang="de-AT" dirty="0"/>
           </a:p>
         </p:txBody>
@@ -3671,708 +1386,6 @@
           <a:bodyPr/>
           <a:lstStyle/>
           <a:p>
-            <a:r>
-              <a:rPr lang="de-AT" dirty="0"/>
-              <a:t>I </a:t>
-            </a:r>
-            <a:r>
-              <a:rPr lang="de-AT" dirty="0" err="1"/>
-              <a:t>selected</a:t>
-            </a:r>
-            <a:r>
-              <a:rPr lang="de-AT" dirty="0"/>
-              <a:t> </a:t>
-            </a:r>
-            <a:r>
-              <a:rPr lang="de-AT" dirty="0" err="1"/>
-              <a:t>this</a:t>
-            </a:r>
-            <a:r>
-              <a:rPr lang="de-AT" dirty="0"/>
-              <a:t> </a:t>
-            </a:r>
-            <a:r>
-              <a:rPr lang="de-AT" dirty="0" err="1"/>
-              <a:t>study</a:t>
-            </a:r>
-            <a:r>
-              <a:rPr lang="de-AT" dirty="0"/>
-              <a:t> </a:t>
-            </a:r>
-            <a:r>
-              <a:rPr lang="de-AT" dirty="0" err="1"/>
-              <a:t>because</a:t>
-            </a:r>
-            <a:r>
-              <a:rPr lang="de-AT" dirty="0"/>
-              <a:t> </a:t>
-            </a:r>
-            <a:r>
-              <a:rPr lang="de-AT" dirty="0" err="1"/>
-              <a:t>it</a:t>
-            </a:r>
-            <a:r>
-              <a:rPr lang="de-AT" dirty="0"/>
-              <a:t> </a:t>
-            </a:r>
-            <a:r>
-              <a:rPr lang="de-AT" dirty="0" err="1"/>
-              <a:t>connects</a:t>
-            </a:r>
-            <a:r>
-              <a:rPr lang="de-AT" dirty="0"/>
-              <a:t> </a:t>
-            </a:r>
-            <a:r>
-              <a:rPr lang="de-AT" dirty="0" err="1"/>
-              <a:t>directly</a:t>
-            </a:r>
-            <a:r>
-              <a:rPr lang="de-AT" dirty="0"/>
-              <a:t> </a:t>
-            </a:r>
-            <a:r>
-              <a:rPr lang="de-AT" dirty="0" err="1"/>
-              <a:t>to</a:t>
-            </a:r>
-            <a:r>
-              <a:rPr lang="de-AT" dirty="0"/>
-              <a:t> </a:t>
-            </a:r>
-            <a:r>
-              <a:rPr lang="de-AT" dirty="0" err="1"/>
-              <a:t>my</a:t>
-            </a:r>
-            <a:r>
-              <a:rPr lang="de-AT" dirty="0"/>
-              <a:t> </a:t>
-            </a:r>
-            <a:r>
-              <a:rPr lang="de-AT" dirty="0" err="1"/>
-              <a:t>master’s</a:t>
-            </a:r>
-            <a:r>
-              <a:rPr lang="de-AT" dirty="0"/>
-              <a:t> </a:t>
-            </a:r>
-            <a:r>
-              <a:rPr lang="de-AT" dirty="0" err="1"/>
-              <a:t>thesis</a:t>
-            </a:r>
-            <a:r>
-              <a:rPr lang="de-AT" dirty="0"/>
-              <a:t>.</a:t>
-            </a:r>
-          </a:p>
-          <a:p>
-            <a:endParaRPr lang="de-AT" dirty="0"/>
-          </a:p>
-          <a:p>
-            <a:r>
-              <a:rPr lang="de-AT" dirty="0"/>
-              <a:t>Many </a:t>
-            </a:r>
-            <a:r>
-              <a:rPr lang="de-AT" dirty="0" err="1"/>
-              <a:t>discussions</a:t>
-            </a:r>
-            <a:r>
-              <a:rPr lang="de-AT" dirty="0"/>
-              <a:t> </a:t>
-            </a:r>
-            <a:r>
-              <a:rPr lang="de-AT" dirty="0" err="1"/>
-              <a:t>about</a:t>
-            </a:r>
-            <a:r>
-              <a:rPr lang="de-AT" dirty="0"/>
-              <a:t> ChatGPT </a:t>
-            </a:r>
-            <a:r>
-              <a:rPr lang="de-AT" dirty="0" err="1"/>
-              <a:t>focus</a:t>
-            </a:r>
-            <a:r>
-              <a:rPr lang="de-AT" dirty="0"/>
-              <a:t> </a:t>
-            </a:r>
-            <a:r>
-              <a:rPr lang="de-AT" dirty="0" err="1"/>
-              <a:t>mainly</a:t>
-            </a:r>
-            <a:r>
-              <a:rPr lang="de-AT" dirty="0"/>
-              <a:t> on </a:t>
-            </a:r>
-            <a:r>
-              <a:rPr lang="de-AT" dirty="0" err="1"/>
-              <a:t>its</a:t>
-            </a:r>
-            <a:r>
-              <a:rPr lang="de-AT" dirty="0"/>
-              <a:t> potential </a:t>
-            </a:r>
-            <a:r>
-              <a:rPr lang="de-AT" dirty="0" err="1"/>
-              <a:t>benefits</a:t>
-            </a:r>
-            <a:r>
-              <a:rPr lang="de-AT" dirty="0"/>
-              <a:t>.</a:t>
-            </a:r>
-          </a:p>
-          <a:p>
-            <a:r>
-              <a:rPr lang="de-AT" dirty="0" err="1"/>
-              <a:t>What</a:t>
-            </a:r>
-            <a:r>
-              <a:rPr lang="de-AT" dirty="0"/>
-              <a:t> I find </a:t>
-            </a:r>
-            <a:r>
-              <a:rPr lang="de-AT" dirty="0" err="1"/>
-              <a:t>particularly</a:t>
-            </a:r>
-            <a:r>
-              <a:rPr lang="de-AT" dirty="0"/>
-              <a:t> </a:t>
-            </a:r>
-            <a:r>
-              <a:rPr lang="de-AT" dirty="0" err="1"/>
-              <a:t>interesting</a:t>
-            </a:r>
-            <a:r>
-              <a:rPr lang="de-AT" dirty="0"/>
-              <a:t> </a:t>
-            </a:r>
-            <a:r>
-              <a:rPr lang="de-AT" dirty="0" err="1"/>
-              <a:t>is</a:t>
-            </a:r>
-            <a:r>
-              <a:rPr lang="de-AT" dirty="0"/>
-              <a:t> </a:t>
-            </a:r>
-            <a:r>
-              <a:rPr lang="de-AT" dirty="0" err="1"/>
-              <a:t>that</a:t>
-            </a:r>
-            <a:r>
-              <a:rPr lang="de-AT" dirty="0"/>
-              <a:t> </a:t>
-            </a:r>
-            <a:r>
-              <a:rPr lang="de-AT" dirty="0" err="1"/>
-              <a:t>this</a:t>
-            </a:r>
-            <a:r>
-              <a:rPr lang="de-AT" dirty="0"/>
-              <a:t> </a:t>
-            </a:r>
-            <a:r>
-              <a:rPr lang="de-AT" dirty="0" err="1"/>
-              <a:t>study</a:t>
-            </a:r>
-            <a:r>
-              <a:rPr lang="de-AT" dirty="0"/>
-              <a:t> also </a:t>
-            </a:r>
-            <a:r>
-              <a:rPr lang="de-AT" dirty="0" err="1"/>
-              <a:t>highlights</a:t>
-            </a:r>
-            <a:r>
-              <a:rPr lang="de-AT" dirty="0"/>
-              <a:t> </a:t>
-            </a:r>
-            <a:r>
-              <a:rPr lang="de-AT" dirty="0" err="1"/>
-              <a:t>its</a:t>
-            </a:r>
-            <a:r>
-              <a:rPr lang="de-AT" dirty="0"/>
-              <a:t> </a:t>
-            </a:r>
-            <a:r>
-              <a:rPr lang="de-AT" dirty="0" err="1"/>
-              <a:t>limitations</a:t>
-            </a:r>
-            <a:r>
-              <a:rPr lang="de-AT" dirty="0"/>
-              <a:t>.</a:t>
-            </a:r>
-          </a:p>
-          <a:p>
-            <a:r>
-              <a:rPr lang="de-AT" dirty="0"/>
-              <a:t>The </a:t>
-            </a:r>
-            <a:r>
-              <a:rPr lang="de-AT" dirty="0" err="1"/>
-              <a:t>findings</a:t>
-            </a:r>
-            <a:r>
-              <a:rPr lang="de-AT" dirty="0"/>
-              <a:t> </a:t>
-            </a:r>
-            <a:r>
-              <a:rPr lang="de-AT" dirty="0" err="1"/>
-              <a:t>suggest</a:t>
-            </a:r>
-            <a:r>
-              <a:rPr lang="de-AT" dirty="0"/>
-              <a:t> </a:t>
-            </a:r>
-            <a:r>
-              <a:rPr lang="de-AT" dirty="0" err="1"/>
-              <a:t>that</a:t>
-            </a:r>
-            <a:r>
-              <a:rPr lang="de-AT" dirty="0"/>
-              <a:t> </a:t>
-            </a:r>
-            <a:r>
-              <a:rPr lang="de-AT" dirty="0" err="1"/>
-              <a:t>simply</a:t>
-            </a:r>
-            <a:r>
-              <a:rPr lang="de-AT" dirty="0"/>
-              <a:t> </a:t>
-            </a:r>
-            <a:r>
-              <a:rPr lang="de-AT" dirty="0" err="1"/>
-              <a:t>having</a:t>
-            </a:r>
-            <a:r>
-              <a:rPr lang="de-AT" dirty="0"/>
-              <a:t> </a:t>
-            </a:r>
-            <a:r>
-              <a:rPr lang="de-AT" dirty="0" err="1"/>
-              <a:t>access</a:t>
-            </a:r>
-            <a:r>
-              <a:rPr lang="de-AT" dirty="0"/>
-              <a:t> </a:t>
-            </a:r>
-            <a:r>
-              <a:rPr lang="de-AT" dirty="0" err="1"/>
-              <a:t>to</a:t>
-            </a:r>
-            <a:r>
-              <a:rPr lang="de-AT" dirty="0"/>
-              <a:t> AI </a:t>
-            </a:r>
-            <a:r>
-              <a:rPr lang="de-AT" dirty="0" err="1"/>
-              <a:t>does</a:t>
-            </a:r>
-            <a:r>
-              <a:rPr lang="de-AT" dirty="0"/>
-              <a:t> not </a:t>
-            </a:r>
-            <a:r>
-              <a:rPr lang="de-AT" dirty="0" err="1"/>
-              <a:t>automatically</a:t>
-            </a:r>
-            <a:r>
-              <a:rPr lang="de-AT" dirty="0"/>
-              <a:t> </a:t>
-            </a:r>
-            <a:r>
-              <a:rPr lang="de-AT" dirty="0" err="1"/>
-              <a:t>improve</a:t>
-            </a:r>
-            <a:r>
-              <a:rPr lang="de-AT" dirty="0"/>
-              <a:t> </a:t>
-            </a:r>
-            <a:r>
-              <a:rPr lang="de-AT" dirty="0" err="1"/>
-              <a:t>performance</a:t>
-            </a:r>
-            <a:r>
-              <a:rPr lang="de-AT" dirty="0"/>
-              <a:t>.</a:t>
-            </a:r>
-          </a:p>
-          <a:p>
-            <a:endParaRPr lang="de-AT" dirty="0"/>
-          </a:p>
-          <a:p>
-            <a:r>
-              <a:rPr lang="de-AT" dirty="0" err="1"/>
-              <a:t>Instead</a:t>
-            </a:r>
-            <a:r>
-              <a:rPr lang="de-AT" dirty="0"/>
-              <a:t>, </a:t>
-            </a:r>
-            <a:r>
-              <a:rPr lang="de-AT" dirty="0" err="1"/>
-              <a:t>successful</a:t>
-            </a:r>
-            <a:r>
-              <a:rPr lang="de-AT" dirty="0"/>
-              <a:t> </a:t>
-            </a:r>
-            <a:r>
-              <a:rPr lang="de-AT" dirty="0" err="1"/>
-              <a:t>use</a:t>
-            </a:r>
-            <a:r>
-              <a:rPr lang="de-AT" dirty="0"/>
-              <a:t> </a:t>
-            </a:r>
-            <a:r>
-              <a:rPr lang="de-AT" dirty="0" err="1"/>
-              <a:t>depends</a:t>
-            </a:r>
-            <a:r>
-              <a:rPr lang="de-AT" dirty="0"/>
-              <a:t> on </a:t>
-            </a:r>
-            <a:r>
-              <a:rPr lang="de-AT" dirty="0" err="1"/>
-              <a:t>how</a:t>
-            </a:r>
-            <a:r>
-              <a:rPr lang="de-AT" dirty="0"/>
-              <a:t> </a:t>
-            </a:r>
-            <a:r>
-              <a:rPr lang="de-AT" dirty="0" err="1"/>
-              <a:t>well</a:t>
-            </a:r>
-            <a:r>
-              <a:rPr lang="de-AT" dirty="0"/>
-              <a:t> </a:t>
-            </a:r>
-            <a:r>
-              <a:rPr lang="de-AT" dirty="0" err="1"/>
-              <a:t>students</a:t>
-            </a:r>
-            <a:r>
-              <a:rPr lang="de-AT" dirty="0"/>
-              <a:t> </a:t>
-            </a:r>
-            <a:r>
-              <a:rPr lang="de-AT" dirty="0" err="1"/>
-              <a:t>understand</a:t>
-            </a:r>
-            <a:r>
-              <a:rPr lang="de-AT" dirty="0"/>
-              <a:t> </a:t>
-            </a:r>
-            <a:r>
-              <a:rPr lang="de-AT" dirty="0" err="1"/>
-              <a:t>the</a:t>
-            </a:r>
-            <a:r>
-              <a:rPr lang="de-AT" dirty="0"/>
-              <a:t> </a:t>
-            </a:r>
-            <a:r>
-              <a:rPr lang="de-AT" dirty="0" err="1"/>
-              <a:t>topic</a:t>
-            </a:r>
-            <a:r>
-              <a:rPr lang="de-AT" dirty="0"/>
-              <a:t>, </a:t>
-            </a:r>
-            <a:r>
-              <a:rPr lang="de-AT" dirty="0" err="1"/>
-              <a:t>formulate</a:t>
-            </a:r>
-            <a:r>
-              <a:rPr lang="de-AT" dirty="0"/>
-              <a:t> </a:t>
-            </a:r>
-            <a:r>
-              <a:rPr lang="de-AT" dirty="0" err="1"/>
-              <a:t>prompts</a:t>
-            </a:r>
-            <a:r>
-              <a:rPr lang="de-AT" dirty="0"/>
-              <a:t>, </a:t>
-            </a:r>
-            <a:r>
-              <a:rPr lang="de-AT" dirty="0" err="1"/>
-              <a:t>evaluate</a:t>
-            </a:r>
-            <a:r>
-              <a:rPr lang="de-AT" dirty="0"/>
-              <a:t> </a:t>
-            </a:r>
-            <a:r>
-              <a:rPr lang="de-AT" dirty="0" err="1"/>
-              <a:t>information</a:t>
-            </a:r>
-            <a:r>
-              <a:rPr lang="de-AT" dirty="0"/>
-              <a:t>, and </a:t>
-            </a:r>
-            <a:r>
-              <a:rPr lang="de-AT" dirty="0" err="1"/>
-              <a:t>integrate</a:t>
-            </a:r>
-            <a:r>
-              <a:rPr lang="de-AT" dirty="0"/>
-              <a:t> AI-</a:t>
-            </a:r>
-            <a:r>
-              <a:rPr lang="de-AT" dirty="0" err="1"/>
-              <a:t>generated</a:t>
-            </a:r>
-            <a:r>
-              <a:rPr lang="de-AT" dirty="0"/>
-              <a:t> </a:t>
-            </a:r>
-            <a:r>
-              <a:rPr lang="de-AT" dirty="0" err="1"/>
-              <a:t>content</a:t>
-            </a:r>
-            <a:r>
-              <a:rPr lang="de-AT" dirty="0"/>
-              <a:t> </a:t>
-            </a:r>
-            <a:r>
-              <a:rPr lang="de-AT" dirty="0" err="1"/>
-              <a:t>into</a:t>
-            </a:r>
-            <a:r>
-              <a:rPr lang="de-AT" dirty="0"/>
-              <a:t> </a:t>
-            </a:r>
-            <a:r>
-              <a:rPr lang="de-AT" dirty="0" err="1"/>
-              <a:t>their</a:t>
-            </a:r>
-            <a:r>
-              <a:rPr lang="de-AT" dirty="0"/>
-              <a:t> own </a:t>
-            </a:r>
-            <a:r>
-              <a:rPr lang="de-AT" dirty="0" err="1"/>
-              <a:t>work</a:t>
-            </a:r>
-            <a:r>
-              <a:rPr lang="de-AT" dirty="0"/>
-              <a:t>. </a:t>
-            </a:r>
-          </a:p>
-          <a:p>
-            <a:r>
-              <a:rPr lang="de-AT" dirty="0" err="1"/>
-              <a:t>For</a:t>
-            </a:r>
-            <a:r>
-              <a:rPr lang="de-AT" dirty="0"/>
-              <a:t> </a:t>
-            </a:r>
-            <a:r>
-              <a:rPr lang="de-AT" dirty="0" err="1"/>
-              <a:t>my</a:t>
-            </a:r>
-            <a:r>
-              <a:rPr lang="de-AT" dirty="0"/>
-              <a:t> </a:t>
-            </a:r>
-            <a:r>
-              <a:rPr lang="de-AT" dirty="0" err="1"/>
-              <a:t>research</a:t>
-            </a:r>
-            <a:r>
-              <a:rPr lang="de-AT" dirty="0"/>
-              <a:t>, </a:t>
-            </a:r>
-            <a:r>
-              <a:rPr lang="de-AT" dirty="0" err="1"/>
-              <a:t>this</a:t>
-            </a:r>
-            <a:r>
-              <a:rPr lang="de-AT" dirty="0"/>
-              <a:t> </a:t>
-            </a:r>
-            <a:r>
-              <a:rPr lang="de-AT" dirty="0" err="1"/>
-              <a:t>is</a:t>
-            </a:r>
-            <a:r>
-              <a:rPr lang="de-AT" dirty="0"/>
-              <a:t> </a:t>
-            </a:r>
-            <a:r>
-              <a:rPr lang="de-AT" dirty="0" err="1"/>
-              <a:t>highly</a:t>
-            </a:r>
-            <a:r>
-              <a:rPr lang="de-AT" dirty="0"/>
-              <a:t> relevant </a:t>
-            </a:r>
-            <a:r>
-              <a:rPr lang="de-AT" dirty="0" err="1"/>
-              <a:t>because</a:t>
-            </a:r>
-            <a:r>
-              <a:rPr lang="de-AT" dirty="0"/>
-              <a:t> </a:t>
-            </a:r>
-            <a:r>
-              <a:rPr lang="de-AT" dirty="0" err="1"/>
-              <a:t>it</a:t>
-            </a:r>
-            <a:r>
-              <a:rPr lang="de-AT" dirty="0"/>
-              <a:t> </a:t>
-            </a:r>
-            <a:r>
-              <a:rPr lang="de-AT" dirty="0" err="1"/>
-              <a:t>shows</a:t>
-            </a:r>
-            <a:r>
-              <a:rPr lang="de-AT" dirty="0"/>
-              <a:t> </a:t>
-            </a:r>
-            <a:r>
-              <a:rPr lang="de-AT" dirty="0" err="1"/>
-              <a:t>that</a:t>
-            </a:r>
-            <a:r>
-              <a:rPr lang="de-AT" dirty="0"/>
-              <a:t> AI </a:t>
-            </a:r>
-            <a:r>
-              <a:rPr lang="de-AT" dirty="0" err="1"/>
-              <a:t>should</a:t>
-            </a:r>
-            <a:r>
-              <a:rPr lang="de-AT" dirty="0"/>
-              <a:t> not </a:t>
-            </a:r>
-            <a:r>
-              <a:rPr lang="de-AT" dirty="0" err="1"/>
-              <a:t>be</a:t>
-            </a:r>
-            <a:r>
-              <a:rPr lang="de-AT" dirty="0"/>
-              <a:t> </a:t>
-            </a:r>
-            <a:r>
-              <a:rPr lang="de-AT" dirty="0" err="1"/>
-              <a:t>seen</a:t>
-            </a:r>
-            <a:r>
-              <a:rPr lang="de-AT" dirty="0"/>
-              <a:t> </a:t>
-            </a:r>
-            <a:r>
-              <a:rPr lang="de-AT" dirty="0" err="1"/>
-              <a:t>as</a:t>
-            </a:r>
-            <a:r>
-              <a:rPr lang="de-AT" dirty="0"/>
-              <a:t> a </a:t>
-            </a:r>
-            <a:r>
-              <a:rPr lang="de-AT" dirty="0" err="1"/>
-              <a:t>replacement</a:t>
-            </a:r>
-            <a:r>
-              <a:rPr lang="de-AT" dirty="0"/>
-              <a:t> </a:t>
-            </a:r>
-            <a:r>
-              <a:rPr lang="de-AT" dirty="0" err="1"/>
-              <a:t>for</a:t>
-            </a:r>
-            <a:r>
-              <a:rPr lang="de-AT" dirty="0"/>
-              <a:t> </a:t>
-            </a:r>
-            <a:r>
-              <a:rPr lang="de-AT" dirty="0" err="1"/>
-              <a:t>writing</a:t>
-            </a:r>
-            <a:r>
-              <a:rPr lang="de-AT" dirty="0"/>
-              <a:t> </a:t>
-            </a:r>
-            <a:r>
-              <a:rPr lang="de-AT" dirty="0" err="1"/>
-              <a:t>skills</a:t>
-            </a:r>
-            <a:r>
-              <a:rPr lang="de-AT" dirty="0"/>
-              <a:t>, but </a:t>
-            </a:r>
-            <a:r>
-              <a:rPr lang="de-AT" dirty="0" err="1"/>
-              <a:t>rather</a:t>
-            </a:r>
-            <a:r>
-              <a:rPr lang="de-AT" dirty="0"/>
-              <a:t> </a:t>
-            </a:r>
-            <a:r>
-              <a:rPr lang="de-AT" dirty="0" err="1"/>
-              <a:t>as</a:t>
-            </a:r>
-            <a:r>
-              <a:rPr lang="de-AT" dirty="0"/>
-              <a:t> a </a:t>
-            </a:r>
-            <a:r>
-              <a:rPr lang="de-AT" dirty="0" err="1"/>
-              <a:t>tool</a:t>
-            </a:r>
-            <a:r>
-              <a:rPr lang="de-AT" dirty="0"/>
-              <a:t> </a:t>
-            </a:r>
-            <a:r>
-              <a:rPr lang="de-AT" dirty="0" err="1"/>
-              <a:t>whose</a:t>
-            </a:r>
-            <a:r>
-              <a:rPr lang="de-AT" dirty="0"/>
-              <a:t> </a:t>
-            </a:r>
-            <a:r>
-              <a:rPr lang="de-AT" dirty="0" err="1"/>
-              <a:t>effectiveness</a:t>
-            </a:r>
-            <a:r>
-              <a:rPr lang="de-AT" dirty="0"/>
-              <a:t> </a:t>
-            </a:r>
-            <a:r>
-              <a:rPr lang="de-AT" dirty="0" err="1"/>
-              <a:t>depends</a:t>
-            </a:r>
-            <a:r>
-              <a:rPr lang="de-AT" dirty="0"/>
-              <a:t> on </a:t>
-            </a:r>
-            <a:r>
-              <a:rPr lang="de-AT" dirty="0" err="1"/>
-              <a:t>the</a:t>
-            </a:r>
-            <a:r>
-              <a:rPr lang="de-AT" dirty="0"/>
-              <a:t> </a:t>
-            </a:r>
-            <a:r>
-              <a:rPr lang="de-AT" dirty="0" err="1"/>
-              <a:t>user</a:t>
-            </a:r>
-            <a:r>
-              <a:rPr lang="de-AT" dirty="0"/>
-              <a:t>.</a:t>
-            </a:r>
-          </a:p>
-          <a:p>
             <a:endParaRPr lang="de-AT" dirty="0"/>
           </a:p>
         </p:txBody>
@@ -4457,306 +1470,7 @@
           <a:bodyPr/>
           <a:lstStyle/>
           <a:p>
-            <a:r>
-              <a:rPr lang="de-AT" dirty="0" err="1"/>
-              <a:t>To</a:t>
-            </a:r>
-            <a:r>
-              <a:rPr lang="de-AT" dirty="0"/>
-              <a:t> </a:t>
-            </a:r>
-            <a:r>
-              <a:rPr lang="de-AT" dirty="0" err="1"/>
-              <a:t>conclude</a:t>
-            </a:r>
-            <a:r>
-              <a:rPr lang="de-AT" dirty="0"/>
-              <a:t>:</a:t>
-            </a:r>
-          </a:p>
-          <a:p>
             <a:endParaRPr lang="de-AT" dirty="0"/>
-          </a:p>
-          <a:p>
-            <a:r>
-              <a:rPr lang="de-AT" dirty="0"/>
-              <a:t>This </a:t>
-            </a:r>
-            <a:r>
-              <a:rPr lang="de-AT" dirty="0" err="1"/>
-              <a:t>study</a:t>
-            </a:r>
-            <a:r>
-              <a:rPr lang="de-AT" dirty="0"/>
-              <a:t> </a:t>
-            </a:r>
-            <a:r>
-              <a:rPr lang="de-AT" dirty="0" err="1"/>
-              <a:t>found</a:t>
-            </a:r>
-            <a:r>
-              <a:rPr lang="de-AT" dirty="0"/>
-              <a:t> </a:t>
-            </a:r>
-            <a:r>
-              <a:rPr lang="de-AT" dirty="0" err="1"/>
-              <a:t>that</a:t>
-            </a:r>
-            <a:r>
-              <a:rPr lang="de-AT" dirty="0"/>
-              <a:t> ChatGPT </a:t>
-            </a:r>
-            <a:r>
-              <a:rPr lang="de-AT" dirty="0" err="1"/>
-              <a:t>did</a:t>
-            </a:r>
-            <a:r>
-              <a:rPr lang="de-AT" dirty="0"/>
-              <a:t> not </a:t>
-            </a:r>
-            <a:r>
-              <a:rPr lang="de-AT" dirty="0" err="1"/>
-              <a:t>significantly</a:t>
-            </a:r>
-            <a:r>
-              <a:rPr lang="de-AT" dirty="0"/>
-              <a:t> </a:t>
-            </a:r>
-            <a:r>
-              <a:rPr lang="de-AT" dirty="0" err="1"/>
-              <a:t>improve</a:t>
-            </a:r>
-            <a:r>
-              <a:rPr lang="de-AT" dirty="0"/>
-              <a:t> </a:t>
-            </a:r>
-            <a:r>
-              <a:rPr lang="de-AT" dirty="0" err="1"/>
-              <a:t>essay</a:t>
-            </a:r>
-            <a:r>
-              <a:rPr lang="de-AT" dirty="0"/>
-              <a:t> </a:t>
-            </a:r>
-            <a:r>
-              <a:rPr lang="de-AT" dirty="0" err="1"/>
-              <a:t>quality</a:t>
-            </a:r>
-            <a:r>
-              <a:rPr lang="de-AT" dirty="0"/>
-              <a:t>, </a:t>
-            </a:r>
-            <a:r>
-              <a:rPr lang="de-AT" dirty="0" err="1"/>
-              <a:t>speed</a:t>
-            </a:r>
-            <a:r>
-              <a:rPr lang="de-AT" dirty="0"/>
-              <a:t>, </a:t>
-            </a:r>
-            <a:r>
-              <a:rPr lang="de-AT" dirty="0" err="1"/>
-              <a:t>or</a:t>
-            </a:r>
-            <a:r>
-              <a:rPr lang="de-AT" dirty="0"/>
-              <a:t> </a:t>
-            </a:r>
-            <a:r>
-              <a:rPr lang="de-AT" dirty="0" err="1"/>
-              <a:t>authenticity</a:t>
-            </a:r>
-            <a:r>
-              <a:rPr lang="de-AT" dirty="0"/>
-              <a:t> in </a:t>
-            </a:r>
-            <a:r>
-              <a:rPr lang="de-AT" dirty="0" err="1"/>
-              <a:t>this</a:t>
-            </a:r>
-            <a:r>
-              <a:rPr lang="de-AT" dirty="0"/>
-              <a:t> </a:t>
-            </a:r>
-            <a:r>
-              <a:rPr lang="de-AT" dirty="0" err="1"/>
-              <a:t>student</a:t>
-            </a:r>
-            <a:r>
-              <a:rPr lang="de-AT" dirty="0"/>
-              <a:t> sample.</a:t>
-            </a:r>
-          </a:p>
-          <a:p>
-            <a:r>
-              <a:rPr lang="de-AT" dirty="0"/>
-              <a:t>The </a:t>
-            </a:r>
-            <a:r>
-              <a:rPr lang="de-AT" dirty="0" err="1"/>
-              <a:t>results</a:t>
-            </a:r>
-            <a:r>
-              <a:rPr lang="de-AT" dirty="0"/>
-              <a:t> </a:t>
-            </a:r>
-            <a:r>
-              <a:rPr lang="de-AT" dirty="0" err="1"/>
-              <a:t>suggest</a:t>
-            </a:r>
-            <a:r>
-              <a:rPr lang="de-AT" dirty="0"/>
-              <a:t> </a:t>
-            </a:r>
-            <a:r>
-              <a:rPr lang="de-AT" dirty="0" err="1"/>
-              <a:t>that</a:t>
-            </a:r>
-            <a:r>
-              <a:rPr lang="de-AT" dirty="0"/>
-              <a:t> AI </a:t>
-            </a:r>
-            <a:r>
-              <a:rPr lang="de-AT" dirty="0" err="1"/>
-              <a:t>can</a:t>
-            </a:r>
-            <a:r>
-              <a:rPr lang="de-AT" dirty="0"/>
-              <a:t> support </a:t>
-            </a:r>
-            <a:r>
-              <a:rPr lang="de-AT" dirty="0" err="1"/>
-              <a:t>writing</a:t>
-            </a:r>
-            <a:r>
-              <a:rPr lang="de-AT" dirty="0"/>
-              <a:t>, but </a:t>
-            </a:r>
-            <a:r>
-              <a:rPr lang="de-AT" dirty="0" err="1"/>
-              <a:t>only</a:t>
-            </a:r>
-            <a:r>
-              <a:rPr lang="de-AT" dirty="0"/>
-              <a:t> </a:t>
-            </a:r>
-            <a:r>
-              <a:rPr lang="de-AT" dirty="0" err="1"/>
-              <a:t>when</a:t>
-            </a:r>
-            <a:r>
-              <a:rPr lang="de-AT" dirty="0"/>
-              <a:t> </a:t>
-            </a:r>
-            <a:r>
-              <a:rPr lang="de-AT" dirty="0" err="1"/>
-              <a:t>users</a:t>
-            </a:r>
-            <a:r>
-              <a:rPr lang="de-AT" dirty="0"/>
-              <a:t> </a:t>
-            </a:r>
-            <a:r>
-              <a:rPr lang="de-AT" dirty="0" err="1"/>
-              <a:t>have</a:t>
-            </a:r>
-            <a:r>
-              <a:rPr lang="de-AT" dirty="0"/>
-              <a:t> </a:t>
-            </a:r>
-            <a:r>
-              <a:rPr lang="de-AT" dirty="0" err="1"/>
-              <a:t>the</a:t>
-            </a:r>
-            <a:r>
-              <a:rPr lang="de-AT" dirty="0"/>
-              <a:t> </a:t>
-            </a:r>
-            <a:r>
-              <a:rPr lang="de-AT" dirty="0" err="1"/>
-              <a:t>necessary</a:t>
-            </a:r>
-            <a:r>
-              <a:rPr lang="de-AT" dirty="0"/>
-              <a:t> </a:t>
-            </a:r>
-            <a:r>
-              <a:rPr lang="de-AT" dirty="0" err="1"/>
-              <a:t>skills</a:t>
-            </a:r>
-            <a:r>
-              <a:rPr lang="de-AT" dirty="0"/>
-              <a:t> </a:t>
-            </a:r>
-            <a:r>
-              <a:rPr lang="de-AT" dirty="0" err="1"/>
-              <a:t>to</a:t>
-            </a:r>
-            <a:r>
-              <a:rPr lang="de-AT" dirty="0"/>
-              <a:t> </a:t>
-            </a:r>
-            <a:r>
-              <a:rPr lang="de-AT" dirty="0" err="1"/>
-              <a:t>use</a:t>
-            </a:r>
-            <a:r>
-              <a:rPr lang="de-AT" dirty="0"/>
-              <a:t> </a:t>
-            </a:r>
-            <a:r>
-              <a:rPr lang="de-AT" dirty="0" err="1"/>
-              <a:t>it</a:t>
-            </a:r>
-            <a:r>
-              <a:rPr lang="de-AT" dirty="0"/>
-              <a:t> </a:t>
-            </a:r>
-            <a:r>
-              <a:rPr lang="de-AT" dirty="0" err="1"/>
-              <a:t>effectively</a:t>
-            </a:r>
-            <a:r>
-              <a:rPr lang="de-AT"/>
-              <a:t>.</a:t>
-            </a:r>
-          </a:p>
-          <a:p>
-            <a:endParaRPr lang="de-AT" dirty="0"/>
-          </a:p>
-          <a:p>
-            <a:r>
-              <a:rPr lang="de-AT" dirty="0" err="1"/>
-              <a:t>Thank</a:t>
-            </a:r>
-            <a:r>
-              <a:rPr lang="de-AT" dirty="0"/>
-              <a:t> </a:t>
-            </a:r>
-            <a:r>
-              <a:rPr lang="de-AT" dirty="0" err="1"/>
-              <a:t>you</a:t>
-            </a:r>
-            <a:r>
-              <a:rPr lang="de-AT" dirty="0"/>
-              <a:t> </a:t>
-            </a:r>
-            <a:r>
-              <a:rPr lang="de-AT" dirty="0" err="1"/>
-              <a:t>for</a:t>
-            </a:r>
-            <a:r>
-              <a:rPr lang="de-AT" dirty="0"/>
-              <a:t> </a:t>
-            </a:r>
-            <a:r>
-              <a:rPr lang="de-AT" dirty="0" err="1"/>
-              <a:t>listening</a:t>
-            </a:r>
-            <a:r>
-              <a:rPr lang="de-AT" dirty="0"/>
-              <a:t>.</a:t>
-            </a:r>
           </a:p>
         </p:txBody>
       </p:sp>
@@ -4976,7 +1690,7 @@
             <a:fld id="{1D8BD707-D9CF-40AE-B4C6-C98DA3205C09}" type="datetimeFigureOut">
               <a:rPr lang="en-US" smtClean="0"/>
               <a:pPr/>
-              <a:t>6/16/2026</a:t>
+              <a:t>6/23/2026</a:t>
             </a:fld>
             <a:endParaRPr lang="en-US"/>
           </a:p>
@@ -5141,7 +1855,7 @@
             <a:fld id="{1D8BD707-D9CF-40AE-B4C6-C98DA3205C09}" type="datetimeFigureOut">
               <a:rPr lang="en-US" smtClean="0"/>
               <a:pPr/>
-              <a:t>6/16/2026</a:t>
+              <a:t>6/23/2026</a:t>
             </a:fld>
             <a:endParaRPr lang="en-US"/>
           </a:p>
@@ -5316,7 +2030,7 @@
             <a:fld id="{1D8BD707-D9CF-40AE-B4C6-C98DA3205C09}" type="datetimeFigureOut">
               <a:rPr lang="en-US" smtClean="0"/>
               <a:pPr/>
-              <a:t>6/16/2026</a:t>
+              <a:t>6/23/2026</a:t>
             </a:fld>
             <a:endParaRPr lang="en-US"/>
           </a:p>
@@ -5481,7 +2195,7 @@
             <a:fld id="{1D8BD707-D9CF-40AE-B4C6-C98DA3205C09}" type="datetimeFigureOut">
               <a:rPr lang="en-US" smtClean="0"/>
               <a:pPr/>
-              <a:t>6/16/2026</a:t>
+              <a:t>6/23/2026</a:t>
             </a:fld>
             <a:endParaRPr lang="en-US"/>
           </a:p>
@@ -5723,7 +2437,7 @@
             <a:fld id="{1D8BD707-D9CF-40AE-B4C6-C98DA3205C09}" type="datetimeFigureOut">
               <a:rPr lang="en-US" smtClean="0"/>
               <a:pPr/>
-              <a:t>6/16/2026</a:t>
+              <a:t>6/23/2026</a:t>
             </a:fld>
             <a:endParaRPr lang="en-US"/>
           </a:p>
@@ -6005,7 +2719,7 @@
             <a:fld id="{1D8BD707-D9CF-40AE-B4C6-C98DA3205C09}" type="datetimeFigureOut">
               <a:rPr lang="en-US" smtClean="0"/>
               <a:pPr/>
-              <a:t>6/16/2026</a:t>
+              <a:t>6/23/2026</a:t>
             </a:fld>
             <a:endParaRPr lang="en-US"/>
           </a:p>
@@ -6421,7 +3135,7 @@
             <a:fld id="{1D8BD707-D9CF-40AE-B4C6-C98DA3205C09}" type="datetimeFigureOut">
               <a:rPr lang="en-US" smtClean="0"/>
               <a:pPr/>
-              <a:t>6/16/2026</a:t>
+              <a:t>6/23/2026</a:t>
             </a:fld>
             <a:endParaRPr lang="en-US"/>
           </a:p>
@@ -6535,7 +3249,7 @@
             <a:fld id="{1D8BD707-D9CF-40AE-B4C6-C98DA3205C09}" type="datetimeFigureOut">
               <a:rPr lang="en-US" smtClean="0"/>
               <a:pPr/>
-              <a:t>6/16/2026</a:t>
+              <a:t>6/23/2026</a:t>
             </a:fld>
             <a:endParaRPr lang="en-US"/>
           </a:p>
@@ -6627,7 +3341,7 @@
             <a:fld id="{1D8BD707-D9CF-40AE-B4C6-C98DA3205C09}" type="datetimeFigureOut">
               <a:rPr lang="en-US" smtClean="0"/>
               <a:pPr/>
-              <a:t>6/16/2026</a:t>
+              <a:t>6/23/2026</a:t>
             </a:fld>
             <a:endParaRPr lang="en-US"/>
           </a:p>
@@ -6899,7 +3613,7 @@
             <a:fld id="{1D8BD707-D9CF-40AE-B4C6-C98DA3205C09}" type="datetimeFigureOut">
               <a:rPr lang="en-US" smtClean="0"/>
               <a:pPr/>
-              <a:t>6/16/2026</a:t>
+              <a:t>6/23/2026</a:t>
             </a:fld>
             <a:endParaRPr lang="en-US"/>
           </a:p>
@@ -7148,7 +3862,7 @@
             <a:fld id="{1D8BD707-D9CF-40AE-B4C6-C98DA3205C09}" type="datetimeFigureOut">
               <a:rPr lang="en-US" smtClean="0"/>
               <a:pPr/>
-              <a:t>6/16/2026</a:t>
+              <a:t>6/23/2026</a:t>
             </a:fld>
             <a:endParaRPr lang="en-US"/>
           </a:p>
@@ -7356,7 +4070,7 @@
             <a:fld id="{1D8BD707-D9CF-40AE-B4C6-C98DA3205C09}" type="datetimeFigureOut">
               <a:rPr lang="en-US" smtClean="0"/>
               <a:pPr/>
-              <a:t>6/16/2026</a:t>
+              <a:t>6/23/2026</a:t>
             </a:fld>
             <a:endParaRPr lang="en-US"/>
           </a:p>
